--- a/AharSetu_Board_Presentation.pptx
+++ b/AharSetu_Board_Presentation.pptx
@@ -5,22 +5,22 @@
     <p:sldMasterId id="2147483648" r:id="rId1"/>
   </p:sldMasterIdLst>
   <p:sldIdLst>
-    <p:sldId id="256" r:id="rId2"/>
-    <p:sldId id="257" r:id="rId3"/>
-    <p:sldId id="258" r:id="rId4"/>
-    <p:sldId id="259" r:id="rId5"/>
-    <p:sldId id="260" r:id="rId6"/>
-    <p:sldId id="261" r:id="rId7"/>
-    <p:sldId id="262" r:id="rId8"/>
-    <p:sldId id="263" r:id="rId9"/>
-    <p:sldId id="264" r:id="rId10"/>
-    <p:sldId id="265" r:id="rId11"/>
-    <p:sldId id="266" r:id="rId12"/>
-    <p:sldId id="267" r:id="rId13"/>
-    <p:sldId id="268" r:id="rId14"/>
-    <p:sldId id="269" r:id="rId15"/>
+    <p:sldId id="256" r:id="rId7"/>
+    <p:sldId id="257" r:id="rId8"/>
+    <p:sldId id="258" r:id="rId9"/>
+    <p:sldId id="259" r:id="rId10"/>
+    <p:sldId id="260" r:id="rId11"/>
+    <p:sldId id="261" r:id="rId12"/>
+    <p:sldId id="262" r:id="rId13"/>
+    <p:sldId id="263" r:id="rId14"/>
+    <p:sldId id="264" r:id="rId15"/>
+    <p:sldId id="265" r:id="rId16"/>
+    <p:sldId id="266" r:id="rId17"/>
+    <p:sldId id="267" r:id="rId18"/>
+    <p:sldId id="268" r:id="rId19"/>
+    <p:sldId id="269" r:id="rId20"/>
   </p:sldIdLst>
-  <p:sldSz cx="12192000" cy="6858000"/>
+  <p:sldSz cx="12191695" cy="6858000" type="screen4x3"/>
   <p:notesSz cx="6858000" cy="9144000"/>
   <p:defaultTextStyle>
     <a:defPPr>
@@ -117,22 +117,6 @@
       </a:defRPr>
     </a:lvl9pPr>
   </p:defaultTextStyle>
-  <p:extLst>
-    <p:ext uri="{EFAFB233-063F-42B5-8137-9DF3F51BA10A}">
-      <p15:sldGuideLst xmlns:p15="http://schemas.microsoft.com/office/powerpoint/2012/main">
-        <p15:guide id="1" orient="horz" pos="2160">
-          <p15:clr>
-            <a:srgbClr val="A4A3A4"/>
-          </p15:clr>
-        </p15:guide>
-        <p15:guide id="2" pos="2880">
-          <p15:clr>
-            <a:srgbClr val="A4A3A4"/>
-          </p15:clr>
-        </p15:guide>
-      </p15:sldGuideLst>
-    </p:ext>
-  </p:extLst>
 </p:presentation>
 </file>
 
@@ -174,9 +158,10 @@
           <a:lstStyle/>
           <a:p>
             <a:r>
-              <a:rPr lang="en-US"/>
+              <a:rPr lang="en-US" smtClean="0"/>
               <a:t>Click to edit Master title style</a:t>
             </a:r>
+            <a:endParaRPr lang="en-US"/>
           </a:p>
         </p:txBody>
       </p:sp>
@@ -292,9 +277,10 @@
           </a:lstStyle>
           <a:p>
             <a:r>
-              <a:rPr lang="en-US"/>
+              <a:rPr lang="en-US" smtClean="0"/>
               <a:t>Click to edit Master subtitle style</a:t>
             </a:r>
+            <a:endParaRPr lang="en-US"/>
           </a:p>
         </p:txBody>
       </p:sp>
@@ -315,7 +301,7 @@
           <a:p>
             <a:fld id="{5BCAD085-E8A6-8845-BD4E-CB4CCA059FC4}" type="datetimeFigureOut">
               <a:rPr lang="en-US" smtClean="0"/>
-              <a:t>8/19/26</a:t>
+              <a:t>1/27/13</a:t>
             </a:fld>
             <a:endParaRPr lang="en-US"/>
           </a:p>
@@ -409,9 +395,10 @@
           <a:lstStyle/>
           <a:p>
             <a:r>
-              <a:rPr lang="en-US"/>
+              <a:rPr lang="en-US" smtClean="0"/>
               <a:t>Click to edit Master title style</a:t>
             </a:r>
+            <a:endParaRPr lang="en-US"/>
           </a:p>
         </p:txBody>
       </p:sp>
@@ -432,37 +419,38 @@
           <a:p>
             <a:pPr lvl="0"/>
             <a:r>
-              <a:rPr lang="en-US"/>
+              <a:rPr lang="en-US" smtClean="0"/>
               <a:t>Click to edit Master text styles</a:t>
             </a:r>
           </a:p>
           <a:p>
             <a:pPr lvl="1"/>
             <a:r>
-              <a:rPr lang="en-US"/>
+              <a:rPr lang="en-US" smtClean="0"/>
               <a:t>Second level</a:t>
             </a:r>
           </a:p>
           <a:p>
             <a:pPr lvl="2"/>
             <a:r>
-              <a:rPr lang="en-US"/>
+              <a:rPr lang="en-US" smtClean="0"/>
               <a:t>Third level</a:t>
             </a:r>
           </a:p>
           <a:p>
             <a:pPr lvl="3"/>
             <a:r>
-              <a:rPr lang="en-US"/>
+              <a:rPr lang="en-US" smtClean="0"/>
               <a:t>Fourth level</a:t>
             </a:r>
           </a:p>
           <a:p>
             <a:pPr lvl="4"/>
             <a:r>
-              <a:rPr lang="en-US"/>
+              <a:rPr lang="en-US" smtClean="0"/>
               <a:t>Fifth level</a:t>
             </a:r>
+            <a:endParaRPr lang="en-US"/>
           </a:p>
         </p:txBody>
       </p:sp>
@@ -483,7 +471,7 @@
           <a:p>
             <a:fld id="{5BCAD085-E8A6-8845-BD4E-CB4CCA059FC4}" type="datetimeFigureOut">
               <a:rPr lang="en-US" smtClean="0"/>
-              <a:t>8/19/26</a:t>
+              <a:t>1/27/13</a:t>
             </a:fld>
             <a:endParaRPr lang="en-US"/>
           </a:p>
@@ -582,9 +570,10 @@
           <a:lstStyle/>
           <a:p>
             <a:r>
-              <a:rPr lang="en-US"/>
+              <a:rPr lang="en-US" smtClean="0"/>
               <a:t>Click to edit Master title style</a:t>
             </a:r>
+            <a:endParaRPr lang="en-US"/>
           </a:p>
         </p:txBody>
       </p:sp>
@@ -610,37 +599,38 @@
           <a:p>
             <a:pPr lvl="0"/>
             <a:r>
-              <a:rPr lang="en-US"/>
+              <a:rPr lang="en-US" smtClean="0"/>
               <a:t>Click to edit Master text styles</a:t>
             </a:r>
           </a:p>
           <a:p>
             <a:pPr lvl="1"/>
             <a:r>
-              <a:rPr lang="en-US"/>
+              <a:rPr lang="en-US" smtClean="0"/>
               <a:t>Second level</a:t>
             </a:r>
           </a:p>
           <a:p>
             <a:pPr lvl="2"/>
             <a:r>
-              <a:rPr lang="en-US"/>
+              <a:rPr lang="en-US" smtClean="0"/>
               <a:t>Third level</a:t>
             </a:r>
           </a:p>
           <a:p>
             <a:pPr lvl="3"/>
             <a:r>
-              <a:rPr lang="en-US"/>
+              <a:rPr lang="en-US" smtClean="0"/>
               <a:t>Fourth level</a:t>
             </a:r>
           </a:p>
           <a:p>
             <a:pPr lvl="4"/>
             <a:r>
-              <a:rPr lang="en-US"/>
+              <a:rPr lang="en-US" smtClean="0"/>
               <a:t>Fifth level</a:t>
             </a:r>
+            <a:endParaRPr lang="en-US"/>
           </a:p>
         </p:txBody>
       </p:sp>
@@ -661,7 +651,7 @@
           <a:p>
             <a:fld id="{5BCAD085-E8A6-8845-BD4E-CB4CCA059FC4}" type="datetimeFigureOut">
               <a:rPr lang="en-US" smtClean="0"/>
-              <a:t>8/19/26</a:t>
+              <a:t>1/27/13</a:t>
             </a:fld>
             <a:endParaRPr lang="en-US"/>
           </a:p>
@@ -755,9 +745,10 @@
           <a:lstStyle/>
           <a:p>
             <a:r>
-              <a:rPr lang="en-US"/>
+              <a:rPr lang="en-US" smtClean="0"/>
               <a:t>Click to edit Master title style</a:t>
             </a:r>
+            <a:endParaRPr lang="en-US"/>
           </a:p>
         </p:txBody>
       </p:sp>
@@ -778,37 +769,38 @@
           <a:p>
             <a:pPr lvl="0"/>
             <a:r>
-              <a:rPr lang="en-US"/>
+              <a:rPr lang="en-US" smtClean="0"/>
               <a:t>Click to edit Master text styles</a:t>
             </a:r>
           </a:p>
           <a:p>
             <a:pPr lvl="1"/>
             <a:r>
-              <a:rPr lang="en-US"/>
+              <a:rPr lang="en-US" smtClean="0"/>
               <a:t>Second level</a:t>
             </a:r>
           </a:p>
           <a:p>
             <a:pPr lvl="2"/>
             <a:r>
-              <a:rPr lang="en-US"/>
+              <a:rPr lang="en-US" smtClean="0"/>
               <a:t>Third level</a:t>
             </a:r>
           </a:p>
           <a:p>
             <a:pPr lvl="3"/>
             <a:r>
-              <a:rPr lang="en-US"/>
+              <a:rPr lang="en-US" smtClean="0"/>
               <a:t>Fourth level</a:t>
             </a:r>
           </a:p>
           <a:p>
             <a:pPr lvl="4"/>
             <a:r>
-              <a:rPr lang="en-US"/>
+              <a:rPr lang="en-US" smtClean="0"/>
               <a:t>Fifth level</a:t>
             </a:r>
+            <a:endParaRPr lang="en-US"/>
           </a:p>
         </p:txBody>
       </p:sp>
@@ -829,7 +821,7 @@
           <a:p>
             <a:fld id="{5BCAD085-E8A6-8845-BD4E-CB4CCA059FC4}" type="datetimeFigureOut">
               <a:rPr lang="en-US" smtClean="0"/>
-              <a:t>8/19/26</a:t>
+              <a:t>1/27/13</a:t>
             </a:fld>
             <a:endParaRPr lang="en-US"/>
           </a:p>
@@ -932,9 +924,10 @@
           </a:lstStyle>
           <a:p>
             <a:r>
-              <a:rPr lang="en-US"/>
+              <a:rPr lang="en-US" smtClean="0"/>
               <a:t>Click to edit Master title style</a:t>
             </a:r>
+            <a:endParaRPr lang="en-US"/>
           </a:p>
         </p:txBody>
       </p:sp>
@@ -1051,7 +1044,7 @@
           <a:p>
             <a:pPr lvl="0"/>
             <a:r>
-              <a:rPr lang="en-US"/>
+              <a:rPr lang="en-US" smtClean="0"/>
               <a:t>Click to edit Master text styles</a:t>
             </a:r>
           </a:p>
@@ -1074,7 +1067,7 @@
           <a:p>
             <a:fld id="{5BCAD085-E8A6-8845-BD4E-CB4CCA059FC4}" type="datetimeFigureOut">
               <a:rPr lang="en-US" smtClean="0"/>
-              <a:t>8/19/26</a:t>
+              <a:t>1/27/13</a:t>
             </a:fld>
             <a:endParaRPr lang="en-US"/>
           </a:p>
@@ -1168,9 +1161,10 @@
           <a:lstStyle/>
           <a:p>
             <a:r>
-              <a:rPr lang="en-US"/>
+              <a:rPr lang="en-US" smtClean="0"/>
               <a:t>Click to edit Master title style</a:t>
             </a:r>
+            <a:endParaRPr lang="en-US"/>
           </a:p>
         </p:txBody>
       </p:sp>
@@ -1224,37 +1218,38 @@
           <a:p>
             <a:pPr lvl="0"/>
             <a:r>
-              <a:rPr lang="en-US"/>
+              <a:rPr lang="en-US" smtClean="0"/>
               <a:t>Click to edit Master text styles</a:t>
             </a:r>
           </a:p>
           <a:p>
             <a:pPr lvl="1"/>
             <a:r>
-              <a:rPr lang="en-US"/>
+              <a:rPr lang="en-US" smtClean="0"/>
               <a:t>Second level</a:t>
             </a:r>
           </a:p>
           <a:p>
             <a:pPr lvl="2"/>
             <a:r>
-              <a:rPr lang="en-US"/>
+              <a:rPr lang="en-US" smtClean="0"/>
               <a:t>Third level</a:t>
             </a:r>
           </a:p>
           <a:p>
             <a:pPr lvl="3"/>
             <a:r>
-              <a:rPr lang="en-US"/>
+              <a:rPr lang="en-US" smtClean="0"/>
               <a:t>Fourth level</a:t>
             </a:r>
           </a:p>
           <a:p>
             <a:pPr lvl="4"/>
             <a:r>
-              <a:rPr lang="en-US"/>
+              <a:rPr lang="en-US" smtClean="0"/>
               <a:t>Fifth level</a:t>
             </a:r>
+            <a:endParaRPr lang="en-US"/>
           </a:p>
         </p:txBody>
       </p:sp>
@@ -1308,37 +1303,38 @@
           <a:p>
             <a:pPr lvl="0"/>
             <a:r>
-              <a:rPr lang="en-US"/>
+              <a:rPr lang="en-US" smtClean="0"/>
               <a:t>Click to edit Master text styles</a:t>
             </a:r>
           </a:p>
           <a:p>
             <a:pPr lvl="1"/>
             <a:r>
-              <a:rPr lang="en-US"/>
+              <a:rPr lang="en-US" smtClean="0"/>
               <a:t>Second level</a:t>
             </a:r>
           </a:p>
           <a:p>
             <a:pPr lvl="2"/>
             <a:r>
-              <a:rPr lang="en-US"/>
+              <a:rPr lang="en-US" smtClean="0"/>
               <a:t>Third level</a:t>
             </a:r>
           </a:p>
           <a:p>
             <a:pPr lvl="3"/>
             <a:r>
-              <a:rPr lang="en-US"/>
+              <a:rPr lang="en-US" smtClean="0"/>
               <a:t>Fourth level</a:t>
             </a:r>
           </a:p>
           <a:p>
             <a:pPr lvl="4"/>
             <a:r>
-              <a:rPr lang="en-US"/>
+              <a:rPr lang="en-US" smtClean="0"/>
               <a:t>Fifth level</a:t>
             </a:r>
+            <a:endParaRPr lang="en-US"/>
           </a:p>
         </p:txBody>
       </p:sp>
@@ -1359,7 +1355,7 @@
           <a:p>
             <a:fld id="{5BCAD085-E8A6-8845-BD4E-CB4CCA059FC4}" type="datetimeFigureOut">
               <a:rPr lang="en-US" smtClean="0"/>
-              <a:t>8/19/26</a:t>
+              <a:t>1/27/13</a:t>
             </a:fld>
             <a:endParaRPr lang="en-US"/>
           </a:p>
@@ -1457,9 +1453,10 @@
           </a:lstStyle>
           <a:p>
             <a:r>
-              <a:rPr lang="en-US"/>
+              <a:rPr lang="en-US" smtClean="0"/>
               <a:t>Click to edit Master title style</a:t>
             </a:r>
+            <a:endParaRPr lang="en-US"/>
           </a:p>
         </p:txBody>
       </p:sp>
@@ -1522,7 +1519,7 @@
           <a:p>
             <a:pPr lvl="0"/>
             <a:r>
-              <a:rPr lang="en-US"/>
+              <a:rPr lang="en-US" smtClean="0"/>
               <a:t>Click to edit Master text styles</a:t>
             </a:r>
           </a:p>
@@ -1578,37 +1575,38 @@
           <a:p>
             <a:pPr lvl="0"/>
             <a:r>
-              <a:rPr lang="en-US"/>
+              <a:rPr lang="en-US" smtClean="0"/>
               <a:t>Click to edit Master text styles</a:t>
             </a:r>
           </a:p>
           <a:p>
             <a:pPr lvl="1"/>
             <a:r>
-              <a:rPr lang="en-US"/>
+              <a:rPr lang="en-US" smtClean="0"/>
               <a:t>Second level</a:t>
             </a:r>
           </a:p>
           <a:p>
             <a:pPr lvl="2"/>
             <a:r>
-              <a:rPr lang="en-US"/>
+              <a:rPr lang="en-US" smtClean="0"/>
               <a:t>Third level</a:t>
             </a:r>
           </a:p>
           <a:p>
             <a:pPr lvl="3"/>
             <a:r>
-              <a:rPr lang="en-US"/>
+              <a:rPr lang="en-US" smtClean="0"/>
               <a:t>Fourth level</a:t>
             </a:r>
           </a:p>
           <a:p>
             <a:pPr lvl="4"/>
             <a:r>
-              <a:rPr lang="en-US"/>
+              <a:rPr lang="en-US" smtClean="0"/>
               <a:t>Fifth level</a:t>
             </a:r>
+            <a:endParaRPr lang="en-US"/>
           </a:p>
         </p:txBody>
       </p:sp>
@@ -1671,7 +1669,7 @@
           <a:p>
             <a:pPr lvl="0"/>
             <a:r>
-              <a:rPr lang="en-US"/>
+              <a:rPr lang="en-US" smtClean="0"/>
               <a:t>Click to edit Master text styles</a:t>
             </a:r>
           </a:p>
@@ -1727,37 +1725,38 @@
           <a:p>
             <a:pPr lvl="0"/>
             <a:r>
-              <a:rPr lang="en-US"/>
+              <a:rPr lang="en-US" smtClean="0"/>
               <a:t>Click to edit Master text styles</a:t>
             </a:r>
           </a:p>
           <a:p>
             <a:pPr lvl="1"/>
             <a:r>
-              <a:rPr lang="en-US"/>
+              <a:rPr lang="en-US" smtClean="0"/>
               <a:t>Second level</a:t>
             </a:r>
           </a:p>
           <a:p>
             <a:pPr lvl="2"/>
             <a:r>
-              <a:rPr lang="en-US"/>
+              <a:rPr lang="en-US" smtClean="0"/>
               <a:t>Third level</a:t>
             </a:r>
           </a:p>
           <a:p>
             <a:pPr lvl="3"/>
             <a:r>
-              <a:rPr lang="en-US"/>
+              <a:rPr lang="en-US" smtClean="0"/>
               <a:t>Fourth level</a:t>
             </a:r>
           </a:p>
           <a:p>
             <a:pPr lvl="4"/>
             <a:r>
-              <a:rPr lang="en-US"/>
+              <a:rPr lang="en-US" smtClean="0"/>
               <a:t>Fifth level</a:t>
             </a:r>
+            <a:endParaRPr lang="en-US"/>
           </a:p>
         </p:txBody>
       </p:sp>
@@ -1778,7 +1777,7 @@
           <a:p>
             <a:fld id="{5BCAD085-E8A6-8845-BD4E-CB4CCA059FC4}" type="datetimeFigureOut">
               <a:rPr lang="en-US" smtClean="0"/>
-              <a:t>8/19/26</a:t>
+              <a:t>1/27/13</a:t>
             </a:fld>
             <a:endParaRPr lang="en-US"/>
           </a:p>
@@ -1872,9 +1871,10 @@
           <a:lstStyle/>
           <a:p>
             <a:r>
-              <a:rPr lang="en-US"/>
+              <a:rPr lang="en-US" smtClean="0"/>
               <a:t>Click to edit Master title style</a:t>
             </a:r>
+            <a:endParaRPr lang="en-US"/>
           </a:p>
         </p:txBody>
       </p:sp>
@@ -1895,7 +1895,7 @@
           <a:p>
             <a:fld id="{5BCAD085-E8A6-8845-BD4E-CB4CCA059FC4}" type="datetimeFigureOut">
               <a:rPr lang="en-US" smtClean="0"/>
-              <a:t>8/19/26</a:t>
+              <a:t>1/27/13</a:t>
             </a:fld>
             <a:endParaRPr lang="en-US"/>
           </a:p>
@@ -1990,7 +1990,7 @@
           <a:p>
             <a:fld id="{5BCAD085-E8A6-8845-BD4E-CB4CCA059FC4}" type="datetimeFigureOut">
               <a:rPr lang="en-US" smtClean="0"/>
-              <a:t>8/19/26</a:t>
+              <a:t>1/27/13</a:t>
             </a:fld>
             <a:endParaRPr lang="en-US"/>
           </a:p>
@@ -2093,9 +2093,10 @@
           </a:lstStyle>
           <a:p>
             <a:r>
-              <a:rPr lang="en-US"/>
+              <a:rPr lang="en-US" smtClean="0"/>
               <a:t>Click to edit Master title style</a:t>
             </a:r>
+            <a:endParaRPr lang="en-US"/>
           </a:p>
         </p:txBody>
       </p:sp>
@@ -2149,37 +2150,38 @@
           <a:p>
             <a:pPr lvl="0"/>
             <a:r>
-              <a:rPr lang="en-US"/>
+              <a:rPr lang="en-US" smtClean="0"/>
               <a:t>Click to edit Master text styles</a:t>
             </a:r>
           </a:p>
           <a:p>
             <a:pPr lvl="1"/>
             <a:r>
-              <a:rPr lang="en-US"/>
+              <a:rPr lang="en-US" smtClean="0"/>
               <a:t>Second level</a:t>
             </a:r>
           </a:p>
           <a:p>
             <a:pPr lvl="2"/>
             <a:r>
-              <a:rPr lang="en-US"/>
+              <a:rPr lang="en-US" smtClean="0"/>
               <a:t>Third level</a:t>
             </a:r>
           </a:p>
           <a:p>
             <a:pPr lvl="3"/>
             <a:r>
-              <a:rPr lang="en-US"/>
+              <a:rPr lang="en-US" smtClean="0"/>
               <a:t>Fourth level</a:t>
             </a:r>
           </a:p>
           <a:p>
             <a:pPr lvl="4"/>
             <a:r>
-              <a:rPr lang="en-US"/>
+              <a:rPr lang="en-US" smtClean="0"/>
               <a:t>Fifth level</a:t>
             </a:r>
+            <a:endParaRPr lang="en-US"/>
           </a:p>
         </p:txBody>
       </p:sp>
@@ -2242,7 +2244,7 @@
           <a:p>
             <a:pPr lvl="0"/>
             <a:r>
-              <a:rPr lang="en-US"/>
+              <a:rPr lang="en-US" smtClean="0"/>
               <a:t>Click to edit Master text styles</a:t>
             </a:r>
           </a:p>
@@ -2265,7 +2267,7 @@
           <a:p>
             <a:fld id="{5BCAD085-E8A6-8845-BD4E-CB4CCA059FC4}" type="datetimeFigureOut">
               <a:rPr lang="en-US" smtClean="0"/>
-              <a:t>8/19/26</a:t>
+              <a:t>1/27/13</a:t>
             </a:fld>
             <a:endParaRPr lang="en-US"/>
           </a:p>
@@ -2368,9 +2370,10 @@
           </a:lstStyle>
           <a:p>
             <a:r>
-              <a:rPr lang="en-US"/>
+              <a:rPr lang="en-US" smtClean="0"/>
               <a:t>Click to edit Master title style</a:t>
             </a:r>
+            <a:endParaRPr lang="en-US"/>
           </a:p>
         </p:txBody>
       </p:sp>
@@ -2494,7 +2497,7 @@
           <a:p>
             <a:pPr lvl="0"/>
             <a:r>
-              <a:rPr lang="en-US"/>
+              <a:rPr lang="en-US" smtClean="0"/>
               <a:t>Click to edit Master text styles</a:t>
             </a:r>
           </a:p>
@@ -2517,7 +2520,7 @@
           <a:p>
             <a:fld id="{5BCAD085-E8A6-8845-BD4E-CB4CCA059FC4}" type="datetimeFigureOut">
               <a:rPr lang="en-US" smtClean="0"/>
-              <a:t>8/19/26</a:t>
+              <a:t>1/27/13</a:t>
             </a:fld>
             <a:endParaRPr lang="en-US"/>
           </a:p>
@@ -2626,9 +2629,10 @@
           <a:lstStyle/>
           <a:p>
             <a:r>
-              <a:rPr lang="en-US"/>
+              <a:rPr lang="en-US" smtClean="0"/>
               <a:t>Click to edit Master title style</a:t>
             </a:r>
+            <a:endParaRPr lang="en-US"/>
           </a:p>
         </p:txBody>
       </p:sp>
@@ -2659,37 +2663,38 @@
           <a:p>
             <a:pPr lvl="0"/>
             <a:r>
-              <a:rPr lang="en-US"/>
+              <a:rPr lang="en-US" smtClean="0"/>
               <a:t>Click to edit Master text styles</a:t>
             </a:r>
           </a:p>
           <a:p>
             <a:pPr lvl="1"/>
             <a:r>
-              <a:rPr lang="en-US"/>
+              <a:rPr lang="en-US" smtClean="0"/>
               <a:t>Second level</a:t>
             </a:r>
           </a:p>
           <a:p>
             <a:pPr lvl="2"/>
             <a:r>
-              <a:rPr lang="en-US"/>
+              <a:rPr lang="en-US" smtClean="0"/>
               <a:t>Third level</a:t>
             </a:r>
           </a:p>
           <a:p>
             <a:pPr lvl="3"/>
             <a:r>
-              <a:rPr lang="en-US"/>
+              <a:rPr lang="en-US" smtClean="0"/>
               <a:t>Fourth level</a:t>
             </a:r>
           </a:p>
           <a:p>
             <a:pPr lvl="4"/>
             <a:r>
-              <a:rPr lang="en-US"/>
+              <a:rPr lang="en-US" smtClean="0"/>
               <a:t>Fifth level</a:t>
             </a:r>
+            <a:endParaRPr lang="en-US"/>
           </a:p>
         </p:txBody>
       </p:sp>
@@ -2728,7 +2733,7 @@
           <a:p>
             <a:fld id="{5BCAD085-E8A6-8845-BD4E-CB4CCA059FC4}" type="datetimeFigureOut">
               <a:rPr lang="en-US" smtClean="0"/>
-              <a:t>8/19/26</a:t>
+              <a:t>1/27/13</a:t>
             </a:fld>
             <a:endParaRPr lang="en-US"/>
           </a:p>
@@ -3087,7 +3092,7 @@
 </file>
 
 <file path=ppt/slides/slide1.xml><?xml version="1.0" encoding="utf-8"?>
-<p:sld xmlns:a="http://schemas.openxmlformats.org/drawingml/2006/main" xmlns:r="http://schemas.openxmlformats.org/officeDocument/2006/relationships" xmlns:p="http://schemas.openxmlformats.org/presentationml/2006/main">
+<p:sld xmlns:a="http://schemas.openxmlformats.org/drawingml/2006/main" xmlns:p="http://schemas.openxmlformats.org/presentationml/2006/main" xmlns:r="http://schemas.openxmlformats.org/officeDocument/2006/relationships">
   <p:cSld>
     <p:spTree>
       <p:nvGrpSpPr>
@@ -3095,14 +3100,7 @@
         <p:cNvGrpSpPr/>
         <p:nvPr/>
       </p:nvGrpSpPr>
-      <p:grpSpPr>
-        <a:xfrm>
-          <a:off x="0" y="0"/>
-          <a:ext cx="0" cy="0"/>
-          <a:chOff x="0" y="0"/>
-          <a:chExt cx="0" cy="0"/>
-        </a:xfrm>
-      </p:grpSpPr>
+      <p:grpSpPr/>
       <p:sp>
         <p:nvSpPr>
           <p:cNvPr id="2" name="Rectangle 1"/>
@@ -3143,7 +3141,6 @@
           <a:lstStyle/>
           <a:p>
             <a:pPr algn="ctr"/>
-            <a:endParaRPr/>
           </a:p>
         </p:txBody>
       </p:sp>
@@ -3162,7 +3159,7 @@
             <a:avLst/>
           </a:prstGeom>
           <a:solidFill>
-            <a:srgbClr val="2563EB"/>
+            <a:srgbClr val="3B82F6"/>
           </a:solidFill>
           <a:ln>
             <a:noFill/>
@@ -3187,7 +3184,6 @@
           <a:lstStyle/>
           <a:p>
             <a:pPr algn="ctr"/>
-            <a:endParaRPr/>
           </a:p>
         </p:txBody>
       </p:sp>
@@ -3208,7 +3204,7 @@
           <a:noFill/>
         </p:spPr>
         <p:txBody>
-          <a:bodyPr wrap="square" lIns="0" tIns="0" rIns="0" bIns="0">
+          <a:bodyPr wrap="square">
             <a:spAutoFit/>
           </a:bodyPr>
           <a:lstStyle/>
@@ -3222,7 +3218,7 @@
               </a:defRPr>
             </a:pPr>
             <a:r>
-              <a:t>ENTERPRISE INSTITUTIONAL PROCUREMENT SYSTEM</a:t>
+              <a:t>ENTERPRISE INSTITUTIONAL PROCUREMENT PLATFORM</a:t>
             </a:r>
           </a:p>
           <a:p>
@@ -3274,7 +3270,7 @@
             </a:r>
             <a:br/>
             <a:r>
-              <a:t>Featuring Real-Time Governance, Role-Based Access Control, Multi-Tier Approvals &amp; Immutable Audit Trails</a:t>
+              <a:t>Featuring Real-Time Governance, Multi-Tier Approvals, Auto-Split Orders &amp; Immutable Audit Trails</a:t>
             </a:r>
           </a:p>
         </p:txBody>
@@ -3323,7 +3319,7 @@
 </file>
 
 <file path=ppt/slides/slide10.xml><?xml version="1.0" encoding="utf-8"?>
-<p:sld xmlns:a="http://schemas.openxmlformats.org/drawingml/2006/main" xmlns:r="http://schemas.openxmlformats.org/officeDocument/2006/relationships" xmlns:p="http://schemas.openxmlformats.org/presentationml/2006/main">
+<p:sld xmlns:a="http://schemas.openxmlformats.org/drawingml/2006/main" xmlns:p="http://schemas.openxmlformats.org/presentationml/2006/main" xmlns:r="http://schemas.openxmlformats.org/officeDocument/2006/relationships">
   <p:cSld>
     <p:spTree>
       <p:nvGrpSpPr>
@@ -3331,14 +3327,7 @@
         <p:cNvGrpSpPr/>
         <p:nvPr/>
       </p:nvGrpSpPr>
-      <p:grpSpPr>
-        <a:xfrm>
-          <a:off x="0" y="0"/>
-          <a:ext cx="0" cy="0"/>
-          <a:chOff x="0" y="0"/>
-          <a:chExt cx="0" cy="0"/>
-        </a:xfrm>
-      </p:grpSpPr>
+      <p:grpSpPr/>
       <p:sp>
         <p:nvSpPr>
           <p:cNvPr id="2" name="Rectangle 1"/>
@@ -3354,7 +3343,7 @@
             <a:avLst/>
           </a:prstGeom>
           <a:solidFill>
-            <a:srgbClr val="F8FAFC"/>
+            <a:srgbClr val="0F172A"/>
           </a:solidFill>
           <a:ln>
             <a:noFill/>
@@ -3379,7 +3368,6 @@
           <a:lstStyle/>
           <a:p>
             <a:pPr algn="ctr"/>
-            <a:endParaRPr/>
           </a:p>
         </p:txBody>
       </p:sp>
@@ -3400,7 +3388,7 @@
           <a:noFill/>
         </p:spPr>
         <p:txBody>
-          <a:bodyPr wrap="square" lIns="0" tIns="0" rIns="0" bIns="0">
+          <a:bodyPr wrap="square" lIns="0" rIns="0" tIns="0" bIns="0">
             <a:spAutoFit/>
           </a:bodyPr>
           <a:lstStyle/>
@@ -3408,13 +3396,13 @@
             <a:pPr>
               <a:defRPr sz="1000" b="1">
                 <a:solidFill>
-                  <a:srgbClr val="2563EB"/>
-                </a:solidFill>
-                <a:latin typeface="Arial"/>
-              </a:defRPr>
-            </a:pPr>
-            <a:r>
-              <a:t>TECHNICAL DIFFERENTIATOR</a:t>
+                  <a:srgbClr val="60A5FA"/>
+                </a:solidFill>
+                <a:latin typeface="Arial"/>
+              </a:defRPr>
+            </a:pPr>
+            <a:r>
+              <a:t>SYNCHRONIZATION ENGINE</a:t>
             </a:r>
           </a:p>
         </p:txBody>
@@ -3436,7 +3424,7 @@
           <a:noFill/>
         </p:spPr>
         <p:txBody>
-          <a:bodyPr wrap="square" lIns="0" tIns="0" rIns="0" bIns="0">
+          <a:bodyPr wrap="square" lIns="0" rIns="0" tIns="0" bIns="0">
             <a:spAutoFit/>
           </a:bodyPr>
           <a:lstStyle/>
@@ -3444,13 +3432,13 @@
             <a:pPr>
               <a:defRPr sz="2200" b="1">
                 <a:solidFill>
-                  <a:srgbClr val="0F172A"/>
-                </a:solidFill>
-                <a:latin typeface="Arial"/>
-              </a:defRPr>
-            </a:pPr>
-            <a:r>
-              <a:t>Real-Time Sync Engine: 10s Polling + WebSockets</a:t>
+                  <a:srgbClr val="F8FAFC"/>
+                </a:solidFill>
+                <a:latin typeface="Arial"/>
+              </a:defRPr>
+            </a:pPr>
+            <a:r>
+              <a:t>Real-Time Synchronization &amp; Cross-Device State</a:t>
             </a:r>
           </a:p>
         </p:txBody>
@@ -3470,7 +3458,7 @@
             <a:avLst/>
           </a:prstGeom>
           <a:solidFill>
-            <a:srgbClr val="E2E8F0"/>
+            <a:srgbClr val="334155"/>
           </a:solidFill>
           <a:ln>
             <a:noFill/>
@@ -3495,7 +3483,6 @@
           <a:lstStyle/>
           <a:p>
             <a:pPr algn="ctr"/>
-            <a:endParaRPr/>
           </a:p>
         </p:txBody>
       </p:sp>
@@ -3516,7 +3503,7 @@
           <a:noFill/>
         </p:spPr>
         <p:txBody>
-          <a:bodyPr wrap="none" lIns="0" tIns="0" rIns="0" bIns="0">
+          <a:bodyPr wrap="none" lIns="0" rIns="0" tIns="0" bIns="0">
             <a:spAutoFit/>
           </a:bodyPr>
           <a:lstStyle/>
@@ -3524,13 +3511,13 @@
             <a:pPr>
               <a:defRPr sz="900">
                 <a:solidFill>
-                  <a:srgbClr val="64748B"/>
-                </a:solidFill>
-                <a:latin typeface="Arial"/>
-              </a:defRPr>
-            </a:pPr>
-            <a:r>
-              <a:t>AharSetu Enterprise ERP  |  Board Presentation  |  Slide 10 of 14</a:t>
+                  <a:srgbClr val="94A3B8"/>
+                </a:solidFill>
+                <a:latin typeface="Arial"/>
+              </a:defRPr>
+            </a:pPr>
+            <a:r>
+              <a:t>AharSetu Enterprise ERP  |  Board of Directors Presentation  |  Slide 10 of 14</a:t>
             </a:r>
           </a:p>
         </p:txBody>
@@ -3550,11 +3537,11 @@
             <a:avLst/>
           </a:prstGeom>
           <a:solidFill>
-            <a:srgbClr val="FFFFFF"/>
+            <a:srgbClr val="1E293B"/>
           </a:solidFill>
           <a:ln w="12700">
             <a:solidFill>
-              <a:srgbClr val="E2E8F0"/>
+              <a:srgbClr val="334155"/>
             </a:solidFill>
           </a:ln>
         </p:spPr>
@@ -3577,7 +3564,6 @@
           <a:lstStyle/>
           <a:p>
             <a:pPr algn="ctr"/>
-            <a:endParaRPr/>
           </a:p>
         </p:txBody>
       </p:sp>
@@ -3598,7 +3584,7 @@
           <a:noFill/>
         </p:spPr>
         <p:txBody>
-          <a:bodyPr wrap="square" lIns="0" tIns="0" rIns="0" bIns="0">
+          <a:bodyPr wrap="square" lIns="0" rIns="0" tIns="0" bIns="0">
             <a:spAutoFit/>
           </a:bodyPr>
           <a:lstStyle/>
@@ -3606,13 +3592,13 @@
             <a:pPr>
               <a:defRPr sz="1350" b="1">
                 <a:solidFill>
-                  <a:srgbClr val="2563EB"/>
-                </a:solidFill>
-                <a:latin typeface="Arial"/>
-              </a:defRPr>
-            </a:pPr>
-            <a:r>
-              <a:t>Layer 1: WebSocket Broadcaster (Sub-Second)</a:t>
+                  <a:srgbClr val="3B82F6"/>
+                </a:solidFill>
+                <a:latin typeface="Arial"/>
+              </a:defRPr>
+            </a:pPr>
+            <a:r>
+              <a:t>1. WebSocket Push Notification Pipeline</a:t>
             </a:r>
           </a:p>
           <a:p>
@@ -3622,13 +3608,13 @@
               </a:spcBef>
               <a:defRPr sz="1000">
                 <a:solidFill>
-                  <a:srgbClr val="0F172A"/>
-                </a:solidFill>
-                <a:latin typeface="Arial"/>
-              </a:defRPr>
-            </a:pPr>
-            <a:r>
-              <a:t>• Native WebSocket gateway delivering immediate state broadcasts.</a:t>
+                  <a:srgbClr val="F8FAFC"/>
+                </a:solidFill>
+                <a:latin typeface="Arial"/>
+              </a:defRPr>
+            </a:pPr>
+            <a:r>
+              <a:t>• Instant broadcast of order lifecycle events (`ORDER_UPDATED`, `USER_CREATED`, `USER_DELETED`).</a:t>
             </a:r>
           </a:p>
           <a:p>
@@ -3638,13 +3624,13 @@
               </a:spcBef>
               <a:defRPr sz="1000">
                 <a:solidFill>
-                  <a:srgbClr val="0F172A"/>
-                </a:solidFill>
-                <a:latin typeface="Arial"/>
-              </a:defRPr>
-            </a:pPr>
-            <a:r>
-              <a:t>• Dispatches USER_DELETED, ORDER_UPDATED, MENU_UPDATED across connected clients.</a:t>
+                  <a:srgbClr val="F8FAFC"/>
+                </a:solidFill>
+                <a:latin typeface="Arial"/>
+              </a:defRPr>
+            </a:pPr>
+            <a:r>
+              <a:t>• Targeted role-based WebSocket connections with sub-second alert delivery.</a:t>
             </a:r>
           </a:p>
           <a:p>
@@ -3654,13 +3640,13 @@
               </a:spcBef>
               <a:defRPr sz="1000">
                 <a:solidFill>
-                  <a:srgbClr val="0F172A"/>
-                </a:solidFill>
-                <a:latin typeface="Arial"/>
-              </a:defRPr>
-            </a:pPr>
-            <a:r>
-              <a:t>• Subprotocol token authorization with automated heartbeat pings.</a:t>
+                  <a:srgbClr val="F8FAFC"/>
+                </a:solidFill>
+                <a:latin typeface="Arial"/>
+              </a:defRPr>
+            </a:pPr>
+            <a:r>
+              <a:t>• Client reconnection backoff algorithm with automatic token heartbeat.</a:t>
             </a:r>
           </a:p>
         </p:txBody>
@@ -3680,11 +3666,11 @@
             <a:avLst/>
           </a:prstGeom>
           <a:solidFill>
-            <a:srgbClr val="FFFFFF"/>
+            <a:srgbClr val="1E293B"/>
           </a:solidFill>
           <a:ln w="12700">
             <a:solidFill>
-              <a:srgbClr val="E2E8F0"/>
+              <a:srgbClr val="334155"/>
             </a:solidFill>
           </a:ln>
         </p:spPr>
@@ -3707,7 +3693,6 @@
           <a:lstStyle/>
           <a:p>
             <a:pPr algn="ctr"/>
-            <a:endParaRPr/>
           </a:p>
         </p:txBody>
       </p:sp>
@@ -3728,7 +3713,7 @@
           <a:noFill/>
         </p:spPr>
         <p:txBody>
-          <a:bodyPr wrap="square" lIns="0" tIns="0" rIns="0" bIns="0">
+          <a:bodyPr wrap="square" lIns="0" rIns="0" tIns="0" bIns="0">
             <a:spAutoFit/>
           </a:bodyPr>
           <a:lstStyle/>
@@ -3742,7 +3727,7 @@
               </a:defRPr>
             </a:pPr>
             <a:r>
-              <a:t>Layer 2: 10-Second Silent Polling (Fault-Tolerant)</a:t>
+              <a:t>2. 10-Second Resilient Silent Polling Fallback</a:t>
             </a:r>
           </a:p>
           <a:p>
@@ -3752,13 +3737,13 @@
               </a:spcBef>
               <a:defRPr sz="1000">
                 <a:solidFill>
-                  <a:srgbClr val="0F172A"/>
-                </a:solidFill>
-                <a:latin typeface="Arial"/>
-              </a:defRPr>
-            </a:pPr>
-            <a:r>
-              <a:t>• Guaranteed background refresh every 10 seconds on all dashboards &amp; subpages.</a:t>
+                  <a:srgbClr val="F8FAFC"/>
+                </a:solidFill>
+                <a:latin typeface="Arial"/>
+              </a:defRPr>
+            </a:pPr>
+            <a:r>
+              <a:t>• Seamless background polling timer that operates silently without triggering full-page loaders.</a:t>
             </a:r>
           </a:p>
           <a:p>
@@ -3768,13 +3753,13 @@
               </a:spcBef>
               <a:defRPr sz="1000">
                 <a:solidFill>
-                  <a:srgbClr val="0F172A"/>
-                </a:solidFill>
-                <a:latin typeface="Arial"/>
-              </a:defRPr>
-            </a:pPr>
-            <a:r>
-              <a:t>• Silent background execution with zero visual flicker or annoying loaders.</a:t>
+                  <a:srgbClr val="F8FAFC"/>
+                </a:solidFill>
+                <a:latin typeface="Arial"/>
+              </a:defRPr>
+            </a:pPr>
+            <a:r>
+              <a:t>• Guarantees 100% data consistency even across unstable campus Wi-Fi connections.</a:t>
             </a:r>
           </a:p>
           <a:p>
@@ -3784,13 +3769,13 @@
               </a:spcBef>
               <a:defRPr sz="1000">
                 <a:solidFill>
-                  <a:srgbClr val="0F172A"/>
-                </a:solidFill>
-                <a:latin typeface="Arial"/>
-              </a:defRPr>
-            </a:pPr>
-            <a:r>
-              <a:t>• Maintains total cross-device sync across phones, laptops, and canteen tablets.</a:t>
+                  <a:srgbClr val="F8FAFC"/>
+                </a:solidFill>
+                <a:latin typeface="Arial"/>
+              </a:defRPr>
+            </a:pPr>
+            <a:r>
+              <a:t>• Shared BroadcastChannel &amp; `storage` event listeners for multi-tab synchronization.</a:t>
             </a:r>
           </a:p>
         </p:txBody>
@@ -3810,11 +3795,11 @@
             <a:avLst/>
           </a:prstGeom>
           <a:solidFill>
-            <a:srgbClr val="FFFFFF"/>
+            <a:srgbClr val="1E293B"/>
           </a:solidFill>
           <a:ln w="12700">
             <a:solidFill>
-              <a:srgbClr val="E2E8F0"/>
+              <a:srgbClr val="334155"/>
             </a:solidFill>
           </a:ln>
         </p:spPr>
@@ -3837,7 +3822,6 @@
           <a:lstStyle/>
           <a:p>
             <a:pPr algn="ctr"/>
-            <a:endParaRPr/>
           </a:p>
         </p:txBody>
       </p:sp>
@@ -3858,7 +3842,7 @@
           <a:noFill/>
         </p:spPr>
         <p:txBody>
-          <a:bodyPr wrap="square" lIns="0" tIns="0" rIns="0" bIns="0">
+          <a:bodyPr wrap="square" lIns="0" rIns="0" tIns="0" bIns="0">
             <a:spAutoFit/>
           </a:bodyPr>
           <a:lstStyle/>
@@ -3866,13 +3850,13 @@
             <a:pPr>
               <a:defRPr sz="1350" b="1">
                 <a:solidFill>
-                  <a:srgbClr val="7C3AED"/>
-                </a:solidFill>
-                <a:latin typeface="Arial"/>
-              </a:defRPr>
-            </a:pPr>
-            <a:r>
-              <a:t>Layer 3: Cross-Tab &amp; Offline Local-First Fallback</a:t>
+                  <a:srgbClr val="A855F7"/>
+                </a:solidFill>
+                <a:latin typeface="Arial"/>
+              </a:defRPr>
+            </a:pPr>
+            <a:r>
+              <a:t>3. Tombstone Deletion &amp; Persistence Consistency</a:t>
             </a:r>
           </a:p>
           <a:p>
@@ -3882,13 +3866,13 @@
               </a:spcBef>
               <a:defRPr sz="1000">
                 <a:solidFill>
-                  <a:srgbClr val="0F172A"/>
-                </a:solidFill>
-                <a:latin typeface="Arial"/>
-              </a:defRPr>
-            </a:pPr>
-            <a:r>
-              <a:t>• Browser storage event dispatchers sync tabs in the same browser instantly.</a:t>
+                  <a:srgbClr val="F8FAFC"/>
+                </a:solidFill>
+                <a:latin typeface="Arial"/>
+              </a:defRPr>
+            </a:pPr>
+            <a:r>
+              <a:t>• Tombstone tracking (`aharsetu_deleted_user_ids`) prevents deleted entities from resurrecting.</a:t>
             </a:r>
           </a:p>
           <a:p>
@@ -3898,13 +3882,13 @@
               </a:spcBef>
               <a:defRPr sz="1000">
                 <a:solidFill>
-                  <a:srgbClr val="0F172A"/>
-                </a:solidFill>
-                <a:latin typeface="Arial"/>
-              </a:defRPr>
-            </a:pPr>
-            <a:r>
-              <a:t>• Local tombstoning &amp; optimistic caching ensures offline continuity.</a:t>
+                  <a:srgbClr val="F8FAFC"/>
+                </a:solidFill>
+                <a:latin typeface="Arial"/>
+              </a:defRPr>
+            </a:pPr>
+            <a:r>
+              <a:t>• Local storage caches gracefully merge with backend API responses on network recovery.</a:t>
             </a:r>
           </a:p>
           <a:p>
@@ -3914,13 +3898,13 @@
               </a:spcBef>
               <a:defRPr sz="1000">
                 <a:solidFill>
-                  <a:srgbClr val="0F172A"/>
-                </a:solidFill>
-                <a:latin typeface="Arial"/>
-              </a:defRPr>
-            </a:pPr>
-            <a:r>
-              <a:t>• Graceful degradation when cloud/LAN network connection resets.</a:t>
+                  <a:srgbClr val="F8FAFC"/>
+                </a:solidFill>
+                <a:latin typeface="Arial"/>
+              </a:defRPr>
+            </a:pPr>
+            <a:r>
+              <a:t>• Zero stale UI states across mobile smartphones, tablets, and desktop workstations.</a:t>
             </a:r>
           </a:p>
         </p:txBody>
@@ -3934,7 +3918,7 @@
 </file>
 
 <file path=ppt/slides/slide11.xml><?xml version="1.0" encoding="utf-8"?>
-<p:sld xmlns:a="http://schemas.openxmlformats.org/drawingml/2006/main" xmlns:r="http://schemas.openxmlformats.org/officeDocument/2006/relationships" xmlns:p="http://schemas.openxmlformats.org/presentationml/2006/main">
+<p:sld xmlns:a="http://schemas.openxmlformats.org/drawingml/2006/main" xmlns:p="http://schemas.openxmlformats.org/presentationml/2006/main" xmlns:r="http://schemas.openxmlformats.org/officeDocument/2006/relationships">
   <p:cSld>
     <p:spTree>
       <p:nvGrpSpPr>
@@ -3942,14 +3926,7 @@
         <p:cNvGrpSpPr/>
         <p:nvPr/>
       </p:nvGrpSpPr>
-      <p:grpSpPr>
-        <a:xfrm>
-          <a:off x="0" y="0"/>
-          <a:ext cx="0" cy="0"/>
-          <a:chOff x="0" y="0"/>
-          <a:chExt cx="0" cy="0"/>
-        </a:xfrm>
-      </p:grpSpPr>
+      <p:grpSpPr/>
       <p:sp>
         <p:nvSpPr>
           <p:cNvPr id="2" name="Rectangle 1"/>
@@ -3965,7 +3942,7 @@
             <a:avLst/>
           </a:prstGeom>
           <a:solidFill>
-            <a:srgbClr val="F8FAFC"/>
+            <a:srgbClr val="0F172A"/>
           </a:solidFill>
           <a:ln>
             <a:noFill/>
@@ -3990,7 +3967,6 @@
           <a:lstStyle/>
           <a:p>
             <a:pPr algn="ctr"/>
-            <a:endParaRPr/>
           </a:p>
         </p:txBody>
       </p:sp>
@@ -4011,7 +3987,7 @@
           <a:noFill/>
         </p:spPr>
         <p:txBody>
-          <a:bodyPr wrap="square" lIns="0" tIns="0" rIns="0" bIns="0">
+          <a:bodyPr wrap="square" lIns="0" rIns="0" tIns="0" bIns="0">
             <a:spAutoFit/>
           </a:bodyPr>
           <a:lstStyle/>
@@ -4019,7 +3995,7 @@
             <a:pPr>
               <a:defRPr sz="1000" b="1">
                 <a:solidFill>
-                  <a:srgbClr val="2563EB"/>
+                  <a:srgbClr val="60A5FA"/>
                 </a:solidFill>
                 <a:latin typeface="Arial"/>
               </a:defRPr>
@@ -4047,7 +4023,7 @@
           <a:noFill/>
         </p:spPr>
         <p:txBody>
-          <a:bodyPr wrap="square" lIns="0" tIns="0" rIns="0" bIns="0">
+          <a:bodyPr wrap="square" lIns="0" rIns="0" tIns="0" bIns="0">
             <a:spAutoFit/>
           </a:bodyPr>
           <a:lstStyle/>
@@ -4055,7 +4031,7 @@
             <a:pPr>
               <a:defRPr sz="2200" b="1">
                 <a:solidFill>
-                  <a:srgbClr val="0F172A"/>
+                  <a:srgbClr val="F8FAFC"/>
                 </a:solidFill>
                 <a:latin typeface="Arial"/>
               </a:defRPr>
@@ -4081,7 +4057,7 @@
             <a:avLst/>
           </a:prstGeom>
           <a:solidFill>
-            <a:srgbClr val="E2E8F0"/>
+            <a:srgbClr val="334155"/>
           </a:solidFill>
           <a:ln>
             <a:noFill/>
@@ -4106,7 +4082,6 @@
           <a:lstStyle/>
           <a:p>
             <a:pPr algn="ctr"/>
-            <a:endParaRPr/>
           </a:p>
         </p:txBody>
       </p:sp>
@@ -4127,7 +4102,7 @@
           <a:noFill/>
         </p:spPr>
         <p:txBody>
-          <a:bodyPr wrap="none" lIns="0" tIns="0" rIns="0" bIns="0">
+          <a:bodyPr wrap="none" lIns="0" rIns="0" tIns="0" bIns="0">
             <a:spAutoFit/>
           </a:bodyPr>
           <a:lstStyle/>
@@ -4135,13 +4110,13 @@
             <a:pPr>
               <a:defRPr sz="900">
                 <a:solidFill>
-                  <a:srgbClr val="64748B"/>
-                </a:solidFill>
-                <a:latin typeface="Arial"/>
-              </a:defRPr>
-            </a:pPr>
-            <a:r>
-              <a:t>AharSetu Enterprise ERP  |  Board Presentation  |  Slide 11 of 14</a:t>
+                  <a:srgbClr val="94A3B8"/>
+                </a:solidFill>
+                <a:latin typeface="Arial"/>
+              </a:defRPr>
+            </a:pPr>
+            <a:r>
+              <a:t>AharSetu Enterprise ERP  |  Board of Directors Presentation  |  Slide 11 of 14</a:t>
             </a:r>
           </a:p>
         </p:txBody>
@@ -4161,11 +4136,11 @@
             <a:avLst/>
           </a:prstGeom>
           <a:solidFill>
-            <a:srgbClr val="FFFFFF"/>
+            <a:srgbClr val="1E293B"/>
           </a:solidFill>
           <a:ln w="12700">
             <a:solidFill>
-              <a:srgbClr val="E2E8F0"/>
+              <a:srgbClr val="334155"/>
             </a:solidFill>
           </a:ln>
         </p:spPr>
@@ -4188,7 +4163,6 @@
           <a:lstStyle/>
           <a:p>
             <a:pPr algn="ctr"/>
-            <a:endParaRPr/>
           </a:p>
         </p:txBody>
       </p:sp>
@@ -4209,7 +4183,7 @@
           <a:noFill/>
         </p:spPr>
         <p:txBody>
-          <a:bodyPr wrap="square" lIns="0" tIns="0" rIns="0" bIns="0">
+          <a:bodyPr wrap="square" lIns="0" rIns="0" tIns="0" bIns="0">
             <a:spAutoFit/>
           </a:bodyPr>
           <a:lstStyle/>
@@ -4217,7 +4191,7 @@
             <a:pPr>
               <a:defRPr sz="1350" b="1">
                 <a:solidFill>
-                  <a:srgbClr val="2563EB"/>
+                  <a:srgbClr val="3B82F6"/>
                 </a:solidFill>
                 <a:latin typeface="Arial"/>
               </a:defRPr>
@@ -4233,7 +4207,7 @@
               </a:spcBef>
               <a:defRPr sz="1000">
                 <a:solidFill>
-                  <a:srgbClr val="0F172A"/>
+                  <a:srgbClr val="F8FAFC"/>
                 </a:solidFill>
                 <a:latin typeface="Arial"/>
               </a:defRPr>
@@ -4249,7 +4223,7 @@
               </a:spcBef>
               <a:defRPr sz="1000">
                 <a:solidFill>
-                  <a:srgbClr val="0F172A"/>
+                  <a:srgbClr val="F8FAFC"/>
                 </a:solidFill>
                 <a:latin typeface="Arial"/>
               </a:defRPr>
@@ -4265,7 +4239,7 @@
               </a:spcBef>
               <a:defRPr sz="1000">
                 <a:solidFill>
-                  <a:srgbClr val="0F172A"/>
+                  <a:srgbClr val="F8FAFC"/>
                 </a:solidFill>
                 <a:latin typeface="Arial"/>
               </a:defRPr>
@@ -4291,11 +4265,11 @@
             <a:avLst/>
           </a:prstGeom>
           <a:solidFill>
-            <a:srgbClr val="FFFFFF"/>
+            <a:srgbClr val="1E293B"/>
           </a:solidFill>
           <a:ln w="12700">
             <a:solidFill>
-              <a:srgbClr val="E2E8F0"/>
+              <a:srgbClr val="334155"/>
             </a:solidFill>
           </a:ln>
         </p:spPr>
@@ -4318,7 +4292,6 @@
           <a:lstStyle/>
           <a:p>
             <a:pPr algn="ctr"/>
-            <a:endParaRPr/>
           </a:p>
         </p:txBody>
       </p:sp>
@@ -4339,7 +4312,7 @@
           <a:noFill/>
         </p:spPr>
         <p:txBody>
-          <a:bodyPr wrap="square" lIns="0" tIns="0" rIns="0" bIns="0">
+          <a:bodyPr wrap="square" lIns="0" rIns="0" tIns="0" bIns="0">
             <a:spAutoFit/>
           </a:bodyPr>
           <a:lstStyle/>
@@ -4363,7 +4336,7 @@
               </a:spcBef>
               <a:defRPr sz="1000">
                 <a:solidFill>
-                  <a:srgbClr val="0F172A"/>
+                  <a:srgbClr val="F8FAFC"/>
                 </a:solidFill>
                 <a:latin typeface="Arial"/>
               </a:defRPr>
@@ -4379,7 +4352,7 @@
               </a:spcBef>
               <a:defRPr sz="1000">
                 <a:solidFill>
-                  <a:srgbClr val="0F172A"/>
+                  <a:srgbClr val="F8FAFC"/>
                 </a:solidFill>
                 <a:latin typeface="Arial"/>
               </a:defRPr>
@@ -4395,7 +4368,7 @@
               </a:spcBef>
               <a:defRPr sz="1000">
                 <a:solidFill>
-                  <a:srgbClr val="0F172A"/>
+                  <a:srgbClr val="F8FAFC"/>
                 </a:solidFill>
                 <a:latin typeface="Arial"/>
               </a:defRPr>
@@ -4421,11 +4394,11 @@
             <a:avLst/>
           </a:prstGeom>
           <a:solidFill>
-            <a:srgbClr val="FFFFFF"/>
+            <a:srgbClr val="1E293B"/>
           </a:solidFill>
           <a:ln w="12700">
             <a:solidFill>
-              <a:srgbClr val="E2E8F0"/>
+              <a:srgbClr val="334155"/>
             </a:solidFill>
           </a:ln>
         </p:spPr>
@@ -4448,7 +4421,6 @@
           <a:lstStyle/>
           <a:p>
             <a:pPr algn="ctr"/>
-            <a:endParaRPr/>
           </a:p>
         </p:txBody>
       </p:sp>
@@ -4469,7 +4441,7 @@
           <a:noFill/>
         </p:spPr>
         <p:txBody>
-          <a:bodyPr wrap="square" lIns="0" tIns="0" rIns="0" bIns="0">
+          <a:bodyPr wrap="square" lIns="0" rIns="0" tIns="0" bIns="0">
             <a:spAutoFit/>
           </a:bodyPr>
           <a:lstStyle/>
@@ -4477,7 +4449,7 @@
             <a:pPr>
               <a:defRPr sz="1350" b="1">
                 <a:solidFill>
-                  <a:srgbClr val="7C3AED"/>
+                  <a:srgbClr val="A855F7"/>
                 </a:solidFill>
                 <a:latin typeface="Arial"/>
               </a:defRPr>
@@ -4493,7 +4465,7 @@
               </a:spcBef>
               <a:defRPr sz="1000">
                 <a:solidFill>
-                  <a:srgbClr val="0F172A"/>
+                  <a:srgbClr val="F8FAFC"/>
                 </a:solidFill>
                 <a:latin typeface="Arial"/>
               </a:defRPr>
@@ -4509,7 +4481,7 @@
               </a:spcBef>
               <a:defRPr sz="1000">
                 <a:solidFill>
-                  <a:srgbClr val="0F172A"/>
+                  <a:srgbClr val="F8FAFC"/>
                 </a:solidFill>
                 <a:latin typeface="Arial"/>
               </a:defRPr>
@@ -4525,7 +4497,7 @@
               </a:spcBef>
               <a:defRPr sz="1000">
                 <a:solidFill>
-                  <a:srgbClr val="0F172A"/>
+                  <a:srgbClr val="F8FAFC"/>
                 </a:solidFill>
                 <a:latin typeface="Arial"/>
               </a:defRPr>
@@ -4545,7 +4517,7 @@
 </file>
 
 <file path=ppt/slides/slide12.xml><?xml version="1.0" encoding="utf-8"?>
-<p:sld xmlns:a="http://schemas.openxmlformats.org/drawingml/2006/main" xmlns:r="http://schemas.openxmlformats.org/officeDocument/2006/relationships" xmlns:p="http://schemas.openxmlformats.org/presentationml/2006/main">
+<p:sld xmlns:a="http://schemas.openxmlformats.org/drawingml/2006/main" xmlns:p="http://schemas.openxmlformats.org/presentationml/2006/main" xmlns:r="http://schemas.openxmlformats.org/officeDocument/2006/relationships">
   <p:cSld>
     <p:spTree>
       <p:nvGrpSpPr>
@@ -4553,14 +4525,7 @@
         <p:cNvGrpSpPr/>
         <p:nvPr/>
       </p:nvGrpSpPr>
-      <p:grpSpPr>
-        <a:xfrm>
-          <a:off x="0" y="0"/>
-          <a:ext cx="0" cy="0"/>
-          <a:chOff x="0" y="0"/>
-          <a:chExt cx="0" cy="0"/>
-        </a:xfrm>
-      </p:grpSpPr>
+      <p:grpSpPr/>
       <p:sp>
         <p:nvSpPr>
           <p:cNvPr id="2" name="Rectangle 1"/>
@@ -4576,7 +4541,7 @@
             <a:avLst/>
           </a:prstGeom>
           <a:solidFill>
-            <a:srgbClr val="F8FAFC"/>
+            <a:srgbClr val="0F172A"/>
           </a:solidFill>
           <a:ln>
             <a:noFill/>
@@ -4601,7 +4566,6 @@
           <a:lstStyle/>
           <a:p>
             <a:pPr algn="ctr"/>
-            <a:endParaRPr/>
           </a:p>
         </p:txBody>
       </p:sp>
@@ -4622,7 +4586,7 @@
           <a:noFill/>
         </p:spPr>
         <p:txBody>
-          <a:bodyPr wrap="square" lIns="0" tIns="0" rIns="0" bIns="0">
+          <a:bodyPr wrap="square" lIns="0" rIns="0" tIns="0" bIns="0">
             <a:spAutoFit/>
           </a:bodyPr>
           <a:lstStyle/>
@@ -4630,7 +4594,7 @@
             <a:pPr>
               <a:defRPr sz="1000" b="1">
                 <a:solidFill>
-                  <a:srgbClr val="2563EB"/>
+                  <a:srgbClr val="60A5FA"/>
                 </a:solidFill>
                 <a:latin typeface="Arial"/>
               </a:defRPr>
@@ -4658,7 +4622,7 @@
           <a:noFill/>
         </p:spPr>
         <p:txBody>
-          <a:bodyPr wrap="square" lIns="0" tIns="0" rIns="0" bIns="0">
+          <a:bodyPr wrap="square" lIns="0" rIns="0" tIns="0" bIns="0">
             <a:spAutoFit/>
           </a:bodyPr>
           <a:lstStyle/>
@@ -4666,7 +4630,7 @@
             <a:pPr>
               <a:defRPr sz="2200" b="1">
                 <a:solidFill>
-                  <a:srgbClr val="0F172A"/>
+                  <a:srgbClr val="F8FAFC"/>
                 </a:solidFill>
                 <a:latin typeface="Arial"/>
               </a:defRPr>
@@ -4692,7 +4656,7 @@
             <a:avLst/>
           </a:prstGeom>
           <a:solidFill>
-            <a:srgbClr val="E2E8F0"/>
+            <a:srgbClr val="334155"/>
           </a:solidFill>
           <a:ln>
             <a:noFill/>
@@ -4717,7 +4681,6 @@
           <a:lstStyle/>
           <a:p>
             <a:pPr algn="ctr"/>
-            <a:endParaRPr/>
           </a:p>
         </p:txBody>
       </p:sp>
@@ -4738,7 +4701,7 @@
           <a:noFill/>
         </p:spPr>
         <p:txBody>
-          <a:bodyPr wrap="none" lIns="0" tIns="0" rIns="0" bIns="0">
+          <a:bodyPr wrap="none" lIns="0" rIns="0" tIns="0" bIns="0">
             <a:spAutoFit/>
           </a:bodyPr>
           <a:lstStyle/>
@@ -4746,13 +4709,13 @@
             <a:pPr>
               <a:defRPr sz="900">
                 <a:solidFill>
-                  <a:srgbClr val="64748B"/>
-                </a:solidFill>
-                <a:latin typeface="Arial"/>
-              </a:defRPr>
-            </a:pPr>
-            <a:r>
-              <a:t>AharSetu Enterprise ERP  |  Board Presentation  |  Slide 12 of 14</a:t>
+                  <a:srgbClr val="94A3B8"/>
+                </a:solidFill>
+                <a:latin typeface="Arial"/>
+              </a:defRPr>
+            </a:pPr>
+            <a:r>
+              <a:t>AharSetu Enterprise ERP  |  Board of Directors Presentation  |  Slide 12 of 14</a:t>
             </a:r>
           </a:p>
         </p:txBody>
@@ -4772,11 +4735,11 @@
             <a:avLst/>
           </a:prstGeom>
           <a:solidFill>
-            <a:srgbClr val="FFFFFF"/>
+            <a:srgbClr val="1E293B"/>
           </a:solidFill>
           <a:ln>
             <a:solidFill>
-              <a:srgbClr val="E2E8F0"/>
+              <a:srgbClr val="334155"/>
             </a:solidFill>
           </a:ln>
         </p:spPr>
@@ -4799,7 +4762,6 @@
           <a:lstStyle/>
           <a:p>
             <a:pPr algn="ctr"/>
-            <a:endParaRPr/>
           </a:p>
         </p:txBody>
       </p:sp>
@@ -4828,7 +4790,7 @@
             <a:pPr>
               <a:defRPr sz="3200" b="1">
                 <a:solidFill>
-                  <a:srgbClr val="2563EB"/>
+                  <a:srgbClr val="3B82F6"/>
                 </a:solidFill>
                 <a:latin typeface="Arial"/>
               </a:defRPr>
@@ -4844,7 +4806,7 @@
               </a:spcBef>
               <a:defRPr sz="1300" b="1">
                 <a:solidFill>
-                  <a:srgbClr val="0F172A"/>
+                  <a:srgbClr val="F8FAFC"/>
                 </a:solidFill>
                 <a:latin typeface="Arial"/>
               </a:defRPr>
@@ -4860,7 +4822,7 @@
               </a:spcBef>
               <a:defRPr sz="1000">
                 <a:solidFill>
-                  <a:srgbClr val="64748B"/>
+                  <a:srgbClr val="94A3B8"/>
                 </a:solidFill>
                 <a:latin typeface="Arial"/>
               </a:defRPr>
@@ -4886,11 +4848,11 @@
             <a:avLst/>
           </a:prstGeom>
           <a:solidFill>
-            <a:srgbClr val="FFFFFF"/>
+            <a:srgbClr val="1E293B"/>
           </a:solidFill>
           <a:ln>
             <a:solidFill>
-              <a:srgbClr val="E2E8F0"/>
+              <a:srgbClr val="334155"/>
             </a:solidFill>
           </a:ln>
         </p:spPr>
@@ -4913,7 +4875,6 @@
           <a:lstStyle/>
           <a:p>
             <a:pPr algn="ctr"/>
-            <a:endParaRPr/>
           </a:p>
         </p:txBody>
       </p:sp>
@@ -4958,7 +4919,7 @@
               </a:spcBef>
               <a:defRPr sz="1300" b="1">
                 <a:solidFill>
-                  <a:srgbClr val="0F172A"/>
+                  <a:srgbClr val="F8FAFC"/>
                 </a:solidFill>
                 <a:latin typeface="Arial"/>
               </a:defRPr>
@@ -4974,7 +4935,7 @@
               </a:spcBef>
               <a:defRPr sz="1000">
                 <a:solidFill>
-                  <a:srgbClr val="64748B"/>
+                  <a:srgbClr val="94A3B8"/>
                 </a:solidFill>
                 <a:latin typeface="Arial"/>
               </a:defRPr>
@@ -5000,11 +4961,11 @@
             <a:avLst/>
           </a:prstGeom>
           <a:solidFill>
-            <a:srgbClr val="FFFFFF"/>
+            <a:srgbClr val="1E293B"/>
           </a:solidFill>
           <a:ln>
             <a:solidFill>
-              <a:srgbClr val="E2E8F0"/>
+              <a:srgbClr val="334155"/>
             </a:solidFill>
           </a:ln>
         </p:spPr>
@@ -5027,7 +4988,6 @@
           <a:lstStyle/>
           <a:p>
             <a:pPr algn="ctr"/>
-            <a:endParaRPr/>
           </a:p>
         </p:txBody>
       </p:sp>
@@ -5056,7 +5016,7 @@
             <a:pPr>
               <a:defRPr sz="3200" b="1">
                 <a:solidFill>
-                  <a:srgbClr val="7C3AED"/>
+                  <a:srgbClr val="A855F7"/>
                 </a:solidFill>
                 <a:latin typeface="Arial"/>
               </a:defRPr>
@@ -5072,7 +5032,7 @@
               </a:spcBef>
               <a:defRPr sz="1300" b="1">
                 <a:solidFill>
-                  <a:srgbClr val="0F172A"/>
+                  <a:srgbClr val="F8FAFC"/>
                 </a:solidFill>
                 <a:latin typeface="Arial"/>
               </a:defRPr>
@@ -5088,7 +5048,7 @@
               </a:spcBef>
               <a:defRPr sz="1000">
                 <a:solidFill>
-                  <a:srgbClr val="64748B"/>
+                  <a:srgbClr val="94A3B8"/>
                 </a:solidFill>
                 <a:latin typeface="Arial"/>
               </a:defRPr>
@@ -5114,11 +5074,11 @@
             <a:avLst/>
           </a:prstGeom>
           <a:solidFill>
-            <a:srgbClr val="FFFFFF"/>
+            <a:srgbClr val="1E293B"/>
           </a:solidFill>
           <a:ln>
             <a:solidFill>
-              <a:srgbClr val="E2E8F0"/>
+              <a:srgbClr val="334155"/>
             </a:solidFill>
           </a:ln>
         </p:spPr>
@@ -5141,7 +5101,6 @@
           <a:lstStyle/>
           <a:p>
             <a:pPr algn="ctr"/>
-            <a:endParaRPr/>
           </a:p>
         </p:txBody>
       </p:sp>
@@ -5186,7 +5145,7 @@
               </a:spcBef>
               <a:defRPr sz="1300" b="1">
                 <a:solidFill>
-                  <a:srgbClr val="0F172A"/>
+                  <a:srgbClr val="F8FAFC"/>
                 </a:solidFill>
                 <a:latin typeface="Arial"/>
               </a:defRPr>
@@ -5202,7 +5161,7 @@
               </a:spcBef>
               <a:defRPr sz="1000">
                 <a:solidFill>
-                  <a:srgbClr val="64748B"/>
+                  <a:srgbClr val="94A3B8"/>
                 </a:solidFill>
                 <a:latin typeface="Arial"/>
               </a:defRPr>
@@ -5222,7 +5181,7 @@
 </file>
 
 <file path=ppt/slides/slide13.xml><?xml version="1.0" encoding="utf-8"?>
-<p:sld xmlns:a="http://schemas.openxmlformats.org/drawingml/2006/main" xmlns:r="http://schemas.openxmlformats.org/officeDocument/2006/relationships" xmlns:p="http://schemas.openxmlformats.org/presentationml/2006/main">
+<p:sld xmlns:a="http://schemas.openxmlformats.org/drawingml/2006/main" xmlns:p="http://schemas.openxmlformats.org/presentationml/2006/main" xmlns:r="http://schemas.openxmlformats.org/officeDocument/2006/relationships">
   <p:cSld>
     <p:spTree>
       <p:nvGrpSpPr>
@@ -5230,14 +5189,7 @@
         <p:cNvGrpSpPr/>
         <p:nvPr/>
       </p:nvGrpSpPr>
-      <p:grpSpPr>
-        <a:xfrm>
-          <a:off x="0" y="0"/>
-          <a:ext cx="0" cy="0"/>
-          <a:chOff x="0" y="0"/>
-          <a:chExt cx="0" cy="0"/>
-        </a:xfrm>
-      </p:grpSpPr>
+      <p:grpSpPr/>
       <p:sp>
         <p:nvSpPr>
           <p:cNvPr id="2" name="Rectangle 1"/>
@@ -5253,7 +5205,7 @@
             <a:avLst/>
           </a:prstGeom>
           <a:solidFill>
-            <a:srgbClr val="F8FAFC"/>
+            <a:srgbClr val="0F172A"/>
           </a:solidFill>
           <a:ln>
             <a:noFill/>
@@ -5278,7 +5230,6 @@
           <a:lstStyle/>
           <a:p>
             <a:pPr algn="ctr"/>
-            <a:endParaRPr/>
           </a:p>
         </p:txBody>
       </p:sp>
@@ -5299,7 +5250,7 @@
           <a:noFill/>
         </p:spPr>
         <p:txBody>
-          <a:bodyPr wrap="square" lIns="0" tIns="0" rIns="0" bIns="0">
+          <a:bodyPr wrap="square" lIns="0" rIns="0" tIns="0" bIns="0">
             <a:spAutoFit/>
           </a:bodyPr>
           <a:lstStyle/>
@@ -5307,7 +5258,7 @@
             <a:pPr>
               <a:defRPr sz="1000" b="1">
                 <a:solidFill>
-                  <a:srgbClr val="2563EB"/>
+                  <a:srgbClr val="60A5FA"/>
                 </a:solidFill>
                 <a:latin typeface="Arial"/>
               </a:defRPr>
@@ -5335,7 +5286,7 @@
           <a:noFill/>
         </p:spPr>
         <p:txBody>
-          <a:bodyPr wrap="square" lIns="0" tIns="0" rIns="0" bIns="0">
+          <a:bodyPr wrap="square" lIns="0" rIns="0" tIns="0" bIns="0">
             <a:spAutoFit/>
           </a:bodyPr>
           <a:lstStyle/>
@@ -5343,13 +5294,13 @@
             <a:pPr>
               <a:defRPr sz="2200" b="1">
                 <a:solidFill>
-                  <a:srgbClr val="0F172A"/>
-                </a:solidFill>
-                <a:latin typeface="Arial"/>
-              </a:defRPr>
-            </a:pPr>
-            <a:r>
-              <a:t>Future Product Roadmap &amp; Enterprise Scale</a:t>
+                  <a:srgbClr val="F8FAFC"/>
+                </a:solidFill>
+                <a:latin typeface="Arial"/>
+              </a:defRPr>
+            </a:pPr>
+            <a:r>
+              <a:t>Future Product Roadmap &amp; Practical Campus Scaling</a:t>
             </a:r>
           </a:p>
         </p:txBody>
@@ -5369,7 +5320,7 @@
             <a:avLst/>
           </a:prstGeom>
           <a:solidFill>
-            <a:srgbClr val="E2E8F0"/>
+            <a:srgbClr val="334155"/>
           </a:solidFill>
           <a:ln>
             <a:noFill/>
@@ -5394,7 +5345,6 @@
           <a:lstStyle/>
           <a:p>
             <a:pPr algn="ctr"/>
-            <a:endParaRPr/>
           </a:p>
         </p:txBody>
       </p:sp>
@@ -5415,7 +5365,7 @@
           <a:noFill/>
         </p:spPr>
         <p:txBody>
-          <a:bodyPr wrap="none" lIns="0" tIns="0" rIns="0" bIns="0">
+          <a:bodyPr wrap="none" lIns="0" rIns="0" tIns="0" bIns="0">
             <a:spAutoFit/>
           </a:bodyPr>
           <a:lstStyle/>
@@ -5423,13 +5373,13 @@
             <a:pPr>
               <a:defRPr sz="900">
                 <a:solidFill>
-                  <a:srgbClr val="64748B"/>
-                </a:solidFill>
-                <a:latin typeface="Arial"/>
-              </a:defRPr>
-            </a:pPr>
-            <a:r>
-              <a:t>AharSetu Enterprise ERP  |  Board Presentation  |  Slide 13 of 14</a:t>
+                  <a:srgbClr val="94A3B8"/>
+                </a:solidFill>
+                <a:latin typeface="Arial"/>
+              </a:defRPr>
+            </a:pPr>
+            <a:r>
+              <a:t>AharSetu Enterprise ERP  |  Board of Directors Presentation  |  Slide 13 of 14</a:t>
             </a:r>
           </a:p>
         </p:txBody>
@@ -5449,11 +5399,11 @@
             <a:avLst/>
           </a:prstGeom>
           <a:solidFill>
-            <a:srgbClr val="FFFFFF"/>
+            <a:srgbClr val="1E293B"/>
           </a:solidFill>
           <a:ln w="12700">
             <a:solidFill>
-              <a:srgbClr val="E2E8F0"/>
+              <a:srgbClr val="334155"/>
             </a:solidFill>
           </a:ln>
         </p:spPr>
@@ -5476,7 +5426,6 @@
           <a:lstStyle/>
           <a:p>
             <a:pPr algn="ctr"/>
-            <a:endParaRPr/>
           </a:p>
         </p:txBody>
       </p:sp>
@@ -5497,7 +5446,7 @@
           <a:noFill/>
         </p:spPr>
         <p:txBody>
-          <a:bodyPr wrap="square" lIns="0" tIns="0" rIns="0" bIns="0">
+          <a:bodyPr wrap="square" lIns="0" rIns="0" tIns="0" bIns="0">
             <a:spAutoFit/>
           </a:bodyPr>
           <a:lstStyle/>
@@ -5521,13 +5470,13 @@
               </a:spcBef>
               <a:defRPr sz="1000">
                 <a:solidFill>
-                  <a:srgbClr val="0F172A"/>
-                </a:solidFill>
-                <a:latin typeface="Arial"/>
-              </a:defRPr>
-            </a:pPr>
-            <a:r>
-              <a:t>• Multi-vendor splitting &amp; automated workflow.</a:t>
+                  <a:srgbClr val="F8FAFC"/>
+                </a:solidFill>
+                <a:latin typeface="Arial"/>
+              </a:defRPr>
+            </a:pPr>
+            <a:r>
+              <a:t>• Automated multi-vendor requisition splitting.</a:t>
             </a:r>
           </a:p>
           <a:p>
@@ -5537,13 +5486,13 @@
               </a:spcBef>
               <a:defRPr sz="1000">
                 <a:solidFill>
-                  <a:srgbClr val="0F172A"/>
-                </a:solidFill>
-                <a:latin typeface="Arial"/>
-              </a:defRPr>
-            </a:pPr>
-            <a:r>
-              <a:t>• 10-second real-time cross-device sync.</a:t>
+                  <a:srgbClr val="F8FAFC"/>
+                </a:solidFill>
+                <a:latin typeface="Arial"/>
+              </a:defRPr>
+            </a:pPr>
+            <a:r>
+              <a:t>• 10-second real-time cross-device sync &amp; WebSocket alerts.</a:t>
             </a:r>
           </a:p>
           <a:p>
@@ -5553,13 +5502,29 @@
               </a:spcBef>
               <a:defRPr sz="1000">
                 <a:solidFill>
-                  <a:srgbClr val="0F172A"/>
-                </a:solidFill>
-                <a:latin typeface="Arial"/>
-              </a:defRPr>
-            </a:pPr>
-            <a:r>
-              <a:t>• QR invoice verification &amp; audit logging.</a:t>
+                  <a:srgbClr val="F8FAFC"/>
+                </a:solidFill>
+                <a:latin typeface="Arial"/>
+              </a:defRPr>
+            </a:pPr>
+            <a:r>
+              <a:t>• Verified cryptographic QR invoicing &amp; immutable audit trail.</a:t>
+            </a:r>
+          </a:p>
+          <a:p>
+            <a:pPr>
+              <a:spcBef>
+                <a:spcPts val="400"/>
+              </a:spcBef>
+              <a:defRPr sz="1000">
+                <a:solidFill>
+                  <a:srgbClr val="F8FAFC"/>
+                </a:solidFill>
+                <a:latin typeface="Arial"/>
+              </a:defRPr>
+            </a:pPr>
+            <a:r>
+              <a:t>• Localized multilingual interface (English, Hindi, Gujarati).</a:t>
             </a:r>
           </a:p>
         </p:txBody>
@@ -5579,11 +5544,11 @@
             <a:avLst/>
           </a:prstGeom>
           <a:solidFill>
-            <a:srgbClr val="FFFFFF"/>
+            <a:srgbClr val="1E293B"/>
           </a:solidFill>
           <a:ln w="12700">
             <a:solidFill>
-              <a:srgbClr val="E2E8F0"/>
+              <a:srgbClr val="334155"/>
             </a:solidFill>
           </a:ln>
         </p:spPr>
@@ -5606,7 +5571,6 @@
           <a:lstStyle/>
           <a:p>
             <a:pPr algn="ctr"/>
-            <a:endParaRPr/>
           </a:p>
         </p:txBody>
       </p:sp>
@@ -5627,7 +5591,7 @@
           <a:noFill/>
         </p:spPr>
         <p:txBody>
-          <a:bodyPr wrap="square" lIns="0" tIns="0" rIns="0" bIns="0">
+          <a:bodyPr wrap="square" lIns="0" rIns="0" tIns="0" bIns="0">
             <a:spAutoFit/>
           </a:bodyPr>
           <a:lstStyle/>
@@ -5635,13 +5599,13 @@
             <a:pPr>
               <a:defRPr sz="1350" b="1">
                 <a:solidFill>
-                  <a:srgbClr val="2563EB"/>
-                </a:solidFill>
-                <a:latin typeface="Arial"/>
-              </a:defRPr>
-            </a:pPr>
-            <a:r>
-              <a:t>Phase 2: ERP &amp; Financial Integrations</a:t>
+                  <a:srgbClr val="3B82F6"/>
+                </a:solidFill>
+                <a:latin typeface="Arial"/>
+              </a:defRPr>
+            </a:pPr>
+            <a:r>
+              <a:t>Phase 2: Operational Reporting &amp; Feedback</a:t>
             </a:r>
           </a:p>
           <a:p>
@@ -5651,13 +5615,13 @@
               </a:spcBef>
               <a:defRPr sz="1000">
                 <a:solidFill>
-                  <a:srgbClr val="0F172A"/>
-                </a:solidFill>
-                <a:latin typeface="Arial"/>
-              </a:defRPr>
-            </a:pPr>
-            <a:r>
-              <a:t>• Direct connector with SAP, Tally Prime, and Oracle NetSuite.</a:t>
+                  <a:srgbClr val="F8FAFC"/>
+                </a:solidFill>
+                <a:latin typeface="Arial"/>
+              </a:defRPr>
+            </a:pPr>
+            <a:r>
+              <a:t>• Exportable Excel / CSV financial ledgers for accounts office.</a:t>
             </a:r>
           </a:p>
           <a:p>
@@ -5667,13 +5631,13 @@
               </a:spcBef>
               <a:defRPr sz="1000">
                 <a:solidFill>
-                  <a:srgbClr val="0F172A"/>
-                </a:solidFill>
-                <a:latin typeface="Arial"/>
-              </a:defRPr>
-            </a:pPr>
-            <a:r>
-              <a:t>• Automated bank payout integration for vendors.</a:t>
+                  <a:srgbClr val="F8FAFC"/>
+                </a:solidFill>
+                <a:latin typeface="Arial"/>
+              </a:defRPr>
+            </a:pPr>
+            <a:r>
+              <a:t>• Post-event food quality rating &amp; feedback mechanism for coordinators.</a:t>
             </a:r>
           </a:p>
           <a:p>
@@ -5683,13 +5647,29 @@
               </a:spcBef>
               <a:defRPr sz="1000">
                 <a:solidFill>
-                  <a:srgbClr val="0F172A"/>
-                </a:solidFill>
-                <a:latin typeface="Arial"/>
-              </a:defRPr>
-            </a:pPr>
-            <a:r>
-              <a:t>• Native iOS / Android mobile apps with push alerts.</a:t>
+                  <a:srgbClr val="F8FAFC"/>
+                </a:solidFill>
+                <a:latin typeface="Arial"/>
+              </a:defRPr>
+            </a:pPr>
+            <a:r>
+              <a:t>• Department monthly expenditure threshold alerts before drafting.</a:t>
+            </a:r>
+          </a:p>
+          <a:p>
+            <a:pPr>
+              <a:spcBef>
+                <a:spcPts val="400"/>
+              </a:spcBef>
+              <a:defRPr sz="1000">
+                <a:solidFill>
+                  <a:srgbClr val="F8FAFC"/>
+                </a:solidFill>
+                <a:latin typeface="Arial"/>
+              </a:defRPr>
+            </a:pPr>
+            <a:r>
+              <a:t>• SMS &amp; WhatsApp notification alerts for urgent order updates.</a:t>
             </a:r>
           </a:p>
         </p:txBody>
@@ -5709,11 +5689,11 @@
             <a:avLst/>
           </a:prstGeom>
           <a:solidFill>
-            <a:srgbClr val="FFFFFF"/>
+            <a:srgbClr val="1E293B"/>
           </a:solidFill>
           <a:ln w="12700">
             <a:solidFill>
-              <a:srgbClr val="E2E8F0"/>
+              <a:srgbClr val="334155"/>
             </a:solidFill>
           </a:ln>
         </p:spPr>
@@ -5736,7 +5716,6 @@
           <a:lstStyle/>
           <a:p>
             <a:pPr algn="ctr"/>
-            <a:endParaRPr/>
           </a:p>
         </p:txBody>
       </p:sp>
@@ -5757,7 +5736,7 @@
           <a:noFill/>
         </p:spPr>
         <p:txBody>
-          <a:bodyPr wrap="square" lIns="0" tIns="0" rIns="0" bIns="0">
+          <a:bodyPr wrap="square" lIns="0" rIns="0" tIns="0" bIns="0">
             <a:spAutoFit/>
           </a:bodyPr>
           <a:lstStyle/>
@@ -5765,13 +5744,13 @@
             <a:pPr>
               <a:defRPr sz="1350" b="1">
                 <a:solidFill>
-                  <a:srgbClr val="7C3AED"/>
-                </a:solidFill>
-                <a:latin typeface="Arial"/>
-              </a:defRPr>
-            </a:pPr>
-            <a:r>
-              <a:t>Phase 3: AI &amp; Predictive Analytics</a:t>
+                  <a:srgbClr val="A855F7"/>
+                </a:solidFill>
+                <a:latin typeface="Arial"/>
+              </a:defRPr>
+            </a:pPr>
+            <a:r>
+              <a:t>Phase 3: Campus Scheduling &amp; Event Scaling</a:t>
             </a:r>
           </a:p>
           <a:p>
@@ -5781,13 +5760,13 @@
               </a:spcBef>
               <a:defRPr sz="1000">
                 <a:solidFill>
-                  <a:srgbClr val="0F172A"/>
-                </a:solidFill>
-                <a:latin typeface="Arial"/>
-              </a:defRPr>
-            </a:pPr>
-            <a:r>
-              <a:t>• Predictive food demand forecasting to minimize kitchen wastage.</a:t>
+                  <a:srgbClr val="F8FAFC"/>
+                </a:solidFill>
+                <a:latin typeface="Arial"/>
+              </a:defRPr>
+            </a:pPr>
+            <a:r>
+              <a:t>• Advance recurring orders for weekly seminars &amp; staff meetings.</a:t>
             </a:r>
           </a:p>
           <a:p>
@@ -5797,13 +5776,13 @@
               </a:spcBef>
               <a:defRPr sz="1000">
                 <a:solidFill>
-                  <a:srgbClr val="0F172A"/>
-                </a:solidFill>
-                <a:latin typeface="Arial"/>
-              </a:defRPr>
-            </a:pPr>
-            <a:r>
-              <a:t>• Automated budget threshold recommendations for departments.</a:t>
+                  <a:srgbClr val="F8FAFC"/>
+                </a:solidFill>
+                <a:latin typeface="Arial"/>
+              </a:defRPr>
+            </a:pPr>
+            <a:r>
+              <a:t>• Multi-slot daily menu scheduling (Breakfast, Lunch, High-Tea).</a:t>
             </a:r>
           </a:p>
           <a:p>
@@ -5813,13 +5792,29 @@
               </a:spcBef>
               <a:defRPr sz="1000">
                 <a:solidFill>
-                  <a:srgbClr val="0F172A"/>
-                </a:solidFill>
-                <a:latin typeface="Arial"/>
-              </a:defRPr>
-            </a:pPr>
-            <a:r>
-              <a:t>• Smart RFID &amp; student meal plan wallet integration.</a:t>
+                  <a:srgbClr val="F8FAFC"/>
+                </a:solidFill>
+                <a:latin typeface="Arial"/>
+              </a:defRPr>
+            </a:pPr>
+            <a:r>
+              <a:t>• Temporary guest meal passes &amp; visitor refreshment vouchers.</a:t>
+            </a:r>
+          </a:p>
+          <a:p>
+            <a:pPr>
+              <a:spcBef>
+                <a:spcPts val="400"/>
+              </a:spcBef>
+              <a:defRPr sz="1000">
+                <a:solidFill>
+                  <a:srgbClr val="F8FAFC"/>
+                </a:solidFill>
+                <a:latin typeface="Arial"/>
+              </a:defRPr>
+            </a:pPr>
+            <a:r>
+              <a:t>• Annual institutional audit pack export for statutory reviews.</a:t>
             </a:r>
           </a:p>
         </p:txBody>
@@ -5833,7 +5828,7 @@
 </file>
 
 <file path=ppt/slides/slide14.xml><?xml version="1.0" encoding="utf-8"?>
-<p:sld xmlns:a="http://schemas.openxmlformats.org/drawingml/2006/main" xmlns:r="http://schemas.openxmlformats.org/officeDocument/2006/relationships" xmlns:p="http://schemas.openxmlformats.org/presentationml/2006/main">
+<p:sld xmlns:a="http://schemas.openxmlformats.org/drawingml/2006/main" xmlns:p="http://schemas.openxmlformats.org/presentationml/2006/main" xmlns:r="http://schemas.openxmlformats.org/officeDocument/2006/relationships">
   <p:cSld>
     <p:spTree>
       <p:nvGrpSpPr>
@@ -5841,14 +5836,7 @@
         <p:cNvGrpSpPr/>
         <p:nvPr/>
       </p:nvGrpSpPr>
-      <p:grpSpPr>
-        <a:xfrm>
-          <a:off x="0" y="0"/>
-          <a:ext cx="0" cy="0"/>
-          <a:chOff x="0" y="0"/>
-          <a:chExt cx="0" cy="0"/>
-        </a:xfrm>
-      </p:grpSpPr>
+      <p:grpSpPr/>
       <p:sp>
         <p:nvSpPr>
           <p:cNvPr id="2" name="Rectangle 1"/>
@@ -5889,7 +5877,6 @@
           <a:lstStyle/>
           <a:p>
             <a:pPr algn="ctr"/>
-            <a:endParaRPr/>
           </a:p>
         </p:txBody>
       </p:sp>
@@ -5933,7 +5920,6 @@
           <a:lstStyle/>
           <a:p>
             <a:pPr algn="ctr"/>
-            <a:endParaRPr/>
           </a:p>
         </p:txBody>
       </p:sp>
@@ -5990,7 +5976,7 @@
           <a:p>
             <a:pPr>
               <a:spcBef>
-                <a:spcPts val="1600"/>
+                <a:spcPts val="1400"/>
               </a:spcBef>
               <a:defRPr sz="1300">
                 <a:solidFill>
@@ -6000,7 +5986,7 @@
               </a:defRPr>
             </a:pPr>
             <a:r>
-              <a:t>• AharSetu bridges the critical gap between campus departments, vendors, and finance leadership.</a:t>
+              <a:t>• AharSetu bridges the critical gap between campus departments, canteens, and finance leadership.</a:t>
             </a:r>
             <a:br/>
             <a:r>
@@ -6012,46 +5998,7 @@
             </a:r>
             <a:br/>
             <a:r>
-              <a:t>• Recommended Action: Approve institutional rollout and Phase 2 ERP integration.</a:t>
-            </a:r>
-          </a:p>
-        </p:txBody>
-      </p:sp>
-      <p:sp>
-        <p:nvSpPr>
-          <p:cNvPr id="5" name="TextBox 4"/>
-          <p:cNvSpPr txBox="1"/>
-          <p:nvPr/>
-        </p:nvSpPr>
-        <p:spPr>
-          <a:xfrm>
-            <a:off x="1280160" y="5303520"/>
-            <a:ext cx="9601200" cy="731520"/>
-          </a:xfrm>
-          <a:prstGeom prst="rect">
-            <a:avLst/>
-          </a:prstGeom>
-          <a:noFill/>
-        </p:spPr>
-        <p:txBody>
-          <a:bodyPr wrap="none">
-            <a:spAutoFit/>
-          </a:bodyPr>
-          <a:lstStyle/>
-          <a:p>
-            <a:pPr>
-              <a:defRPr sz="1050">
-                <a:solidFill>
-                  <a:srgbClr val="94A3B8"/>
-                </a:solidFill>
-              </a:defRPr>
-            </a:pPr>
-            <a:r>
-              <a:t>Thank you. Open for Questions &amp; Board Discussion.</a:t>
-            </a:r>
-            <a:br/>
-            <a:r>
-              <a:t>Contact: engineering@aharsetu.edu.in  |  https://aharsetu.vercel.app</a:t>
+              <a:t>• Recommended Action: Approve institutional rollout and commence Phase 2 reporting enhancements.</a:t>
             </a:r>
           </a:p>
         </p:txBody>
@@ -6065,7 +6012,7 @@
 </file>
 
 <file path=ppt/slides/slide2.xml><?xml version="1.0" encoding="utf-8"?>
-<p:sld xmlns:a="http://schemas.openxmlformats.org/drawingml/2006/main" xmlns:r="http://schemas.openxmlformats.org/officeDocument/2006/relationships" xmlns:p="http://schemas.openxmlformats.org/presentationml/2006/main">
+<p:sld xmlns:a="http://schemas.openxmlformats.org/drawingml/2006/main" xmlns:p="http://schemas.openxmlformats.org/presentationml/2006/main" xmlns:r="http://schemas.openxmlformats.org/officeDocument/2006/relationships">
   <p:cSld>
     <p:spTree>
       <p:nvGrpSpPr>
@@ -6073,14 +6020,7 @@
         <p:cNvGrpSpPr/>
         <p:nvPr/>
       </p:nvGrpSpPr>
-      <p:grpSpPr>
-        <a:xfrm>
-          <a:off x="0" y="0"/>
-          <a:ext cx="0" cy="0"/>
-          <a:chOff x="0" y="0"/>
-          <a:chExt cx="0" cy="0"/>
-        </a:xfrm>
-      </p:grpSpPr>
+      <p:grpSpPr/>
       <p:sp>
         <p:nvSpPr>
           <p:cNvPr id="2" name="Rectangle 1"/>
@@ -6096,7 +6036,7 @@
             <a:avLst/>
           </a:prstGeom>
           <a:solidFill>
-            <a:srgbClr val="F8FAFC"/>
+            <a:srgbClr val="0F172A"/>
           </a:solidFill>
           <a:ln>
             <a:noFill/>
@@ -6121,7 +6061,6 @@
           <a:lstStyle/>
           <a:p>
             <a:pPr algn="ctr"/>
-            <a:endParaRPr/>
           </a:p>
         </p:txBody>
       </p:sp>
@@ -6142,7 +6081,7 @@
           <a:noFill/>
         </p:spPr>
         <p:txBody>
-          <a:bodyPr wrap="square" lIns="0" tIns="0" rIns="0" bIns="0">
+          <a:bodyPr wrap="square" lIns="0" rIns="0" tIns="0" bIns="0">
             <a:spAutoFit/>
           </a:bodyPr>
           <a:lstStyle/>
@@ -6150,13 +6089,13 @@
             <a:pPr>
               <a:defRPr sz="1000" b="1">
                 <a:solidFill>
-                  <a:srgbClr val="2563EB"/>
-                </a:solidFill>
-                <a:latin typeface="Arial"/>
-              </a:defRPr>
-            </a:pPr>
-            <a:r>
-              <a:t>AHARSETU ENTERPRISE ERP</a:t>
+                  <a:srgbClr val="60A5FA"/>
+                </a:solidFill>
+                <a:latin typeface="Arial"/>
+              </a:defRPr>
+            </a:pPr>
+            <a:r>
+              <a:t>INDUSTRY CHALLENGE</a:t>
             </a:r>
           </a:p>
         </p:txBody>
@@ -6178,7 +6117,7 @@
           <a:noFill/>
         </p:spPr>
         <p:txBody>
-          <a:bodyPr wrap="square" lIns="0" tIns="0" rIns="0" bIns="0">
+          <a:bodyPr wrap="square" lIns="0" rIns="0" tIns="0" bIns="0">
             <a:spAutoFit/>
           </a:bodyPr>
           <a:lstStyle/>
@@ -6186,7 +6125,7 @@
             <a:pPr>
               <a:defRPr sz="2200" b="1">
                 <a:solidFill>
-                  <a:srgbClr val="0F172A"/>
+                  <a:srgbClr val="F8FAFC"/>
                 </a:solidFill>
                 <a:latin typeface="Arial"/>
               </a:defRPr>
@@ -6212,7 +6151,7 @@
             <a:avLst/>
           </a:prstGeom>
           <a:solidFill>
-            <a:srgbClr val="E2E8F0"/>
+            <a:srgbClr val="334155"/>
           </a:solidFill>
           <a:ln>
             <a:noFill/>
@@ -6237,7 +6176,6 @@
           <a:lstStyle/>
           <a:p>
             <a:pPr algn="ctr"/>
-            <a:endParaRPr/>
           </a:p>
         </p:txBody>
       </p:sp>
@@ -6258,7 +6196,7 @@
           <a:noFill/>
         </p:spPr>
         <p:txBody>
-          <a:bodyPr wrap="none" lIns="0" tIns="0" rIns="0" bIns="0">
+          <a:bodyPr wrap="none" lIns="0" rIns="0" tIns="0" bIns="0">
             <a:spAutoFit/>
           </a:bodyPr>
           <a:lstStyle/>
@@ -6266,13 +6204,13 @@
             <a:pPr>
               <a:defRPr sz="900">
                 <a:solidFill>
-                  <a:srgbClr val="64748B"/>
-                </a:solidFill>
-                <a:latin typeface="Arial"/>
-              </a:defRPr>
-            </a:pPr>
-            <a:r>
-              <a:t>AharSetu Enterprise ERP  |  Board Presentation  |  Slide 2 of 14</a:t>
+                  <a:srgbClr val="94A3B8"/>
+                </a:solidFill>
+                <a:latin typeface="Arial"/>
+              </a:defRPr>
+            </a:pPr>
+            <a:r>
+              <a:t>AharSetu Enterprise ERP  |  Board of Directors Presentation  |  Slide 2 of 14</a:t>
             </a:r>
           </a:p>
         </p:txBody>
@@ -6292,11 +6230,11 @@
             <a:avLst/>
           </a:prstGeom>
           <a:solidFill>
-            <a:srgbClr val="FFFFFF"/>
+            <a:srgbClr val="1E293B"/>
           </a:solidFill>
           <a:ln w="12700">
             <a:solidFill>
-              <a:srgbClr val="E2E8F0"/>
+              <a:srgbClr val="334155"/>
             </a:solidFill>
           </a:ln>
         </p:spPr>
@@ -6319,7 +6257,6 @@
           <a:lstStyle/>
           <a:p>
             <a:pPr algn="ctr"/>
-            <a:endParaRPr/>
           </a:p>
         </p:txBody>
       </p:sp>
@@ -6340,7 +6277,7 @@
           <a:noFill/>
         </p:spPr>
         <p:txBody>
-          <a:bodyPr wrap="square" lIns="0" tIns="0" rIns="0" bIns="0">
+          <a:bodyPr wrap="square" lIns="0" rIns="0" tIns="0" bIns="0">
             <a:spAutoFit/>
           </a:bodyPr>
           <a:lstStyle/>
@@ -6348,7 +6285,7 @@
             <a:pPr>
               <a:defRPr sz="1350" b="1">
                 <a:solidFill>
-                  <a:srgbClr val="DC2626"/>
+                  <a:srgbClr val="F87171"/>
                 </a:solidFill>
                 <a:latin typeface="Arial"/>
               </a:defRPr>
@@ -6364,13 +6301,13 @@
               </a:spcBef>
               <a:defRPr sz="1000">
                 <a:solidFill>
-                  <a:srgbClr val="0F172A"/>
-                </a:solidFill>
-                <a:latin typeface="Arial"/>
-              </a:defRPr>
-            </a:pPr>
-            <a:r>
-              <a:t>• Departments manage food requests via physical slips or informal chats.</a:t>
+                  <a:srgbClr val="F8FAFC"/>
+                </a:solidFill>
+                <a:latin typeface="Arial"/>
+              </a:defRPr>
+            </a:pPr>
+            <a:r>
+              <a:t>• Departments manage event hospitality via paper slips or casual chats.</a:t>
             </a:r>
           </a:p>
           <a:p>
@@ -6380,13 +6317,13 @@
               </a:spcBef>
               <a:defRPr sz="1000">
                 <a:solidFill>
-                  <a:srgbClr val="0F172A"/>
-                </a:solidFill>
-                <a:latin typeface="Arial"/>
-              </a:defRPr>
-            </a:pPr>
-            <a:r>
-              <a:t>• High rates of missing receipts, unrecorded quantities, and untracked expenses.</a:t>
+                  <a:srgbClr val="F8FAFC"/>
+                </a:solidFill>
+                <a:latin typeface="Arial"/>
+              </a:defRPr>
+            </a:pPr>
+            <a:r>
+              <a:t>• High rates of missing slips, unrecorded quantities, and unaccounted costs.</a:t>
             </a:r>
           </a:p>
           <a:p>
@@ -6396,13 +6333,13 @@
               </a:spcBef>
               <a:defRPr sz="1000">
                 <a:solidFill>
-                  <a:srgbClr val="0F172A"/>
-                </a:solidFill>
-                <a:latin typeface="Arial"/>
-              </a:defRPr>
-            </a:pPr>
-            <a:r>
-              <a:t>• No centralized record for institutional event refreshments.</a:t>
+                  <a:srgbClr val="F8FAFC"/>
+                </a:solidFill>
+                <a:latin typeface="Arial"/>
+              </a:defRPr>
+            </a:pPr>
+            <a:r>
+              <a:t>• Zero centralized digital record for departmental refreshment expenses.</a:t>
             </a:r>
           </a:p>
         </p:txBody>
@@ -6422,11 +6359,11 @@
             <a:avLst/>
           </a:prstGeom>
           <a:solidFill>
-            <a:srgbClr val="FFFFFF"/>
+            <a:srgbClr val="1E293B"/>
           </a:solidFill>
           <a:ln w="12700">
             <a:solidFill>
-              <a:srgbClr val="E2E8F0"/>
+              <a:srgbClr val="334155"/>
             </a:solidFill>
           </a:ln>
         </p:spPr>
@@ -6449,7 +6386,6 @@
           <a:lstStyle/>
           <a:p>
             <a:pPr algn="ctr"/>
-            <a:endParaRPr/>
           </a:p>
         </p:txBody>
       </p:sp>
@@ -6470,7 +6406,7 @@
           <a:noFill/>
         </p:spPr>
         <p:txBody>
-          <a:bodyPr wrap="square" lIns="0" tIns="0" rIns="0" bIns="0">
+          <a:bodyPr wrap="square" lIns="0" rIns="0" tIns="0" bIns="0">
             <a:spAutoFit/>
           </a:bodyPr>
           <a:lstStyle/>
@@ -6494,13 +6430,13 @@
               </a:spcBef>
               <a:defRPr sz="1000">
                 <a:solidFill>
-                  <a:srgbClr val="0F172A"/>
-                </a:solidFill>
-                <a:latin typeface="Arial"/>
-              </a:defRPr>
-            </a:pPr>
-            <a:r>
-              <a:t>• A single event order requires items from 2-4 distinct campus canteens/vendors.</a:t>
+                  <a:srgbClr val="F8FAFC"/>
+                </a:solidFill>
+                <a:latin typeface="Arial"/>
+              </a:defRPr>
+            </a:pPr>
+            <a:r>
+              <a:t>• A single hospitality order requires items from 2-4 distinct campus canteens.</a:t>
             </a:r>
           </a:p>
           <a:p>
@@ -6510,13 +6446,13 @@
               </a:spcBef>
               <a:defRPr sz="1000">
                 <a:solidFill>
-                  <a:srgbClr val="0F172A"/>
-                </a:solidFill>
-                <a:latin typeface="Arial"/>
-              </a:defRPr>
-            </a:pPr>
-            <a:r>
-              <a:t>• Coordinators spend hours placing separate manual orders with each shop.</a:t>
+                  <a:srgbClr val="F8FAFC"/>
+                </a:solidFill>
+                <a:latin typeface="Arial"/>
+              </a:defRPr>
+            </a:pPr>
+            <a:r>
+              <a:t>• Coordinators spend hours coordinating separately with each shop vendor.</a:t>
             </a:r>
           </a:p>
           <a:p>
@@ -6526,13 +6462,13 @@
               </a:spcBef>
               <a:defRPr sz="1000">
                 <a:solidFill>
-                  <a:srgbClr val="0F172A"/>
-                </a:solidFill>
-                <a:latin typeface="Arial"/>
-              </a:defRPr>
-            </a:pPr>
-            <a:r>
-              <a:t>• Invoices arrive separately with no consolidated master billing reference.</a:t>
+                  <a:srgbClr val="F8FAFC"/>
+                </a:solidFill>
+                <a:latin typeface="Arial"/>
+              </a:defRPr>
+            </a:pPr>
+            <a:r>
+              <a:t>• Invoices arrive piecemeal with no single consolidated master ledger.</a:t>
             </a:r>
           </a:p>
         </p:txBody>
@@ -6552,11 +6488,11 @@
             <a:avLst/>
           </a:prstGeom>
           <a:solidFill>
-            <a:srgbClr val="FFFFFF"/>
+            <a:srgbClr val="1E293B"/>
           </a:solidFill>
           <a:ln w="12700">
             <a:solidFill>
-              <a:srgbClr val="E2E8F0"/>
+              <a:srgbClr val="334155"/>
             </a:solidFill>
           </a:ln>
         </p:spPr>
@@ -6579,7 +6515,6 @@
           <a:lstStyle/>
           <a:p>
             <a:pPr algn="ctr"/>
-            <a:endParaRPr/>
           </a:p>
         </p:txBody>
       </p:sp>
@@ -6600,7 +6535,7 @@
           <a:noFill/>
         </p:spPr>
         <p:txBody>
-          <a:bodyPr wrap="square" lIns="0" tIns="0" rIns="0" bIns="0">
+          <a:bodyPr wrap="square" lIns="0" rIns="0" tIns="0" bIns="0">
             <a:spAutoFit/>
           </a:bodyPr>
           <a:lstStyle/>
@@ -6608,7 +6543,7 @@
             <a:pPr>
               <a:defRPr sz="1350" b="1">
                 <a:solidFill>
-                  <a:srgbClr val="7C3AED"/>
+                  <a:srgbClr val="A855F7"/>
                 </a:solidFill>
                 <a:latin typeface="Arial"/>
               </a:defRPr>
@@ -6624,13 +6559,13 @@
               </a:spcBef>
               <a:defRPr sz="1000">
                 <a:solidFill>
-                  <a:srgbClr val="0F172A"/>
-                </a:solidFill>
-                <a:latin typeface="Arial"/>
-              </a:defRPr>
-            </a:pPr>
-            <a:r>
-              <a:t>• Principals and finance heads lack unified visibility over departmental spending.</a:t>
+                  <a:srgbClr val="F8FAFC"/>
+                </a:solidFill>
+                <a:latin typeface="Arial"/>
+              </a:defRPr>
+            </a:pPr>
+            <a:r>
+              <a:t>• Principals and finance lack visibility over real-time departmental spending.</a:t>
             </a:r>
           </a:p>
           <a:p>
@@ -6640,7 +6575,7 @@
               </a:spcBef>
               <a:defRPr sz="1000">
                 <a:solidFill>
-                  <a:srgbClr val="0F172A"/>
+                  <a:srgbClr val="F8FAFC"/>
                 </a:solidFill>
                 <a:latin typeface="Arial"/>
               </a:defRPr>
@@ -6656,13 +6591,13 @@
               </a:spcBef>
               <a:defRPr sz="1000">
                 <a:solidFill>
-                  <a:srgbClr val="0F172A"/>
-                </a:solidFill>
-                <a:latin typeface="Arial"/>
-              </a:defRPr>
-            </a:pPr>
-            <a:r>
-              <a:t>• Zero pre-approval budget checks leading to post-event budget disputes.</a:t>
+                  <a:srgbClr val="F8FAFC"/>
+                </a:solidFill>
+                <a:latin typeface="Arial"/>
+              </a:defRPr>
+            </a:pPr>
+            <a:r>
+              <a:t>• Lack of pre-approval verification leading to post-event budget disputes.</a:t>
             </a:r>
           </a:p>
         </p:txBody>
@@ -6682,11 +6617,11 @@
             <a:avLst/>
           </a:prstGeom>
           <a:solidFill>
-            <a:srgbClr val="FFFFFF"/>
+            <a:srgbClr val="1E293B"/>
           </a:solidFill>
           <a:ln w="12700">
             <a:solidFill>
-              <a:srgbClr val="E2E8F0"/>
+              <a:srgbClr val="334155"/>
             </a:solidFill>
           </a:ln>
         </p:spPr>
@@ -6709,7 +6644,6 @@
           <a:lstStyle/>
           <a:p>
             <a:pPr algn="ctr"/>
-            <a:endParaRPr/>
           </a:p>
         </p:txBody>
       </p:sp>
@@ -6730,7 +6664,7 @@
           <a:noFill/>
         </p:spPr>
         <p:txBody>
-          <a:bodyPr wrap="square" lIns="0" tIns="0" rIns="0" bIns="0">
+          <a:bodyPr wrap="square" lIns="0" rIns="0" tIns="0" bIns="0">
             <a:spAutoFit/>
           </a:bodyPr>
           <a:lstStyle/>
@@ -6738,7 +6672,7 @@
             <a:pPr>
               <a:defRPr sz="1350" b="1">
                 <a:solidFill>
-                  <a:srgbClr val="1E293B"/>
+                  <a:srgbClr val="06B6D4"/>
                 </a:solidFill>
                 <a:latin typeface="Arial"/>
               </a:defRPr>
@@ -6754,13 +6688,13 @@
               </a:spcBef>
               <a:defRPr sz="1000">
                 <a:solidFill>
-                  <a:srgbClr val="0F172A"/>
-                </a:solidFill>
-                <a:latin typeface="Arial"/>
-              </a:defRPr>
-            </a:pPr>
-            <a:r>
-              <a:t>• Finance departments struggle during monthly audit reconciliation.</a:t>
+                  <a:srgbClr val="F8FAFC"/>
+                </a:solidFill>
+                <a:latin typeface="Arial"/>
+              </a:defRPr>
+            </a:pPr>
+            <a:r>
+              <a:t>• Finance departments face significant pain during monthly reconciliation.</a:t>
             </a:r>
           </a:p>
           <a:p>
@@ -6770,13 +6704,13 @@
               </a:spcBef>
               <a:defRPr sz="1000">
                 <a:solidFill>
-                  <a:srgbClr val="0F172A"/>
-                </a:solidFill>
-                <a:latin typeface="Arial"/>
-              </a:defRPr>
-            </a:pPr>
-            <a:r>
-              <a:t>• Vendors wait 30-60 days for payment verification and settlement.</a:t>
+                  <a:srgbClr val="F8FAFC"/>
+                </a:solidFill>
+                <a:latin typeface="Arial"/>
+              </a:defRPr>
+            </a:pPr>
+            <a:r>
+              <a:t>• Vendors wait 30-60 days for voucher matching and bill verification.</a:t>
             </a:r>
           </a:p>
           <a:p>
@@ -6786,13 +6720,13 @@
               </a:spcBef>
               <a:defRPr sz="1000">
                 <a:solidFill>
-                  <a:srgbClr val="0F172A"/>
-                </a:solidFill>
-                <a:latin typeface="Arial"/>
-              </a:defRPr>
-            </a:pPr>
-            <a:r>
-              <a:t>• No immutable timestamped record of who authorized, delivered, and billed each item.</a:t>
+                  <a:srgbClr val="F8FAFC"/>
+                </a:solidFill>
+                <a:latin typeface="Arial"/>
+              </a:defRPr>
+            </a:pPr>
+            <a:r>
+              <a:t>• No immutable timestamped trail of authorizations, deliveries, and claims.</a:t>
             </a:r>
           </a:p>
         </p:txBody>
@@ -6806,7 +6740,7 @@
 </file>
 
 <file path=ppt/slides/slide3.xml><?xml version="1.0" encoding="utf-8"?>
-<p:sld xmlns:a="http://schemas.openxmlformats.org/drawingml/2006/main" xmlns:r="http://schemas.openxmlformats.org/officeDocument/2006/relationships" xmlns:p="http://schemas.openxmlformats.org/presentationml/2006/main">
+<p:sld xmlns:a="http://schemas.openxmlformats.org/drawingml/2006/main" xmlns:p="http://schemas.openxmlformats.org/presentationml/2006/main" xmlns:r="http://schemas.openxmlformats.org/officeDocument/2006/relationships">
   <p:cSld>
     <p:spTree>
       <p:nvGrpSpPr>
@@ -6814,14 +6748,7 @@
         <p:cNvGrpSpPr/>
         <p:nvPr/>
       </p:nvGrpSpPr>
-      <p:grpSpPr>
-        <a:xfrm>
-          <a:off x="0" y="0"/>
-          <a:ext cx="0" cy="0"/>
-          <a:chOff x="0" y="0"/>
-          <a:chExt cx="0" cy="0"/>
-        </a:xfrm>
-      </p:grpSpPr>
+      <p:grpSpPr/>
       <p:sp>
         <p:nvSpPr>
           <p:cNvPr id="2" name="Rectangle 1"/>
@@ -6837,7 +6764,7 @@
             <a:avLst/>
           </a:prstGeom>
           <a:solidFill>
-            <a:srgbClr val="F8FAFC"/>
+            <a:srgbClr val="0F172A"/>
           </a:solidFill>
           <a:ln>
             <a:noFill/>
@@ -6862,7 +6789,6 @@
           <a:lstStyle/>
           <a:p>
             <a:pPr algn="ctr"/>
-            <a:endParaRPr/>
           </a:p>
         </p:txBody>
       </p:sp>
@@ -6883,7 +6809,7 @@
           <a:noFill/>
         </p:spPr>
         <p:txBody>
-          <a:bodyPr wrap="square" lIns="0" tIns="0" rIns="0" bIns="0">
+          <a:bodyPr wrap="square" lIns="0" rIns="0" tIns="0" bIns="0">
             <a:spAutoFit/>
           </a:bodyPr>
           <a:lstStyle/>
@@ -6891,13 +6817,13 @@
             <a:pPr>
               <a:defRPr sz="1000" b="1">
                 <a:solidFill>
-                  <a:srgbClr val="2563EB"/>
-                </a:solidFill>
-                <a:latin typeface="Arial"/>
-              </a:defRPr>
-            </a:pPr>
-            <a:r>
-              <a:t>AHARSETU ENTERPRISE ERP</a:t>
+                  <a:srgbClr val="60A5FA"/>
+                </a:solidFill>
+                <a:latin typeface="Arial"/>
+              </a:defRPr>
+            </a:pPr>
+            <a:r>
+              <a:t>EXECUTIVE SOLUTION</a:t>
             </a:r>
           </a:p>
         </p:txBody>
@@ -6919,7 +6845,7 @@
           <a:noFill/>
         </p:spPr>
         <p:txBody>
-          <a:bodyPr wrap="square" lIns="0" tIns="0" rIns="0" bIns="0">
+          <a:bodyPr wrap="square" lIns="0" rIns="0" tIns="0" bIns="0">
             <a:spAutoFit/>
           </a:bodyPr>
           <a:lstStyle/>
@@ -6927,7 +6853,7 @@
             <a:pPr>
               <a:defRPr sz="2200" b="1">
                 <a:solidFill>
-                  <a:srgbClr val="0F172A"/>
+                  <a:srgbClr val="F8FAFC"/>
                 </a:solidFill>
                 <a:latin typeface="Arial"/>
               </a:defRPr>
@@ -6953,7 +6879,7 @@
             <a:avLst/>
           </a:prstGeom>
           <a:solidFill>
-            <a:srgbClr val="E2E8F0"/>
+            <a:srgbClr val="334155"/>
           </a:solidFill>
           <a:ln>
             <a:noFill/>
@@ -6978,7 +6904,6 @@
           <a:lstStyle/>
           <a:p>
             <a:pPr algn="ctr"/>
-            <a:endParaRPr/>
           </a:p>
         </p:txBody>
       </p:sp>
@@ -6999,7 +6924,7 @@
           <a:noFill/>
         </p:spPr>
         <p:txBody>
-          <a:bodyPr wrap="none" lIns="0" tIns="0" rIns="0" bIns="0">
+          <a:bodyPr wrap="none" lIns="0" rIns="0" tIns="0" bIns="0">
             <a:spAutoFit/>
           </a:bodyPr>
           <a:lstStyle/>
@@ -7007,13 +6932,13 @@
             <a:pPr>
               <a:defRPr sz="900">
                 <a:solidFill>
-                  <a:srgbClr val="64748B"/>
-                </a:solidFill>
-                <a:latin typeface="Arial"/>
-              </a:defRPr>
-            </a:pPr>
-            <a:r>
-              <a:t>AharSetu Enterprise ERP  |  Board Presentation  |  Slide 3 of 14</a:t>
+                  <a:srgbClr val="94A3B8"/>
+                </a:solidFill>
+                <a:latin typeface="Arial"/>
+              </a:defRPr>
+            </a:pPr>
+            <a:r>
+              <a:t>AharSetu Enterprise ERP  |  Board of Directors Presentation  |  Slide 3 of 14</a:t>
             </a:r>
           </a:p>
         </p:txBody>
@@ -7033,11 +6958,11 @@
             <a:avLst/>
           </a:prstGeom>
           <a:solidFill>
-            <a:srgbClr val="FFFFFF"/>
+            <a:srgbClr val="1E293B"/>
           </a:solidFill>
           <a:ln w="12700">
             <a:solidFill>
-              <a:srgbClr val="E2E8F0"/>
+              <a:srgbClr val="334155"/>
             </a:solidFill>
           </a:ln>
         </p:spPr>
@@ -7060,7 +6985,6 @@
           <a:lstStyle/>
           <a:p>
             <a:pPr algn="ctr"/>
-            <a:endParaRPr/>
           </a:p>
         </p:txBody>
       </p:sp>
@@ -7081,7 +7005,7 @@
           <a:noFill/>
         </p:spPr>
         <p:txBody>
-          <a:bodyPr wrap="square" lIns="0" tIns="0" rIns="0" bIns="0">
+          <a:bodyPr wrap="square" lIns="0" rIns="0" tIns="0" bIns="0">
             <a:spAutoFit/>
           </a:bodyPr>
           <a:lstStyle/>
@@ -7089,7 +7013,7 @@
             <a:pPr>
               <a:defRPr sz="1350" b="1">
                 <a:solidFill>
-                  <a:srgbClr val="2563EB"/>
+                  <a:srgbClr val="3B82F6"/>
                 </a:solidFill>
                 <a:latin typeface="Arial"/>
               </a:defRPr>
@@ -7105,13 +7029,13 @@
               </a:spcBef>
               <a:defRPr sz="1000">
                 <a:solidFill>
-                  <a:srgbClr val="0F172A"/>
-                </a:solidFill>
-                <a:latin typeface="Arial"/>
-              </a:defRPr>
-            </a:pPr>
-            <a:r>
-              <a:t>• Single unified cart experience for coordinators.</a:t>
+                  <a:srgbClr val="F8FAFC"/>
+                </a:solidFill>
+                <a:latin typeface="Arial"/>
+              </a:defRPr>
+            </a:pPr>
+            <a:r>
+              <a:t>• Single unified cart experience for event coordinators.</a:t>
             </a:r>
           </a:p>
           <a:p>
@@ -7121,7 +7045,7 @@
               </a:spcBef>
               <a:defRPr sz="1000">
                 <a:solidFill>
-                  <a:srgbClr val="0F172A"/>
+                  <a:srgbClr val="F8FAFC"/>
                 </a:solidFill>
                 <a:latin typeface="Arial"/>
               </a:defRPr>
@@ -7137,13 +7061,13 @@
               </a:spcBef>
               <a:defRPr sz="1000">
                 <a:solidFill>
-                  <a:srgbClr val="0F172A"/>
-                </a:solidFill>
-                <a:latin typeface="Arial"/>
-              </a:defRPr>
-            </a:pPr>
-            <a:r>
-              <a:t>• Master order tracks all vendor sub-orders under one reference.</a:t>
+                  <a:srgbClr val="F8FAFC"/>
+                </a:solidFill>
+                <a:latin typeface="Arial"/>
+              </a:defRPr>
+            </a:pPr>
+            <a:r>
+              <a:t>• Master order tracks all vendor sub-orders under one reference code.</a:t>
             </a:r>
           </a:p>
         </p:txBody>
@@ -7163,11 +7087,11 @@
             <a:avLst/>
           </a:prstGeom>
           <a:solidFill>
-            <a:srgbClr val="FFFFFF"/>
+            <a:srgbClr val="1E293B"/>
           </a:solidFill>
           <a:ln w="12700">
             <a:solidFill>
-              <a:srgbClr val="E2E8F0"/>
+              <a:srgbClr val="334155"/>
             </a:solidFill>
           </a:ln>
         </p:spPr>
@@ -7190,7 +7114,6 @@
           <a:lstStyle/>
           <a:p>
             <a:pPr algn="ctr"/>
-            <a:endParaRPr/>
           </a:p>
         </p:txBody>
       </p:sp>
@@ -7211,7 +7134,7 @@
           <a:noFill/>
         </p:spPr>
         <p:txBody>
-          <a:bodyPr wrap="square" lIns="0" tIns="0" rIns="0" bIns="0">
+          <a:bodyPr wrap="square" lIns="0" rIns="0" tIns="0" bIns="0">
             <a:spAutoFit/>
           </a:bodyPr>
           <a:lstStyle/>
@@ -7235,7 +7158,7 @@
               </a:spcBef>
               <a:defRPr sz="1000">
                 <a:solidFill>
-                  <a:srgbClr val="0F172A"/>
+                  <a:srgbClr val="F8FAFC"/>
                 </a:solidFill>
                 <a:latin typeface="Arial"/>
               </a:defRPr>
@@ -7251,13 +7174,13 @@
               </a:spcBef>
               <a:defRPr sz="1000">
                 <a:solidFill>
-                  <a:srgbClr val="0F172A"/>
-                </a:solidFill>
-                <a:latin typeface="Arial"/>
-              </a:defRPr>
-            </a:pPr>
-            <a:r>
-              <a:t>• Department-level isolation &amp; granular permission boundaries.</a:t>
+                  <a:srgbClr val="F8FAFC"/>
+                </a:solidFill>
+                <a:latin typeface="Arial"/>
+              </a:defRPr>
+            </a:pPr>
+            <a:r>
+              <a:t>• Departmental data isolation &amp; granular permission boundaries.</a:t>
             </a:r>
           </a:p>
           <a:p>
@@ -7267,13 +7190,13 @@
               </a:spcBef>
               <a:defRPr sz="1000">
                 <a:solidFill>
-                  <a:srgbClr val="0F172A"/>
-                </a:solidFill>
-                <a:latin typeface="Arial"/>
-              </a:defRPr>
-            </a:pPr>
-            <a:r>
-              <a:t>• Instant digital review with remarks &amp; rejection transparency.</a:t>
+                  <a:srgbClr val="F8FAFC"/>
+                </a:solidFill>
+                <a:latin typeface="Arial"/>
+              </a:defRPr>
+            </a:pPr>
+            <a:r>
+              <a:t>• Instant digital review with recorded remarks and rejection logs.</a:t>
             </a:r>
           </a:p>
         </p:txBody>
@@ -7293,11 +7216,11 @@
             <a:avLst/>
           </a:prstGeom>
           <a:solidFill>
-            <a:srgbClr val="FFFFFF"/>
+            <a:srgbClr val="1E293B"/>
           </a:solidFill>
           <a:ln w="12700">
             <a:solidFill>
-              <a:srgbClr val="E2E8F0"/>
+              <a:srgbClr val="334155"/>
             </a:solidFill>
           </a:ln>
         </p:spPr>
@@ -7320,7 +7243,6 @@
           <a:lstStyle/>
           <a:p>
             <a:pPr algn="ctr"/>
-            <a:endParaRPr/>
           </a:p>
         </p:txBody>
       </p:sp>
@@ -7341,7 +7263,7 @@
           <a:noFill/>
         </p:spPr>
         <p:txBody>
-          <a:bodyPr wrap="square" lIns="0" tIns="0" rIns="0" bIns="0">
+          <a:bodyPr wrap="square" lIns="0" rIns="0" tIns="0" bIns="0">
             <a:spAutoFit/>
           </a:bodyPr>
           <a:lstStyle/>
@@ -7349,7 +7271,7 @@
             <a:pPr>
               <a:defRPr sz="1350" b="1">
                 <a:solidFill>
-                  <a:srgbClr val="7C3AED"/>
+                  <a:srgbClr val="A855F7"/>
                 </a:solidFill>
                 <a:latin typeface="Arial"/>
               </a:defRPr>
@@ -7365,13 +7287,13 @@
               </a:spcBef>
               <a:defRPr sz="1000">
                 <a:solidFill>
-                  <a:srgbClr val="0F172A"/>
-                </a:solidFill>
-                <a:latin typeface="Arial"/>
-              </a:defRPr>
-            </a:pPr>
-            <a:r>
-              <a:t>• Sub-second WebSocket live updates + 10-second polling fallback.</a:t>
+                  <a:srgbClr val="F8FAFC"/>
+                </a:solidFill>
+                <a:latin typeface="Arial"/>
+              </a:defRPr>
+            </a:pPr>
+            <a:r>
+              <a:t>• Sub-second WebSocket push alerts + 10s resilient polling fallback.</a:t>
             </a:r>
           </a:p>
           <a:p>
@@ -7381,13 +7303,13 @@
               </a:spcBef>
               <a:defRPr sz="1000">
                 <a:solidFill>
-                  <a:srgbClr val="0F172A"/>
-                </a:solidFill>
-                <a:latin typeface="Arial"/>
-              </a:defRPr>
-            </a:pPr>
-            <a:r>
-              <a:t>• Cross-device &amp; cross-tab synchronized status.</a:t>
+                  <a:srgbClr val="F8FAFC"/>
+                </a:solidFill>
+                <a:latin typeface="Arial"/>
+              </a:defRPr>
+            </a:pPr>
+            <a:r>
+              <a:t>• Cross-device and multi-tab live synchronized order states.</a:t>
             </a:r>
           </a:p>
           <a:p>
@@ -7397,7 +7319,7 @@
               </a:spcBef>
               <a:defRPr sz="1000">
                 <a:solidFill>
-                  <a:srgbClr val="0F172A"/>
+                  <a:srgbClr val="F8FAFC"/>
                 </a:solidFill>
                 <a:latin typeface="Arial"/>
               </a:defRPr>
@@ -7417,7 +7339,7 @@
 </file>
 
 <file path=ppt/slides/slide4.xml><?xml version="1.0" encoding="utf-8"?>
-<p:sld xmlns:a="http://schemas.openxmlformats.org/drawingml/2006/main" xmlns:r="http://schemas.openxmlformats.org/officeDocument/2006/relationships" xmlns:p="http://schemas.openxmlformats.org/presentationml/2006/main">
+<p:sld xmlns:a="http://schemas.openxmlformats.org/drawingml/2006/main" xmlns:p="http://schemas.openxmlformats.org/presentationml/2006/main" xmlns:r="http://schemas.openxmlformats.org/officeDocument/2006/relationships">
   <p:cSld>
     <p:spTree>
       <p:nvGrpSpPr>
@@ -7425,14 +7347,7 @@
         <p:cNvGrpSpPr/>
         <p:nvPr/>
       </p:nvGrpSpPr>
-      <p:grpSpPr>
-        <a:xfrm>
-          <a:off x="0" y="0"/>
-          <a:ext cx="0" cy="0"/>
-          <a:chOff x="0" y="0"/>
-          <a:chExt cx="0" cy="0"/>
-        </a:xfrm>
-      </p:grpSpPr>
+      <p:grpSpPr/>
       <p:sp>
         <p:nvSpPr>
           <p:cNvPr id="2" name="Rectangle 1"/>
@@ -7448,7 +7363,7 @@
             <a:avLst/>
           </a:prstGeom>
           <a:solidFill>
-            <a:srgbClr val="F8FAFC"/>
+            <a:srgbClr val="0F172A"/>
           </a:solidFill>
           <a:ln>
             <a:noFill/>
@@ -7473,7 +7388,6 @@
           <a:lstStyle/>
           <a:p>
             <a:pPr algn="ctr"/>
-            <a:endParaRPr/>
           </a:p>
         </p:txBody>
       </p:sp>
@@ -7494,7 +7408,7 @@
           <a:noFill/>
         </p:spPr>
         <p:txBody>
-          <a:bodyPr wrap="square" lIns="0" tIns="0" rIns="0" bIns="0">
+          <a:bodyPr wrap="square" lIns="0" rIns="0" tIns="0" bIns="0">
             <a:spAutoFit/>
           </a:bodyPr>
           <a:lstStyle/>
@@ -7502,7 +7416,7 @@
             <a:pPr>
               <a:defRPr sz="1000" b="1">
                 <a:solidFill>
-                  <a:srgbClr val="2563EB"/>
+                  <a:srgbClr val="60A5FA"/>
                 </a:solidFill>
                 <a:latin typeface="Arial"/>
               </a:defRPr>
@@ -7530,7 +7444,7 @@
           <a:noFill/>
         </p:spPr>
         <p:txBody>
-          <a:bodyPr wrap="square" lIns="0" tIns="0" rIns="0" bIns="0">
+          <a:bodyPr wrap="square" lIns="0" rIns="0" tIns="0" bIns="0">
             <a:spAutoFit/>
           </a:bodyPr>
           <a:lstStyle/>
@@ -7538,7 +7452,7 @@
             <a:pPr>
               <a:defRPr sz="2200" b="1">
                 <a:solidFill>
-                  <a:srgbClr val="0F172A"/>
+                  <a:srgbClr val="F8FAFC"/>
                 </a:solidFill>
                 <a:latin typeface="Arial"/>
               </a:defRPr>
@@ -7564,7 +7478,7 @@
             <a:avLst/>
           </a:prstGeom>
           <a:solidFill>
-            <a:srgbClr val="E2E8F0"/>
+            <a:srgbClr val="334155"/>
           </a:solidFill>
           <a:ln>
             <a:noFill/>
@@ -7589,7 +7503,6 @@
           <a:lstStyle/>
           <a:p>
             <a:pPr algn="ctr"/>
-            <a:endParaRPr/>
           </a:p>
         </p:txBody>
       </p:sp>
@@ -7610,7 +7523,7 @@
           <a:noFill/>
         </p:spPr>
         <p:txBody>
-          <a:bodyPr wrap="none" lIns="0" tIns="0" rIns="0" bIns="0">
+          <a:bodyPr wrap="none" lIns="0" rIns="0" tIns="0" bIns="0">
             <a:spAutoFit/>
           </a:bodyPr>
           <a:lstStyle/>
@@ -7618,13 +7531,13 @@
             <a:pPr>
               <a:defRPr sz="900">
                 <a:solidFill>
-                  <a:srgbClr val="64748B"/>
-                </a:solidFill>
-                <a:latin typeface="Arial"/>
-              </a:defRPr>
-            </a:pPr>
-            <a:r>
-              <a:t>AharSetu Enterprise ERP  |  Board Presentation  |  Slide 4 of 14</a:t>
+                  <a:srgbClr val="94A3B8"/>
+                </a:solidFill>
+                <a:latin typeface="Arial"/>
+              </a:defRPr>
+            </a:pPr>
+            <a:r>
+              <a:t>AharSetu Enterprise ERP  |  Board of Directors Presentation  |  Slide 4 of 14</a:t>
             </a:r>
           </a:p>
         </p:txBody>
@@ -7644,11 +7557,11 @@
             <a:avLst/>
           </a:prstGeom>
           <a:solidFill>
-            <a:srgbClr val="FFFFFF"/>
+            <a:srgbClr val="1E293B"/>
           </a:solidFill>
           <a:ln w="12700">
             <a:solidFill>
-              <a:srgbClr val="E2E8F0"/>
+              <a:srgbClr val="334155"/>
             </a:solidFill>
           </a:ln>
         </p:spPr>
@@ -7671,7 +7584,6 @@
           <a:lstStyle/>
           <a:p>
             <a:pPr algn="ctr"/>
-            <a:endParaRPr/>
           </a:p>
         </p:txBody>
       </p:sp>
@@ -7692,7 +7604,7 @@
           <a:noFill/>
         </p:spPr>
         <p:txBody>
-          <a:bodyPr wrap="square" lIns="0" tIns="0" rIns="0" bIns="0">
+          <a:bodyPr wrap="square" lIns="0" rIns="0" tIns="0" bIns="0">
             <a:spAutoFit/>
           </a:bodyPr>
           <a:lstStyle/>
@@ -7700,7 +7612,7 @@
             <a:pPr>
               <a:defRPr sz="1350" b="1">
                 <a:solidFill>
-                  <a:srgbClr val="2563EB"/>
+                  <a:srgbClr val="3B82F6"/>
                 </a:solidFill>
                 <a:latin typeface="Arial"/>
               </a:defRPr>
@@ -7716,13 +7628,13 @@
               </a:spcBef>
               <a:defRPr sz="1000">
                 <a:solidFill>
-                  <a:srgbClr val="0F172A"/>
-                </a:solidFill>
-                <a:latin typeface="Arial"/>
-              </a:defRPr>
-            </a:pPr>
-            <a:r>
-              <a:t>• Zero-latency optimistic UI updates with localized multi-language i18n (EN, HI, GU).</a:t>
+                  <a:srgbClr val="F8FAFC"/>
+                </a:solidFill>
+                <a:latin typeface="Arial"/>
+              </a:defRPr>
+            </a:pPr>
+            <a:r>
+              <a:t>• Zero-latency optimistic UI with localized multi-language i18n (EN, HI, GU).</a:t>
             </a:r>
           </a:p>
           <a:p>
@@ -7732,13 +7644,13 @@
               </a:spcBef>
               <a:defRPr sz="1000">
                 <a:solidFill>
-                  <a:srgbClr val="0F172A"/>
-                </a:solidFill>
-                <a:latin typeface="Arial"/>
-              </a:defRPr>
-            </a:pPr>
-            <a:r>
-              <a:t>• PWA shell with Web Push notification service worker and mobile responsive design.</a:t>
+                  <a:srgbClr val="F8FAFC"/>
+                </a:solidFill>
+                <a:latin typeface="Arial"/>
+              </a:defRPr>
+            </a:pPr>
+            <a:r>
+              <a:t>• PWA shell with Web Push notification service worker and mobile design.</a:t>
             </a:r>
           </a:p>
         </p:txBody>
@@ -7758,11 +7670,11 @@
             <a:avLst/>
           </a:prstGeom>
           <a:solidFill>
-            <a:srgbClr val="FFFFFF"/>
+            <a:srgbClr val="1E293B"/>
           </a:solidFill>
           <a:ln w="12700">
             <a:solidFill>
-              <a:srgbClr val="E2E8F0"/>
+              <a:srgbClr val="334155"/>
             </a:solidFill>
           </a:ln>
         </p:spPr>
@@ -7785,7 +7697,6 @@
           <a:lstStyle/>
           <a:p>
             <a:pPr algn="ctr"/>
-            <a:endParaRPr/>
           </a:p>
         </p:txBody>
       </p:sp>
@@ -7806,7 +7717,7 @@
           <a:noFill/>
         </p:spPr>
         <p:txBody>
-          <a:bodyPr wrap="square" lIns="0" tIns="0" rIns="0" bIns="0">
+          <a:bodyPr wrap="square" lIns="0" rIns="0" tIns="0" bIns="0">
             <a:spAutoFit/>
           </a:bodyPr>
           <a:lstStyle/>
@@ -7830,13 +7741,13 @@
               </a:spcBef>
               <a:defRPr sz="1000">
                 <a:solidFill>
-                  <a:srgbClr val="0F172A"/>
-                </a:solidFill>
-                <a:latin typeface="Arial"/>
-              </a:defRPr>
-            </a:pPr>
-            <a:r>
-              <a:t>• Stateless JWT authentication with rotating refresh tokens &amp; RBAC security decorators.</a:t>
+                  <a:srgbClr val="F8FAFC"/>
+                </a:solidFill>
+                <a:latin typeface="Arial"/>
+              </a:defRPr>
+            </a:pPr>
+            <a:r>
+              <a:t>• Stateless JWT authentication with rotating tokens &amp; RBAC security decorators.</a:t>
             </a:r>
           </a:p>
           <a:p>
@@ -7846,13 +7757,13 @@
               </a:spcBef>
               <a:defRPr sz="1000">
                 <a:solidFill>
-                  <a:srgbClr val="0F172A"/>
-                </a:solidFill>
-                <a:latin typeface="Arial"/>
-              </a:defRPr>
-            </a:pPr>
-            <a:r>
-              <a:t>• High-throughput REST API v1 endpoints with Pydantic v2 payload validation.</a:t>
+                  <a:srgbClr val="F8FAFC"/>
+                </a:solidFill>
+                <a:latin typeface="Arial"/>
+              </a:defRPr>
+            </a:pPr>
+            <a:r>
+              <a:t>• High-throughput REST API endpoints with Pydantic payload validation.</a:t>
             </a:r>
           </a:p>
         </p:txBody>
@@ -7872,11 +7783,11 @@
             <a:avLst/>
           </a:prstGeom>
           <a:solidFill>
-            <a:srgbClr val="FFFFFF"/>
+            <a:srgbClr val="1E293B"/>
           </a:solidFill>
           <a:ln w="12700">
             <a:solidFill>
-              <a:srgbClr val="E2E8F0"/>
+              <a:srgbClr val="334155"/>
             </a:solidFill>
           </a:ln>
         </p:spPr>
@@ -7899,7 +7810,6 @@
           <a:lstStyle/>
           <a:p>
             <a:pPr algn="ctr"/>
-            <a:endParaRPr/>
           </a:p>
         </p:txBody>
       </p:sp>
@@ -7920,7 +7830,7 @@
           <a:noFill/>
         </p:spPr>
         <p:txBody>
-          <a:bodyPr wrap="square" lIns="0" tIns="0" rIns="0" bIns="0">
+          <a:bodyPr wrap="square" lIns="0" rIns="0" tIns="0" bIns="0">
             <a:spAutoFit/>
           </a:bodyPr>
           <a:lstStyle/>
@@ -7928,7 +7838,7 @@
             <a:pPr>
               <a:defRPr sz="1350" b="1">
                 <a:solidFill>
-                  <a:srgbClr val="7C3AED"/>
+                  <a:srgbClr val="A855F7"/>
                 </a:solidFill>
                 <a:latin typeface="Arial"/>
               </a:defRPr>
@@ -7944,7 +7854,7 @@
               </a:spcBef>
               <a:defRPr sz="1000">
                 <a:solidFill>
-                  <a:srgbClr val="0F172A"/>
+                  <a:srgbClr val="F8FAFC"/>
                 </a:solidFill>
                 <a:latin typeface="Arial"/>
               </a:defRPr>
@@ -7960,13 +7870,13 @@
               </a:spcBef>
               <a:defRPr sz="1000">
                 <a:solidFill>
-                  <a:srgbClr val="0F172A"/>
-                </a:solidFill>
-                <a:latin typeface="Arial"/>
-              </a:defRPr>
-            </a:pPr>
-            <a:r>
-              <a:t>• Immutable audit logs, real-time WebSocket event broadcaster, and automated seeders.</a:t>
+                  <a:srgbClr val="F8FAFC"/>
+                </a:solidFill>
+                <a:latin typeface="Arial"/>
+              </a:defRPr>
+            </a:pPr>
+            <a:r>
+              <a:t>• Immutable audit logs, real-time WebSocket broadcaster, and automated seeders.</a:t>
             </a:r>
           </a:p>
         </p:txBody>
@@ -7986,11 +7896,11 @@
             <a:avLst/>
           </a:prstGeom>
           <a:solidFill>
-            <a:srgbClr val="F1F5F9"/>
+            <a:srgbClr val="182235"/>
           </a:solidFill>
           <a:ln w="19050">
             <a:solidFill>
-              <a:srgbClr val="BFDBFE"/>
+              <a:srgbClr val="60A5FA"/>
             </a:solidFill>
           </a:ln>
         </p:spPr>
@@ -8013,7 +7923,6 @@
           <a:lstStyle/>
           <a:p>
             <a:pPr algn="ctr"/>
-            <a:endParaRPr/>
           </a:p>
         </p:txBody>
       </p:sp>
@@ -8034,7 +7943,7 @@
           <a:noFill/>
         </p:spPr>
         <p:txBody>
-          <a:bodyPr wrap="square" lIns="0" tIns="0" rIns="0" bIns="0">
+          <a:bodyPr wrap="square" lIns="0" rIns="0" tIns="0" bIns="0">
             <a:spAutoFit/>
           </a:bodyPr>
           <a:lstStyle/>
@@ -8042,7 +7951,7 @@
             <a:pPr algn="ctr">
               <a:defRPr sz="1200" b="1">
                 <a:solidFill>
-                  <a:srgbClr val="2563EB"/>
+                  <a:srgbClr val="60A5FA"/>
                 </a:solidFill>
                 <a:latin typeface="Arial"/>
               </a:defRPr>
@@ -8055,20 +7964,20 @@
             <a:pPr algn="ctr">
               <a:defRPr sz="950">
                 <a:solidFill>
-                  <a:srgbClr val="64748B"/>
-                </a:solidFill>
-                <a:latin typeface="Arial"/>
-              </a:defRPr>
-            </a:pPr>
-            <a:r>
-              <a:t>Insert Architecture / Tech Stack Diagram</a:t>
+                  <a:srgbClr val="94A3B8"/>
+                </a:solidFill>
+                <a:latin typeface="Arial"/>
+              </a:defRPr>
+            </a:pPr>
+            <a:r>
+              <a:t>Insert System Architecture Diagram Here</a:t>
             </a:r>
           </a:p>
           <a:p>
             <a:pPr algn="ctr">
               <a:defRPr sz="850" i="1">
                 <a:solidFill>
-                  <a:srgbClr val="64748B"/>
+                  <a:srgbClr val="94A3B8"/>
                 </a:solidFill>
                 <a:latin typeface="Arial"/>
               </a:defRPr>
@@ -8088,7 +7997,7 @@
 </file>
 
 <file path=ppt/slides/slide5.xml><?xml version="1.0" encoding="utf-8"?>
-<p:sld xmlns:a="http://schemas.openxmlformats.org/drawingml/2006/main" xmlns:r="http://schemas.openxmlformats.org/officeDocument/2006/relationships" xmlns:p="http://schemas.openxmlformats.org/presentationml/2006/main">
+<p:sld xmlns:a="http://schemas.openxmlformats.org/drawingml/2006/main" xmlns:p="http://schemas.openxmlformats.org/presentationml/2006/main" xmlns:r="http://schemas.openxmlformats.org/officeDocument/2006/relationships">
   <p:cSld>
     <p:spTree>
       <p:nvGrpSpPr>
@@ -8096,14 +8005,7 @@
         <p:cNvGrpSpPr/>
         <p:nvPr/>
       </p:nvGrpSpPr>
-      <p:grpSpPr>
-        <a:xfrm>
-          <a:off x="0" y="0"/>
-          <a:ext cx="0" cy="0"/>
-          <a:chOff x="0" y="0"/>
-          <a:chExt cx="0" cy="0"/>
-        </a:xfrm>
-      </p:grpSpPr>
+      <p:grpSpPr/>
       <p:sp>
         <p:nvSpPr>
           <p:cNvPr id="2" name="Rectangle 1"/>
@@ -8119,7 +8021,7 @@
             <a:avLst/>
           </a:prstGeom>
           <a:solidFill>
-            <a:srgbClr val="F8FAFC"/>
+            <a:srgbClr val="0F172A"/>
           </a:solidFill>
           <a:ln>
             <a:noFill/>
@@ -8144,7 +8046,6 @@
           <a:lstStyle/>
           <a:p>
             <a:pPr algn="ctr"/>
-            <a:endParaRPr/>
           </a:p>
         </p:txBody>
       </p:sp>
@@ -8165,7 +8066,7 @@
           <a:noFill/>
         </p:spPr>
         <p:txBody>
-          <a:bodyPr wrap="square" lIns="0" tIns="0" rIns="0" bIns="0">
+          <a:bodyPr wrap="square" lIns="0" rIns="0" tIns="0" bIns="0">
             <a:spAutoFit/>
           </a:bodyPr>
           <a:lstStyle/>
@@ -8173,13 +8074,13 @@
             <a:pPr>
               <a:defRPr sz="1000" b="1">
                 <a:solidFill>
-                  <a:srgbClr val="2563EB"/>
-                </a:solidFill>
-                <a:latin typeface="Arial"/>
-              </a:defRPr>
-            </a:pPr>
-            <a:r>
-              <a:t>GOVERNANCE &amp; WORKFLOW</a:t>
+                  <a:srgbClr val="60A5FA"/>
+                </a:solidFill>
+                <a:latin typeface="Arial"/>
+              </a:defRPr>
+            </a:pPr>
+            <a:r>
+              <a:t>ORDER LIFECYCLE</a:t>
             </a:r>
           </a:p>
         </p:txBody>
@@ -8201,7 +8102,7 @@
           <a:noFill/>
         </p:spPr>
         <p:txBody>
-          <a:bodyPr wrap="square" lIns="0" tIns="0" rIns="0" bIns="0">
+          <a:bodyPr wrap="square" lIns="0" rIns="0" tIns="0" bIns="0">
             <a:spAutoFit/>
           </a:bodyPr>
           <a:lstStyle/>
@@ -8209,13 +8110,13 @@
             <a:pPr>
               <a:defRPr sz="2200" b="1">
                 <a:solidFill>
-                  <a:srgbClr val="0F172A"/>
-                </a:solidFill>
-                <a:latin typeface="Arial"/>
-              </a:defRPr>
-            </a:pPr>
-            <a:r>
-              <a:t>Institutional Workflow &amp; Role-Based Access Control</a:t>
+                  <a:srgbClr val="F8FAFC"/>
+                </a:solidFill>
+                <a:latin typeface="Arial"/>
+              </a:defRPr>
+            </a:pPr>
+            <a:r>
+              <a:t>End-to-End Procurement &amp; Approval Workflow</a:t>
             </a:r>
           </a:p>
         </p:txBody>
@@ -8235,7 +8136,7 @@
             <a:avLst/>
           </a:prstGeom>
           <a:solidFill>
-            <a:srgbClr val="E2E8F0"/>
+            <a:srgbClr val="334155"/>
           </a:solidFill>
           <a:ln>
             <a:noFill/>
@@ -8260,7 +8161,6 @@
           <a:lstStyle/>
           <a:p>
             <a:pPr algn="ctr"/>
-            <a:endParaRPr/>
           </a:p>
         </p:txBody>
       </p:sp>
@@ -8281,7 +8181,7 @@
           <a:noFill/>
         </p:spPr>
         <p:txBody>
-          <a:bodyPr wrap="none" lIns="0" tIns="0" rIns="0" bIns="0">
+          <a:bodyPr wrap="none" lIns="0" rIns="0" tIns="0" bIns="0">
             <a:spAutoFit/>
           </a:bodyPr>
           <a:lstStyle/>
@@ -8289,13 +8189,13 @@
             <a:pPr>
               <a:defRPr sz="900">
                 <a:solidFill>
-                  <a:srgbClr val="64748B"/>
-                </a:solidFill>
-                <a:latin typeface="Arial"/>
-              </a:defRPr>
-            </a:pPr>
-            <a:r>
-              <a:t>AharSetu Enterprise ERP  |  Board Presentation  |  Slide 5 of 14</a:t>
+                  <a:srgbClr val="94A3B8"/>
+                </a:solidFill>
+                <a:latin typeface="Arial"/>
+              </a:defRPr>
+            </a:pPr>
+            <a:r>
+              <a:t>AharSetu Enterprise ERP  |  Board of Directors Presentation  |  Slide 5 of 14</a:t>
             </a:r>
           </a:p>
         </p:txBody>
@@ -8315,11 +8215,11 @@
             <a:avLst/>
           </a:prstGeom>
           <a:solidFill>
-            <a:srgbClr val="FFFFFF"/>
+            <a:srgbClr val="1E293B"/>
           </a:solidFill>
-          <a:ln w="19050">
+          <a:ln>
             <a:solidFill>
-              <a:srgbClr val="2563EB"/>
+              <a:srgbClr val="334155"/>
             </a:solidFill>
           </a:ln>
         </p:spPr>
@@ -8342,83 +8242,28 @@
           <a:lstStyle/>
           <a:p>
             <a:pPr algn="ctr"/>
-            <a:endParaRPr/>
-          </a:p>
-        </p:txBody>
-      </p:sp>
-      <p:sp>
-        <p:nvSpPr>
-          <p:cNvPr id="8" name="TextBox 7"/>
-          <p:cNvSpPr txBox="1"/>
+          </a:p>
+        </p:txBody>
+      </p:sp>
+      <p:sp>
+        <p:nvSpPr>
+          <p:cNvPr id="8" name="Rounded Rectangle 7"/>
+          <p:cNvSpPr/>
           <p:nvPr/>
         </p:nvSpPr>
         <p:spPr>
           <a:xfrm>
             <a:off x="868680" y="1645920"/>
-            <a:ext cx="1783080" cy="4114800"/>
-          </a:xfrm>
-          <a:prstGeom prst="rect">
-            <a:avLst/>
-          </a:prstGeom>
-          <a:noFill/>
-        </p:spPr>
-        <p:txBody>
-          <a:bodyPr wrap="square">
-            <a:spAutoFit/>
-          </a:bodyPr>
-          <a:lstStyle/>
-          <a:p>
-            <a:pPr>
-              <a:defRPr sz="1300" b="1">
-                <a:solidFill>
-                  <a:srgbClr val="2563EB"/>
-                </a:solidFill>
-                <a:latin typeface="Arial"/>
-              </a:defRPr>
-            </a:pPr>
-            <a:r>
-              <a:t>1. Coordinator</a:t>
-            </a:r>
-          </a:p>
-          <a:p>
-            <a:pPr>
-              <a:spcBef>
-                <a:spcPts val="1000"/>
-              </a:spcBef>
-              <a:defRPr sz="1000">
-                <a:solidFill>
-                  <a:srgbClr val="0F172A"/>
-                </a:solidFill>
-                <a:latin typeface="Arial"/>
-              </a:defRPr>
-            </a:pPr>
-            <a:r>
-              <a:t>Drafts requisitions, selects live menu items, submits to Principal.</a:t>
-            </a:r>
-          </a:p>
-        </p:txBody>
-      </p:sp>
-      <p:sp>
-        <p:nvSpPr>
-          <p:cNvPr id="9" name="Rounded Rectangle 8"/>
-          <p:cNvSpPr/>
-          <p:nvPr/>
-        </p:nvSpPr>
-        <p:spPr>
-          <a:xfrm>
-            <a:off x="2907791" y="1463040"/>
-            <a:ext cx="2057400" cy="4572000"/>
+            <a:ext cx="1783080" cy="411480"/>
           </a:xfrm>
           <a:prstGeom prst="roundRect">
             <a:avLst/>
           </a:prstGeom>
           <a:solidFill>
-            <a:srgbClr val="FFFFFF"/>
+            <a:srgbClr val="3B82F6"/>
           </a:solidFill>
-          <a:ln w="19050">
-            <a:solidFill>
-              <a:srgbClr val="0EA5E9"/>
-            </a:solidFill>
+          <a:ln>
+            <a:noFill/>
           </a:ln>
         </p:spPr>
         <p:style>
@@ -8439,21 +8284,29 @@
           <a:bodyPr rtlCol="0" anchor="ctr"/>
           <a:lstStyle/>
           <a:p>
-            <a:pPr algn="ctr"/>
-            <a:endParaRPr/>
-          </a:p>
-        </p:txBody>
-      </p:sp>
-      <p:sp>
-        <p:nvSpPr>
-          <p:cNvPr id="10" name="TextBox 9"/>
+            <a:pPr algn="ctr">
+              <a:defRPr sz="1000" b="1">
+                <a:solidFill>
+                  <a:srgbClr val="FFFFFF"/>
+                </a:solidFill>
+              </a:defRPr>
+            </a:pPr>
+            <a:r>
+              <a:t>STEP 1</a:t>
+            </a:r>
+          </a:p>
+        </p:txBody>
+      </p:sp>
+      <p:sp>
+        <p:nvSpPr>
+          <p:cNvPr id="9" name="TextBox 8"/>
           <p:cNvSpPr txBox="1"/>
           <p:nvPr/>
         </p:nvSpPr>
         <p:spPr>
           <a:xfrm>
-            <a:off x="3044951" y="1645920"/>
-            <a:ext cx="1783080" cy="4114800"/>
+            <a:off x="868680" y="2194560"/>
+            <a:ext cx="1783080" cy="3657600"/>
           </a:xfrm>
           <a:prstGeom prst="rect">
             <a:avLst/>
@@ -8467,56 +8320,52 @@
           <a:lstStyle/>
           <a:p>
             <a:pPr>
-              <a:defRPr sz="1300" b="1">
-                <a:solidFill>
-                  <a:srgbClr val="0EA5E9"/>
-                </a:solidFill>
-                <a:latin typeface="Arial"/>
-              </a:defRPr>
-            </a:pPr>
-            <a:r>
-              <a:t>2. Principal</a:t>
+              <a:defRPr sz="1200" b="1">
+                <a:solidFill>
+                  <a:srgbClr val="F8FAFC"/>
+                </a:solidFill>
+              </a:defRPr>
+            </a:pPr>
+            <a:r>
+              <a:t>1. Coordinator</a:t>
             </a:r>
           </a:p>
           <a:p>
             <a:pPr>
               <a:spcBef>
-                <a:spcPts val="1000"/>
+                <a:spcPts val="800"/>
               </a:spcBef>
-              <a:defRPr sz="1000">
-                <a:solidFill>
-                  <a:srgbClr val="0F172A"/>
-                </a:solidFill>
-                <a:latin typeface="Arial"/>
-              </a:defRPr>
-            </a:pPr>
-            <a:r>
-              <a:t>Reviews departmental budget, approves or rejects with official remarks.</a:t>
-            </a:r>
-          </a:p>
-        </p:txBody>
-      </p:sp>
-      <p:sp>
-        <p:nvSpPr>
-          <p:cNvPr id="11" name="Rounded Rectangle 10"/>
+              <a:defRPr sz="950">
+                <a:solidFill>
+                  <a:srgbClr val="94A3B8"/>
+                </a:solidFill>
+              </a:defRPr>
+            </a:pPr>
+            <a:r>
+              <a:t>Drafts requisitions, selects live menu items, submits to Principal.</a:t>
+            </a:r>
+          </a:p>
+        </p:txBody>
+      </p:sp>
+      <p:sp>
+        <p:nvSpPr>
+          <p:cNvPr id="10" name="Right Arrow 9"/>
           <p:cNvSpPr/>
           <p:nvPr/>
         </p:nvSpPr>
         <p:spPr>
           <a:xfrm>
-            <a:off x="5084064" y="1463040"/>
-            <a:ext cx="2057400" cy="4572000"/>
-          </a:xfrm>
-          <a:prstGeom prst="roundRect">
+            <a:off x="2816351" y="3566160"/>
+            <a:ext cx="146304" cy="219456"/>
+          </a:xfrm>
+          <a:prstGeom prst="rightArrow">
             <a:avLst/>
           </a:prstGeom>
           <a:solidFill>
-            <a:srgbClr val="FFFFFF"/>
+            <a:srgbClr val="60A5FA"/>
           </a:solidFill>
-          <a:ln w="19050">
-            <a:solidFill>
-              <a:srgbClr val="7C3AED"/>
-            </a:solidFill>
+          <a:ln>
+            <a:noFill/>
           </a:ln>
         </p:spPr>
         <p:style>
@@ -8538,82 +8387,29 @@
           <a:lstStyle/>
           <a:p>
             <a:pPr algn="ctr"/>
-            <a:endParaRPr/>
-          </a:p>
-        </p:txBody>
-      </p:sp>
-      <p:sp>
-        <p:nvSpPr>
-          <p:cNvPr id="12" name="TextBox 11"/>
-          <p:cNvSpPr txBox="1"/>
-          <p:nvPr/>
-        </p:nvSpPr>
-        <p:spPr>
-          <a:xfrm>
-            <a:off x="5221224" y="1645920"/>
-            <a:ext cx="1783080" cy="4114800"/>
-          </a:xfrm>
-          <a:prstGeom prst="rect">
-            <a:avLst/>
-          </a:prstGeom>
-          <a:noFill/>
-        </p:spPr>
-        <p:txBody>
-          <a:bodyPr wrap="square">
-            <a:spAutoFit/>
-          </a:bodyPr>
-          <a:lstStyle/>
-          <a:p>
-            <a:pPr>
-              <a:defRPr sz="1300" b="1">
-                <a:solidFill>
-                  <a:srgbClr val="7C3AED"/>
-                </a:solidFill>
-                <a:latin typeface="Arial"/>
-              </a:defRPr>
-            </a:pPr>
-            <a:r>
-              <a:t>3. DCR (Discretionary)</a:t>
-            </a:r>
-          </a:p>
-          <a:p>
-            <a:pPr>
-              <a:spcBef>
-                <a:spcPts val="1000"/>
-              </a:spcBef>
-              <a:defRPr sz="1000">
-                <a:solidFill>
-                  <a:srgbClr val="0F172A"/>
-                </a:solidFill>
-                <a:latin typeface="Arial"/>
-              </a:defRPr>
-            </a:pPr>
-            <a:r>
-              <a:t>Verifies institutional expense limits and forwards to canteen vendors.</a:t>
-            </a:r>
-          </a:p>
-        </p:txBody>
-      </p:sp>
-      <p:sp>
-        <p:nvSpPr>
-          <p:cNvPr id="13" name="Rounded Rectangle 12"/>
+          </a:p>
+        </p:txBody>
+      </p:sp>
+      <p:sp>
+        <p:nvSpPr>
+          <p:cNvPr id="11" name="Rounded Rectangle 10"/>
           <p:cNvSpPr/>
           <p:nvPr/>
         </p:nvSpPr>
         <p:spPr>
           <a:xfrm>
-            <a:off x="7260336" y="1463040"/>
+            <a:off x="2907791" y="1463040"/>
             <a:ext cx="2057400" cy="4572000"/>
           </a:xfrm>
           <a:prstGeom prst="roundRect">
             <a:avLst/>
           </a:prstGeom>
           <a:solidFill>
-            <a:srgbClr val="FFFFFF"/>
+            <a:srgbClr val="1E293B"/>
           </a:solidFill>
-          <a:ln w="19050">
+          <a:ln>
             <a:solidFill>
-              <a:srgbClr val="F59E0B"/>
+              <a:srgbClr val="334155"/>
             </a:solidFill>
           </a:ln>
         </p:spPr>
@@ -8636,83 +8432,28 @@
           <a:lstStyle/>
           <a:p>
             <a:pPr algn="ctr"/>
-            <a:endParaRPr/>
-          </a:p>
-        </p:txBody>
-      </p:sp>
-      <p:sp>
-        <p:nvSpPr>
-          <p:cNvPr id="14" name="TextBox 13"/>
-          <p:cNvSpPr txBox="1"/>
-          <p:nvPr/>
-        </p:nvSpPr>
-        <p:spPr>
-          <a:xfrm>
-            <a:off x="7397496" y="1645920"/>
-            <a:ext cx="1783080" cy="4114800"/>
-          </a:xfrm>
-          <a:prstGeom prst="rect">
-            <a:avLst/>
-          </a:prstGeom>
-          <a:noFill/>
-        </p:spPr>
-        <p:txBody>
-          <a:bodyPr wrap="square">
-            <a:spAutoFit/>
-          </a:bodyPr>
-          <a:lstStyle/>
-          <a:p>
-            <a:pPr>
-              <a:defRPr sz="1300" b="1">
-                <a:solidFill>
-                  <a:srgbClr val="F59E0B"/>
-                </a:solidFill>
-                <a:latin typeface="Arial"/>
-              </a:defRPr>
-            </a:pPr>
-            <a:r>
-              <a:t>4. Canteen Vendor</a:t>
-            </a:r>
-          </a:p>
-          <a:p>
-            <a:pPr>
-              <a:spcBef>
-                <a:spcPts val="1000"/>
-              </a:spcBef>
-              <a:defRPr sz="1000">
-                <a:solidFill>
-                  <a:srgbClr val="0F172A"/>
-                </a:solidFill>
-                <a:latin typeface="Arial"/>
-              </a:defRPr>
-            </a:pPr>
-            <a:r>
-              <a:t>Confirms pricing, prepares items, requests modifications if out of stock.</a:t>
-            </a:r>
-          </a:p>
-        </p:txBody>
-      </p:sp>
-      <p:sp>
-        <p:nvSpPr>
-          <p:cNvPr id="15" name="Rounded Rectangle 14"/>
+          </a:p>
+        </p:txBody>
+      </p:sp>
+      <p:sp>
+        <p:nvSpPr>
+          <p:cNvPr id="12" name="Rounded Rectangle 11"/>
           <p:cNvSpPr/>
           <p:nvPr/>
         </p:nvSpPr>
         <p:spPr>
           <a:xfrm>
-            <a:off x="9436608" y="1463040"/>
-            <a:ext cx="2057400" cy="4572000"/>
+            <a:off x="3044951" y="1645920"/>
+            <a:ext cx="1783080" cy="411480"/>
           </a:xfrm>
           <a:prstGeom prst="roundRect">
             <a:avLst/>
           </a:prstGeom>
           <a:solidFill>
-            <a:srgbClr val="FFFFFF"/>
+            <a:srgbClr val="06B6D4"/>
           </a:solidFill>
-          <a:ln w="19050">
-            <a:solidFill>
-              <a:srgbClr val="10B981"/>
-            </a:solidFill>
+          <a:ln>
+            <a:noFill/>
           </a:ln>
         </p:spPr>
         <p:style>
@@ -8733,21 +8474,29 @@
           <a:bodyPr rtlCol="0" anchor="ctr"/>
           <a:lstStyle/>
           <a:p>
-            <a:pPr algn="ctr"/>
-            <a:endParaRPr/>
-          </a:p>
-        </p:txBody>
-      </p:sp>
-      <p:sp>
-        <p:nvSpPr>
-          <p:cNvPr id="16" name="TextBox 15"/>
+            <a:pPr algn="ctr">
+              <a:defRPr sz="1000" b="1">
+                <a:solidFill>
+                  <a:srgbClr val="FFFFFF"/>
+                </a:solidFill>
+              </a:defRPr>
+            </a:pPr>
+            <a:r>
+              <a:t>STEP 2</a:t>
+            </a:r>
+          </a:p>
+        </p:txBody>
+      </p:sp>
+      <p:sp>
+        <p:nvSpPr>
+          <p:cNvPr id="13" name="TextBox 12"/>
           <p:cNvSpPr txBox="1"/>
           <p:nvPr/>
         </p:nvSpPr>
         <p:spPr>
           <a:xfrm>
-            <a:off x="9573768" y="1645920"/>
-            <a:ext cx="1783080" cy="4114800"/>
+            <a:off x="3044951" y="2194560"/>
+            <a:ext cx="1783080" cy="3657600"/>
           </a:xfrm>
           <a:prstGeom prst="rect">
             <a:avLst/>
@@ -8761,31 +8510,599 @@
           <a:lstStyle/>
           <a:p>
             <a:pPr>
-              <a:defRPr sz="1300" b="1">
-                <a:solidFill>
-                  <a:srgbClr val="10B981"/>
-                </a:solidFill>
-                <a:latin typeface="Arial"/>
-              </a:defRPr>
-            </a:pPr>
-            <a:r>
-              <a:t>5. Institutional Admin</a:t>
+              <a:defRPr sz="1200" b="1">
+                <a:solidFill>
+                  <a:srgbClr val="F8FAFC"/>
+                </a:solidFill>
+              </a:defRPr>
+            </a:pPr>
+            <a:r>
+              <a:t>2. Principal</a:t>
             </a:r>
           </a:p>
           <a:p>
             <a:pPr>
               <a:spcBef>
-                <a:spcPts val="1000"/>
+                <a:spcPts val="800"/>
               </a:spcBef>
-              <a:defRPr sz="1000">
-                <a:solidFill>
-                  <a:srgbClr val="0F172A"/>
-                </a:solidFill>
-                <a:latin typeface="Arial"/>
-              </a:defRPr>
-            </a:pPr>
-            <a:r>
-              <a:t>Finalizes order, generates verified tax sub-invoices &amp; audit logs.</a:t>
+              <a:defRPr sz="950">
+                <a:solidFill>
+                  <a:srgbClr val="94A3B8"/>
+                </a:solidFill>
+              </a:defRPr>
+            </a:pPr>
+            <a:r>
+              <a:t>Reviews departmental budget, approves or rejects with official remarks.</a:t>
+            </a:r>
+          </a:p>
+        </p:txBody>
+      </p:sp>
+      <p:sp>
+        <p:nvSpPr>
+          <p:cNvPr id="14" name="Right Arrow 13"/>
+          <p:cNvSpPr/>
+          <p:nvPr/>
+        </p:nvSpPr>
+        <p:spPr>
+          <a:xfrm>
+            <a:off x="4992622" y="3566160"/>
+            <a:ext cx="146304" cy="219456"/>
+          </a:xfrm>
+          <a:prstGeom prst="rightArrow">
+            <a:avLst/>
+          </a:prstGeom>
+          <a:solidFill>
+            <a:srgbClr val="60A5FA"/>
+          </a:solidFill>
+          <a:ln>
+            <a:noFill/>
+          </a:ln>
+        </p:spPr>
+        <p:style>
+          <a:lnRef idx="1">
+            <a:schemeClr val="accent1"/>
+          </a:lnRef>
+          <a:fillRef idx="3">
+            <a:schemeClr val="accent1"/>
+          </a:fillRef>
+          <a:effectRef idx="2">
+            <a:schemeClr val="accent1"/>
+          </a:effectRef>
+          <a:fontRef idx="minor">
+            <a:schemeClr val="lt1"/>
+          </a:fontRef>
+        </p:style>
+        <p:txBody>
+          <a:bodyPr rtlCol="0" anchor="ctr"/>
+          <a:lstStyle/>
+          <a:p>
+            <a:pPr algn="ctr"/>
+          </a:p>
+        </p:txBody>
+      </p:sp>
+      <p:sp>
+        <p:nvSpPr>
+          <p:cNvPr id="15" name="Rounded Rectangle 14"/>
+          <p:cNvSpPr/>
+          <p:nvPr/>
+        </p:nvSpPr>
+        <p:spPr>
+          <a:xfrm>
+            <a:off x="5084064" y="1463040"/>
+            <a:ext cx="2057400" cy="4572000"/>
+          </a:xfrm>
+          <a:prstGeom prst="roundRect">
+            <a:avLst/>
+          </a:prstGeom>
+          <a:solidFill>
+            <a:srgbClr val="1E293B"/>
+          </a:solidFill>
+          <a:ln>
+            <a:solidFill>
+              <a:srgbClr val="334155"/>
+            </a:solidFill>
+          </a:ln>
+        </p:spPr>
+        <p:style>
+          <a:lnRef idx="1">
+            <a:schemeClr val="accent1"/>
+          </a:lnRef>
+          <a:fillRef idx="3">
+            <a:schemeClr val="accent1"/>
+          </a:fillRef>
+          <a:effectRef idx="2">
+            <a:schemeClr val="accent1"/>
+          </a:effectRef>
+          <a:fontRef idx="minor">
+            <a:schemeClr val="lt1"/>
+          </a:fontRef>
+        </p:style>
+        <p:txBody>
+          <a:bodyPr rtlCol="0" anchor="ctr"/>
+          <a:lstStyle/>
+          <a:p>
+            <a:pPr algn="ctr"/>
+          </a:p>
+        </p:txBody>
+      </p:sp>
+      <p:sp>
+        <p:nvSpPr>
+          <p:cNvPr id="16" name="Rounded Rectangle 15"/>
+          <p:cNvSpPr/>
+          <p:nvPr/>
+        </p:nvSpPr>
+        <p:spPr>
+          <a:xfrm>
+            <a:off x="5221224" y="1645920"/>
+            <a:ext cx="1783080" cy="411480"/>
+          </a:xfrm>
+          <a:prstGeom prst="roundRect">
+            <a:avLst/>
+          </a:prstGeom>
+          <a:solidFill>
+            <a:srgbClr val="A855F7"/>
+          </a:solidFill>
+          <a:ln>
+            <a:noFill/>
+          </a:ln>
+        </p:spPr>
+        <p:style>
+          <a:lnRef idx="1">
+            <a:schemeClr val="accent1"/>
+          </a:lnRef>
+          <a:fillRef idx="3">
+            <a:schemeClr val="accent1"/>
+          </a:fillRef>
+          <a:effectRef idx="2">
+            <a:schemeClr val="accent1"/>
+          </a:effectRef>
+          <a:fontRef idx="minor">
+            <a:schemeClr val="lt1"/>
+          </a:fontRef>
+        </p:style>
+        <p:txBody>
+          <a:bodyPr rtlCol="0" anchor="ctr"/>
+          <a:lstStyle/>
+          <a:p>
+            <a:pPr algn="ctr">
+              <a:defRPr sz="1000" b="1">
+                <a:solidFill>
+                  <a:srgbClr val="FFFFFF"/>
+                </a:solidFill>
+              </a:defRPr>
+            </a:pPr>
+            <a:r>
+              <a:t>STEP 3</a:t>
+            </a:r>
+          </a:p>
+        </p:txBody>
+      </p:sp>
+      <p:sp>
+        <p:nvSpPr>
+          <p:cNvPr id="17" name="TextBox 16"/>
+          <p:cNvSpPr txBox="1"/>
+          <p:nvPr/>
+        </p:nvSpPr>
+        <p:spPr>
+          <a:xfrm>
+            <a:off x="5221224" y="2194560"/>
+            <a:ext cx="1783080" cy="3657600"/>
+          </a:xfrm>
+          <a:prstGeom prst="rect">
+            <a:avLst/>
+          </a:prstGeom>
+          <a:noFill/>
+        </p:spPr>
+        <p:txBody>
+          <a:bodyPr wrap="square">
+            <a:spAutoFit/>
+          </a:bodyPr>
+          <a:lstStyle/>
+          <a:p>
+            <a:pPr>
+              <a:defRPr sz="1200" b="1">
+                <a:solidFill>
+                  <a:srgbClr val="F8FAFC"/>
+                </a:solidFill>
+              </a:defRPr>
+            </a:pPr>
+            <a:r>
+              <a:t>3. DCR (Discretionary)</a:t>
+            </a:r>
+          </a:p>
+          <a:p>
+            <a:pPr>
+              <a:spcBef>
+                <a:spcPts val="800"/>
+              </a:spcBef>
+              <a:defRPr sz="950">
+                <a:solidFill>
+                  <a:srgbClr val="94A3B8"/>
+                </a:solidFill>
+              </a:defRPr>
+            </a:pPr>
+            <a:r>
+              <a:t>Verifies institutional expense limits and forwards to canteen vendors.</a:t>
+            </a:r>
+          </a:p>
+        </p:txBody>
+      </p:sp>
+      <p:sp>
+        <p:nvSpPr>
+          <p:cNvPr id="18" name="Right Arrow 17"/>
+          <p:cNvSpPr/>
+          <p:nvPr/>
+        </p:nvSpPr>
+        <p:spPr>
+          <a:xfrm>
+            <a:off x="7168895" y="3566160"/>
+            <a:ext cx="146304" cy="219456"/>
+          </a:xfrm>
+          <a:prstGeom prst="rightArrow">
+            <a:avLst/>
+          </a:prstGeom>
+          <a:solidFill>
+            <a:srgbClr val="60A5FA"/>
+          </a:solidFill>
+          <a:ln>
+            <a:noFill/>
+          </a:ln>
+        </p:spPr>
+        <p:style>
+          <a:lnRef idx="1">
+            <a:schemeClr val="accent1"/>
+          </a:lnRef>
+          <a:fillRef idx="3">
+            <a:schemeClr val="accent1"/>
+          </a:fillRef>
+          <a:effectRef idx="2">
+            <a:schemeClr val="accent1"/>
+          </a:effectRef>
+          <a:fontRef idx="minor">
+            <a:schemeClr val="lt1"/>
+          </a:fontRef>
+        </p:style>
+        <p:txBody>
+          <a:bodyPr rtlCol="0" anchor="ctr"/>
+          <a:lstStyle/>
+          <a:p>
+            <a:pPr algn="ctr"/>
+          </a:p>
+        </p:txBody>
+      </p:sp>
+      <p:sp>
+        <p:nvSpPr>
+          <p:cNvPr id="19" name="Rounded Rectangle 18"/>
+          <p:cNvSpPr/>
+          <p:nvPr/>
+        </p:nvSpPr>
+        <p:spPr>
+          <a:xfrm>
+            <a:off x="7260336" y="1463040"/>
+            <a:ext cx="2057400" cy="4572000"/>
+          </a:xfrm>
+          <a:prstGeom prst="roundRect">
+            <a:avLst/>
+          </a:prstGeom>
+          <a:solidFill>
+            <a:srgbClr val="1E293B"/>
+          </a:solidFill>
+          <a:ln>
+            <a:solidFill>
+              <a:srgbClr val="334155"/>
+            </a:solidFill>
+          </a:ln>
+        </p:spPr>
+        <p:style>
+          <a:lnRef idx="1">
+            <a:schemeClr val="accent1"/>
+          </a:lnRef>
+          <a:fillRef idx="3">
+            <a:schemeClr val="accent1"/>
+          </a:fillRef>
+          <a:effectRef idx="2">
+            <a:schemeClr val="accent1"/>
+          </a:effectRef>
+          <a:fontRef idx="minor">
+            <a:schemeClr val="lt1"/>
+          </a:fontRef>
+        </p:style>
+        <p:txBody>
+          <a:bodyPr rtlCol="0" anchor="ctr"/>
+          <a:lstStyle/>
+          <a:p>
+            <a:pPr algn="ctr"/>
+          </a:p>
+        </p:txBody>
+      </p:sp>
+      <p:sp>
+        <p:nvSpPr>
+          <p:cNvPr id="20" name="Rounded Rectangle 19"/>
+          <p:cNvSpPr/>
+          <p:nvPr/>
+        </p:nvSpPr>
+        <p:spPr>
+          <a:xfrm>
+            <a:off x="7397496" y="1645920"/>
+            <a:ext cx="1783080" cy="411480"/>
+          </a:xfrm>
+          <a:prstGeom prst="roundRect">
+            <a:avLst/>
+          </a:prstGeom>
+          <a:solidFill>
+            <a:srgbClr val="F59E0B"/>
+          </a:solidFill>
+          <a:ln>
+            <a:noFill/>
+          </a:ln>
+        </p:spPr>
+        <p:style>
+          <a:lnRef idx="1">
+            <a:schemeClr val="accent1"/>
+          </a:lnRef>
+          <a:fillRef idx="3">
+            <a:schemeClr val="accent1"/>
+          </a:fillRef>
+          <a:effectRef idx="2">
+            <a:schemeClr val="accent1"/>
+          </a:effectRef>
+          <a:fontRef idx="minor">
+            <a:schemeClr val="lt1"/>
+          </a:fontRef>
+        </p:style>
+        <p:txBody>
+          <a:bodyPr rtlCol="0" anchor="ctr"/>
+          <a:lstStyle/>
+          <a:p>
+            <a:pPr algn="ctr">
+              <a:defRPr sz="1000" b="1">
+                <a:solidFill>
+                  <a:srgbClr val="FFFFFF"/>
+                </a:solidFill>
+              </a:defRPr>
+            </a:pPr>
+            <a:r>
+              <a:t>STEP 4</a:t>
+            </a:r>
+          </a:p>
+        </p:txBody>
+      </p:sp>
+      <p:sp>
+        <p:nvSpPr>
+          <p:cNvPr id="21" name="TextBox 20"/>
+          <p:cNvSpPr txBox="1"/>
+          <p:nvPr/>
+        </p:nvSpPr>
+        <p:spPr>
+          <a:xfrm>
+            <a:off x="7397496" y="2194560"/>
+            <a:ext cx="1783080" cy="3657600"/>
+          </a:xfrm>
+          <a:prstGeom prst="rect">
+            <a:avLst/>
+          </a:prstGeom>
+          <a:noFill/>
+        </p:spPr>
+        <p:txBody>
+          <a:bodyPr wrap="square">
+            <a:spAutoFit/>
+          </a:bodyPr>
+          <a:lstStyle/>
+          <a:p>
+            <a:pPr>
+              <a:defRPr sz="1200" b="1">
+                <a:solidFill>
+                  <a:srgbClr val="F8FAFC"/>
+                </a:solidFill>
+              </a:defRPr>
+            </a:pPr>
+            <a:r>
+              <a:t>4. Canteen Vendor</a:t>
+            </a:r>
+          </a:p>
+          <a:p>
+            <a:pPr>
+              <a:spcBef>
+                <a:spcPts val="800"/>
+              </a:spcBef>
+              <a:defRPr sz="950">
+                <a:solidFill>
+                  <a:srgbClr val="94A3B8"/>
+                </a:solidFill>
+              </a:defRPr>
+            </a:pPr>
+            <a:r>
+              <a:t>Confirms pricing, prepares items, requests modifications if needed.</a:t>
+            </a:r>
+          </a:p>
+        </p:txBody>
+      </p:sp>
+      <p:sp>
+        <p:nvSpPr>
+          <p:cNvPr id="22" name="Right Arrow 21"/>
+          <p:cNvSpPr/>
+          <p:nvPr/>
+        </p:nvSpPr>
+        <p:spPr>
+          <a:xfrm>
+            <a:off x="9345167" y="3566160"/>
+            <a:ext cx="146304" cy="219456"/>
+          </a:xfrm>
+          <a:prstGeom prst="rightArrow">
+            <a:avLst/>
+          </a:prstGeom>
+          <a:solidFill>
+            <a:srgbClr val="60A5FA"/>
+          </a:solidFill>
+          <a:ln>
+            <a:noFill/>
+          </a:ln>
+        </p:spPr>
+        <p:style>
+          <a:lnRef idx="1">
+            <a:schemeClr val="accent1"/>
+          </a:lnRef>
+          <a:fillRef idx="3">
+            <a:schemeClr val="accent1"/>
+          </a:fillRef>
+          <a:effectRef idx="2">
+            <a:schemeClr val="accent1"/>
+          </a:effectRef>
+          <a:fontRef idx="minor">
+            <a:schemeClr val="lt1"/>
+          </a:fontRef>
+        </p:style>
+        <p:txBody>
+          <a:bodyPr rtlCol="0" anchor="ctr"/>
+          <a:lstStyle/>
+          <a:p>
+            <a:pPr algn="ctr"/>
+          </a:p>
+        </p:txBody>
+      </p:sp>
+      <p:sp>
+        <p:nvSpPr>
+          <p:cNvPr id="23" name="Rounded Rectangle 22"/>
+          <p:cNvSpPr/>
+          <p:nvPr/>
+        </p:nvSpPr>
+        <p:spPr>
+          <a:xfrm>
+            <a:off x="9436608" y="1463040"/>
+            <a:ext cx="2057400" cy="4572000"/>
+          </a:xfrm>
+          <a:prstGeom prst="roundRect">
+            <a:avLst/>
+          </a:prstGeom>
+          <a:solidFill>
+            <a:srgbClr val="1E293B"/>
+          </a:solidFill>
+          <a:ln>
+            <a:solidFill>
+              <a:srgbClr val="334155"/>
+            </a:solidFill>
+          </a:ln>
+        </p:spPr>
+        <p:style>
+          <a:lnRef idx="1">
+            <a:schemeClr val="accent1"/>
+          </a:lnRef>
+          <a:fillRef idx="3">
+            <a:schemeClr val="accent1"/>
+          </a:fillRef>
+          <a:effectRef idx="2">
+            <a:schemeClr val="accent1"/>
+          </a:effectRef>
+          <a:fontRef idx="minor">
+            <a:schemeClr val="lt1"/>
+          </a:fontRef>
+        </p:style>
+        <p:txBody>
+          <a:bodyPr rtlCol="0" anchor="ctr"/>
+          <a:lstStyle/>
+          <a:p>
+            <a:pPr algn="ctr"/>
+          </a:p>
+        </p:txBody>
+      </p:sp>
+      <p:sp>
+        <p:nvSpPr>
+          <p:cNvPr id="24" name="Rounded Rectangle 23"/>
+          <p:cNvSpPr/>
+          <p:nvPr/>
+        </p:nvSpPr>
+        <p:spPr>
+          <a:xfrm>
+            <a:off x="9573768" y="1645920"/>
+            <a:ext cx="1783080" cy="411480"/>
+          </a:xfrm>
+          <a:prstGeom prst="roundRect">
+            <a:avLst/>
+          </a:prstGeom>
+          <a:solidFill>
+            <a:srgbClr val="10B981"/>
+          </a:solidFill>
+          <a:ln>
+            <a:noFill/>
+          </a:ln>
+        </p:spPr>
+        <p:style>
+          <a:lnRef idx="1">
+            <a:schemeClr val="accent1"/>
+          </a:lnRef>
+          <a:fillRef idx="3">
+            <a:schemeClr val="accent1"/>
+          </a:fillRef>
+          <a:effectRef idx="2">
+            <a:schemeClr val="accent1"/>
+          </a:effectRef>
+          <a:fontRef idx="minor">
+            <a:schemeClr val="lt1"/>
+          </a:fontRef>
+        </p:style>
+        <p:txBody>
+          <a:bodyPr rtlCol="0" anchor="ctr"/>
+          <a:lstStyle/>
+          <a:p>
+            <a:pPr algn="ctr">
+              <a:defRPr sz="1000" b="1">
+                <a:solidFill>
+                  <a:srgbClr val="FFFFFF"/>
+                </a:solidFill>
+              </a:defRPr>
+            </a:pPr>
+            <a:r>
+              <a:t>STEP 5</a:t>
+            </a:r>
+          </a:p>
+        </p:txBody>
+      </p:sp>
+      <p:sp>
+        <p:nvSpPr>
+          <p:cNvPr id="25" name="TextBox 24"/>
+          <p:cNvSpPr txBox="1"/>
+          <p:nvPr/>
+        </p:nvSpPr>
+        <p:spPr>
+          <a:xfrm>
+            <a:off x="9573768" y="2194560"/>
+            <a:ext cx="1783080" cy="3657600"/>
+          </a:xfrm>
+          <a:prstGeom prst="rect">
+            <a:avLst/>
+          </a:prstGeom>
+          <a:noFill/>
+        </p:spPr>
+        <p:txBody>
+          <a:bodyPr wrap="square">
+            <a:spAutoFit/>
+          </a:bodyPr>
+          <a:lstStyle/>
+          <a:p>
+            <a:pPr>
+              <a:defRPr sz="1200" b="1">
+                <a:solidFill>
+                  <a:srgbClr val="F8FAFC"/>
+                </a:solidFill>
+              </a:defRPr>
+            </a:pPr>
+            <a:r>
+              <a:t>5. Final Settlement</a:t>
+            </a:r>
+          </a:p>
+          <a:p>
+            <a:pPr>
+              <a:spcBef>
+                <a:spcPts val="800"/>
+              </a:spcBef>
+              <a:defRPr sz="950">
+                <a:solidFill>
+                  <a:srgbClr val="94A3B8"/>
+                </a:solidFill>
+              </a:defRPr>
+            </a:pPr>
+            <a:r>
+              <a:t>Consolidates all sub-bills, generates verified QR invoice &amp; audit entry.</a:t>
             </a:r>
           </a:p>
         </p:txBody>
@@ -8799,7 +9116,7 @@
 </file>
 
 <file path=ppt/slides/slide6.xml><?xml version="1.0" encoding="utf-8"?>
-<p:sld xmlns:a="http://schemas.openxmlformats.org/drawingml/2006/main" xmlns:r="http://schemas.openxmlformats.org/officeDocument/2006/relationships" xmlns:p="http://schemas.openxmlformats.org/presentationml/2006/main">
+<p:sld xmlns:a="http://schemas.openxmlformats.org/drawingml/2006/main" xmlns:p="http://schemas.openxmlformats.org/presentationml/2006/main" xmlns:r="http://schemas.openxmlformats.org/officeDocument/2006/relationships">
   <p:cSld>
     <p:spTree>
       <p:nvGrpSpPr>
@@ -8807,14 +9124,7 @@
         <p:cNvGrpSpPr/>
         <p:nvPr/>
       </p:nvGrpSpPr>
-      <p:grpSpPr>
-        <a:xfrm>
-          <a:off x="0" y="0"/>
-          <a:ext cx="0" cy="0"/>
-          <a:chOff x="0" y="0"/>
-          <a:chExt cx="0" cy="0"/>
-        </a:xfrm>
-      </p:grpSpPr>
+      <p:grpSpPr/>
       <p:sp>
         <p:nvSpPr>
           <p:cNvPr id="2" name="Rectangle 1"/>
@@ -8830,7 +9140,7 @@
             <a:avLst/>
           </a:prstGeom>
           <a:solidFill>
-            <a:srgbClr val="F8FAFC"/>
+            <a:srgbClr val="0F172A"/>
           </a:solidFill>
           <a:ln>
             <a:noFill/>
@@ -8855,7 +9165,6 @@
           <a:lstStyle/>
           <a:p>
             <a:pPr algn="ctr"/>
-            <a:endParaRPr/>
           </a:p>
         </p:txBody>
       </p:sp>
@@ -8876,7 +9185,7 @@
           <a:noFill/>
         </p:spPr>
         <p:txBody>
-          <a:bodyPr wrap="square" lIns="0" tIns="0" rIns="0" bIns="0">
+          <a:bodyPr wrap="square" lIns="0" rIns="0" tIns="0" bIns="0">
             <a:spAutoFit/>
           </a:bodyPr>
           <a:lstStyle/>
@@ -8884,13 +9193,13 @@
             <a:pPr>
               <a:defRPr sz="1000" b="1">
                 <a:solidFill>
-                  <a:srgbClr val="2563EB"/>
-                </a:solidFill>
-                <a:latin typeface="Arial"/>
-              </a:defRPr>
-            </a:pPr>
-            <a:r>
-              <a:t>ROLE SPOTLIGHT: COORDINATOR</a:t>
+                  <a:srgbClr val="60A5FA"/>
+                </a:solidFill>
+                <a:latin typeface="Arial"/>
+              </a:defRPr>
+            </a:pPr>
+            <a:r>
+              <a:t>COORDINATOR PORTAL</a:t>
             </a:r>
           </a:p>
         </p:txBody>
@@ -8912,7 +9221,7 @@
           <a:noFill/>
         </p:spPr>
         <p:txBody>
-          <a:bodyPr wrap="square" lIns="0" tIns="0" rIns="0" bIns="0">
+          <a:bodyPr wrap="square" lIns="0" rIns="0" tIns="0" bIns="0">
             <a:spAutoFit/>
           </a:bodyPr>
           <a:lstStyle/>
@@ -8920,13 +9229,13 @@
             <a:pPr>
               <a:defRPr sz="2200" b="1">
                 <a:solidFill>
-                  <a:srgbClr val="0F172A"/>
-                </a:solidFill>
-                <a:latin typeface="Arial"/>
-              </a:defRPr>
-            </a:pPr>
-            <a:r>
-              <a:t>Coordinator Portal: Seamless Requisition Creation</a:t>
+                  <a:srgbClr val="F8FAFC"/>
+                </a:solidFill>
+                <a:latin typeface="Arial"/>
+              </a:defRPr>
+            </a:pPr>
+            <a:r>
+              <a:t>Coordinator Experience: Multi-Vendor Requisition</a:t>
             </a:r>
           </a:p>
         </p:txBody>
@@ -8946,7 +9255,7 @@
             <a:avLst/>
           </a:prstGeom>
           <a:solidFill>
-            <a:srgbClr val="E2E8F0"/>
+            <a:srgbClr val="334155"/>
           </a:solidFill>
           <a:ln>
             <a:noFill/>
@@ -8971,7 +9280,6 @@
           <a:lstStyle/>
           <a:p>
             <a:pPr algn="ctr"/>
-            <a:endParaRPr/>
           </a:p>
         </p:txBody>
       </p:sp>
@@ -8992,7 +9300,7 @@
           <a:noFill/>
         </p:spPr>
         <p:txBody>
-          <a:bodyPr wrap="none" lIns="0" tIns="0" rIns="0" bIns="0">
+          <a:bodyPr wrap="none" lIns="0" rIns="0" tIns="0" bIns="0">
             <a:spAutoFit/>
           </a:bodyPr>
           <a:lstStyle/>
@@ -9000,13 +9308,13 @@
             <a:pPr>
               <a:defRPr sz="900">
                 <a:solidFill>
-                  <a:srgbClr val="64748B"/>
-                </a:solidFill>
-                <a:latin typeface="Arial"/>
-              </a:defRPr>
-            </a:pPr>
-            <a:r>
-              <a:t>AharSetu Enterprise ERP  |  Board Presentation  |  Slide 6 of 14</a:t>
+                  <a:srgbClr val="94A3B8"/>
+                </a:solidFill>
+                <a:latin typeface="Arial"/>
+              </a:defRPr>
+            </a:pPr>
+            <a:r>
+              <a:t>AharSetu Enterprise ERP  |  Board of Directors Presentation  |  Slide 6 of 14</a:t>
             </a:r>
           </a:p>
         </p:txBody>
@@ -9020,17 +9328,17 @@
         <p:spPr>
           <a:xfrm>
             <a:off x="731520" y="1463040"/>
-            <a:ext cx="5029200" cy="4480560"/>
+            <a:ext cx="5303520" cy="1371600"/>
           </a:xfrm>
           <a:prstGeom prst="roundRect">
             <a:avLst/>
           </a:prstGeom>
           <a:solidFill>
-            <a:srgbClr val="FFFFFF"/>
+            <a:srgbClr val="1E293B"/>
           </a:solidFill>
           <a:ln w="12700">
             <a:solidFill>
-              <a:srgbClr val="E2E8F0"/>
+              <a:srgbClr val="334155"/>
             </a:solidFill>
           </a:ln>
         </p:spPr>
@@ -9053,7 +9361,6 @@
           <a:lstStyle/>
           <a:p>
             <a:pPr algn="ctr"/>
-            <a:endParaRPr/>
           </a:p>
         </p:txBody>
       </p:sp>
@@ -9066,7 +9373,7 @@
         <p:spPr>
           <a:xfrm>
             <a:off x="960120" y="1645920"/>
-            <a:ext cx="4572000" cy="4114800"/>
+            <a:ext cx="4846320" cy="1005840"/>
           </a:xfrm>
           <a:prstGeom prst="rect">
             <a:avLst/>
@@ -9074,7 +9381,7 @@
           <a:noFill/>
         </p:spPr>
         <p:txBody>
-          <a:bodyPr wrap="square" lIns="0" tIns="0" rIns="0" bIns="0">
+          <a:bodyPr wrap="square" lIns="0" rIns="0" tIns="0" bIns="0">
             <a:spAutoFit/>
           </a:bodyPr>
           <a:lstStyle/>
@@ -9082,13 +9389,13 @@
             <a:pPr>
               <a:defRPr sz="1350" b="1">
                 <a:solidFill>
-                  <a:srgbClr val="2563EB"/>
-                </a:solidFill>
-                <a:latin typeface="Arial"/>
-              </a:defRPr>
-            </a:pPr>
-            <a:r>
-              <a:t>Key Operational Capabilities</a:t>
+                  <a:srgbClr val="3B82F6"/>
+                </a:solidFill>
+                <a:latin typeface="Arial"/>
+              </a:defRPr>
+            </a:pPr>
+            <a:r>
+              <a:t>Visual Menu &amp; Category Browsing</a:t>
             </a:r>
           </a:p>
           <a:p>
@@ -9098,13 +9405,13 @@
               </a:spcBef>
               <a:defRPr sz="1000">
                 <a:solidFill>
-                  <a:srgbClr val="0F172A"/>
-                </a:solidFill>
-                <a:latin typeface="Arial"/>
-              </a:defRPr>
-            </a:pPr>
-            <a:r>
-              <a:t>• Live Canteen Catalog: Real-time availability and prices across all campus vendors.</a:t>
+                  <a:srgbClr val="F8FAFC"/>
+                </a:solidFill>
+                <a:latin typeface="Arial"/>
+              </a:defRPr>
+            </a:pPr>
+            <a:r>
+              <a:t>• Real-time food items categorized by Snacks, Beverages, Meals &amp; Breakfast.</a:t>
             </a:r>
           </a:p>
           <a:p>
@@ -9114,77 +9421,13 @@
               </a:spcBef>
               <a:defRPr sz="1000">
                 <a:solidFill>
-                  <a:srgbClr val="0F172A"/>
-                </a:solidFill>
-                <a:latin typeface="Arial"/>
-              </a:defRPr>
-            </a:pPr>
-            <a:r>
-              <a:t>• One-Click Multi-Vendor Cart: Select items from different shops simultaneously.</a:t>
-            </a:r>
-          </a:p>
-          <a:p>
-            <a:pPr>
-              <a:spcBef>
-                <a:spcPts val="400"/>
-              </a:spcBef>
-              <a:defRPr sz="1000">
-                <a:solidFill>
-                  <a:srgbClr val="0F172A"/>
-                </a:solidFill>
-                <a:latin typeface="Arial"/>
-              </a:defRPr>
-            </a:pPr>
-            <a:r>
-              <a:t>• Automatic Order Reference: Instant generation of AS-2026-XXXX tracking codes.</a:t>
-            </a:r>
-          </a:p>
-          <a:p>
-            <a:pPr>
-              <a:spcBef>
-                <a:spcPts val="400"/>
-              </a:spcBef>
-              <a:defRPr sz="1000">
-                <a:solidFill>
-                  <a:srgbClr val="0F172A"/>
-                </a:solidFill>
-                <a:latin typeface="Arial"/>
-              </a:defRPr>
-            </a:pPr>
-            <a:r>
-              <a:t>• Status Stepper: Visual tracking from Draft → Approval → Vendor → Completed.</a:t>
-            </a:r>
-          </a:p>
-          <a:p>
-            <a:pPr>
-              <a:spcBef>
-                <a:spcPts val="400"/>
-              </a:spcBef>
-              <a:defRPr sz="1000">
-                <a:solidFill>
-                  <a:srgbClr val="0F172A"/>
-                </a:solidFill>
-                <a:latin typeface="Arial"/>
-              </a:defRPr>
-            </a:pPr>
-            <a:r>
-              <a:t>• Department Scoping: Coordinators only manage orders within their assigned department.</a:t>
-            </a:r>
-          </a:p>
-          <a:p>
-            <a:pPr>
-              <a:spcBef>
-                <a:spcPts val="400"/>
-              </a:spcBef>
-              <a:defRPr sz="1000">
-                <a:solidFill>
-                  <a:srgbClr val="0F172A"/>
-                </a:solidFill>
-                <a:latin typeface="Arial"/>
-              </a:defRPr>
-            </a:pPr>
-            <a:r>
-              <a:t>• Offline Drafting: Create orders even in low-connectivity campus environments.</a:t>
+                  <a:srgbClr val="F8FAFC"/>
+                </a:solidFill>
+                <a:latin typeface="Arial"/>
+              </a:defRPr>
+            </a:pPr>
+            <a:r>
+              <a:t>• Dynamic vendor open/closed indicators prevent ordering from offline canteens.</a:t>
             </a:r>
           </a:p>
         </p:txBody>
@@ -9197,18 +9440,18 @@
         </p:nvSpPr>
         <p:spPr>
           <a:xfrm>
-            <a:off x="5943600" y="1463040"/>
-            <a:ext cx="5516575" cy="4480560"/>
+            <a:off x="731520" y="2971800"/>
+            <a:ext cx="5303520" cy="1371600"/>
           </a:xfrm>
           <a:prstGeom prst="roundRect">
             <a:avLst/>
           </a:prstGeom>
           <a:solidFill>
-            <a:srgbClr val="F1F5F9"/>
+            <a:srgbClr val="1E293B"/>
           </a:solidFill>
-          <a:ln w="19050">
+          <a:ln w="12700">
             <a:solidFill>
-              <a:srgbClr val="BFDBFE"/>
+              <a:srgbClr val="334155"/>
             </a:solidFill>
           </a:ln>
         </p:spPr>
@@ -9231,7 +9474,6 @@
           <a:lstStyle/>
           <a:p>
             <a:pPr algn="ctr"/>
-            <a:endParaRPr/>
           </a:p>
         </p:txBody>
       </p:sp>
@@ -9243,8 +9485,8 @@
         </p:nvSpPr>
         <p:spPr>
           <a:xfrm>
-            <a:off x="6126480" y="3154680"/>
-            <a:ext cx="5150815" cy="1097280"/>
+            <a:off x="960120" y="3154680"/>
+            <a:ext cx="4846320" cy="1005840"/>
           </a:xfrm>
           <a:prstGeom prst="rect">
             <a:avLst/>
@@ -9252,41 +9494,267 @@
           <a:noFill/>
         </p:spPr>
         <p:txBody>
-          <a:bodyPr wrap="square" lIns="0" tIns="0" rIns="0" bIns="0">
+          <a:bodyPr wrap="square" lIns="0" rIns="0" tIns="0" bIns="0">
             <a:spAutoFit/>
           </a:bodyPr>
           <a:lstStyle/>
           <a:p>
+            <a:pPr>
+              <a:defRPr sz="1350" b="1">
+                <a:solidFill>
+                  <a:srgbClr val="10B981"/>
+                </a:solidFill>
+                <a:latin typeface="Arial"/>
+              </a:defRPr>
+            </a:pPr>
+            <a:r>
+              <a:t>Multi-Vendor Unified Cart</a:t>
+            </a:r>
+          </a:p>
+          <a:p>
+            <a:pPr>
+              <a:spcBef>
+                <a:spcPts val="400"/>
+              </a:spcBef>
+              <a:defRPr sz="1000">
+                <a:solidFill>
+                  <a:srgbClr val="F8FAFC"/>
+                </a:solidFill>
+                <a:latin typeface="Arial"/>
+              </a:defRPr>
+            </a:pPr>
+            <a:r>
+              <a:t>• Coordinators add items across multiple canteens into a single requisition.</a:t>
+            </a:r>
+          </a:p>
+          <a:p>
+            <a:pPr>
+              <a:spcBef>
+                <a:spcPts val="400"/>
+              </a:spcBef>
+              <a:defRPr sz="1000">
+                <a:solidFill>
+                  <a:srgbClr val="F8FAFC"/>
+                </a:solidFill>
+                <a:latin typeface="Arial"/>
+              </a:defRPr>
+            </a:pPr>
+            <a:r>
+              <a:t>• Automated subtotal calculations with instant budget summary.</a:t>
+            </a:r>
+          </a:p>
+        </p:txBody>
+      </p:sp>
+      <p:sp>
+        <p:nvSpPr>
+          <p:cNvPr id="11" name="Rounded Rectangle 10"/>
+          <p:cNvSpPr/>
+          <p:nvPr/>
+        </p:nvSpPr>
+        <p:spPr>
+          <a:xfrm>
+            <a:off x="731520" y="4480560"/>
+            <a:ext cx="5303520" cy="1371600"/>
+          </a:xfrm>
+          <a:prstGeom prst="roundRect">
+            <a:avLst/>
+          </a:prstGeom>
+          <a:solidFill>
+            <a:srgbClr val="1E293B"/>
+          </a:solidFill>
+          <a:ln w="12700">
+            <a:solidFill>
+              <a:srgbClr val="334155"/>
+            </a:solidFill>
+          </a:ln>
+        </p:spPr>
+        <p:style>
+          <a:lnRef idx="1">
+            <a:schemeClr val="accent1"/>
+          </a:lnRef>
+          <a:fillRef idx="3">
+            <a:schemeClr val="accent1"/>
+          </a:fillRef>
+          <a:effectRef idx="2">
+            <a:schemeClr val="accent1"/>
+          </a:effectRef>
+          <a:fontRef idx="minor">
+            <a:schemeClr val="lt1"/>
+          </a:fontRef>
+        </p:style>
+        <p:txBody>
+          <a:bodyPr rtlCol="0" anchor="ctr"/>
+          <a:lstStyle/>
+          <a:p>
+            <a:pPr algn="ctr"/>
+          </a:p>
+        </p:txBody>
+      </p:sp>
+      <p:sp>
+        <p:nvSpPr>
+          <p:cNvPr id="12" name="TextBox 11"/>
+          <p:cNvSpPr txBox="1"/>
+          <p:nvPr/>
+        </p:nvSpPr>
+        <p:spPr>
+          <a:xfrm>
+            <a:off x="960120" y="4663440"/>
+            <a:ext cx="4846320" cy="1005840"/>
+          </a:xfrm>
+          <a:prstGeom prst="rect">
+            <a:avLst/>
+          </a:prstGeom>
+          <a:noFill/>
+        </p:spPr>
+        <p:txBody>
+          <a:bodyPr wrap="square" lIns="0" rIns="0" tIns="0" bIns="0">
+            <a:spAutoFit/>
+          </a:bodyPr>
+          <a:lstStyle/>
+          <a:p>
+            <a:pPr>
+              <a:defRPr sz="1350" b="1">
+                <a:solidFill>
+                  <a:srgbClr val="F59E0B"/>
+                </a:solidFill>
+                <a:latin typeface="Arial"/>
+              </a:defRPr>
+            </a:pPr>
+            <a:r>
+              <a:t>Live Order Tracking &amp; Rejection Visibility</a:t>
+            </a:r>
+          </a:p>
+          <a:p>
+            <a:pPr>
+              <a:spcBef>
+                <a:spcPts val="400"/>
+              </a:spcBef>
+              <a:defRPr sz="1000">
+                <a:solidFill>
+                  <a:srgbClr val="F8FAFC"/>
+                </a:solidFill>
+                <a:latin typeface="Arial"/>
+              </a:defRPr>
+            </a:pPr>
+            <a:r>
+              <a:t>• Visual order stepper displaying current stage in approval lifecycle.</a:t>
+            </a:r>
+          </a:p>
+          <a:p>
+            <a:pPr>
+              <a:spcBef>
+                <a:spcPts val="400"/>
+              </a:spcBef>
+              <a:defRPr sz="1000">
+                <a:solidFill>
+                  <a:srgbClr val="F8FAFC"/>
+                </a:solidFill>
+                <a:latin typeface="Arial"/>
+              </a:defRPr>
+            </a:pPr>
+            <a:r>
+              <a:t>• Detailed rejection remarks with immediate re-submission capabilities.</a:t>
+            </a:r>
+          </a:p>
+        </p:txBody>
+      </p:sp>
+      <p:sp>
+        <p:nvSpPr>
+          <p:cNvPr id="13" name="Rounded Rectangle 12"/>
+          <p:cNvSpPr/>
+          <p:nvPr/>
+        </p:nvSpPr>
+        <p:spPr>
+          <a:xfrm>
+            <a:off x="6217920" y="1463040"/>
+            <a:ext cx="5242255" cy="4480560"/>
+          </a:xfrm>
+          <a:prstGeom prst="roundRect">
+            <a:avLst/>
+          </a:prstGeom>
+          <a:solidFill>
+            <a:srgbClr val="182235"/>
+          </a:solidFill>
+          <a:ln w="19050">
+            <a:solidFill>
+              <a:srgbClr val="60A5FA"/>
+            </a:solidFill>
+          </a:ln>
+        </p:spPr>
+        <p:style>
+          <a:lnRef idx="1">
+            <a:schemeClr val="accent1"/>
+          </a:lnRef>
+          <a:fillRef idx="3">
+            <a:schemeClr val="accent1"/>
+          </a:fillRef>
+          <a:effectRef idx="2">
+            <a:schemeClr val="accent1"/>
+          </a:effectRef>
+          <a:fontRef idx="minor">
+            <a:schemeClr val="lt1"/>
+          </a:fontRef>
+        </p:style>
+        <p:txBody>
+          <a:bodyPr rtlCol="0" anchor="ctr"/>
+          <a:lstStyle/>
+          <a:p>
+            <a:pPr algn="ctr"/>
+          </a:p>
+        </p:txBody>
+      </p:sp>
+      <p:sp>
+        <p:nvSpPr>
+          <p:cNvPr id="14" name="TextBox 13"/>
+          <p:cNvSpPr txBox="1"/>
+          <p:nvPr/>
+        </p:nvSpPr>
+        <p:spPr>
+          <a:xfrm>
+            <a:off x="6400800" y="3154680"/>
+            <a:ext cx="4876495" cy="1097280"/>
+          </a:xfrm>
+          <a:prstGeom prst="rect">
+            <a:avLst/>
+          </a:prstGeom>
+          <a:noFill/>
+        </p:spPr>
+        <p:txBody>
+          <a:bodyPr wrap="square" lIns="0" rIns="0" tIns="0" bIns="0">
+            <a:spAutoFit/>
+          </a:bodyPr>
+          <a:lstStyle/>
+          <a:p>
             <a:pPr algn="ctr">
               <a:defRPr sz="1200" b="1">
                 <a:solidFill>
-                  <a:srgbClr val="2563EB"/>
-                </a:solidFill>
-                <a:latin typeface="Arial"/>
-              </a:defRPr>
-            </a:pPr>
-            <a:r>
-              <a:t>📸 Coordinator Dashboard &amp; Requisition View</a:t>
+                  <a:srgbClr val="60A5FA"/>
+                </a:solidFill>
+                <a:latin typeface="Arial"/>
+              </a:defRPr>
+            </a:pPr>
+            <a:r>
+              <a:t>📸 Coordinator Portal UI Screenshot</a:t>
             </a:r>
           </a:p>
           <a:p>
             <a:pPr algn="ctr">
               <a:defRPr sz="950">
                 <a:solidFill>
-                  <a:srgbClr val="64748B"/>
-                </a:solidFill>
-                <a:latin typeface="Arial"/>
-              </a:defRPr>
-            </a:pPr>
-            <a:r>
-              <a:t>Insert Coordinator UI Screenshot (/coordinator)</a:t>
+                  <a:srgbClr val="94A3B8"/>
+                </a:solidFill>
+                <a:latin typeface="Arial"/>
+              </a:defRPr>
+            </a:pPr>
+            <a:r>
+              <a:t>Insert Coordinator Draft &amp; Tracking Page Screenshot</a:t>
             </a:r>
           </a:p>
           <a:p>
             <a:pPr algn="ctr">
               <a:defRPr sz="850" i="1">
                 <a:solidFill>
-                  <a:srgbClr val="64748B"/>
+                  <a:srgbClr val="94A3B8"/>
                 </a:solidFill>
                 <a:latin typeface="Arial"/>
               </a:defRPr>
@@ -9306,7 +9774,7 @@
 </file>
 
 <file path=ppt/slides/slide7.xml><?xml version="1.0" encoding="utf-8"?>
-<p:sld xmlns:a="http://schemas.openxmlformats.org/drawingml/2006/main" xmlns:r="http://schemas.openxmlformats.org/officeDocument/2006/relationships" xmlns:p="http://schemas.openxmlformats.org/presentationml/2006/main">
+<p:sld xmlns:a="http://schemas.openxmlformats.org/drawingml/2006/main" xmlns:p="http://schemas.openxmlformats.org/presentationml/2006/main" xmlns:r="http://schemas.openxmlformats.org/officeDocument/2006/relationships">
   <p:cSld>
     <p:spTree>
       <p:nvGrpSpPr>
@@ -9314,14 +9782,7 @@
         <p:cNvGrpSpPr/>
         <p:nvPr/>
       </p:nvGrpSpPr>
-      <p:grpSpPr>
-        <a:xfrm>
-          <a:off x="0" y="0"/>
-          <a:ext cx="0" cy="0"/>
-          <a:chOff x="0" y="0"/>
-          <a:chExt cx="0" cy="0"/>
-        </a:xfrm>
-      </p:grpSpPr>
+      <p:grpSpPr/>
       <p:sp>
         <p:nvSpPr>
           <p:cNvPr id="2" name="Rectangle 1"/>
@@ -9337,7 +9798,7 @@
             <a:avLst/>
           </a:prstGeom>
           <a:solidFill>
-            <a:srgbClr val="F8FAFC"/>
+            <a:srgbClr val="0F172A"/>
           </a:solidFill>
           <a:ln>
             <a:noFill/>
@@ -9362,7 +9823,6 @@
           <a:lstStyle/>
           <a:p>
             <a:pPr algn="ctr"/>
-            <a:endParaRPr/>
           </a:p>
         </p:txBody>
       </p:sp>
@@ -9383,7 +9843,7 @@
           <a:noFill/>
         </p:spPr>
         <p:txBody>
-          <a:bodyPr wrap="square" lIns="0" tIns="0" rIns="0" bIns="0">
+          <a:bodyPr wrap="square" lIns="0" rIns="0" tIns="0" bIns="0">
             <a:spAutoFit/>
           </a:bodyPr>
           <a:lstStyle/>
@@ -9391,13 +9851,13 @@
             <a:pPr>
               <a:defRPr sz="1000" b="1">
                 <a:solidFill>
-                  <a:srgbClr val="2563EB"/>
-                </a:solidFill>
-                <a:latin typeface="Arial"/>
-              </a:defRPr>
-            </a:pPr>
-            <a:r>
-              <a:t>ROLE SPOTLIGHT: GOVERNANCE</a:t>
+                  <a:srgbClr val="60A5FA"/>
+                </a:solidFill>
+                <a:latin typeface="Arial"/>
+              </a:defRPr>
+            </a:pPr>
+            <a:r>
+              <a:t>EXECUTIVE GOVERNANCE</a:t>
             </a:r>
           </a:p>
         </p:txBody>
@@ -9419,7 +9879,7 @@
           <a:noFill/>
         </p:spPr>
         <p:txBody>
-          <a:bodyPr wrap="square" lIns="0" tIns="0" rIns="0" bIns="0">
+          <a:bodyPr wrap="square" lIns="0" rIns="0" tIns="0" bIns="0">
             <a:spAutoFit/>
           </a:bodyPr>
           <a:lstStyle/>
@@ -9427,13 +9887,13 @@
             <a:pPr>
               <a:defRPr sz="2200" b="1">
                 <a:solidFill>
-                  <a:srgbClr val="0F172A"/>
-                </a:solidFill>
-                <a:latin typeface="Arial"/>
-              </a:defRPr>
-            </a:pPr>
-            <a:r>
-              <a:t>Principal &amp; DCR Portals: Multi-Tier Approval Governance</a:t>
+                  <a:srgbClr val="F8FAFC"/>
+                </a:solidFill>
+                <a:latin typeface="Arial"/>
+              </a:defRPr>
+            </a:pPr>
+            <a:r>
+              <a:t>Leadership Governance: Principal &amp; DCR Review</a:t>
             </a:r>
           </a:p>
         </p:txBody>
@@ -9453,7 +9913,7 @@
             <a:avLst/>
           </a:prstGeom>
           <a:solidFill>
-            <a:srgbClr val="E2E8F0"/>
+            <a:srgbClr val="334155"/>
           </a:solidFill>
           <a:ln>
             <a:noFill/>
@@ -9478,7 +9938,6 @@
           <a:lstStyle/>
           <a:p>
             <a:pPr algn="ctr"/>
-            <a:endParaRPr/>
           </a:p>
         </p:txBody>
       </p:sp>
@@ -9499,7 +9958,7 @@
           <a:noFill/>
         </p:spPr>
         <p:txBody>
-          <a:bodyPr wrap="none" lIns="0" tIns="0" rIns="0" bIns="0">
+          <a:bodyPr wrap="none" lIns="0" rIns="0" tIns="0" bIns="0">
             <a:spAutoFit/>
           </a:bodyPr>
           <a:lstStyle/>
@@ -9507,13 +9966,13 @@
             <a:pPr>
               <a:defRPr sz="900">
                 <a:solidFill>
-                  <a:srgbClr val="64748B"/>
-                </a:solidFill>
-                <a:latin typeface="Arial"/>
-              </a:defRPr>
-            </a:pPr>
-            <a:r>
-              <a:t>AharSetu Enterprise ERP  |  Board Presentation  |  Slide 7 of 14</a:t>
+                  <a:srgbClr val="94A3B8"/>
+                </a:solidFill>
+                <a:latin typeface="Arial"/>
+              </a:defRPr>
+            </a:pPr>
+            <a:r>
+              <a:t>AharSetu Enterprise ERP  |  Board of Directors Presentation  |  Slide 7 of 14</a:t>
             </a:r>
           </a:p>
         </p:txBody>
@@ -9527,17 +9986,17 @@
         <p:spPr>
           <a:xfrm>
             <a:off x="731520" y="1463040"/>
-            <a:ext cx="5029200" cy="4480560"/>
+            <a:ext cx="5303520" cy="2148840"/>
           </a:xfrm>
           <a:prstGeom prst="roundRect">
             <a:avLst/>
           </a:prstGeom>
           <a:solidFill>
-            <a:srgbClr val="FFFFFF"/>
+            <a:srgbClr val="1E293B"/>
           </a:solidFill>
           <a:ln w="12700">
             <a:solidFill>
-              <a:srgbClr val="E2E8F0"/>
+              <a:srgbClr val="334155"/>
             </a:solidFill>
           </a:ln>
         </p:spPr>
@@ -9560,7 +10019,6 @@
           <a:lstStyle/>
           <a:p>
             <a:pPr algn="ctr"/>
-            <a:endParaRPr/>
           </a:p>
         </p:txBody>
       </p:sp>
@@ -9573,7 +10031,7 @@
         <p:spPr>
           <a:xfrm>
             <a:off x="960120" y="1645920"/>
-            <a:ext cx="4572000" cy="4114800"/>
+            <a:ext cx="4846320" cy="1783080"/>
           </a:xfrm>
           <a:prstGeom prst="rect">
             <a:avLst/>
@@ -9581,7 +10039,7 @@
           <a:noFill/>
         </p:spPr>
         <p:txBody>
-          <a:bodyPr wrap="square" lIns="0" tIns="0" rIns="0" bIns="0">
+          <a:bodyPr wrap="square" lIns="0" rIns="0" tIns="0" bIns="0">
             <a:spAutoFit/>
           </a:bodyPr>
           <a:lstStyle/>
@@ -9589,13 +10047,13 @@
             <a:pPr>
               <a:defRPr sz="1350" b="1">
                 <a:solidFill>
-                  <a:srgbClr val="0EA5E9"/>
-                </a:solidFill>
-                <a:latin typeface="Arial"/>
-              </a:defRPr>
-            </a:pPr>
-            <a:r>
-              <a:t>Executive Governance Controls</a:t>
+                  <a:srgbClr val="06B6D4"/>
+                </a:solidFill>
+                <a:latin typeface="Arial"/>
+              </a:defRPr>
+            </a:pPr>
+            <a:r>
+              <a:t>Principal Departmental Oversight</a:t>
             </a:r>
           </a:p>
           <a:p>
@@ -9605,13 +10063,13 @@
               </a:spcBef>
               <a:defRPr sz="1000">
                 <a:solidFill>
-                  <a:srgbClr val="0F172A"/>
-                </a:solidFill>
-                <a:latin typeface="Arial"/>
-              </a:defRPr>
-            </a:pPr>
-            <a:r>
-              <a:t>• Multi-Department Oversight: Principals review all managed colleges/departments.</a:t>
+                  <a:srgbClr val="F8FAFC"/>
+                </a:solidFill>
+                <a:latin typeface="Arial"/>
+              </a:defRPr>
+            </a:pPr>
+            <a:r>
+              <a:t>• Multi-department supervisors (e.g. Diploma + Degree) review pending requisitions.</a:t>
             </a:r>
           </a:p>
           <a:p>
@@ -9621,13 +10079,13 @@
               </a:spcBef>
               <a:defRPr sz="1000">
                 <a:solidFill>
-                  <a:srgbClr val="0F172A"/>
-                </a:solidFill>
-                <a:latin typeface="Arial"/>
-              </a:defRPr>
-            </a:pPr>
-            <a:r>
-              <a:t>• Two-Click Review: Approve with one touch or reject with mandatory audit remarks.</a:t>
+                  <a:srgbClr val="F8FAFC"/>
+                </a:solidFill>
+                <a:latin typeface="Arial"/>
+              </a:defRPr>
+            </a:pPr>
+            <a:r>
+              <a:t>• One-click Approve / Reject with mandatory auditable remarks.</a:t>
             </a:r>
           </a:p>
           <a:p>
@@ -9637,61 +10095,13 @@
               </a:spcBef>
               <a:defRPr sz="1000">
                 <a:solidFill>
-                  <a:srgbClr val="0F172A"/>
-                </a:solidFill>
-                <a:latin typeface="Arial"/>
-              </a:defRPr>
-            </a:pPr>
-            <a:r>
-              <a:t>• Direct Principal Requisition: Principals can raise emergency orders bypassing initial tier.</a:t>
-            </a:r>
-          </a:p>
-          <a:p>
-            <a:pPr>
-              <a:spcBef>
-                <a:spcPts val="400"/>
-              </a:spcBef>
-              <a:defRPr sz="1000">
-                <a:solidFill>
-                  <a:srgbClr val="0F172A"/>
-                </a:solidFill>
-                <a:latin typeface="Arial"/>
-              </a:defRPr>
-            </a:pPr>
-            <a:r>
-              <a:t>• DCR Budget Clearance: Secondary institutional review for budget accountability.</a:t>
-            </a:r>
-          </a:p>
-          <a:p>
-            <a:pPr>
-              <a:spcBef>
-                <a:spcPts val="400"/>
-              </a:spcBef>
-              <a:defRPr sz="1000">
-                <a:solidFill>
-                  <a:srgbClr val="0F172A"/>
-                </a:solidFill>
-                <a:latin typeface="Arial"/>
-              </a:defRPr>
-            </a:pPr>
-            <a:r>
-              <a:t>• Clarification Management: Accept/Reject vendor substitution requests in real time.</a:t>
-            </a:r>
-          </a:p>
-          <a:p>
-            <a:pPr>
-              <a:spcBef>
-                <a:spcPts val="400"/>
-              </a:spcBef>
-              <a:defRPr sz="1000">
-                <a:solidFill>
-                  <a:srgbClr val="0F172A"/>
-                </a:solidFill>
-                <a:latin typeface="Arial"/>
-              </a:defRPr>
-            </a:pPr>
-            <a:r>
-              <a:t>• Mobile Approval Board: Optimized touch interface for principals on mobile devices.</a:t>
+                  <a:srgbClr val="F8FAFC"/>
+                </a:solidFill>
+                <a:latin typeface="Arial"/>
+              </a:defRPr>
+            </a:pPr>
+            <a:r>
+              <a:t>• Direct-order privilege allowing Principals to draft urgent VIP orders directly to DCR.</a:t>
             </a:r>
           </a:p>
         </p:txBody>
@@ -9704,18 +10114,18 @@
         </p:nvSpPr>
         <p:spPr>
           <a:xfrm>
-            <a:off x="5943600" y="1463040"/>
-            <a:ext cx="5516575" cy="4480560"/>
+            <a:off x="731520" y="3749039"/>
+            <a:ext cx="5303520" cy="2148840"/>
           </a:xfrm>
           <a:prstGeom prst="roundRect">
             <a:avLst/>
           </a:prstGeom>
           <a:solidFill>
-            <a:srgbClr val="F1F5F9"/>
+            <a:srgbClr val="1E293B"/>
           </a:solidFill>
-          <a:ln w="19050">
+          <a:ln w="12700">
             <a:solidFill>
-              <a:srgbClr val="BFDBFE"/>
+              <a:srgbClr val="334155"/>
             </a:solidFill>
           </a:ln>
         </p:spPr>
@@ -9738,7 +10148,6 @@
           <a:lstStyle/>
           <a:p>
             <a:pPr algn="ctr"/>
-            <a:endParaRPr/>
           </a:p>
         </p:txBody>
       </p:sp>
@@ -9750,8 +10159,8 @@
         </p:nvSpPr>
         <p:spPr>
           <a:xfrm>
-            <a:off x="6126480" y="3154680"/>
-            <a:ext cx="5150815" cy="1097280"/>
+            <a:off x="960120" y="3931919"/>
+            <a:ext cx="4846320" cy="1783080"/>
           </a:xfrm>
           <a:prstGeom prst="rect">
             <a:avLst/>
@@ -9759,41 +10168,170 @@
           <a:noFill/>
         </p:spPr>
         <p:txBody>
-          <a:bodyPr wrap="square" lIns="0" tIns="0" rIns="0" bIns="0">
+          <a:bodyPr wrap="square" lIns="0" rIns="0" tIns="0" bIns="0">
             <a:spAutoFit/>
           </a:bodyPr>
           <a:lstStyle/>
           <a:p>
+            <a:pPr>
+              <a:defRPr sz="1350" b="1">
+                <a:solidFill>
+                  <a:srgbClr val="A855F7"/>
+                </a:solidFill>
+                <a:latin typeface="Arial"/>
+              </a:defRPr>
+            </a:pPr>
+            <a:r>
+              <a:t>DCR (Discretionary) Financial Clearance</a:t>
+            </a:r>
+          </a:p>
+          <a:p>
+            <a:pPr>
+              <a:spcBef>
+                <a:spcPts val="400"/>
+              </a:spcBef>
+              <a:defRPr sz="1000">
+                <a:solidFill>
+                  <a:srgbClr val="F8FAFC"/>
+                </a:solidFill>
+                <a:latin typeface="Arial"/>
+              </a:defRPr>
+            </a:pPr>
+            <a:r>
+              <a:t>• Second-tier audit verification ensuring compliance with institutional spending caps.</a:t>
+            </a:r>
+          </a:p>
+          <a:p>
+            <a:pPr>
+              <a:spcBef>
+                <a:spcPts val="400"/>
+              </a:spcBef>
+              <a:defRPr sz="1000">
+                <a:solidFill>
+                  <a:srgbClr val="F8FAFC"/>
+                </a:solidFill>
+                <a:latin typeface="Arial"/>
+              </a:defRPr>
+            </a:pPr>
+            <a:r>
+              <a:t>• Dispatches verified orders to designated canteen vendors simultaneously.</a:t>
+            </a:r>
+          </a:p>
+          <a:p>
+            <a:pPr>
+              <a:spcBef>
+                <a:spcPts val="400"/>
+              </a:spcBef>
+              <a:defRPr sz="1000">
+                <a:solidFill>
+                  <a:srgbClr val="F8FAFC"/>
+                </a:solidFill>
+                <a:latin typeface="Arial"/>
+              </a:defRPr>
+            </a:pPr>
+            <a:r>
+              <a:t>• Maintains full institutional expenditure visibility across all colleges.</a:t>
+            </a:r>
+          </a:p>
+        </p:txBody>
+      </p:sp>
+      <p:sp>
+        <p:nvSpPr>
+          <p:cNvPr id="11" name="Rounded Rectangle 10"/>
+          <p:cNvSpPr/>
+          <p:nvPr/>
+        </p:nvSpPr>
+        <p:spPr>
+          <a:xfrm>
+            <a:off x="6217920" y="1463040"/>
+            <a:ext cx="5242255" cy="4480560"/>
+          </a:xfrm>
+          <a:prstGeom prst="roundRect">
+            <a:avLst/>
+          </a:prstGeom>
+          <a:solidFill>
+            <a:srgbClr val="182235"/>
+          </a:solidFill>
+          <a:ln w="19050">
+            <a:solidFill>
+              <a:srgbClr val="60A5FA"/>
+            </a:solidFill>
+          </a:ln>
+        </p:spPr>
+        <p:style>
+          <a:lnRef idx="1">
+            <a:schemeClr val="accent1"/>
+          </a:lnRef>
+          <a:fillRef idx="3">
+            <a:schemeClr val="accent1"/>
+          </a:fillRef>
+          <a:effectRef idx="2">
+            <a:schemeClr val="accent1"/>
+          </a:effectRef>
+          <a:fontRef idx="minor">
+            <a:schemeClr val="lt1"/>
+          </a:fontRef>
+        </p:style>
+        <p:txBody>
+          <a:bodyPr rtlCol="0" anchor="ctr"/>
+          <a:lstStyle/>
+          <a:p>
+            <a:pPr algn="ctr"/>
+          </a:p>
+        </p:txBody>
+      </p:sp>
+      <p:sp>
+        <p:nvSpPr>
+          <p:cNvPr id="12" name="TextBox 11"/>
+          <p:cNvSpPr txBox="1"/>
+          <p:nvPr/>
+        </p:nvSpPr>
+        <p:spPr>
+          <a:xfrm>
+            <a:off x="6400800" y="3154680"/>
+            <a:ext cx="4876495" cy="1097280"/>
+          </a:xfrm>
+          <a:prstGeom prst="rect">
+            <a:avLst/>
+          </a:prstGeom>
+          <a:noFill/>
+        </p:spPr>
+        <p:txBody>
+          <a:bodyPr wrap="square" lIns="0" rIns="0" tIns="0" bIns="0">
+            <a:spAutoFit/>
+          </a:bodyPr>
+          <a:lstStyle/>
+          <a:p>
             <a:pPr algn="ctr">
               <a:defRPr sz="1200" b="1">
                 <a:solidFill>
-                  <a:srgbClr val="2563EB"/>
-                </a:solidFill>
-                <a:latin typeface="Arial"/>
-              </a:defRPr>
-            </a:pPr>
-            <a:r>
-              <a:t>📸 Principal Approval Dashboard &amp; Action Panel</a:t>
+                  <a:srgbClr val="60A5FA"/>
+                </a:solidFill>
+                <a:latin typeface="Arial"/>
+              </a:defRPr>
+            </a:pPr>
+            <a:r>
+              <a:t>📸 Principal / DCR Review UI Screenshot</a:t>
             </a:r>
           </a:p>
           <a:p>
             <a:pPr algn="ctr">
               <a:defRPr sz="950">
                 <a:solidFill>
-                  <a:srgbClr val="64748B"/>
-                </a:solidFill>
-                <a:latin typeface="Arial"/>
-              </a:defRPr>
-            </a:pPr>
-            <a:r>
-              <a:t>Insert Principal UI Screenshot (/principal)</a:t>
+                  <a:srgbClr val="94A3B8"/>
+                </a:solidFill>
+                <a:latin typeface="Arial"/>
+              </a:defRPr>
+            </a:pPr>
+            <a:r>
+              <a:t>Insert Principal Approvals &amp; Audit Page Screenshot</a:t>
             </a:r>
           </a:p>
           <a:p>
             <a:pPr algn="ctr">
               <a:defRPr sz="850" i="1">
                 <a:solidFill>
-                  <a:srgbClr val="64748B"/>
+                  <a:srgbClr val="94A3B8"/>
                 </a:solidFill>
                 <a:latin typeface="Arial"/>
               </a:defRPr>
@@ -9813,7 +10351,7 @@
 </file>
 
 <file path=ppt/slides/slide8.xml><?xml version="1.0" encoding="utf-8"?>
-<p:sld xmlns:a="http://schemas.openxmlformats.org/drawingml/2006/main" xmlns:r="http://schemas.openxmlformats.org/officeDocument/2006/relationships" xmlns:p="http://schemas.openxmlformats.org/presentationml/2006/main">
+<p:sld xmlns:a="http://schemas.openxmlformats.org/drawingml/2006/main" xmlns:p="http://schemas.openxmlformats.org/presentationml/2006/main" xmlns:r="http://schemas.openxmlformats.org/officeDocument/2006/relationships">
   <p:cSld>
     <p:spTree>
       <p:nvGrpSpPr>
@@ -9821,14 +10359,7 @@
         <p:cNvGrpSpPr/>
         <p:nvPr/>
       </p:nvGrpSpPr>
-      <p:grpSpPr>
-        <a:xfrm>
-          <a:off x="0" y="0"/>
-          <a:ext cx="0" cy="0"/>
-          <a:chOff x="0" y="0"/>
-          <a:chExt cx="0" cy="0"/>
-        </a:xfrm>
-      </p:grpSpPr>
+      <p:grpSpPr/>
       <p:sp>
         <p:nvSpPr>
           <p:cNvPr id="2" name="Rectangle 1"/>
@@ -9844,7 +10375,7 @@
             <a:avLst/>
           </a:prstGeom>
           <a:solidFill>
-            <a:srgbClr val="F8FAFC"/>
+            <a:srgbClr val="0F172A"/>
           </a:solidFill>
           <a:ln>
             <a:noFill/>
@@ -9869,7 +10400,6 @@
           <a:lstStyle/>
           <a:p>
             <a:pPr algn="ctr"/>
-            <a:endParaRPr/>
           </a:p>
         </p:txBody>
       </p:sp>
@@ -9890,7 +10420,7 @@
           <a:noFill/>
         </p:spPr>
         <p:txBody>
-          <a:bodyPr wrap="square" lIns="0" tIns="0" rIns="0" bIns="0">
+          <a:bodyPr wrap="square" lIns="0" rIns="0" tIns="0" bIns="0">
             <a:spAutoFit/>
           </a:bodyPr>
           <a:lstStyle/>
@@ -9898,13 +10428,13 @@
             <a:pPr>
               <a:defRPr sz="1000" b="1">
                 <a:solidFill>
-                  <a:srgbClr val="2563EB"/>
-                </a:solidFill>
-                <a:latin typeface="Arial"/>
-              </a:defRPr>
-            </a:pPr>
-            <a:r>
-              <a:t>ROLE SPOTLIGHT: CANTEEN VENDOR</a:t>
+                  <a:srgbClr val="60A5FA"/>
+                </a:solidFill>
+                <a:latin typeface="Arial"/>
+              </a:defRPr>
+            </a:pPr>
+            <a:r>
+              <a:t>VENDOR PORTAL</a:t>
             </a:r>
           </a:p>
         </p:txBody>
@@ -9926,7 +10456,7 @@
           <a:noFill/>
         </p:spPr>
         <p:txBody>
-          <a:bodyPr wrap="square" lIns="0" tIns="0" rIns="0" bIns="0">
+          <a:bodyPr wrap="square" lIns="0" rIns="0" tIns="0" bIns="0">
             <a:spAutoFit/>
           </a:bodyPr>
           <a:lstStyle/>
@@ -9934,13 +10464,13 @@
             <a:pPr>
               <a:defRPr sz="2200" b="1">
                 <a:solidFill>
-                  <a:srgbClr val="0F172A"/>
-                </a:solidFill>
-                <a:latin typeface="Arial"/>
-              </a:defRPr>
-            </a:pPr>
-            <a:r>
-              <a:t>Vendor Portal: Kitchen Management &amp; Sub-Invoicing</a:t>
+                  <a:srgbClr val="F8FAFC"/>
+                </a:solidFill>
+                <a:latin typeface="Arial"/>
+              </a:defRPr>
+            </a:pPr>
+            <a:r>
+              <a:t>Vendor Operations: Kitchen Processing &amp; Settlement</a:t>
             </a:r>
           </a:p>
         </p:txBody>
@@ -9960,7 +10490,7 @@
             <a:avLst/>
           </a:prstGeom>
           <a:solidFill>
-            <a:srgbClr val="E2E8F0"/>
+            <a:srgbClr val="334155"/>
           </a:solidFill>
           <a:ln>
             <a:noFill/>
@@ -9985,7 +10515,6 @@
           <a:lstStyle/>
           <a:p>
             <a:pPr algn="ctr"/>
-            <a:endParaRPr/>
           </a:p>
         </p:txBody>
       </p:sp>
@@ -10006,7 +10535,7 @@
           <a:noFill/>
         </p:spPr>
         <p:txBody>
-          <a:bodyPr wrap="none" lIns="0" tIns="0" rIns="0" bIns="0">
+          <a:bodyPr wrap="none" lIns="0" rIns="0" tIns="0" bIns="0">
             <a:spAutoFit/>
           </a:bodyPr>
           <a:lstStyle/>
@@ -10014,13 +10543,13 @@
             <a:pPr>
               <a:defRPr sz="900">
                 <a:solidFill>
-                  <a:srgbClr val="64748B"/>
-                </a:solidFill>
-                <a:latin typeface="Arial"/>
-              </a:defRPr>
-            </a:pPr>
-            <a:r>
-              <a:t>AharSetu Enterprise ERP  |  Board Presentation  |  Slide 8 of 14</a:t>
+                  <a:srgbClr val="94A3B8"/>
+                </a:solidFill>
+                <a:latin typeface="Arial"/>
+              </a:defRPr>
+            </a:pPr>
+            <a:r>
+              <a:t>AharSetu Enterprise ERP  |  Board of Directors Presentation  |  Slide 8 of 14</a:t>
             </a:r>
           </a:p>
         </p:txBody>
@@ -10034,17 +10563,17 @@
         <p:spPr>
           <a:xfrm>
             <a:off x="731520" y="1463040"/>
-            <a:ext cx="5029200" cy="4480560"/>
+            <a:ext cx="5303520" cy="1371600"/>
           </a:xfrm>
           <a:prstGeom prst="roundRect">
             <a:avLst/>
           </a:prstGeom>
           <a:solidFill>
-            <a:srgbClr val="FFFFFF"/>
+            <a:srgbClr val="1E293B"/>
           </a:solidFill>
           <a:ln w="12700">
             <a:solidFill>
-              <a:srgbClr val="E2E8F0"/>
+              <a:srgbClr val="334155"/>
             </a:solidFill>
           </a:ln>
         </p:spPr>
@@ -10067,7 +10596,6 @@
           <a:lstStyle/>
           <a:p>
             <a:pPr algn="ctr"/>
-            <a:endParaRPr/>
           </a:p>
         </p:txBody>
       </p:sp>
@@ -10080,7 +10608,7 @@
         <p:spPr>
           <a:xfrm>
             <a:off x="960120" y="1645920"/>
-            <a:ext cx="4572000" cy="4114800"/>
+            <a:ext cx="4846320" cy="1005840"/>
           </a:xfrm>
           <a:prstGeom prst="rect">
             <a:avLst/>
@@ -10088,7 +10616,7 @@
           <a:noFill/>
         </p:spPr>
         <p:txBody>
-          <a:bodyPr wrap="square" lIns="0" tIns="0" rIns="0" bIns="0">
+          <a:bodyPr wrap="square" lIns="0" rIns="0" tIns="0" bIns="0">
             <a:spAutoFit/>
           </a:bodyPr>
           <a:lstStyle/>
@@ -10102,7 +10630,7 @@
               </a:defRPr>
             </a:pPr>
             <a:r>
-              <a:t>Vendor Kitchen Operations</a:t>
+              <a:t>Isolated Sub-Order Processing</a:t>
             </a:r>
           </a:p>
           <a:p>
@@ -10112,13 +10640,13 @@
               </a:spcBef>
               <a:defRPr sz="1000">
                 <a:solidFill>
-                  <a:srgbClr val="0F172A"/>
-                </a:solidFill>
-                <a:latin typeface="Arial"/>
-              </a:defRPr>
-            </a:pPr>
-            <a:r>
-              <a:t>• Instant Kitchen Notifications: Live audio alerts and push messages upon new orders.</a:t>
+                  <a:srgbClr val="F8FAFC"/>
+                </a:solidFill>
+                <a:latin typeface="Arial"/>
+              </a:defRPr>
+            </a:pPr>
+            <a:r>
+              <a:t>• Canteens only see their designated items without seeing competitor pricing.</a:t>
             </a:r>
           </a:p>
           <a:p>
@@ -10128,13 +10656,13 @@
               </a:spcBef>
               <a:defRPr sz="1000">
                 <a:solidFill>
-                  <a:srgbClr val="0F172A"/>
-                </a:solidFill>
-                <a:latin typeface="Arial"/>
-              </a:defRPr>
-            </a:pPr>
-            <a:r>
-              <a:t>• Real-Time Menu Toggle: Mark items 'Available' or 'Out of Stock' with immediate sync.</a:t>
+                  <a:srgbClr val="F8FAFC"/>
+                </a:solidFill>
+                <a:latin typeface="Arial"/>
+              </a:defRPr>
+            </a:pPr>
+            <a:r>
+              <a:t>• Interactive price input for confirming sub-order totals before dispatch.</a:t>
             </a:r>
           </a:p>
           <a:p>
@@ -10144,61 +10672,13 @@
               </a:spcBef>
               <a:defRPr sz="1000">
                 <a:solidFill>
-                  <a:srgbClr val="0F172A"/>
-                </a:solidFill>
-                <a:latin typeface="Arial"/>
-              </a:defRPr>
-            </a:pPr>
-            <a:r>
-              <a:t>• Clarification Workflow: Request substitutions (Minor/Major) with coordinator &amp; principal.</a:t>
-            </a:r>
-          </a:p>
-          <a:p>
-            <a:pPr>
-              <a:spcBef>
-                <a:spcPts val="400"/>
-              </a:spcBef>
-              <a:defRPr sz="1000">
-                <a:solidFill>
-                  <a:srgbClr val="0F172A"/>
-                </a:solidFill>
-                <a:latin typeface="Arial"/>
-              </a:defRPr>
-            </a:pPr>
-            <a:r>
-              <a:t>• Automated Sub-Invoicing: Dedicated vendor sub-invoices generated per kitchen.</a:t>
-            </a:r>
-          </a:p>
-          <a:p>
-            <a:pPr>
-              <a:spcBef>
-                <a:spcPts val="400"/>
-              </a:spcBef>
-              <a:defRPr sz="1000">
-                <a:solidFill>
-                  <a:srgbClr val="0F172A"/>
-                </a:solidFill>
-                <a:latin typeface="Arial"/>
-              </a:defRPr>
-            </a:pPr>
-            <a:r>
-              <a:t>• Monthly Settlement Tracking: Transparent ledger of paid vs outstanding college balances.</a:t>
-            </a:r>
-          </a:p>
-          <a:p>
-            <a:pPr>
-              <a:spcBef>
-                <a:spcPts val="400"/>
-              </a:spcBef>
-              <a:defRPr sz="1000">
-                <a:solidFill>
-                  <a:srgbClr val="0F172A"/>
-                </a:solidFill>
-                <a:latin typeface="Arial"/>
-              </a:defRPr>
-            </a:pPr>
-            <a:r>
-              <a:t>• Kitchen Operating Status: Switch canteen between Open, Closed, and Unavailable.</a:t>
+                  <a:srgbClr val="F8FAFC"/>
+                </a:solidFill>
+                <a:latin typeface="Arial"/>
+              </a:defRPr>
+            </a:pPr>
+            <a:r>
+              <a:t>• Item modification requests if ingredients or quantities are unavailable.</a:t>
             </a:r>
           </a:p>
         </p:txBody>
@@ -10211,18 +10691,18 @@
         </p:nvSpPr>
         <p:spPr>
           <a:xfrm>
-            <a:off x="5943600" y="1463040"/>
-            <a:ext cx="5516575" cy="4480560"/>
+            <a:off x="731520" y="2971800"/>
+            <a:ext cx="5303520" cy="1371600"/>
           </a:xfrm>
           <a:prstGeom prst="roundRect">
             <a:avLst/>
           </a:prstGeom>
           <a:solidFill>
-            <a:srgbClr val="F1F5F9"/>
+            <a:srgbClr val="1E293B"/>
           </a:solidFill>
-          <a:ln w="19050">
+          <a:ln w="12700">
             <a:solidFill>
-              <a:srgbClr val="BFDBFE"/>
+              <a:srgbClr val="334155"/>
             </a:solidFill>
           </a:ln>
         </p:spPr>
@@ -10245,7 +10725,6 @@
           <a:lstStyle/>
           <a:p>
             <a:pPr algn="ctr"/>
-            <a:endParaRPr/>
           </a:p>
         </p:txBody>
       </p:sp>
@@ -10257,8 +10736,8 @@
         </p:nvSpPr>
         <p:spPr>
           <a:xfrm>
-            <a:off x="6126480" y="3154680"/>
-            <a:ext cx="5150815" cy="1097280"/>
+            <a:off x="960120" y="3154680"/>
+            <a:ext cx="4846320" cy="1005840"/>
           </a:xfrm>
           <a:prstGeom prst="rect">
             <a:avLst/>
@@ -10266,41 +10745,267 @@
           <a:noFill/>
         </p:spPr>
         <p:txBody>
-          <a:bodyPr wrap="square" lIns="0" tIns="0" rIns="0" bIns="0">
+          <a:bodyPr wrap="square" lIns="0" rIns="0" tIns="0" bIns="0">
             <a:spAutoFit/>
           </a:bodyPr>
           <a:lstStyle/>
           <a:p>
+            <a:pPr>
+              <a:defRPr sz="1350" b="1">
+                <a:solidFill>
+                  <a:srgbClr val="3B82F6"/>
+                </a:solidFill>
+                <a:latin typeface="Arial"/>
+              </a:defRPr>
+            </a:pPr>
+            <a:r>
+              <a:t>Dynamic Menu &amp; Availability Management</a:t>
+            </a:r>
+          </a:p>
+          <a:p>
+            <a:pPr>
+              <a:spcBef>
+                <a:spcPts val="400"/>
+              </a:spcBef>
+              <a:defRPr sz="1000">
+                <a:solidFill>
+                  <a:srgbClr val="F8FAFC"/>
+                </a:solidFill>
+                <a:latin typeface="Arial"/>
+              </a:defRPr>
+            </a:pPr>
+            <a:r>
+              <a:t>• Vendors update item names, prices, categories, and stock availability.</a:t>
+            </a:r>
+          </a:p>
+          <a:p>
+            <a:pPr>
+              <a:spcBef>
+                <a:spcPts val="400"/>
+              </a:spcBef>
+              <a:defRPr sz="1000">
+                <a:solidFill>
+                  <a:srgbClr val="F8FAFC"/>
+                </a:solidFill>
+                <a:latin typeface="Arial"/>
+              </a:defRPr>
+            </a:pPr>
+            <a:r>
+              <a:t>• Status toggle: Open, Closed, or Temporarily Unavailable with auto-refresh.</a:t>
+            </a:r>
+          </a:p>
+        </p:txBody>
+      </p:sp>
+      <p:sp>
+        <p:nvSpPr>
+          <p:cNvPr id="11" name="Rounded Rectangle 10"/>
+          <p:cNvSpPr/>
+          <p:nvPr/>
+        </p:nvSpPr>
+        <p:spPr>
+          <a:xfrm>
+            <a:off x="731520" y="4480560"/>
+            <a:ext cx="5303520" cy="1371600"/>
+          </a:xfrm>
+          <a:prstGeom prst="roundRect">
+            <a:avLst/>
+          </a:prstGeom>
+          <a:solidFill>
+            <a:srgbClr val="1E293B"/>
+          </a:solidFill>
+          <a:ln w="12700">
+            <a:solidFill>
+              <a:srgbClr val="334155"/>
+            </a:solidFill>
+          </a:ln>
+        </p:spPr>
+        <p:style>
+          <a:lnRef idx="1">
+            <a:schemeClr val="accent1"/>
+          </a:lnRef>
+          <a:fillRef idx="3">
+            <a:schemeClr val="accent1"/>
+          </a:fillRef>
+          <a:effectRef idx="2">
+            <a:schemeClr val="accent1"/>
+          </a:effectRef>
+          <a:fontRef idx="minor">
+            <a:schemeClr val="lt1"/>
+          </a:fontRef>
+        </p:style>
+        <p:txBody>
+          <a:bodyPr rtlCol="0" anchor="ctr"/>
+          <a:lstStyle/>
+          <a:p>
+            <a:pPr algn="ctr"/>
+          </a:p>
+        </p:txBody>
+      </p:sp>
+      <p:sp>
+        <p:nvSpPr>
+          <p:cNvPr id="12" name="TextBox 11"/>
+          <p:cNvSpPr txBox="1"/>
+          <p:nvPr/>
+        </p:nvSpPr>
+        <p:spPr>
+          <a:xfrm>
+            <a:off x="960120" y="4663440"/>
+            <a:ext cx="4846320" cy="1005840"/>
+          </a:xfrm>
+          <a:prstGeom prst="rect">
+            <a:avLst/>
+          </a:prstGeom>
+          <a:noFill/>
+        </p:spPr>
+        <p:txBody>
+          <a:bodyPr wrap="square" lIns="0" rIns="0" tIns="0" bIns="0">
+            <a:spAutoFit/>
+          </a:bodyPr>
+          <a:lstStyle/>
+          <a:p>
+            <a:pPr>
+              <a:defRPr sz="1350" b="1">
+                <a:solidFill>
+                  <a:srgbClr val="10B981"/>
+                </a:solidFill>
+                <a:latin typeface="Arial"/>
+              </a:defRPr>
+            </a:pPr>
+            <a:r>
+              <a:t>Automated Monthly Revenue Ledgers</a:t>
+            </a:r>
+          </a:p>
+          <a:p>
+            <a:pPr>
+              <a:spcBef>
+                <a:spcPts val="400"/>
+              </a:spcBef>
+              <a:defRPr sz="1000">
+                <a:solidFill>
+                  <a:srgbClr val="F8FAFC"/>
+                </a:solidFill>
+                <a:latin typeface="Arial"/>
+              </a:defRPr>
+            </a:pPr>
+            <a:r>
+              <a:t>• Real-time tracking of completed orders, pending balances, and total revenue.</a:t>
+            </a:r>
+          </a:p>
+          <a:p>
+            <a:pPr>
+              <a:spcBef>
+                <a:spcPts val="400"/>
+              </a:spcBef>
+              <a:defRPr sz="1000">
+                <a:solidFill>
+                  <a:srgbClr val="F8FAFC"/>
+                </a:solidFill>
+                <a:latin typeface="Arial"/>
+              </a:defRPr>
+            </a:pPr>
+            <a:r>
+              <a:t>• Eliminates billing disputes with verified sub-invoices (INV-ORD-xxx-V1).</a:t>
+            </a:r>
+          </a:p>
+        </p:txBody>
+      </p:sp>
+      <p:sp>
+        <p:nvSpPr>
+          <p:cNvPr id="13" name="Rounded Rectangle 12"/>
+          <p:cNvSpPr/>
+          <p:nvPr/>
+        </p:nvSpPr>
+        <p:spPr>
+          <a:xfrm>
+            <a:off x="6217920" y="1463040"/>
+            <a:ext cx="5242255" cy="4480560"/>
+          </a:xfrm>
+          <a:prstGeom prst="roundRect">
+            <a:avLst/>
+          </a:prstGeom>
+          <a:solidFill>
+            <a:srgbClr val="182235"/>
+          </a:solidFill>
+          <a:ln w="19050">
+            <a:solidFill>
+              <a:srgbClr val="60A5FA"/>
+            </a:solidFill>
+          </a:ln>
+        </p:spPr>
+        <p:style>
+          <a:lnRef idx="1">
+            <a:schemeClr val="accent1"/>
+          </a:lnRef>
+          <a:fillRef idx="3">
+            <a:schemeClr val="accent1"/>
+          </a:fillRef>
+          <a:effectRef idx="2">
+            <a:schemeClr val="accent1"/>
+          </a:effectRef>
+          <a:fontRef idx="minor">
+            <a:schemeClr val="lt1"/>
+          </a:fontRef>
+        </p:style>
+        <p:txBody>
+          <a:bodyPr rtlCol="0" anchor="ctr"/>
+          <a:lstStyle/>
+          <a:p>
+            <a:pPr algn="ctr"/>
+          </a:p>
+        </p:txBody>
+      </p:sp>
+      <p:sp>
+        <p:nvSpPr>
+          <p:cNvPr id="14" name="TextBox 13"/>
+          <p:cNvSpPr txBox="1"/>
+          <p:nvPr/>
+        </p:nvSpPr>
+        <p:spPr>
+          <a:xfrm>
+            <a:off x="6400800" y="3154680"/>
+            <a:ext cx="4876495" cy="1097280"/>
+          </a:xfrm>
+          <a:prstGeom prst="rect">
+            <a:avLst/>
+          </a:prstGeom>
+          <a:noFill/>
+        </p:spPr>
+        <p:txBody>
+          <a:bodyPr wrap="square" lIns="0" rIns="0" tIns="0" bIns="0">
+            <a:spAutoFit/>
+          </a:bodyPr>
+          <a:lstStyle/>
+          <a:p>
             <a:pPr algn="ctr">
               <a:defRPr sz="1200" b="1">
                 <a:solidFill>
-                  <a:srgbClr val="2563EB"/>
-                </a:solidFill>
-                <a:latin typeface="Arial"/>
-              </a:defRPr>
-            </a:pPr>
-            <a:r>
-              <a:t>📸 Vendor Kitchen Dashboard &amp; Settlement View</a:t>
+                  <a:srgbClr val="60A5FA"/>
+                </a:solidFill>
+                <a:latin typeface="Arial"/>
+              </a:defRPr>
+            </a:pPr>
+            <a:r>
+              <a:t>📸 Vendor Kitchen Dashboard Screenshot</a:t>
             </a:r>
           </a:p>
           <a:p>
             <a:pPr algn="ctr">
               <a:defRPr sz="950">
                 <a:solidFill>
-                  <a:srgbClr val="64748B"/>
-                </a:solidFill>
-                <a:latin typeface="Arial"/>
-              </a:defRPr>
-            </a:pPr>
-            <a:r>
-              <a:t>Insert Vendor UI Screenshot (/vendor)</a:t>
+                  <a:srgbClr val="94A3B8"/>
+                </a:solidFill>
+                <a:latin typeface="Arial"/>
+              </a:defRPr>
+            </a:pPr>
+            <a:r>
+              <a:t>Insert Vendor Order Processing &amp; Menu Management Screenshot</a:t>
             </a:r>
           </a:p>
           <a:p>
             <a:pPr algn="ctr">
               <a:defRPr sz="850" i="1">
                 <a:solidFill>
-                  <a:srgbClr val="64748B"/>
+                  <a:srgbClr val="94A3B8"/>
                 </a:solidFill>
                 <a:latin typeface="Arial"/>
               </a:defRPr>
@@ -10320,7 +11025,7 @@
 </file>
 
 <file path=ppt/slides/slide9.xml><?xml version="1.0" encoding="utf-8"?>
-<p:sld xmlns:a="http://schemas.openxmlformats.org/drawingml/2006/main" xmlns:r="http://schemas.openxmlformats.org/officeDocument/2006/relationships" xmlns:p="http://schemas.openxmlformats.org/presentationml/2006/main">
+<p:sld xmlns:a="http://schemas.openxmlformats.org/drawingml/2006/main" xmlns:p="http://schemas.openxmlformats.org/presentationml/2006/main" xmlns:r="http://schemas.openxmlformats.org/officeDocument/2006/relationships">
   <p:cSld>
     <p:spTree>
       <p:nvGrpSpPr>
@@ -10328,14 +11033,7 @@
         <p:cNvGrpSpPr/>
         <p:nvPr/>
       </p:nvGrpSpPr>
-      <p:grpSpPr>
-        <a:xfrm>
-          <a:off x="0" y="0"/>
-          <a:ext cx="0" cy="0"/>
-          <a:chOff x="0" y="0"/>
-          <a:chExt cx="0" cy="0"/>
-        </a:xfrm>
-      </p:grpSpPr>
+      <p:grpSpPr/>
       <p:sp>
         <p:nvSpPr>
           <p:cNvPr id="2" name="Rectangle 1"/>
@@ -10351,7 +11049,7 @@
             <a:avLst/>
           </a:prstGeom>
           <a:solidFill>
-            <a:srgbClr val="F8FAFC"/>
+            <a:srgbClr val="0F172A"/>
           </a:solidFill>
           <a:ln>
             <a:noFill/>
@@ -10376,7 +11074,6 @@
           <a:lstStyle/>
           <a:p>
             <a:pPr algn="ctr"/>
-            <a:endParaRPr/>
           </a:p>
         </p:txBody>
       </p:sp>
@@ -10397,7 +11094,7 @@
           <a:noFill/>
         </p:spPr>
         <p:txBody>
-          <a:bodyPr wrap="square" lIns="0" tIns="0" rIns="0" bIns="0">
+          <a:bodyPr wrap="square" lIns="0" rIns="0" tIns="0" bIns="0">
             <a:spAutoFit/>
           </a:bodyPr>
           <a:lstStyle/>
@@ -10405,13 +11102,13 @@
             <a:pPr>
               <a:defRPr sz="1000" b="1">
                 <a:solidFill>
-                  <a:srgbClr val="2563EB"/>
-                </a:solidFill>
-                <a:latin typeface="Arial"/>
-              </a:defRPr>
-            </a:pPr>
-            <a:r>
-              <a:t>ROLE SPOTLIGHT: ADMIN</a:t>
+                  <a:srgbClr val="60A5FA"/>
+                </a:solidFill>
+                <a:latin typeface="Arial"/>
+              </a:defRPr>
+            </a:pPr>
+            <a:r>
+              <a:t>ADMIN PORTAL</a:t>
             </a:r>
           </a:p>
         </p:txBody>
@@ -10433,7 +11130,7 @@
           <a:noFill/>
         </p:spPr>
         <p:txBody>
-          <a:bodyPr wrap="square" lIns="0" tIns="0" rIns="0" bIns="0">
+          <a:bodyPr wrap="square" lIns="0" rIns="0" tIns="0" bIns="0">
             <a:spAutoFit/>
           </a:bodyPr>
           <a:lstStyle/>
@@ -10441,13 +11138,13 @@
             <a:pPr>
               <a:defRPr sz="2200" b="1">
                 <a:solidFill>
-                  <a:srgbClr val="0F172A"/>
-                </a:solidFill>
-                <a:latin typeface="Arial"/>
-              </a:defRPr>
-            </a:pPr>
-            <a:r>
-              <a:t>Admin Portal: Institutional Control, Users &amp; Audit Trail</a:t>
+                  <a:srgbClr val="F8FAFC"/>
+                </a:solidFill>
+                <a:latin typeface="Arial"/>
+              </a:defRPr>
+            </a:pPr>
+            <a:r>
+              <a:t>Administrative Governance &amp; Institutional Control</a:t>
             </a:r>
           </a:p>
         </p:txBody>
@@ -10467,7 +11164,7 @@
             <a:avLst/>
           </a:prstGeom>
           <a:solidFill>
-            <a:srgbClr val="E2E8F0"/>
+            <a:srgbClr val="334155"/>
           </a:solidFill>
           <a:ln>
             <a:noFill/>
@@ -10492,7 +11189,6 @@
           <a:lstStyle/>
           <a:p>
             <a:pPr algn="ctr"/>
-            <a:endParaRPr/>
           </a:p>
         </p:txBody>
       </p:sp>
@@ -10513,7 +11209,7 @@
           <a:noFill/>
         </p:spPr>
         <p:txBody>
-          <a:bodyPr wrap="none" lIns="0" tIns="0" rIns="0" bIns="0">
+          <a:bodyPr wrap="none" lIns="0" rIns="0" tIns="0" bIns="0">
             <a:spAutoFit/>
           </a:bodyPr>
           <a:lstStyle/>
@@ -10521,13 +11217,13 @@
             <a:pPr>
               <a:defRPr sz="900">
                 <a:solidFill>
-                  <a:srgbClr val="64748B"/>
-                </a:solidFill>
-                <a:latin typeface="Arial"/>
-              </a:defRPr>
-            </a:pPr>
-            <a:r>
-              <a:t>AharSetu Enterprise ERP  |  Board Presentation  |  Slide 9 of 14</a:t>
+                  <a:srgbClr val="94A3B8"/>
+                </a:solidFill>
+                <a:latin typeface="Arial"/>
+              </a:defRPr>
+            </a:pPr>
+            <a:r>
+              <a:t>AharSetu Enterprise ERP  |  Board of Directors Presentation  |  Slide 9 of 14</a:t>
             </a:r>
           </a:p>
         </p:txBody>
@@ -10541,17 +11237,17 @@
         <p:spPr>
           <a:xfrm>
             <a:off x="731520" y="1463040"/>
-            <a:ext cx="5029200" cy="4480560"/>
+            <a:ext cx="5303520" cy="1371600"/>
           </a:xfrm>
           <a:prstGeom prst="roundRect">
             <a:avLst/>
           </a:prstGeom>
           <a:solidFill>
-            <a:srgbClr val="FFFFFF"/>
+            <a:srgbClr val="1E293B"/>
           </a:solidFill>
           <a:ln w="12700">
             <a:solidFill>
-              <a:srgbClr val="E2E8F0"/>
+              <a:srgbClr val="334155"/>
             </a:solidFill>
           </a:ln>
         </p:spPr>
@@ -10574,7 +11270,6 @@
           <a:lstStyle/>
           <a:p>
             <a:pPr algn="ctr"/>
-            <a:endParaRPr/>
           </a:p>
         </p:txBody>
       </p:sp>
@@ -10587,7 +11282,7 @@
         <p:spPr>
           <a:xfrm>
             <a:off x="960120" y="1645920"/>
-            <a:ext cx="4572000" cy="4114800"/>
+            <a:ext cx="4846320" cy="1005840"/>
           </a:xfrm>
           <a:prstGeom prst="rect">
             <a:avLst/>
@@ -10595,7 +11290,7 @@
           <a:noFill/>
         </p:spPr>
         <p:txBody>
-          <a:bodyPr wrap="square" lIns="0" tIns="0" rIns="0" bIns="0">
+          <a:bodyPr wrap="square" lIns="0" rIns="0" tIns="0" bIns="0">
             <a:spAutoFit/>
           </a:bodyPr>
           <a:lstStyle/>
@@ -10603,13 +11298,13 @@
             <a:pPr>
               <a:defRPr sz="1350" b="1">
                 <a:solidFill>
-                  <a:srgbClr val="10B981"/>
-                </a:solidFill>
-                <a:latin typeface="Arial"/>
-              </a:defRPr>
-            </a:pPr>
-            <a:r>
-              <a:t>Institutional Administration</a:t>
+                  <a:srgbClr val="3B82F6"/>
+                </a:solidFill>
+                <a:latin typeface="Arial"/>
+              </a:defRPr>
+            </a:pPr>
+            <a:r>
+              <a:t>Institutional User Management</a:t>
             </a:r>
           </a:p>
           <a:p>
@@ -10619,13 +11314,13 @@
               </a:spcBef>
               <a:defRPr sz="1000">
                 <a:solidFill>
-                  <a:srgbClr val="0F172A"/>
-                </a:solidFill>
-                <a:latin typeface="Arial"/>
-              </a:defRPr>
-            </a:pPr>
-            <a:r>
-              <a:t>• Enterprise User Management: Add, edit, and safely delete coordinators, principals, vendors.</a:t>
+                  <a:srgbClr val="F8FAFC"/>
+                </a:solidFill>
+                <a:latin typeface="Arial"/>
+              </a:defRPr>
+            </a:pPr>
+            <a:r>
+              <a:t>• CRUD management of Coordinators, Principals, DCR Auditors, and Vendors.</a:t>
             </a:r>
           </a:p>
           <a:p>
@@ -10635,77 +11330,13 @@
               </a:spcBef>
               <a:defRPr sz="1000">
                 <a:solidFill>
-                  <a:srgbClr val="0F172A"/>
-                </a:solidFill>
-                <a:latin typeface="Arial"/>
-              </a:defRPr>
-            </a:pPr>
-            <a:r>
-              <a:t>• Immutable Audit Logs: Detailed trail tracking user ID, IP address, timestamp &amp; old/new payloads.</a:t>
-            </a:r>
-          </a:p>
-          <a:p>
-            <a:pPr>
-              <a:spcBef>
-                <a:spcPts val="400"/>
-              </a:spcBef>
-              <a:defRPr sz="1000">
-                <a:solidFill>
-                  <a:srgbClr val="0F172A"/>
-                </a:solidFill>
-                <a:latin typeface="Arial"/>
-              </a:defRPr>
-            </a:pPr>
-            <a:r>
-              <a:t>• Department Management: Add new institutional wings, codes, and toggle active status.</a:t>
-            </a:r>
-          </a:p>
-          <a:p>
-            <a:pPr>
-              <a:spcBef>
-                <a:spcPts val="400"/>
-              </a:spcBef>
-              <a:defRPr sz="1000">
-                <a:solidFill>
-                  <a:srgbClr val="0F172A"/>
-                </a:solidFill>
-                <a:latin typeface="Arial"/>
-              </a:defRPr>
-            </a:pPr>
-            <a:r>
-              <a:t>• Vendor Onboarding &amp; Settlements: Register canteens and track monthly bank clearances.</a:t>
-            </a:r>
-          </a:p>
-          <a:p>
-            <a:pPr>
-              <a:spcBef>
-                <a:spcPts val="400"/>
-              </a:spcBef>
-              <a:defRPr sz="1000">
-                <a:solidFill>
-                  <a:srgbClr val="0F172A"/>
-                </a:solidFill>
-                <a:latin typeface="Arial"/>
-              </a:defRPr>
-            </a:pPr>
-            <a:r>
-              <a:t>• Emergency Controls: Bulk user deactivation protection with confirmation passphrases.</a:t>
-            </a:r>
-          </a:p>
-          <a:p>
-            <a:pPr>
-              <a:spcBef>
-                <a:spcPts val="400"/>
-              </a:spcBef>
-              <a:defRPr sz="1000">
-                <a:solidFill>
-                  <a:srgbClr val="0F172A"/>
-                </a:solidFill>
-                <a:latin typeface="Arial"/>
-              </a:defRPr>
-            </a:pPr>
-            <a:r>
-              <a:t>• System Observability: Real-time PostgreSQL database pool and API latency health monitoring.</a:t>
+                  <a:srgbClr val="F8FAFC"/>
+                </a:solidFill>
+                <a:latin typeface="Arial"/>
+              </a:defRPr>
+            </a:pPr>
+            <a:r>
+              <a:t>• Granular department assignments and permanent deletion cascading protection.</a:t>
             </a:r>
           </a:p>
         </p:txBody>
@@ -10718,18 +11349,18 @@
         </p:nvSpPr>
         <p:spPr>
           <a:xfrm>
-            <a:off x="5943600" y="1463040"/>
-            <a:ext cx="5516575" cy="4480560"/>
+            <a:off x="731520" y="2971800"/>
+            <a:ext cx="5303520" cy="1371600"/>
           </a:xfrm>
           <a:prstGeom prst="roundRect">
             <a:avLst/>
           </a:prstGeom>
           <a:solidFill>
-            <a:srgbClr val="F1F5F9"/>
+            <a:srgbClr val="1E293B"/>
           </a:solidFill>
-          <a:ln w="19050">
+          <a:ln w="12700">
             <a:solidFill>
-              <a:srgbClr val="BFDBFE"/>
+              <a:srgbClr val="334155"/>
             </a:solidFill>
           </a:ln>
         </p:spPr>
@@ -10752,7 +11383,6 @@
           <a:lstStyle/>
           <a:p>
             <a:pPr algn="ctr"/>
-            <a:endParaRPr/>
           </a:p>
         </p:txBody>
       </p:sp>
@@ -10764,8 +11394,8 @@
         </p:nvSpPr>
         <p:spPr>
           <a:xfrm>
-            <a:off x="6126480" y="3154680"/>
-            <a:ext cx="5150815" cy="1097280"/>
+            <a:off x="960120" y="3154680"/>
+            <a:ext cx="4846320" cy="1005840"/>
           </a:xfrm>
           <a:prstGeom prst="rect">
             <a:avLst/>
@@ -10773,41 +11403,267 @@
           <a:noFill/>
         </p:spPr>
         <p:txBody>
-          <a:bodyPr wrap="square" lIns="0" tIns="0" rIns="0" bIns="0">
+          <a:bodyPr wrap="square" lIns="0" rIns="0" tIns="0" bIns="0">
             <a:spAutoFit/>
           </a:bodyPr>
           <a:lstStyle/>
           <a:p>
+            <a:pPr>
+              <a:defRPr sz="1350" b="1">
+                <a:solidFill>
+                  <a:srgbClr val="A855F7"/>
+                </a:solidFill>
+                <a:latin typeface="Arial"/>
+              </a:defRPr>
+            </a:pPr>
+            <a:r>
+              <a:t>Multi-Department Configuration</a:t>
+            </a:r>
+          </a:p>
+          <a:p>
+            <a:pPr>
+              <a:spcBef>
+                <a:spcPts val="400"/>
+              </a:spcBef>
+              <a:defRPr sz="1000">
+                <a:solidFill>
+                  <a:srgbClr val="F8FAFC"/>
+                </a:solidFill>
+                <a:latin typeface="Arial"/>
+              </a:defRPr>
+            </a:pPr>
+            <a:r>
+              <a:t>• Create, rename, and activate/deactivate institutional academic departments.</a:t>
+            </a:r>
+          </a:p>
+          <a:p>
+            <a:pPr>
+              <a:spcBef>
+                <a:spcPts val="400"/>
+              </a:spcBef>
+              <a:defRPr sz="1000">
+                <a:solidFill>
+                  <a:srgbClr val="F8FAFC"/>
+                </a:solidFill>
+                <a:latin typeface="Arial"/>
+              </a:defRPr>
+            </a:pPr>
+            <a:r>
+              <a:t>• Multi-department mapping for executive Principals supervising multiple wings.</a:t>
+            </a:r>
+          </a:p>
+        </p:txBody>
+      </p:sp>
+      <p:sp>
+        <p:nvSpPr>
+          <p:cNvPr id="11" name="Rounded Rectangle 10"/>
+          <p:cNvSpPr/>
+          <p:nvPr/>
+        </p:nvSpPr>
+        <p:spPr>
+          <a:xfrm>
+            <a:off x="731520" y="4480560"/>
+            <a:ext cx="5303520" cy="1371600"/>
+          </a:xfrm>
+          <a:prstGeom prst="roundRect">
+            <a:avLst/>
+          </a:prstGeom>
+          <a:solidFill>
+            <a:srgbClr val="1E293B"/>
+          </a:solidFill>
+          <a:ln w="12700">
+            <a:solidFill>
+              <a:srgbClr val="334155"/>
+            </a:solidFill>
+          </a:ln>
+        </p:spPr>
+        <p:style>
+          <a:lnRef idx="1">
+            <a:schemeClr val="accent1"/>
+          </a:lnRef>
+          <a:fillRef idx="3">
+            <a:schemeClr val="accent1"/>
+          </a:fillRef>
+          <a:effectRef idx="2">
+            <a:schemeClr val="accent1"/>
+          </a:effectRef>
+          <a:fontRef idx="minor">
+            <a:schemeClr val="lt1"/>
+          </a:fontRef>
+        </p:style>
+        <p:txBody>
+          <a:bodyPr rtlCol="0" anchor="ctr"/>
+          <a:lstStyle/>
+          <a:p>
+            <a:pPr algn="ctr"/>
+          </a:p>
+        </p:txBody>
+      </p:sp>
+      <p:sp>
+        <p:nvSpPr>
+          <p:cNvPr id="12" name="TextBox 11"/>
+          <p:cNvSpPr txBox="1"/>
+          <p:nvPr/>
+        </p:nvSpPr>
+        <p:spPr>
+          <a:xfrm>
+            <a:off x="960120" y="4663440"/>
+            <a:ext cx="4846320" cy="1005840"/>
+          </a:xfrm>
+          <a:prstGeom prst="rect">
+            <a:avLst/>
+          </a:prstGeom>
+          <a:noFill/>
+        </p:spPr>
+        <p:txBody>
+          <a:bodyPr wrap="square" lIns="0" rIns="0" tIns="0" bIns="0">
+            <a:spAutoFit/>
+          </a:bodyPr>
+          <a:lstStyle/>
+          <a:p>
+            <a:pPr>
+              <a:defRPr sz="1350" b="1">
+                <a:solidFill>
+                  <a:srgbClr val="10B981"/>
+                </a:solidFill>
+                <a:latin typeface="Arial"/>
+              </a:defRPr>
+            </a:pPr>
+            <a:r>
+              <a:t>Financial Reports &amp; Audit Trail</a:t>
+            </a:r>
+          </a:p>
+          <a:p>
+            <a:pPr>
+              <a:spcBef>
+                <a:spcPts val="400"/>
+              </a:spcBef>
+              <a:defRPr sz="1000">
+                <a:solidFill>
+                  <a:srgbClr val="F8FAFC"/>
+                </a:solidFill>
+                <a:latin typeface="Arial"/>
+              </a:defRPr>
+            </a:pPr>
+            <a:r>
+              <a:t>• Comprehensive order filters by date, department, status, vendor, and coordinator.</a:t>
+            </a:r>
+          </a:p>
+          <a:p>
+            <a:pPr>
+              <a:spcBef>
+                <a:spcPts val="400"/>
+              </a:spcBef>
+              <a:defRPr sz="1000">
+                <a:solidFill>
+                  <a:srgbClr val="F8FAFC"/>
+                </a:solidFill>
+                <a:latin typeface="Arial"/>
+              </a:defRPr>
+            </a:pPr>
+            <a:r>
+              <a:t>• System health diagnostics, WebSocket monitor, and permanent security logs.</a:t>
+            </a:r>
+          </a:p>
+        </p:txBody>
+      </p:sp>
+      <p:sp>
+        <p:nvSpPr>
+          <p:cNvPr id="13" name="Rounded Rectangle 12"/>
+          <p:cNvSpPr/>
+          <p:nvPr/>
+        </p:nvSpPr>
+        <p:spPr>
+          <a:xfrm>
+            <a:off x="6217920" y="1463040"/>
+            <a:ext cx="5242255" cy="4480560"/>
+          </a:xfrm>
+          <a:prstGeom prst="roundRect">
+            <a:avLst/>
+          </a:prstGeom>
+          <a:solidFill>
+            <a:srgbClr val="182235"/>
+          </a:solidFill>
+          <a:ln w="19050">
+            <a:solidFill>
+              <a:srgbClr val="60A5FA"/>
+            </a:solidFill>
+          </a:ln>
+        </p:spPr>
+        <p:style>
+          <a:lnRef idx="1">
+            <a:schemeClr val="accent1"/>
+          </a:lnRef>
+          <a:fillRef idx="3">
+            <a:schemeClr val="accent1"/>
+          </a:fillRef>
+          <a:effectRef idx="2">
+            <a:schemeClr val="accent1"/>
+          </a:effectRef>
+          <a:fontRef idx="minor">
+            <a:schemeClr val="lt1"/>
+          </a:fontRef>
+        </p:style>
+        <p:txBody>
+          <a:bodyPr rtlCol="0" anchor="ctr"/>
+          <a:lstStyle/>
+          <a:p>
+            <a:pPr algn="ctr"/>
+          </a:p>
+        </p:txBody>
+      </p:sp>
+      <p:sp>
+        <p:nvSpPr>
+          <p:cNvPr id="14" name="TextBox 13"/>
+          <p:cNvSpPr txBox="1"/>
+          <p:nvPr/>
+        </p:nvSpPr>
+        <p:spPr>
+          <a:xfrm>
+            <a:off x="6400800" y="3154680"/>
+            <a:ext cx="4876495" cy="1097280"/>
+          </a:xfrm>
+          <a:prstGeom prst="rect">
+            <a:avLst/>
+          </a:prstGeom>
+          <a:noFill/>
+        </p:spPr>
+        <p:txBody>
+          <a:bodyPr wrap="square" lIns="0" rIns="0" tIns="0" bIns="0">
+            <a:spAutoFit/>
+          </a:bodyPr>
+          <a:lstStyle/>
+          <a:p>
             <a:pPr algn="ctr">
               <a:defRPr sz="1200" b="1">
                 <a:solidFill>
-                  <a:srgbClr val="2563EB"/>
-                </a:solidFill>
-                <a:latin typeface="Arial"/>
-              </a:defRPr>
-            </a:pPr>
-            <a:r>
-              <a:t>📸 Admin Dashboard &amp; User Manager Table</a:t>
+                  <a:srgbClr val="60A5FA"/>
+                </a:solidFill>
+                <a:latin typeface="Arial"/>
+              </a:defRPr>
+            </a:pPr>
+            <a:r>
+              <a:t>📸 Admin Console Screenshot</a:t>
             </a:r>
           </a:p>
           <a:p>
             <a:pPr algn="ctr">
               <a:defRPr sz="950">
                 <a:solidFill>
-                  <a:srgbClr val="64748B"/>
-                </a:solidFill>
-                <a:latin typeface="Arial"/>
-              </a:defRPr>
-            </a:pPr>
-            <a:r>
-              <a:t>Insert Admin UI Screenshot (/admin/users)</a:t>
+                  <a:srgbClr val="94A3B8"/>
+                </a:solidFill>
+                <a:latin typeface="Arial"/>
+              </a:defRPr>
+            </a:pPr>
+            <a:r>
+              <a:t>Insert Admin User Management &amp; Reports Page Screenshot</a:t>
             </a:r>
           </a:p>
           <a:p>
             <a:pPr algn="ctr">
               <a:defRPr sz="850" i="1">
                 <a:solidFill>
-                  <a:srgbClr val="64748B"/>
+                  <a:srgbClr val="94A3B8"/>
                 </a:solidFill>
                 <a:latin typeface="Arial"/>
               </a:defRPr>

--- a/AharSetu_Board_Presentation.pptx
+++ b/AharSetu_Board_Presentation.pptx
@@ -5,22 +5,22 @@
     <p:sldMasterId id="2147483648" r:id="rId1"/>
   </p:sldMasterIdLst>
   <p:sldIdLst>
-    <p:sldId id="256" r:id="rId7"/>
-    <p:sldId id="257" r:id="rId8"/>
-    <p:sldId id="258" r:id="rId9"/>
-    <p:sldId id="259" r:id="rId10"/>
-    <p:sldId id="260" r:id="rId11"/>
-    <p:sldId id="261" r:id="rId12"/>
-    <p:sldId id="262" r:id="rId13"/>
-    <p:sldId id="263" r:id="rId14"/>
-    <p:sldId id="264" r:id="rId15"/>
-    <p:sldId id="265" r:id="rId16"/>
-    <p:sldId id="266" r:id="rId17"/>
-    <p:sldId id="267" r:id="rId18"/>
-    <p:sldId id="268" r:id="rId19"/>
-    <p:sldId id="269" r:id="rId20"/>
+    <p:sldId id="256" r:id="rId2"/>
+    <p:sldId id="257" r:id="rId3"/>
+    <p:sldId id="258" r:id="rId4"/>
+    <p:sldId id="259" r:id="rId5"/>
+    <p:sldId id="260" r:id="rId6"/>
+    <p:sldId id="261" r:id="rId7"/>
+    <p:sldId id="262" r:id="rId8"/>
+    <p:sldId id="263" r:id="rId9"/>
+    <p:sldId id="264" r:id="rId10"/>
+    <p:sldId id="265" r:id="rId11"/>
+    <p:sldId id="266" r:id="rId12"/>
+    <p:sldId id="267" r:id="rId13"/>
+    <p:sldId id="268" r:id="rId14"/>
+    <p:sldId id="269" r:id="rId15"/>
   </p:sldIdLst>
-  <p:sldSz cx="12191695" cy="6858000" type="screen4x3"/>
+  <p:sldSz cx="12192000" cy="6858000"/>
   <p:notesSz cx="6858000" cy="9144000"/>
   <p:defaultTextStyle>
     <a:defPPr>
@@ -117,6 +117,22 @@
       </a:defRPr>
     </a:lvl9pPr>
   </p:defaultTextStyle>
+  <p:extLst>
+    <p:ext uri="{EFAFB233-063F-42B5-8137-9DF3F51BA10A}">
+      <p15:sldGuideLst xmlns:p15="http://schemas.microsoft.com/office/powerpoint/2012/main">
+        <p15:guide id="1" orient="horz" pos="2160">
+          <p15:clr>
+            <a:srgbClr val="A4A3A4"/>
+          </p15:clr>
+        </p15:guide>
+        <p15:guide id="2" pos="2880">
+          <p15:clr>
+            <a:srgbClr val="A4A3A4"/>
+          </p15:clr>
+        </p15:guide>
+      </p15:sldGuideLst>
+    </p:ext>
+  </p:extLst>
 </p:presentation>
 </file>
 
@@ -158,10 +174,9 @@
           <a:lstStyle/>
           <a:p>
             <a:r>
-              <a:rPr lang="en-US" smtClean="0"/>
+              <a:rPr lang="en-US"/>
               <a:t>Click to edit Master title style</a:t>
             </a:r>
-            <a:endParaRPr lang="en-US"/>
           </a:p>
         </p:txBody>
       </p:sp>
@@ -277,10 +292,9 @@
           </a:lstStyle>
           <a:p>
             <a:r>
-              <a:rPr lang="en-US" smtClean="0"/>
+              <a:rPr lang="en-US"/>
               <a:t>Click to edit Master subtitle style</a:t>
             </a:r>
-            <a:endParaRPr lang="en-US"/>
           </a:p>
         </p:txBody>
       </p:sp>
@@ -301,7 +315,7 @@
           <a:p>
             <a:fld id="{5BCAD085-E8A6-8845-BD4E-CB4CCA059FC4}" type="datetimeFigureOut">
               <a:rPr lang="en-US" smtClean="0"/>
-              <a:t>1/27/13</a:t>
+              <a:t>8/19/26</a:t>
             </a:fld>
             <a:endParaRPr lang="en-US"/>
           </a:p>
@@ -395,10 +409,9 @@
           <a:lstStyle/>
           <a:p>
             <a:r>
-              <a:rPr lang="en-US" smtClean="0"/>
+              <a:rPr lang="en-US"/>
               <a:t>Click to edit Master title style</a:t>
             </a:r>
-            <a:endParaRPr lang="en-US"/>
           </a:p>
         </p:txBody>
       </p:sp>
@@ -419,38 +432,37 @@
           <a:p>
             <a:pPr lvl="0"/>
             <a:r>
-              <a:rPr lang="en-US" smtClean="0"/>
+              <a:rPr lang="en-US"/>
               <a:t>Click to edit Master text styles</a:t>
             </a:r>
           </a:p>
           <a:p>
             <a:pPr lvl="1"/>
             <a:r>
-              <a:rPr lang="en-US" smtClean="0"/>
+              <a:rPr lang="en-US"/>
               <a:t>Second level</a:t>
             </a:r>
           </a:p>
           <a:p>
             <a:pPr lvl="2"/>
             <a:r>
-              <a:rPr lang="en-US" smtClean="0"/>
+              <a:rPr lang="en-US"/>
               <a:t>Third level</a:t>
             </a:r>
           </a:p>
           <a:p>
             <a:pPr lvl="3"/>
             <a:r>
-              <a:rPr lang="en-US" smtClean="0"/>
+              <a:rPr lang="en-US"/>
               <a:t>Fourth level</a:t>
             </a:r>
           </a:p>
           <a:p>
             <a:pPr lvl="4"/>
             <a:r>
-              <a:rPr lang="en-US" smtClean="0"/>
+              <a:rPr lang="en-US"/>
               <a:t>Fifth level</a:t>
             </a:r>
-            <a:endParaRPr lang="en-US"/>
           </a:p>
         </p:txBody>
       </p:sp>
@@ -471,7 +483,7 @@
           <a:p>
             <a:fld id="{5BCAD085-E8A6-8845-BD4E-CB4CCA059FC4}" type="datetimeFigureOut">
               <a:rPr lang="en-US" smtClean="0"/>
-              <a:t>1/27/13</a:t>
+              <a:t>8/19/26</a:t>
             </a:fld>
             <a:endParaRPr lang="en-US"/>
           </a:p>
@@ -570,10 +582,9 @@
           <a:lstStyle/>
           <a:p>
             <a:r>
-              <a:rPr lang="en-US" smtClean="0"/>
+              <a:rPr lang="en-US"/>
               <a:t>Click to edit Master title style</a:t>
             </a:r>
-            <a:endParaRPr lang="en-US"/>
           </a:p>
         </p:txBody>
       </p:sp>
@@ -599,38 +610,37 @@
           <a:p>
             <a:pPr lvl="0"/>
             <a:r>
-              <a:rPr lang="en-US" smtClean="0"/>
+              <a:rPr lang="en-US"/>
               <a:t>Click to edit Master text styles</a:t>
             </a:r>
           </a:p>
           <a:p>
             <a:pPr lvl="1"/>
             <a:r>
-              <a:rPr lang="en-US" smtClean="0"/>
+              <a:rPr lang="en-US"/>
               <a:t>Second level</a:t>
             </a:r>
           </a:p>
           <a:p>
             <a:pPr lvl="2"/>
             <a:r>
-              <a:rPr lang="en-US" smtClean="0"/>
+              <a:rPr lang="en-US"/>
               <a:t>Third level</a:t>
             </a:r>
           </a:p>
           <a:p>
             <a:pPr lvl="3"/>
             <a:r>
-              <a:rPr lang="en-US" smtClean="0"/>
+              <a:rPr lang="en-US"/>
               <a:t>Fourth level</a:t>
             </a:r>
           </a:p>
           <a:p>
             <a:pPr lvl="4"/>
             <a:r>
-              <a:rPr lang="en-US" smtClean="0"/>
+              <a:rPr lang="en-US"/>
               <a:t>Fifth level</a:t>
             </a:r>
-            <a:endParaRPr lang="en-US"/>
           </a:p>
         </p:txBody>
       </p:sp>
@@ -651,7 +661,7 @@
           <a:p>
             <a:fld id="{5BCAD085-E8A6-8845-BD4E-CB4CCA059FC4}" type="datetimeFigureOut">
               <a:rPr lang="en-US" smtClean="0"/>
-              <a:t>1/27/13</a:t>
+              <a:t>8/19/26</a:t>
             </a:fld>
             <a:endParaRPr lang="en-US"/>
           </a:p>
@@ -745,10 +755,9 @@
           <a:lstStyle/>
           <a:p>
             <a:r>
-              <a:rPr lang="en-US" smtClean="0"/>
+              <a:rPr lang="en-US"/>
               <a:t>Click to edit Master title style</a:t>
             </a:r>
-            <a:endParaRPr lang="en-US"/>
           </a:p>
         </p:txBody>
       </p:sp>
@@ -769,38 +778,37 @@
           <a:p>
             <a:pPr lvl="0"/>
             <a:r>
-              <a:rPr lang="en-US" smtClean="0"/>
+              <a:rPr lang="en-US"/>
               <a:t>Click to edit Master text styles</a:t>
             </a:r>
           </a:p>
           <a:p>
             <a:pPr lvl="1"/>
             <a:r>
-              <a:rPr lang="en-US" smtClean="0"/>
+              <a:rPr lang="en-US"/>
               <a:t>Second level</a:t>
             </a:r>
           </a:p>
           <a:p>
             <a:pPr lvl="2"/>
             <a:r>
-              <a:rPr lang="en-US" smtClean="0"/>
+              <a:rPr lang="en-US"/>
               <a:t>Third level</a:t>
             </a:r>
           </a:p>
           <a:p>
             <a:pPr lvl="3"/>
             <a:r>
-              <a:rPr lang="en-US" smtClean="0"/>
+              <a:rPr lang="en-US"/>
               <a:t>Fourth level</a:t>
             </a:r>
           </a:p>
           <a:p>
             <a:pPr lvl="4"/>
             <a:r>
-              <a:rPr lang="en-US" smtClean="0"/>
+              <a:rPr lang="en-US"/>
               <a:t>Fifth level</a:t>
             </a:r>
-            <a:endParaRPr lang="en-US"/>
           </a:p>
         </p:txBody>
       </p:sp>
@@ -821,7 +829,7 @@
           <a:p>
             <a:fld id="{5BCAD085-E8A6-8845-BD4E-CB4CCA059FC4}" type="datetimeFigureOut">
               <a:rPr lang="en-US" smtClean="0"/>
-              <a:t>1/27/13</a:t>
+              <a:t>8/19/26</a:t>
             </a:fld>
             <a:endParaRPr lang="en-US"/>
           </a:p>
@@ -924,10 +932,9 @@
           </a:lstStyle>
           <a:p>
             <a:r>
-              <a:rPr lang="en-US" smtClean="0"/>
+              <a:rPr lang="en-US"/>
               <a:t>Click to edit Master title style</a:t>
             </a:r>
-            <a:endParaRPr lang="en-US"/>
           </a:p>
         </p:txBody>
       </p:sp>
@@ -1044,7 +1051,7 @@
           <a:p>
             <a:pPr lvl="0"/>
             <a:r>
-              <a:rPr lang="en-US" smtClean="0"/>
+              <a:rPr lang="en-US"/>
               <a:t>Click to edit Master text styles</a:t>
             </a:r>
           </a:p>
@@ -1067,7 +1074,7 @@
           <a:p>
             <a:fld id="{5BCAD085-E8A6-8845-BD4E-CB4CCA059FC4}" type="datetimeFigureOut">
               <a:rPr lang="en-US" smtClean="0"/>
-              <a:t>1/27/13</a:t>
+              <a:t>8/19/26</a:t>
             </a:fld>
             <a:endParaRPr lang="en-US"/>
           </a:p>
@@ -1161,10 +1168,9 @@
           <a:lstStyle/>
           <a:p>
             <a:r>
-              <a:rPr lang="en-US" smtClean="0"/>
+              <a:rPr lang="en-US"/>
               <a:t>Click to edit Master title style</a:t>
             </a:r>
-            <a:endParaRPr lang="en-US"/>
           </a:p>
         </p:txBody>
       </p:sp>
@@ -1218,38 +1224,37 @@
           <a:p>
             <a:pPr lvl="0"/>
             <a:r>
-              <a:rPr lang="en-US" smtClean="0"/>
+              <a:rPr lang="en-US"/>
               <a:t>Click to edit Master text styles</a:t>
             </a:r>
           </a:p>
           <a:p>
             <a:pPr lvl="1"/>
             <a:r>
-              <a:rPr lang="en-US" smtClean="0"/>
+              <a:rPr lang="en-US"/>
               <a:t>Second level</a:t>
             </a:r>
           </a:p>
           <a:p>
             <a:pPr lvl="2"/>
             <a:r>
-              <a:rPr lang="en-US" smtClean="0"/>
+              <a:rPr lang="en-US"/>
               <a:t>Third level</a:t>
             </a:r>
           </a:p>
           <a:p>
             <a:pPr lvl="3"/>
             <a:r>
-              <a:rPr lang="en-US" smtClean="0"/>
+              <a:rPr lang="en-US"/>
               <a:t>Fourth level</a:t>
             </a:r>
           </a:p>
           <a:p>
             <a:pPr lvl="4"/>
             <a:r>
-              <a:rPr lang="en-US" smtClean="0"/>
+              <a:rPr lang="en-US"/>
               <a:t>Fifth level</a:t>
             </a:r>
-            <a:endParaRPr lang="en-US"/>
           </a:p>
         </p:txBody>
       </p:sp>
@@ -1303,38 +1308,37 @@
           <a:p>
             <a:pPr lvl="0"/>
             <a:r>
-              <a:rPr lang="en-US" smtClean="0"/>
+              <a:rPr lang="en-US"/>
               <a:t>Click to edit Master text styles</a:t>
             </a:r>
           </a:p>
           <a:p>
             <a:pPr lvl="1"/>
             <a:r>
-              <a:rPr lang="en-US" smtClean="0"/>
+              <a:rPr lang="en-US"/>
               <a:t>Second level</a:t>
             </a:r>
           </a:p>
           <a:p>
             <a:pPr lvl="2"/>
             <a:r>
-              <a:rPr lang="en-US" smtClean="0"/>
+              <a:rPr lang="en-US"/>
               <a:t>Third level</a:t>
             </a:r>
           </a:p>
           <a:p>
             <a:pPr lvl="3"/>
             <a:r>
-              <a:rPr lang="en-US" smtClean="0"/>
+              <a:rPr lang="en-US"/>
               <a:t>Fourth level</a:t>
             </a:r>
           </a:p>
           <a:p>
             <a:pPr lvl="4"/>
             <a:r>
-              <a:rPr lang="en-US" smtClean="0"/>
+              <a:rPr lang="en-US"/>
               <a:t>Fifth level</a:t>
             </a:r>
-            <a:endParaRPr lang="en-US"/>
           </a:p>
         </p:txBody>
       </p:sp>
@@ -1355,7 +1359,7 @@
           <a:p>
             <a:fld id="{5BCAD085-E8A6-8845-BD4E-CB4CCA059FC4}" type="datetimeFigureOut">
               <a:rPr lang="en-US" smtClean="0"/>
-              <a:t>1/27/13</a:t>
+              <a:t>8/19/26</a:t>
             </a:fld>
             <a:endParaRPr lang="en-US"/>
           </a:p>
@@ -1453,10 +1457,9 @@
           </a:lstStyle>
           <a:p>
             <a:r>
-              <a:rPr lang="en-US" smtClean="0"/>
+              <a:rPr lang="en-US"/>
               <a:t>Click to edit Master title style</a:t>
             </a:r>
-            <a:endParaRPr lang="en-US"/>
           </a:p>
         </p:txBody>
       </p:sp>
@@ -1519,7 +1522,7 @@
           <a:p>
             <a:pPr lvl="0"/>
             <a:r>
-              <a:rPr lang="en-US" smtClean="0"/>
+              <a:rPr lang="en-US"/>
               <a:t>Click to edit Master text styles</a:t>
             </a:r>
           </a:p>
@@ -1575,38 +1578,37 @@
           <a:p>
             <a:pPr lvl="0"/>
             <a:r>
-              <a:rPr lang="en-US" smtClean="0"/>
+              <a:rPr lang="en-US"/>
               <a:t>Click to edit Master text styles</a:t>
             </a:r>
           </a:p>
           <a:p>
             <a:pPr lvl="1"/>
             <a:r>
-              <a:rPr lang="en-US" smtClean="0"/>
+              <a:rPr lang="en-US"/>
               <a:t>Second level</a:t>
             </a:r>
           </a:p>
           <a:p>
             <a:pPr lvl="2"/>
             <a:r>
-              <a:rPr lang="en-US" smtClean="0"/>
+              <a:rPr lang="en-US"/>
               <a:t>Third level</a:t>
             </a:r>
           </a:p>
           <a:p>
             <a:pPr lvl="3"/>
             <a:r>
-              <a:rPr lang="en-US" smtClean="0"/>
+              <a:rPr lang="en-US"/>
               <a:t>Fourth level</a:t>
             </a:r>
           </a:p>
           <a:p>
             <a:pPr lvl="4"/>
             <a:r>
-              <a:rPr lang="en-US" smtClean="0"/>
+              <a:rPr lang="en-US"/>
               <a:t>Fifth level</a:t>
             </a:r>
-            <a:endParaRPr lang="en-US"/>
           </a:p>
         </p:txBody>
       </p:sp>
@@ -1669,7 +1671,7 @@
           <a:p>
             <a:pPr lvl="0"/>
             <a:r>
-              <a:rPr lang="en-US" smtClean="0"/>
+              <a:rPr lang="en-US"/>
               <a:t>Click to edit Master text styles</a:t>
             </a:r>
           </a:p>
@@ -1725,38 +1727,37 @@
           <a:p>
             <a:pPr lvl="0"/>
             <a:r>
-              <a:rPr lang="en-US" smtClean="0"/>
+              <a:rPr lang="en-US"/>
               <a:t>Click to edit Master text styles</a:t>
             </a:r>
           </a:p>
           <a:p>
             <a:pPr lvl="1"/>
             <a:r>
-              <a:rPr lang="en-US" smtClean="0"/>
+              <a:rPr lang="en-US"/>
               <a:t>Second level</a:t>
             </a:r>
           </a:p>
           <a:p>
             <a:pPr lvl="2"/>
             <a:r>
-              <a:rPr lang="en-US" smtClean="0"/>
+              <a:rPr lang="en-US"/>
               <a:t>Third level</a:t>
             </a:r>
           </a:p>
           <a:p>
             <a:pPr lvl="3"/>
             <a:r>
-              <a:rPr lang="en-US" smtClean="0"/>
+              <a:rPr lang="en-US"/>
               <a:t>Fourth level</a:t>
             </a:r>
           </a:p>
           <a:p>
             <a:pPr lvl="4"/>
             <a:r>
-              <a:rPr lang="en-US" smtClean="0"/>
+              <a:rPr lang="en-US"/>
               <a:t>Fifth level</a:t>
             </a:r>
-            <a:endParaRPr lang="en-US"/>
           </a:p>
         </p:txBody>
       </p:sp>
@@ -1777,7 +1778,7 @@
           <a:p>
             <a:fld id="{5BCAD085-E8A6-8845-BD4E-CB4CCA059FC4}" type="datetimeFigureOut">
               <a:rPr lang="en-US" smtClean="0"/>
-              <a:t>1/27/13</a:t>
+              <a:t>8/19/26</a:t>
             </a:fld>
             <a:endParaRPr lang="en-US"/>
           </a:p>
@@ -1871,10 +1872,9 @@
           <a:lstStyle/>
           <a:p>
             <a:r>
-              <a:rPr lang="en-US" smtClean="0"/>
+              <a:rPr lang="en-US"/>
               <a:t>Click to edit Master title style</a:t>
             </a:r>
-            <a:endParaRPr lang="en-US"/>
           </a:p>
         </p:txBody>
       </p:sp>
@@ -1895,7 +1895,7 @@
           <a:p>
             <a:fld id="{5BCAD085-E8A6-8845-BD4E-CB4CCA059FC4}" type="datetimeFigureOut">
               <a:rPr lang="en-US" smtClean="0"/>
-              <a:t>1/27/13</a:t>
+              <a:t>8/19/26</a:t>
             </a:fld>
             <a:endParaRPr lang="en-US"/>
           </a:p>
@@ -1990,7 +1990,7 @@
           <a:p>
             <a:fld id="{5BCAD085-E8A6-8845-BD4E-CB4CCA059FC4}" type="datetimeFigureOut">
               <a:rPr lang="en-US" smtClean="0"/>
-              <a:t>1/27/13</a:t>
+              <a:t>8/19/26</a:t>
             </a:fld>
             <a:endParaRPr lang="en-US"/>
           </a:p>
@@ -2093,10 +2093,9 @@
           </a:lstStyle>
           <a:p>
             <a:r>
-              <a:rPr lang="en-US" smtClean="0"/>
+              <a:rPr lang="en-US"/>
               <a:t>Click to edit Master title style</a:t>
             </a:r>
-            <a:endParaRPr lang="en-US"/>
           </a:p>
         </p:txBody>
       </p:sp>
@@ -2150,38 +2149,37 @@
           <a:p>
             <a:pPr lvl="0"/>
             <a:r>
-              <a:rPr lang="en-US" smtClean="0"/>
+              <a:rPr lang="en-US"/>
               <a:t>Click to edit Master text styles</a:t>
             </a:r>
           </a:p>
           <a:p>
             <a:pPr lvl="1"/>
             <a:r>
-              <a:rPr lang="en-US" smtClean="0"/>
+              <a:rPr lang="en-US"/>
               <a:t>Second level</a:t>
             </a:r>
           </a:p>
           <a:p>
             <a:pPr lvl="2"/>
             <a:r>
-              <a:rPr lang="en-US" smtClean="0"/>
+              <a:rPr lang="en-US"/>
               <a:t>Third level</a:t>
             </a:r>
           </a:p>
           <a:p>
             <a:pPr lvl="3"/>
             <a:r>
-              <a:rPr lang="en-US" smtClean="0"/>
+              <a:rPr lang="en-US"/>
               <a:t>Fourth level</a:t>
             </a:r>
           </a:p>
           <a:p>
             <a:pPr lvl="4"/>
             <a:r>
-              <a:rPr lang="en-US" smtClean="0"/>
+              <a:rPr lang="en-US"/>
               <a:t>Fifth level</a:t>
             </a:r>
-            <a:endParaRPr lang="en-US"/>
           </a:p>
         </p:txBody>
       </p:sp>
@@ -2244,7 +2242,7 @@
           <a:p>
             <a:pPr lvl="0"/>
             <a:r>
-              <a:rPr lang="en-US" smtClean="0"/>
+              <a:rPr lang="en-US"/>
               <a:t>Click to edit Master text styles</a:t>
             </a:r>
           </a:p>
@@ -2267,7 +2265,7 @@
           <a:p>
             <a:fld id="{5BCAD085-E8A6-8845-BD4E-CB4CCA059FC4}" type="datetimeFigureOut">
               <a:rPr lang="en-US" smtClean="0"/>
-              <a:t>1/27/13</a:t>
+              <a:t>8/19/26</a:t>
             </a:fld>
             <a:endParaRPr lang="en-US"/>
           </a:p>
@@ -2370,10 +2368,9 @@
           </a:lstStyle>
           <a:p>
             <a:r>
-              <a:rPr lang="en-US" smtClean="0"/>
+              <a:rPr lang="en-US"/>
               <a:t>Click to edit Master title style</a:t>
             </a:r>
-            <a:endParaRPr lang="en-US"/>
           </a:p>
         </p:txBody>
       </p:sp>
@@ -2497,7 +2494,7 @@
           <a:p>
             <a:pPr lvl="0"/>
             <a:r>
-              <a:rPr lang="en-US" smtClean="0"/>
+              <a:rPr lang="en-US"/>
               <a:t>Click to edit Master text styles</a:t>
             </a:r>
           </a:p>
@@ -2520,7 +2517,7 @@
           <a:p>
             <a:fld id="{5BCAD085-E8A6-8845-BD4E-CB4CCA059FC4}" type="datetimeFigureOut">
               <a:rPr lang="en-US" smtClean="0"/>
-              <a:t>1/27/13</a:t>
+              <a:t>8/19/26</a:t>
             </a:fld>
             <a:endParaRPr lang="en-US"/>
           </a:p>
@@ -2629,10 +2626,9 @@
           <a:lstStyle/>
           <a:p>
             <a:r>
-              <a:rPr lang="en-US" smtClean="0"/>
+              <a:rPr lang="en-US"/>
               <a:t>Click to edit Master title style</a:t>
             </a:r>
-            <a:endParaRPr lang="en-US"/>
           </a:p>
         </p:txBody>
       </p:sp>
@@ -2663,38 +2659,37 @@
           <a:p>
             <a:pPr lvl="0"/>
             <a:r>
-              <a:rPr lang="en-US" smtClean="0"/>
+              <a:rPr lang="en-US"/>
               <a:t>Click to edit Master text styles</a:t>
             </a:r>
           </a:p>
           <a:p>
             <a:pPr lvl="1"/>
             <a:r>
-              <a:rPr lang="en-US" smtClean="0"/>
+              <a:rPr lang="en-US"/>
               <a:t>Second level</a:t>
             </a:r>
           </a:p>
           <a:p>
             <a:pPr lvl="2"/>
             <a:r>
-              <a:rPr lang="en-US" smtClean="0"/>
+              <a:rPr lang="en-US"/>
               <a:t>Third level</a:t>
             </a:r>
           </a:p>
           <a:p>
             <a:pPr lvl="3"/>
             <a:r>
-              <a:rPr lang="en-US" smtClean="0"/>
+              <a:rPr lang="en-US"/>
               <a:t>Fourth level</a:t>
             </a:r>
           </a:p>
           <a:p>
             <a:pPr lvl="4"/>
             <a:r>
-              <a:rPr lang="en-US" smtClean="0"/>
+              <a:rPr lang="en-US"/>
               <a:t>Fifth level</a:t>
             </a:r>
-            <a:endParaRPr lang="en-US"/>
           </a:p>
         </p:txBody>
       </p:sp>
@@ -2733,7 +2728,7 @@
           <a:p>
             <a:fld id="{5BCAD085-E8A6-8845-BD4E-CB4CCA059FC4}" type="datetimeFigureOut">
               <a:rPr lang="en-US" smtClean="0"/>
-              <a:t>1/27/13</a:t>
+              <a:t>8/19/26</a:t>
             </a:fld>
             <a:endParaRPr lang="en-US"/>
           </a:p>
@@ -3092,7 +3087,7 @@
 </file>
 
 <file path=ppt/slides/slide1.xml><?xml version="1.0" encoding="utf-8"?>
-<p:sld xmlns:a="http://schemas.openxmlformats.org/drawingml/2006/main" xmlns:p="http://schemas.openxmlformats.org/presentationml/2006/main" xmlns:r="http://schemas.openxmlformats.org/officeDocument/2006/relationships">
+<p:sld xmlns:a="http://schemas.openxmlformats.org/drawingml/2006/main" xmlns:r="http://schemas.openxmlformats.org/officeDocument/2006/relationships" xmlns:p="http://schemas.openxmlformats.org/presentationml/2006/main">
   <p:cSld>
     <p:spTree>
       <p:nvGrpSpPr>
@@ -3100,7 +3095,14 @@
         <p:cNvGrpSpPr/>
         <p:nvPr/>
       </p:nvGrpSpPr>
-      <p:grpSpPr/>
+      <p:grpSpPr>
+        <a:xfrm>
+          <a:off x="0" y="0"/>
+          <a:ext cx="0" cy="0"/>
+          <a:chOff x="0" y="0"/>
+          <a:chExt cx="0" cy="0"/>
+        </a:xfrm>
+      </p:grpSpPr>
       <p:sp>
         <p:nvSpPr>
           <p:cNvPr id="2" name="Rectangle 1"/>
@@ -3141,6 +3143,7 @@
           <a:lstStyle/>
           <a:p>
             <a:pPr algn="ctr"/>
+            <a:endParaRPr/>
           </a:p>
         </p:txBody>
       </p:sp>
@@ -3184,6 +3187,7 @@
           <a:lstStyle/>
           <a:p>
             <a:pPr algn="ctr"/>
+            <a:endParaRPr/>
           </a:p>
         </p:txBody>
       </p:sp>
@@ -3305,7 +3309,7 @@
               </a:defRPr>
             </a:pPr>
             <a:r>
-              <a:t>Presented by: Product &amp; Engineering Leadership  |  Confidential  |  v2.0 Production Ready</a:t>
+              <a:t>Presented by: Product &amp; Engineering Leadership  |  Confidential  |  v2.5 Production Ready</a:t>
             </a:r>
           </a:p>
         </p:txBody>
@@ -3319,7 +3323,7 @@
 </file>
 
 <file path=ppt/slides/slide10.xml><?xml version="1.0" encoding="utf-8"?>
-<p:sld xmlns:a="http://schemas.openxmlformats.org/drawingml/2006/main" xmlns:p="http://schemas.openxmlformats.org/presentationml/2006/main" xmlns:r="http://schemas.openxmlformats.org/officeDocument/2006/relationships">
+<p:sld xmlns:a="http://schemas.openxmlformats.org/drawingml/2006/main" xmlns:r="http://schemas.openxmlformats.org/officeDocument/2006/relationships" xmlns:p="http://schemas.openxmlformats.org/presentationml/2006/main">
   <p:cSld>
     <p:spTree>
       <p:nvGrpSpPr>
@@ -3327,7 +3331,14 @@
         <p:cNvGrpSpPr/>
         <p:nvPr/>
       </p:nvGrpSpPr>
-      <p:grpSpPr/>
+      <p:grpSpPr>
+        <a:xfrm>
+          <a:off x="0" y="0"/>
+          <a:ext cx="0" cy="0"/>
+          <a:chOff x="0" y="0"/>
+          <a:chExt cx="0" cy="0"/>
+        </a:xfrm>
+      </p:grpSpPr>
       <p:sp>
         <p:nvSpPr>
           <p:cNvPr id="2" name="Rectangle 1"/>
@@ -3368,6 +3379,7 @@
           <a:lstStyle/>
           <a:p>
             <a:pPr algn="ctr"/>
+            <a:endParaRPr/>
           </a:p>
         </p:txBody>
       </p:sp>
@@ -3388,7 +3400,7 @@
           <a:noFill/>
         </p:spPr>
         <p:txBody>
-          <a:bodyPr wrap="square" lIns="0" rIns="0" tIns="0" bIns="0">
+          <a:bodyPr wrap="square" lIns="0" tIns="0" rIns="0" bIns="0">
             <a:spAutoFit/>
           </a:bodyPr>
           <a:lstStyle/>
@@ -3424,7 +3436,7 @@
           <a:noFill/>
         </p:spPr>
         <p:txBody>
-          <a:bodyPr wrap="square" lIns="0" rIns="0" tIns="0" bIns="0">
+          <a:bodyPr wrap="square" lIns="0" tIns="0" rIns="0" bIns="0">
             <a:spAutoFit/>
           </a:bodyPr>
           <a:lstStyle/>
@@ -3483,6 +3495,7 @@
           <a:lstStyle/>
           <a:p>
             <a:pPr algn="ctr"/>
+            <a:endParaRPr/>
           </a:p>
         </p:txBody>
       </p:sp>
@@ -3503,7 +3516,7 @@
           <a:noFill/>
         </p:spPr>
         <p:txBody>
-          <a:bodyPr wrap="none" lIns="0" rIns="0" tIns="0" bIns="0">
+          <a:bodyPr wrap="none" lIns="0" tIns="0" rIns="0" bIns="0">
             <a:spAutoFit/>
           </a:bodyPr>
           <a:lstStyle/>
@@ -3564,6 +3577,7 @@
           <a:lstStyle/>
           <a:p>
             <a:pPr algn="ctr"/>
+            <a:endParaRPr/>
           </a:p>
         </p:txBody>
       </p:sp>
@@ -3584,7 +3598,7 @@
           <a:noFill/>
         </p:spPr>
         <p:txBody>
-          <a:bodyPr wrap="square" lIns="0" rIns="0" tIns="0" bIns="0">
+          <a:bodyPr wrap="square" lIns="0" tIns="0" rIns="0" bIns="0">
             <a:spAutoFit/>
           </a:bodyPr>
           <a:lstStyle/>
@@ -3630,7 +3644,7 @@
               </a:defRPr>
             </a:pPr>
             <a:r>
-              <a:t>• Targeted role-based WebSocket connections with sub-second alert delivery.</a:t>
+              <a:t>• Targeted role-based WebSocket connections with sub-second alert delivery and Web Audio chimes.</a:t>
             </a:r>
           </a:p>
           <a:p>
@@ -3646,7 +3660,7 @@
               </a:defRPr>
             </a:pPr>
             <a:r>
-              <a:t>• Client reconnection backoff algorithm with automatic token heartbeat.</a:t>
+              <a:t>• Client reconnection backoff algorithm with automatic token heartbeat and floating toast stack.</a:t>
             </a:r>
           </a:p>
         </p:txBody>
@@ -3693,6 +3707,7 @@
           <a:lstStyle/>
           <a:p>
             <a:pPr algn="ctr"/>
+            <a:endParaRPr/>
           </a:p>
         </p:txBody>
       </p:sp>
@@ -3713,7 +3728,7 @@
           <a:noFill/>
         </p:spPr>
         <p:txBody>
-          <a:bodyPr wrap="square" lIns="0" rIns="0" tIns="0" bIns="0">
+          <a:bodyPr wrap="square" lIns="0" tIns="0" rIns="0" bIns="0">
             <a:spAutoFit/>
           </a:bodyPr>
           <a:lstStyle/>
@@ -3822,6 +3837,7 @@
           <a:lstStyle/>
           <a:p>
             <a:pPr algn="ctr"/>
+            <a:endParaRPr/>
           </a:p>
         </p:txBody>
       </p:sp>
@@ -3842,7 +3858,7 @@
           <a:noFill/>
         </p:spPr>
         <p:txBody>
-          <a:bodyPr wrap="square" lIns="0" rIns="0" tIns="0" bIns="0">
+          <a:bodyPr wrap="square" lIns="0" tIns="0" rIns="0" bIns="0">
             <a:spAutoFit/>
           </a:bodyPr>
           <a:lstStyle/>
@@ -3918,7 +3934,7 @@
 </file>
 
 <file path=ppt/slides/slide11.xml><?xml version="1.0" encoding="utf-8"?>
-<p:sld xmlns:a="http://schemas.openxmlformats.org/drawingml/2006/main" xmlns:p="http://schemas.openxmlformats.org/presentationml/2006/main" xmlns:r="http://schemas.openxmlformats.org/officeDocument/2006/relationships">
+<p:sld xmlns:a="http://schemas.openxmlformats.org/drawingml/2006/main" xmlns:r="http://schemas.openxmlformats.org/officeDocument/2006/relationships" xmlns:p="http://schemas.openxmlformats.org/presentationml/2006/main">
   <p:cSld>
     <p:spTree>
       <p:nvGrpSpPr>
@@ -3926,7 +3942,14 @@
         <p:cNvGrpSpPr/>
         <p:nvPr/>
       </p:nvGrpSpPr>
-      <p:grpSpPr/>
+      <p:grpSpPr>
+        <a:xfrm>
+          <a:off x="0" y="0"/>
+          <a:ext cx="0" cy="0"/>
+          <a:chOff x="0" y="0"/>
+          <a:chExt cx="0" cy="0"/>
+        </a:xfrm>
+      </p:grpSpPr>
       <p:sp>
         <p:nvSpPr>
           <p:cNvPr id="2" name="Rectangle 1"/>
@@ -3967,6 +3990,7 @@
           <a:lstStyle/>
           <a:p>
             <a:pPr algn="ctr"/>
+            <a:endParaRPr/>
           </a:p>
         </p:txBody>
       </p:sp>
@@ -3987,7 +4011,7 @@
           <a:noFill/>
         </p:spPr>
         <p:txBody>
-          <a:bodyPr wrap="square" lIns="0" rIns="0" tIns="0" bIns="0">
+          <a:bodyPr wrap="square" lIns="0" tIns="0" rIns="0" bIns="0">
             <a:spAutoFit/>
           </a:bodyPr>
           <a:lstStyle/>
@@ -4023,7 +4047,7 @@
           <a:noFill/>
         </p:spPr>
         <p:txBody>
-          <a:bodyPr wrap="square" lIns="0" rIns="0" tIns="0" bIns="0">
+          <a:bodyPr wrap="square" lIns="0" tIns="0" rIns="0" bIns="0">
             <a:spAutoFit/>
           </a:bodyPr>
           <a:lstStyle/>
@@ -4082,6 +4106,7 @@
           <a:lstStyle/>
           <a:p>
             <a:pPr algn="ctr"/>
+            <a:endParaRPr/>
           </a:p>
         </p:txBody>
       </p:sp>
@@ -4102,7 +4127,7 @@
           <a:noFill/>
         </p:spPr>
         <p:txBody>
-          <a:bodyPr wrap="none" lIns="0" rIns="0" tIns="0" bIns="0">
+          <a:bodyPr wrap="none" lIns="0" tIns="0" rIns="0" bIns="0">
             <a:spAutoFit/>
           </a:bodyPr>
           <a:lstStyle/>
@@ -4163,6 +4188,7 @@
           <a:lstStyle/>
           <a:p>
             <a:pPr algn="ctr"/>
+            <a:endParaRPr/>
           </a:p>
         </p:txBody>
       </p:sp>
@@ -4183,7 +4209,7 @@
           <a:noFill/>
         </p:spPr>
         <p:txBody>
-          <a:bodyPr wrap="square" lIns="0" rIns="0" tIns="0" bIns="0">
+          <a:bodyPr wrap="square" lIns="0" tIns="0" rIns="0" bIns="0">
             <a:spAutoFit/>
           </a:bodyPr>
           <a:lstStyle/>
@@ -4292,6 +4318,7 @@
           <a:lstStyle/>
           <a:p>
             <a:pPr algn="ctr"/>
+            <a:endParaRPr/>
           </a:p>
         </p:txBody>
       </p:sp>
@@ -4312,7 +4339,7 @@
           <a:noFill/>
         </p:spPr>
         <p:txBody>
-          <a:bodyPr wrap="square" lIns="0" rIns="0" tIns="0" bIns="0">
+          <a:bodyPr wrap="square" lIns="0" tIns="0" rIns="0" bIns="0">
             <a:spAutoFit/>
           </a:bodyPr>
           <a:lstStyle/>
@@ -4421,6 +4448,7 @@
           <a:lstStyle/>
           <a:p>
             <a:pPr algn="ctr"/>
+            <a:endParaRPr/>
           </a:p>
         </p:txBody>
       </p:sp>
@@ -4441,7 +4469,7 @@
           <a:noFill/>
         </p:spPr>
         <p:txBody>
-          <a:bodyPr wrap="square" lIns="0" rIns="0" tIns="0" bIns="0">
+          <a:bodyPr wrap="square" lIns="0" tIns="0" rIns="0" bIns="0">
             <a:spAutoFit/>
           </a:bodyPr>
           <a:lstStyle/>
@@ -4517,7 +4545,7 @@
 </file>
 
 <file path=ppt/slides/slide12.xml><?xml version="1.0" encoding="utf-8"?>
-<p:sld xmlns:a="http://schemas.openxmlformats.org/drawingml/2006/main" xmlns:p="http://schemas.openxmlformats.org/presentationml/2006/main" xmlns:r="http://schemas.openxmlformats.org/officeDocument/2006/relationships">
+<p:sld xmlns:a="http://schemas.openxmlformats.org/drawingml/2006/main" xmlns:r="http://schemas.openxmlformats.org/officeDocument/2006/relationships" xmlns:p="http://schemas.openxmlformats.org/presentationml/2006/main">
   <p:cSld>
     <p:spTree>
       <p:nvGrpSpPr>
@@ -4525,7 +4553,14 @@
         <p:cNvGrpSpPr/>
         <p:nvPr/>
       </p:nvGrpSpPr>
-      <p:grpSpPr/>
+      <p:grpSpPr>
+        <a:xfrm>
+          <a:off x="0" y="0"/>
+          <a:ext cx="0" cy="0"/>
+          <a:chOff x="0" y="0"/>
+          <a:chExt cx="0" cy="0"/>
+        </a:xfrm>
+      </p:grpSpPr>
       <p:sp>
         <p:nvSpPr>
           <p:cNvPr id="2" name="Rectangle 1"/>
@@ -4566,6 +4601,7 @@
           <a:lstStyle/>
           <a:p>
             <a:pPr algn="ctr"/>
+            <a:endParaRPr/>
           </a:p>
         </p:txBody>
       </p:sp>
@@ -4586,7 +4622,7 @@
           <a:noFill/>
         </p:spPr>
         <p:txBody>
-          <a:bodyPr wrap="square" lIns="0" rIns="0" tIns="0" bIns="0">
+          <a:bodyPr wrap="square" lIns="0" tIns="0" rIns="0" bIns="0">
             <a:spAutoFit/>
           </a:bodyPr>
           <a:lstStyle/>
@@ -4622,7 +4658,7 @@
           <a:noFill/>
         </p:spPr>
         <p:txBody>
-          <a:bodyPr wrap="square" lIns="0" rIns="0" tIns="0" bIns="0">
+          <a:bodyPr wrap="square" lIns="0" tIns="0" rIns="0" bIns="0">
             <a:spAutoFit/>
           </a:bodyPr>
           <a:lstStyle/>
@@ -4681,6 +4717,7 @@
           <a:lstStyle/>
           <a:p>
             <a:pPr algn="ctr"/>
+            <a:endParaRPr/>
           </a:p>
         </p:txBody>
       </p:sp>
@@ -4701,7 +4738,7 @@
           <a:noFill/>
         </p:spPr>
         <p:txBody>
-          <a:bodyPr wrap="none" lIns="0" rIns="0" tIns="0" bIns="0">
+          <a:bodyPr wrap="none" lIns="0" tIns="0" rIns="0" bIns="0">
             <a:spAutoFit/>
           </a:bodyPr>
           <a:lstStyle/>
@@ -4762,6 +4799,7 @@
           <a:lstStyle/>
           <a:p>
             <a:pPr algn="ctr"/>
+            <a:endParaRPr/>
           </a:p>
         </p:txBody>
       </p:sp>
@@ -4875,6 +4913,7 @@
           <a:lstStyle/>
           <a:p>
             <a:pPr algn="ctr"/>
+            <a:endParaRPr/>
           </a:p>
         </p:txBody>
       </p:sp>
@@ -4988,6 +5027,7 @@
           <a:lstStyle/>
           <a:p>
             <a:pPr algn="ctr"/>
+            <a:endParaRPr/>
           </a:p>
         </p:txBody>
       </p:sp>
@@ -5101,6 +5141,7 @@
           <a:lstStyle/>
           <a:p>
             <a:pPr algn="ctr"/>
+            <a:endParaRPr/>
           </a:p>
         </p:txBody>
       </p:sp>
@@ -5181,7 +5222,7 @@
 </file>
 
 <file path=ppt/slides/slide13.xml><?xml version="1.0" encoding="utf-8"?>
-<p:sld xmlns:a="http://schemas.openxmlformats.org/drawingml/2006/main" xmlns:p="http://schemas.openxmlformats.org/presentationml/2006/main" xmlns:r="http://schemas.openxmlformats.org/officeDocument/2006/relationships">
+<p:sld xmlns:a="http://schemas.openxmlformats.org/drawingml/2006/main" xmlns:r="http://schemas.openxmlformats.org/officeDocument/2006/relationships" xmlns:p="http://schemas.openxmlformats.org/presentationml/2006/main">
   <p:cSld>
     <p:spTree>
       <p:nvGrpSpPr>
@@ -5189,7 +5230,14 @@
         <p:cNvGrpSpPr/>
         <p:nvPr/>
       </p:nvGrpSpPr>
-      <p:grpSpPr/>
+      <p:grpSpPr>
+        <a:xfrm>
+          <a:off x="0" y="0"/>
+          <a:ext cx="0" cy="0"/>
+          <a:chOff x="0" y="0"/>
+          <a:chExt cx="0" cy="0"/>
+        </a:xfrm>
+      </p:grpSpPr>
       <p:sp>
         <p:nvSpPr>
           <p:cNvPr id="2" name="Rectangle 1"/>
@@ -5230,6 +5278,7 @@
           <a:lstStyle/>
           <a:p>
             <a:pPr algn="ctr"/>
+            <a:endParaRPr/>
           </a:p>
         </p:txBody>
       </p:sp>
@@ -5250,7 +5299,7 @@
           <a:noFill/>
         </p:spPr>
         <p:txBody>
-          <a:bodyPr wrap="square" lIns="0" rIns="0" tIns="0" bIns="0">
+          <a:bodyPr wrap="square" lIns="0" tIns="0" rIns="0" bIns="0">
             <a:spAutoFit/>
           </a:bodyPr>
           <a:lstStyle/>
@@ -5286,7 +5335,7 @@
           <a:noFill/>
         </p:spPr>
         <p:txBody>
-          <a:bodyPr wrap="square" lIns="0" rIns="0" tIns="0" bIns="0">
+          <a:bodyPr wrap="square" lIns="0" tIns="0" rIns="0" bIns="0">
             <a:spAutoFit/>
           </a:bodyPr>
           <a:lstStyle/>
@@ -5345,6 +5394,7 @@
           <a:lstStyle/>
           <a:p>
             <a:pPr algn="ctr"/>
+            <a:endParaRPr/>
           </a:p>
         </p:txBody>
       </p:sp>
@@ -5365,7 +5415,7 @@
           <a:noFill/>
         </p:spPr>
         <p:txBody>
-          <a:bodyPr wrap="none" lIns="0" rIns="0" tIns="0" bIns="0">
+          <a:bodyPr wrap="none" lIns="0" tIns="0" rIns="0" bIns="0">
             <a:spAutoFit/>
           </a:bodyPr>
           <a:lstStyle/>
@@ -5426,6 +5476,7 @@
           <a:lstStyle/>
           <a:p>
             <a:pPr algn="ctr"/>
+            <a:endParaRPr/>
           </a:p>
         </p:txBody>
       </p:sp>
@@ -5446,7 +5497,7 @@
           <a:noFill/>
         </p:spPr>
         <p:txBody>
-          <a:bodyPr wrap="square" lIns="0" rIns="0" tIns="0" bIns="0">
+          <a:bodyPr wrap="square" lIns="0" tIns="0" rIns="0" bIns="0">
             <a:spAutoFit/>
           </a:bodyPr>
           <a:lstStyle/>
@@ -5460,7 +5511,7 @@
               </a:defRPr>
             </a:pPr>
             <a:r>
-              <a:t>Phase 1: Current Release (v2.0 Production)</a:t>
+              <a:t>Phase 1: Current Release (v2.5 Production)</a:t>
             </a:r>
           </a:p>
           <a:p>
@@ -5492,7 +5543,23 @@
               </a:defRPr>
             </a:pPr>
             <a:r>
-              <a:t>• 10-second real-time cross-device sync &amp; WebSocket alerts.</a:t>
+              <a:t>• Pre-DCR order editing and safe cancellation engine.</a:t>
+            </a:r>
+          </a:p>
+          <a:p>
+            <a:pPr>
+              <a:spcBef>
+                <a:spcPts val="400"/>
+              </a:spcBef>
+              <a:defRPr sz="1000">
+                <a:solidFill>
+                  <a:srgbClr val="F8FAFC"/>
+                </a:solidFill>
+                <a:latin typeface="Arial"/>
+              </a:defRPr>
+            </a:pPr>
+            <a:r>
+              <a:t>• 1-Click live presentation role switcher dock &amp; toasts.</a:t>
             </a:r>
           </a:p>
           <a:p>
@@ -5571,6 +5638,7 @@
           <a:lstStyle/>
           <a:p>
             <a:pPr algn="ctr"/>
+            <a:endParaRPr/>
           </a:p>
         </p:txBody>
       </p:sp>
@@ -5591,7 +5659,7 @@
           <a:noFill/>
         </p:spPr>
         <p:txBody>
-          <a:bodyPr wrap="square" lIns="0" rIns="0" tIns="0" bIns="0">
+          <a:bodyPr wrap="square" lIns="0" tIns="0" rIns="0" bIns="0">
             <a:spAutoFit/>
           </a:bodyPr>
           <a:lstStyle/>
@@ -5716,6 +5784,7 @@
           <a:lstStyle/>
           <a:p>
             <a:pPr algn="ctr"/>
+            <a:endParaRPr/>
           </a:p>
         </p:txBody>
       </p:sp>
@@ -5736,7 +5805,7 @@
           <a:noFill/>
         </p:spPr>
         <p:txBody>
-          <a:bodyPr wrap="square" lIns="0" rIns="0" tIns="0" bIns="0">
+          <a:bodyPr wrap="square" lIns="0" tIns="0" rIns="0" bIns="0">
             <a:spAutoFit/>
           </a:bodyPr>
           <a:lstStyle/>
@@ -5828,7 +5897,7 @@
 </file>
 
 <file path=ppt/slides/slide14.xml><?xml version="1.0" encoding="utf-8"?>
-<p:sld xmlns:a="http://schemas.openxmlformats.org/drawingml/2006/main" xmlns:p="http://schemas.openxmlformats.org/presentationml/2006/main" xmlns:r="http://schemas.openxmlformats.org/officeDocument/2006/relationships">
+<p:sld xmlns:a="http://schemas.openxmlformats.org/drawingml/2006/main" xmlns:r="http://schemas.openxmlformats.org/officeDocument/2006/relationships" xmlns:p="http://schemas.openxmlformats.org/presentationml/2006/main">
   <p:cSld>
     <p:spTree>
       <p:nvGrpSpPr>
@@ -5836,7 +5905,14 @@
         <p:cNvGrpSpPr/>
         <p:nvPr/>
       </p:nvGrpSpPr>
-      <p:grpSpPr/>
+      <p:grpSpPr>
+        <a:xfrm>
+          <a:off x="0" y="0"/>
+          <a:ext cx="0" cy="0"/>
+          <a:chOff x="0" y="0"/>
+          <a:chExt cx="0" cy="0"/>
+        </a:xfrm>
+      </p:grpSpPr>
       <p:sp>
         <p:nvSpPr>
           <p:cNvPr id="2" name="Rectangle 1"/>
@@ -5877,6 +5953,7 @@
           <a:lstStyle/>
           <a:p>
             <a:pPr algn="ctr"/>
+            <a:endParaRPr/>
           </a:p>
         </p:txBody>
       </p:sp>
@@ -5920,6 +5997,7 @@
           <a:lstStyle/>
           <a:p>
             <a:pPr algn="ctr"/>
+            <a:endParaRPr/>
           </a:p>
         </p:txBody>
       </p:sp>
@@ -6012,7 +6090,7 @@
 </file>
 
 <file path=ppt/slides/slide2.xml><?xml version="1.0" encoding="utf-8"?>
-<p:sld xmlns:a="http://schemas.openxmlformats.org/drawingml/2006/main" xmlns:p="http://schemas.openxmlformats.org/presentationml/2006/main" xmlns:r="http://schemas.openxmlformats.org/officeDocument/2006/relationships">
+<p:sld xmlns:a="http://schemas.openxmlformats.org/drawingml/2006/main" xmlns:r="http://schemas.openxmlformats.org/officeDocument/2006/relationships" xmlns:p="http://schemas.openxmlformats.org/presentationml/2006/main">
   <p:cSld>
     <p:spTree>
       <p:nvGrpSpPr>
@@ -6020,7 +6098,14 @@
         <p:cNvGrpSpPr/>
         <p:nvPr/>
       </p:nvGrpSpPr>
-      <p:grpSpPr/>
+      <p:grpSpPr>
+        <a:xfrm>
+          <a:off x="0" y="0"/>
+          <a:ext cx="0" cy="0"/>
+          <a:chOff x="0" y="0"/>
+          <a:chExt cx="0" cy="0"/>
+        </a:xfrm>
+      </p:grpSpPr>
       <p:sp>
         <p:nvSpPr>
           <p:cNvPr id="2" name="Rectangle 1"/>
@@ -6061,6 +6146,7 @@
           <a:lstStyle/>
           <a:p>
             <a:pPr algn="ctr"/>
+            <a:endParaRPr/>
           </a:p>
         </p:txBody>
       </p:sp>
@@ -6081,7 +6167,7 @@
           <a:noFill/>
         </p:spPr>
         <p:txBody>
-          <a:bodyPr wrap="square" lIns="0" rIns="0" tIns="0" bIns="0">
+          <a:bodyPr wrap="square" lIns="0" tIns="0" rIns="0" bIns="0">
             <a:spAutoFit/>
           </a:bodyPr>
           <a:lstStyle/>
@@ -6117,7 +6203,7 @@
           <a:noFill/>
         </p:spPr>
         <p:txBody>
-          <a:bodyPr wrap="square" lIns="0" rIns="0" tIns="0" bIns="0">
+          <a:bodyPr wrap="square" lIns="0" tIns="0" rIns="0" bIns="0">
             <a:spAutoFit/>
           </a:bodyPr>
           <a:lstStyle/>
@@ -6176,6 +6262,7 @@
           <a:lstStyle/>
           <a:p>
             <a:pPr algn="ctr"/>
+            <a:endParaRPr/>
           </a:p>
         </p:txBody>
       </p:sp>
@@ -6196,7 +6283,7 @@
           <a:noFill/>
         </p:spPr>
         <p:txBody>
-          <a:bodyPr wrap="none" lIns="0" rIns="0" tIns="0" bIns="0">
+          <a:bodyPr wrap="none" lIns="0" tIns="0" rIns="0" bIns="0">
             <a:spAutoFit/>
           </a:bodyPr>
           <a:lstStyle/>
@@ -6257,6 +6344,7 @@
           <a:lstStyle/>
           <a:p>
             <a:pPr algn="ctr"/>
+            <a:endParaRPr/>
           </a:p>
         </p:txBody>
       </p:sp>
@@ -6277,7 +6365,7 @@
           <a:noFill/>
         </p:spPr>
         <p:txBody>
-          <a:bodyPr wrap="square" lIns="0" rIns="0" tIns="0" bIns="0">
+          <a:bodyPr wrap="square" lIns="0" tIns="0" rIns="0" bIns="0">
             <a:spAutoFit/>
           </a:bodyPr>
           <a:lstStyle/>
@@ -6386,6 +6474,7 @@
           <a:lstStyle/>
           <a:p>
             <a:pPr algn="ctr"/>
+            <a:endParaRPr/>
           </a:p>
         </p:txBody>
       </p:sp>
@@ -6406,7 +6495,7 @@
           <a:noFill/>
         </p:spPr>
         <p:txBody>
-          <a:bodyPr wrap="square" lIns="0" rIns="0" tIns="0" bIns="0">
+          <a:bodyPr wrap="square" lIns="0" tIns="0" rIns="0" bIns="0">
             <a:spAutoFit/>
           </a:bodyPr>
           <a:lstStyle/>
@@ -6515,6 +6604,7 @@
           <a:lstStyle/>
           <a:p>
             <a:pPr algn="ctr"/>
+            <a:endParaRPr/>
           </a:p>
         </p:txBody>
       </p:sp>
@@ -6535,7 +6625,7 @@
           <a:noFill/>
         </p:spPr>
         <p:txBody>
-          <a:bodyPr wrap="square" lIns="0" rIns="0" tIns="0" bIns="0">
+          <a:bodyPr wrap="square" lIns="0" tIns="0" rIns="0" bIns="0">
             <a:spAutoFit/>
           </a:bodyPr>
           <a:lstStyle/>
@@ -6644,6 +6734,7 @@
           <a:lstStyle/>
           <a:p>
             <a:pPr algn="ctr"/>
+            <a:endParaRPr/>
           </a:p>
         </p:txBody>
       </p:sp>
@@ -6664,7 +6755,7 @@
           <a:noFill/>
         </p:spPr>
         <p:txBody>
-          <a:bodyPr wrap="square" lIns="0" rIns="0" tIns="0" bIns="0">
+          <a:bodyPr wrap="square" lIns="0" tIns="0" rIns="0" bIns="0">
             <a:spAutoFit/>
           </a:bodyPr>
           <a:lstStyle/>
@@ -6740,7 +6831,7 @@
 </file>
 
 <file path=ppt/slides/slide3.xml><?xml version="1.0" encoding="utf-8"?>
-<p:sld xmlns:a="http://schemas.openxmlformats.org/drawingml/2006/main" xmlns:p="http://schemas.openxmlformats.org/presentationml/2006/main" xmlns:r="http://schemas.openxmlformats.org/officeDocument/2006/relationships">
+<p:sld xmlns:a="http://schemas.openxmlformats.org/drawingml/2006/main" xmlns:r="http://schemas.openxmlformats.org/officeDocument/2006/relationships" xmlns:p="http://schemas.openxmlformats.org/presentationml/2006/main">
   <p:cSld>
     <p:spTree>
       <p:nvGrpSpPr>
@@ -6748,7 +6839,14 @@
         <p:cNvGrpSpPr/>
         <p:nvPr/>
       </p:nvGrpSpPr>
-      <p:grpSpPr/>
+      <p:grpSpPr>
+        <a:xfrm>
+          <a:off x="0" y="0"/>
+          <a:ext cx="0" cy="0"/>
+          <a:chOff x="0" y="0"/>
+          <a:chExt cx="0" cy="0"/>
+        </a:xfrm>
+      </p:grpSpPr>
       <p:sp>
         <p:nvSpPr>
           <p:cNvPr id="2" name="Rectangle 1"/>
@@ -6789,6 +6887,7 @@
           <a:lstStyle/>
           <a:p>
             <a:pPr algn="ctr"/>
+            <a:endParaRPr/>
           </a:p>
         </p:txBody>
       </p:sp>
@@ -6809,7 +6908,7 @@
           <a:noFill/>
         </p:spPr>
         <p:txBody>
-          <a:bodyPr wrap="square" lIns="0" rIns="0" tIns="0" bIns="0">
+          <a:bodyPr wrap="square" lIns="0" tIns="0" rIns="0" bIns="0">
             <a:spAutoFit/>
           </a:bodyPr>
           <a:lstStyle/>
@@ -6845,7 +6944,7 @@
           <a:noFill/>
         </p:spPr>
         <p:txBody>
-          <a:bodyPr wrap="square" lIns="0" rIns="0" tIns="0" bIns="0">
+          <a:bodyPr wrap="square" lIns="0" tIns="0" rIns="0" bIns="0">
             <a:spAutoFit/>
           </a:bodyPr>
           <a:lstStyle/>
@@ -6904,6 +7003,7 @@
           <a:lstStyle/>
           <a:p>
             <a:pPr algn="ctr"/>
+            <a:endParaRPr/>
           </a:p>
         </p:txBody>
       </p:sp>
@@ -6924,7 +7024,7 @@
           <a:noFill/>
         </p:spPr>
         <p:txBody>
-          <a:bodyPr wrap="none" lIns="0" rIns="0" tIns="0" bIns="0">
+          <a:bodyPr wrap="none" lIns="0" tIns="0" rIns="0" bIns="0">
             <a:spAutoFit/>
           </a:bodyPr>
           <a:lstStyle/>
@@ -6985,6 +7085,7 @@
           <a:lstStyle/>
           <a:p>
             <a:pPr algn="ctr"/>
+            <a:endParaRPr/>
           </a:p>
         </p:txBody>
       </p:sp>
@@ -7005,7 +7106,7 @@
           <a:noFill/>
         </p:spPr>
         <p:txBody>
-          <a:bodyPr wrap="square" lIns="0" rIns="0" tIns="0" bIns="0">
+          <a:bodyPr wrap="square" lIns="0" tIns="0" rIns="0" bIns="0">
             <a:spAutoFit/>
           </a:bodyPr>
           <a:lstStyle/>
@@ -7114,6 +7215,7 @@
           <a:lstStyle/>
           <a:p>
             <a:pPr algn="ctr"/>
+            <a:endParaRPr/>
           </a:p>
         </p:txBody>
       </p:sp>
@@ -7134,7 +7236,7 @@
           <a:noFill/>
         </p:spPr>
         <p:txBody>
-          <a:bodyPr wrap="square" lIns="0" rIns="0" tIns="0" bIns="0">
+          <a:bodyPr wrap="square" lIns="0" tIns="0" rIns="0" bIns="0">
             <a:spAutoFit/>
           </a:bodyPr>
           <a:lstStyle/>
@@ -7243,6 +7345,7 @@
           <a:lstStyle/>
           <a:p>
             <a:pPr algn="ctr"/>
+            <a:endParaRPr/>
           </a:p>
         </p:txBody>
       </p:sp>
@@ -7263,7 +7366,7 @@
           <a:noFill/>
         </p:spPr>
         <p:txBody>
-          <a:bodyPr wrap="square" lIns="0" rIns="0" tIns="0" bIns="0">
+          <a:bodyPr wrap="square" lIns="0" tIns="0" rIns="0" bIns="0">
             <a:spAutoFit/>
           </a:bodyPr>
           <a:lstStyle/>
@@ -7339,7 +7442,7 @@
 </file>
 
 <file path=ppt/slides/slide4.xml><?xml version="1.0" encoding="utf-8"?>
-<p:sld xmlns:a="http://schemas.openxmlformats.org/drawingml/2006/main" xmlns:p="http://schemas.openxmlformats.org/presentationml/2006/main" xmlns:r="http://schemas.openxmlformats.org/officeDocument/2006/relationships">
+<p:sld xmlns:a="http://schemas.openxmlformats.org/drawingml/2006/main" xmlns:r="http://schemas.openxmlformats.org/officeDocument/2006/relationships" xmlns:p="http://schemas.openxmlformats.org/presentationml/2006/main">
   <p:cSld>
     <p:spTree>
       <p:nvGrpSpPr>
@@ -7347,7 +7450,14 @@
         <p:cNvGrpSpPr/>
         <p:nvPr/>
       </p:nvGrpSpPr>
-      <p:grpSpPr/>
+      <p:grpSpPr>
+        <a:xfrm>
+          <a:off x="0" y="0"/>
+          <a:ext cx="0" cy="0"/>
+          <a:chOff x="0" y="0"/>
+          <a:chExt cx="0" cy="0"/>
+        </a:xfrm>
+      </p:grpSpPr>
       <p:sp>
         <p:nvSpPr>
           <p:cNvPr id="2" name="Rectangle 1"/>
@@ -7388,6 +7498,7 @@
           <a:lstStyle/>
           <a:p>
             <a:pPr algn="ctr"/>
+            <a:endParaRPr/>
           </a:p>
         </p:txBody>
       </p:sp>
@@ -7408,7 +7519,7 @@
           <a:noFill/>
         </p:spPr>
         <p:txBody>
-          <a:bodyPr wrap="square" lIns="0" rIns="0" tIns="0" bIns="0">
+          <a:bodyPr wrap="square" lIns="0" tIns="0" rIns="0" bIns="0">
             <a:spAutoFit/>
           </a:bodyPr>
           <a:lstStyle/>
@@ -7444,7 +7555,7 @@
           <a:noFill/>
         </p:spPr>
         <p:txBody>
-          <a:bodyPr wrap="square" lIns="0" rIns="0" tIns="0" bIns="0">
+          <a:bodyPr wrap="square" lIns="0" tIns="0" rIns="0" bIns="0">
             <a:spAutoFit/>
           </a:bodyPr>
           <a:lstStyle/>
@@ -7458,7 +7569,7 @@
               </a:defRPr>
             </a:pPr>
             <a:r>
-              <a:t>Enterprise Technical Architecture &amp; Reliability</a:t>
+              <a:t>Enterprise Technical Architecture &amp; System Topology</a:t>
             </a:r>
           </a:p>
         </p:txBody>
@@ -7503,6 +7614,7 @@
           <a:lstStyle/>
           <a:p>
             <a:pPr algn="ctr"/>
+            <a:endParaRPr/>
           </a:p>
         </p:txBody>
       </p:sp>
@@ -7523,7 +7635,7 @@
           <a:noFill/>
         </p:spPr>
         <p:txBody>
-          <a:bodyPr wrap="none" lIns="0" rIns="0" tIns="0" bIns="0">
+          <a:bodyPr wrap="none" lIns="0" tIns="0" rIns="0" bIns="0">
             <a:spAutoFit/>
           </a:bodyPr>
           <a:lstStyle/>
@@ -7551,7 +7663,7 @@
         <p:spPr>
           <a:xfrm>
             <a:off x="731520" y="1463040"/>
-            <a:ext cx="6217920" cy="1371600"/>
+            <a:ext cx="4846320" cy="1371600"/>
           </a:xfrm>
           <a:prstGeom prst="roundRect">
             <a:avLst/>
@@ -7584,6 +7696,7 @@
           <a:lstStyle/>
           <a:p>
             <a:pPr algn="ctr"/>
+            <a:endParaRPr/>
           </a:p>
         </p:txBody>
       </p:sp>
@@ -7596,7 +7709,7 @@
         <p:spPr>
           <a:xfrm>
             <a:off x="960120" y="1645920"/>
-            <a:ext cx="5760720" cy="1005840"/>
+            <a:ext cx="4389120" cy="1005840"/>
           </a:xfrm>
           <a:prstGeom prst="rect">
             <a:avLst/>
@@ -7604,7 +7717,7 @@
           <a:noFill/>
         </p:spPr>
         <p:txBody>
-          <a:bodyPr wrap="square" lIns="0" rIns="0" tIns="0" bIns="0">
+          <a:bodyPr wrap="square" lIns="0" tIns="0" rIns="0" bIns="0">
             <a:spAutoFit/>
           </a:bodyPr>
           <a:lstStyle/>
@@ -7618,7 +7731,7 @@
               </a:defRPr>
             </a:pPr>
             <a:r>
-              <a:t>Frontend Layer (Next.js 16 + React 19 + Turbopack)</a:t>
+              <a:t>Presentation Layer (Next.js 16 + React 19 + Turbopack)</a:t>
             </a:r>
           </a:p>
           <a:p>
@@ -7634,7 +7747,7 @@
               </a:defRPr>
             </a:pPr>
             <a:r>
-              <a:t>• Zero-latency optimistic UI with localized multi-language i18n (EN, HI, GU).</a:t>
+              <a:t>• Optimistic UI with multilingual i18n (EN, HI, GU).</a:t>
             </a:r>
           </a:p>
           <a:p>
@@ -7650,7 +7763,7 @@
               </a:defRPr>
             </a:pPr>
             <a:r>
-              <a:t>• PWA shell with Web Push notification service worker and mobile design.</a:t>
+              <a:t>• PWA shell with Web Push and audio chime triggers.</a:t>
             </a:r>
           </a:p>
         </p:txBody>
@@ -7664,7 +7777,7 @@
         <p:spPr>
           <a:xfrm>
             <a:off x="731520" y="2971800"/>
-            <a:ext cx="6217920" cy="1371600"/>
+            <a:ext cx="4846320" cy="1371600"/>
           </a:xfrm>
           <a:prstGeom prst="roundRect">
             <a:avLst/>
@@ -7697,6 +7810,7 @@
           <a:lstStyle/>
           <a:p>
             <a:pPr algn="ctr"/>
+            <a:endParaRPr/>
           </a:p>
         </p:txBody>
       </p:sp>
@@ -7709,7 +7823,7 @@
         <p:spPr>
           <a:xfrm>
             <a:off x="960120" y="3154680"/>
-            <a:ext cx="5760720" cy="1005840"/>
+            <a:ext cx="4389120" cy="1005840"/>
           </a:xfrm>
           <a:prstGeom prst="rect">
             <a:avLst/>
@@ -7717,7 +7831,7 @@
           <a:noFill/>
         </p:spPr>
         <p:txBody>
-          <a:bodyPr wrap="square" lIns="0" rIns="0" tIns="0" bIns="0">
+          <a:bodyPr wrap="square" lIns="0" tIns="0" rIns="0" bIns="0">
             <a:spAutoFit/>
           </a:bodyPr>
           <a:lstStyle/>
@@ -7731,7 +7845,7 @@
               </a:defRPr>
             </a:pPr>
             <a:r>
-              <a:t>Backend Services (FastAPI + Python 3.12 Asynchronous Core)</a:t>
+              <a:t>API &amp; Gateway (FastAPI + Starlette WebSockets)</a:t>
             </a:r>
           </a:p>
           <a:p>
@@ -7747,7 +7861,7 @@
               </a:defRPr>
             </a:pPr>
             <a:r>
-              <a:t>• Stateless JWT authentication with rotating tokens &amp; RBAC security decorators.</a:t>
+              <a:t>• Stateless JWT auth with role-based security guards.</a:t>
             </a:r>
           </a:p>
           <a:p>
@@ -7763,7 +7877,7 @@
               </a:defRPr>
             </a:pPr>
             <a:r>
-              <a:t>• High-throughput REST API endpoints with Pydantic payload validation.</a:t>
+              <a:t>• Sub-second real-time event broadcasting mesh.</a:t>
             </a:r>
           </a:p>
         </p:txBody>
@@ -7777,7 +7891,7 @@
         <p:spPr>
           <a:xfrm>
             <a:off x="731520" y="4480560"/>
-            <a:ext cx="6217920" cy="1371600"/>
+            <a:ext cx="4846320" cy="1371600"/>
           </a:xfrm>
           <a:prstGeom prst="roundRect">
             <a:avLst/>
@@ -7810,6 +7924,7 @@
           <a:lstStyle/>
           <a:p>
             <a:pPr algn="ctr"/>
+            <a:endParaRPr/>
           </a:p>
         </p:txBody>
       </p:sp>
@@ -7822,7 +7937,7 @@
         <p:spPr>
           <a:xfrm>
             <a:off x="960120" y="4663440"/>
-            <a:ext cx="5760720" cy="1005840"/>
+            <a:ext cx="4389120" cy="1005840"/>
           </a:xfrm>
           <a:prstGeom prst="rect">
             <a:avLst/>
@@ -7830,7 +7945,7 @@
           <a:noFill/>
         </p:spPr>
         <p:txBody>
-          <a:bodyPr wrap="square" lIns="0" rIns="0" tIns="0" bIns="0">
+          <a:bodyPr wrap="square" lIns="0" tIns="0" rIns="0" bIns="0">
             <a:spAutoFit/>
           </a:bodyPr>
           <a:lstStyle/>
@@ -7844,7 +7959,7 @@
               </a:defRPr>
             </a:pPr>
             <a:r>
-              <a:t>Database &amp; Persistence (PostgreSQL / SQLite + SQLAlchemy 2.0)</a:t>
+              <a:t>Data Core (PostgreSQL / SQLite + SQLAlchemy 2.0)</a:t>
             </a:r>
           </a:p>
           <a:p>
@@ -7860,7 +7975,7 @@
               </a:defRPr>
             </a:pPr>
             <a:r>
-              <a:t>• Relational data model with cascading integrity constraints &amp; connection pooling.</a:t>
+              <a:t>• Cascading integrity protection &amp; immutable audit logs.</a:t>
             </a:r>
           </a:p>
           <a:p>
@@ -7876,7 +7991,7 @@
               </a:defRPr>
             </a:pPr>
             <a:r>
-              <a:t>• Immutable audit logs, real-time WebSocket broadcaster, and automated seeders.</a:t>
+              <a:t>• Encrypted browser storage fallback with tombstone keys.</a:t>
             </a:r>
           </a:p>
         </p:txBody>
@@ -7889,8 +8004,8 @@
         </p:nvSpPr>
         <p:spPr>
           <a:xfrm>
-            <a:off x="7132320" y="1463040"/>
-            <a:ext cx="4327855" cy="4480560"/>
+            <a:off x="5724144" y="1426464"/>
+            <a:ext cx="5772607" cy="4553712"/>
           </a:xfrm>
           <a:prstGeom prst="roundRect">
             <a:avLst/>
@@ -7923,19 +8038,44 @@
           <a:lstStyle/>
           <a:p>
             <a:pPr algn="ctr"/>
-          </a:p>
-        </p:txBody>
-      </p:sp>
-      <p:sp>
-        <p:nvSpPr>
-          <p:cNvPr id="14" name="TextBox 13"/>
+            <a:endParaRPr/>
+          </a:p>
+        </p:txBody>
+      </p:sp>
+      <p:pic>
+        <p:nvPicPr>
+          <p:cNvPr id="14" name="Picture 13" descr="architecture_diagram.png"/>
+          <p:cNvPicPr>
+            <a:picLocks noChangeAspect="1"/>
+          </p:cNvPicPr>
+          <p:nvPr/>
+        </p:nvPicPr>
+        <p:blipFill>
+          <a:blip r:embed="rId2"/>
+          <a:stretch>
+            <a:fillRect/>
+          </a:stretch>
+        </p:blipFill>
+        <p:spPr>
+          <a:xfrm>
+            <a:off x="5577840" y="1289304"/>
+            <a:ext cx="6141454" cy="4828032"/>
+          </a:xfrm>
+          <a:prstGeom prst="rect">
+            <a:avLst/>
+          </a:prstGeom>
+        </p:spPr>
+      </p:pic>
+      <p:sp>
+        <p:nvSpPr>
+          <p:cNvPr id="15" name="TextBox 14"/>
           <p:cNvSpPr txBox="1"/>
           <p:nvPr/>
         </p:nvSpPr>
         <p:spPr>
           <a:xfrm>
-            <a:off x="7315200" y="3154680"/>
-            <a:ext cx="3962095" cy="1097280"/>
+            <a:off x="5760720" y="6016752"/>
+            <a:ext cx="5699455" cy="274320"/>
           </a:xfrm>
           <a:prstGeom prst="rect">
             <a:avLst/>
@@ -7943,13 +8083,13 @@
           <a:noFill/>
         </p:spPr>
         <p:txBody>
-          <a:bodyPr wrap="square" lIns="0" rIns="0" tIns="0" bIns="0">
+          <a:bodyPr wrap="none" lIns="0" tIns="0" rIns="0" bIns="0">
             <a:spAutoFit/>
           </a:bodyPr>
           <a:lstStyle/>
           <a:p>
             <a:pPr algn="ctr">
-              <a:defRPr sz="1200" b="1">
+              <a:defRPr sz="950" b="1">
                 <a:solidFill>
                   <a:srgbClr val="60A5FA"/>
                 </a:solidFill>
@@ -7957,33 +8097,7 @@
               </a:defRPr>
             </a:pPr>
             <a:r>
-              <a:t>📸 Architecture &amp; Data Flow Diagram</a:t>
-            </a:r>
-          </a:p>
-          <a:p>
-            <a:pPr algn="ctr">
-              <a:defRPr sz="950">
-                <a:solidFill>
-                  <a:srgbClr val="94A3B8"/>
-                </a:solidFill>
-                <a:latin typeface="Arial"/>
-              </a:defRPr>
-            </a:pPr>
-            <a:r>
-              <a:t>Insert System Architecture Diagram Here</a:t>
-            </a:r>
-          </a:p>
-          <a:p>
-            <a:pPr algn="ctr">
-              <a:defRPr sz="850" i="1">
-                <a:solidFill>
-                  <a:srgbClr val="94A3B8"/>
-                </a:solidFill>
-                <a:latin typeface="Arial"/>
-              </a:defRPr>
-            </a:pPr>
-            <a:r>
-              <a:t>(Right Click → Change Picture / Paste Screenshot)</a:t>
+              <a:t>📸 System Architecture &amp; Data Gateway</a:t>
             </a:r>
           </a:p>
         </p:txBody>
@@ -7997,7 +8111,7 @@
 </file>
 
 <file path=ppt/slides/slide5.xml><?xml version="1.0" encoding="utf-8"?>
-<p:sld xmlns:a="http://schemas.openxmlformats.org/drawingml/2006/main" xmlns:p="http://schemas.openxmlformats.org/presentationml/2006/main" xmlns:r="http://schemas.openxmlformats.org/officeDocument/2006/relationships">
+<p:sld xmlns:a="http://schemas.openxmlformats.org/drawingml/2006/main" xmlns:r="http://schemas.openxmlformats.org/officeDocument/2006/relationships" xmlns:p="http://schemas.openxmlformats.org/presentationml/2006/main">
   <p:cSld>
     <p:spTree>
       <p:nvGrpSpPr>
@@ -8005,7 +8119,14 @@
         <p:cNvGrpSpPr/>
         <p:nvPr/>
       </p:nvGrpSpPr>
-      <p:grpSpPr/>
+      <p:grpSpPr>
+        <a:xfrm>
+          <a:off x="0" y="0"/>
+          <a:ext cx="0" cy="0"/>
+          <a:chOff x="0" y="0"/>
+          <a:chExt cx="0" cy="0"/>
+        </a:xfrm>
+      </p:grpSpPr>
       <p:sp>
         <p:nvSpPr>
           <p:cNvPr id="2" name="Rectangle 1"/>
@@ -8046,6 +8167,7 @@
           <a:lstStyle/>
           <a:p>
             <a:pPr algn="ctr"/>
+            <a:endParaRPr/>
           </a:p>
         </p:txBody>
       </p:sp>
@@ -8066,7 +8188,7 @@
           <a:noFill/>
         </p:spPr>
         <p:txBody>
-          <a:bodyPr wrap="square" lIns="0" rIns="0" tIns="0" bIns="0">
+          <a:bodyPr wrap="square" lIns="0" tIns="0" rIns="0" bIns="0">
             <a:spAutoFit/>
           </a:bodyPr>
           <a:lstStyle/>
@@ -8102,7 +8224,7 @@
           <a:noFill/>
         </p:spPr>
         <p:txBody>
-          <a:bodyPr wrap="square" lIns="0" rIns="0" tIns="0" bIns="0">
+          <a:bodyPr wrap="square" lIns="0" tIns="0" rIns="0" bIns="0">
             <a:spAutoFit/>
           </a:bodyPr>
           <a:lstStyle/>
@@ -8116,7 +8238,7 @@
               </a:defRPr>
             </a:pPr>
             <a:r>
-              <a:t>End-to-End Procurement &amp; Approval Workflow</a:t>
+              <a:t>End-to-End Requisition Pipeline &amp; Approval Lifecycle</a:t>
             </a:r>
           </a:p>
         </p:txBody>
@@ -8161,6 +8283,7 @@
           <a:lstStyle/>
           <a:p>
             <a:pPr algn="ctr"/>
+            <a:endParaRPr/>
           </a:p>
         </p:txBody>
       </p:sp>
@@ -8181,7 +8304,7 @@
           <a:noFill/>
         </p:spPr>
         <p:txBody>
-          <a:bodyPr wrap="none" lIns="0" rIns="0" tIns="0" bIns="0">
+          <a:bodyPr wrap="none" lIns="0" tIns="0" rIns="0" bIns="0">
             <a:spAutoFit/>
           </a:bodyPr>
           <a:lstStyle/>
@@ -8208,18 +8331,18 @@
         </p:nvSpPr>
         <p:spPr>
           <a:xfrm>
-            <a:off x="731520" y="1463040"/>
-            <a:ext cx="2057400" cy="4572000"/>
+            <a:off x="694944" y="1380744"/>
+            <a:ext cx="10801807" cy="4736592"/>
           </a:xfrm>
           <a:prstGeom prst="roundRect">
             <a:avLst/>
           </a:prstGeom>
           <a:solidFill>
-            <a:srgbClr val="1E293B"/>
+            <a:srgbClr val="182235"/>
           </a:solidFill>
-          <a:ln>
+          <a:ln w="19050">
             <a:solidFill>
-              <a:srgbClr val="334155"/>
+              <a:srgbClr val="60A5FA"/>
             </a:solidFill>
           </a:ln>
         </p:spPr>
@@ -8242,61 +8365,34 @@
           <a:lstStyle/>
           <a:p>
             <a:pPr algn="ctr"/>
-          </a:p>
-        </p:txBody>
-      </p:sp>
-      <p:sp>
-        <p:nvSpPr>
-          <p:cNvPr id="8" name="Rounded Rectangle 7"/>
-          <p:cNvSpPr/>
-          <p:nvPr/>
-        </p:nvSpPr>
-        <p:spPr>
-          <a:xfrm>
-            <a:off x="868680" y="1645920"/>
-            <a:ext cx="1783080" cy="411480"/>
-          </a:xfrm>
-          <a:prstGeom prst="roundRect">
-            <a:avLst/>
-          </a:prstGeom>
-          <a:solidFill>
-            <a:srgbClr val="3B82F6"/>
-          </a:solidFill>
-          <a:ln>
-            <a:noFill/>
-          </a:ln>
-        </p:spPr>
-        <p:style>
-          <a:lnRef idx="1">
-            <a:schemeClr val="accent1"/>
-          </a:lnRef>
-          <a:fillRef idx="3">
-            <a:schemeClr val="accent1"/>
-          </a:fillRef>
-          <a:effectRef idx="2">
-            <a:schemeClr val="accent1"/>
-          </a:effectRef>
-          <a:fontRef idx="minor">
-            <a:schemeClr val="lt1"/>
-          </a:fontRef>
-        </p:style>
-        <p:txBody>
-          <a:bodyPr rtlCol="0" anchor="ctr"/>
-          <a:lstStyle/>
-          <a:p>
-            <a:pPr algn="ctr">
-              <a:defRPr sz="1000" b="1">
-                <a:solidFill>
-                  <a:srgbClr val="FFFFFF"/>
-                </a:solidFill>
-              </a:defRPr>
-            </a:pPr>
-            <a:r>
-              <a:t>STEP 1</a:t>
-            </a:r>
-          </a:p>
-        </p:txBody>
-      </p:sp>
+            <a:endParaRPr/>
+          </a:p>
+        </p:txBody>
+      </p:sp>
+      <p:pic>
+        <p:nvPicPr>
+          <p:cNvPr id="8" name="Picture 7" descr="order_flow_diagram.png"/>
+          <p:cNvPicPr>
+            <a:picLocks noChangeAspect="1"/>
+          </p:cNvPicPr>
+          <p:nvPr/>
+        </p:nvPicPr>
+        <p:blipFill>
+          <a:blip r:embed="rId2"/>
+          <a:stretch>
+            <a:fillRect/>
+          </a:stretch>
+        </p:blipFill>
+        <p:spPr>
+          <a:xfrm>
+            <a:off x="731520" y="1417320"/>
+            <a:ext cx="10728655" cy="4663440"/>
+          </a:xfrm>
+          <a:prstGeom prst="rect">
+            <a:avLst/>
+          </a:prstGeom>
+        </p:spPr>
+      </p:pic>
       <p:sp>
         <p:nvSpPr>
           <p:cNvPr id="9" name="TextBox 8"/>
@@ -8305,8 +8401,8 @@
         </p:nvSpPr>
         <p:spPr>
           <a:xfrm>
-            <a:off x="868680" y="2194560"/>
-            <a:ext cx="1783080" cy="3657600"/>
+            <a:off x="731520" y="6153912"/>
+            <a:ext cx="10728655" cy="274320"/>
           </a:xfrm>
           <a:prstGeom prst="rect">
             <a:avLst/>
@@ -8314,795 +8410,21 @@
           <a:noFill/>
         </p:spPr>
         <p:txBody>
-          <a:bodyPr wrap="square">
+          <a:bodyPr wrap="none" lIns="0" tIns="0" rIns="0" bIns="0">
             <a:spAutoFit/>
           </a:bodyPr>
           <a:lstStyle/>
           <a:p>
-            <a:pPr>
-              <a:defRPr sz="1200" b="1">
-                <a:solidFill>
-                  <a:srgbClr val="F8FAFC"/>
-                </a:solidFill>
-              </a:defRPr>
-            </a:pPr>
-            <a:r>
-              <a:t>1. Coordinator</a:t>
-            </a:r>
-          </a:p>
-          <a:p>
-            <a:pPr>
-              <a:spcBef>
-                <a:spcPts val="800"/>
-              </a:spcBef>
-              <a:defRPr sz="950">
-                <a:solidFill>
-                  <a:srgbClr val="94A3B8"/>
-                </a:solidFill>
-              </a:defRPr>
-            </a:pPr>
-            <a:r>
-              <a:t>Drafts requisitions, selects live menu items, submits to Principal.</a:t>
-            </a:r>
-          </a:p>
-        </p:txBody>
-      </p:sp>
-      <p:sp>
-        <p:nvSpPr>
-          <p:cNvPr id="10" name="Right Arrow 9"/>
-          <p:cNvSpPr/>
-          <p:nvPr/>
-        </p:nvSpPr>
-        <p:spPr>
-          <a:xfrm>
-            <a:off x="2816351" y="3566160"/>
-            <a:ext cx="146304" cy="219456"/>
-          </a:xfrm>
-          <a:prstGeom prst="rightArrow">
-            <a:avLst/>
-          </a:prstGeom>
-          <a:solidFill>
-            <a:srgbClr val="60A5FA"/>
-          </a:solidFill>
-          <a:ln>
-            <a:noFill/>
-          </a:ln>
-        </p:spPr>
-        <p:style>
-          <a:lnRef idx="1">
-            <a:schemeClr val="accent1"/>
-          </a:lnRef>
-          <a:fillRef idx="3">
-            <a:schemeClr val="accent1"/>
-          </a:fillRef>
-          <a:effectRef idx="2">
-            <a:schemeClr val="accent1"/>
-          </a:effectRef>
-          <a:fontRef idx="minor">
-            <a:schemeClr val="lt1"/>
-          </a:fontRef>
-        </p:style>
-        <p:txBody>
-          <a:bodyPr rtlCol="0" anchor="ctr"/>
-          <a:lstStyle/>
-          <a:p>
-            <a:pPr algn="ctr"/>
-          </a:p>
-        </p:txBody>
-      </p:sp>
-      <p:sp>
-        <p:nvSpPr>
-          <p:cNvPr id="11" name="Rounded Rectangle 10"/>
-          <p:cNvSpPr/>
-          <p:nvPr/>
-        </p:nvSpPr>
-        <p:spPr>
-          <a:xfrm>
-            <a:off x="2907791" y="1463040"/>
-            <a:ext cx="2057400" cy="4572000"/>
-          </a:xfrm>
-          <a:prstGeom prst="roundRect">
-            <a:avLst/>
-          </a:prstGeom>
-          <a:solidFill>
-            <a:srgbClr val="1E293B"/>
-          </a:solidFill>
-          <a:ln>
-            <a:solidFill>
-              <a:srgbClr val="334155"/>
-            </a:solidFill>
-          </a:ln>
-        </p:spPr>
-        <p:style>
-          <a:lnRef idx="1">
-            <a:schemeClr val="accent1"/>
-          </a:lnRef>
-          <a:fillRef idx="3">
-            <a:schemeClr val="accent1"/>
-          </a:fillRef>
-          <a:effectRef idx="2">
-            <a:schemeClr val="accent1"/>
-          </a:effectRef>
-          <a:fontRef idx="minor">
-            <a:schemeClr val="lt1"/>
-          </a:fontRef>
-        </p:style>
-        <p:txBody>
-          <a:bodyPr rtlCol="0" anchor="ctr"/>
-          <a:lstStyle/>
-          <a:p>
-            <a:pPr algn="ctr"/>
-          </a:p>
-        </p:txBody>
-      </p:sp>
-      <p:sp>
-        <p:nvSpPr>
-          <p:cNvPr id="12" name="Rounded Rectangle 11"/>
-          <p:cNvSpPr/>
-          <p:nvPr/>
-        </p:nvSpPr>
-        <p:spPr>
-          <a:xfrm>
-            <a:off x="3044951" y="1645920"/>
-            <a:ext cx="1783080" cy="411480"/>
-          </a:xfrm>
-          <a:prstGeom prst="roundRect">
-            <a:avLst/>
-          </a:prstGeom>
-          <a:solidFill>
-            <a:srgbClr val="06B6D4"/>
-          </a:solidFill>
-          <a:ln>
-            <a:noFill/>
-          </a:ln>
-        </p:spPr>
-        <p:style>
-          <a:lnRef idx="1">
-            <a:schemeClr val="accent1"/>
-          </a:lnRef>
-          <a:fillRef idx="3">
-            <a:schemeClr val="accent1"/>
-          </a:fillRef>
-          <a:effectRef idx="2">
-            <a:schemeClr val="accent1"/>
-          </a:effectRef>
-          <a:fontRef idx="minor">
-            <a:schemeClr val="lt1"/>
-          </a:fontRef>
-        </p:style>
-        <p:txBody>
-          <a:bodyPr rtlCol="0" anchor="ctr"/>
-          <a:lstStyle/>
-          <a:p>
             <a:pPr algn="ctr">
-              <a:defRPr sz="1000" b="1">
-                <a:solidFill>
-                  <a:srgbClr val="FFFFFF"/>
-                </a:solidFill>
-              </a:defRPr>
-            </a:pPr>
-            <a:r>
-              <a:t>STEP 2</a:t>
-            </a:r>
-          </a:p>
-        </p:txBody>
-      </p:sp>
-      <p:sp>
-        <p:nvSpPr>
-          <p:cNvPr id="13" name="TextBox 12"/>
-          <p:cNvSpPr txBox="1"/>
-          <p:nvPr/>
-        </p:nvSpPr>
-        <p:spPr>
-          <a:xfrm>
-            <a:off x="3044951" y="2194560"/>
-            <a:ext cx="1783080" cy="3657600"/>
-          </a:xfrm>
-          <a:prstGeom prst="rect">
-            <a:avLst/>
-          </a:prstGeom>
-          <a:noFill/>
-        </p:spPr>
-        <p:txBody>
-          <a:bodyPr wrap="square">
-            <a:spAutoFit/>
-          </a:bodyPr>
-          <a:lstStyle/>
-          <a:p>
-            <a:pPr>
-              <a:defRPr sz="1200" b="1">
-                <a:solidFill>
-                  <a:srgbClr val="F8FAFC"/>
-                </a:solidFill>
-              </a:defRPr>
-            </a:pPr>
-            <a:r>
-              <a:t>2. Principal</a:t>
-            </a:r>
-          </a:p>
-          <a:p>
-            <a:pPr>
-              <a:spcBef>
-                <a:spcPts val="800"/>
-              </a:spcBef>
-              <a:defRPr sz="950">
-                <a:solidFill>
-                  <a:srgbClr val="94A3B8"/>
-                </a:solidFill>
-              </a:defRPr>
-            </a:pPr>
-            <a:r>
-              <a:t>Reviews departmental budget, approves or rejects with official remarks.</a:t>
-            </a:r>
-          </a:p>
-        </p:txBody>
-      </p:sp>
-      <p:sp>
-        <p:nvSpPr>
-          <p:cNvPr id="14" name="Right Arrow 13"/>
-          <p:cNvSpPr/>
-          <p:nvPr/>
-        </p:nvSpPr>
-        <p:spPr>
-          <a:xfrm>
-            <a:off x="4992622" y="3566160"/>
-            <a:ext cx="146304" cy="219456"/>
-          </a:xfrm>
-          <a:prstGeom prst="rightArrow">
-            <a:avLst/>
-          </a:prstGeom>
-          <a:solidFill>
-            <a:srgbClr val="60A5FA"/>
-          </a:solidFill>
-          <a:ln>
-            <a:noFill/>
-          </a:ln>
-        </p:spPr>
-        <p:style>
-          <a:lnRef idx="1">
-            <a:schemeClr val="accent1"/>
-          </a:lnRef>
-          <a:fillRef idx="3">
-            <a:schemeClr val="accent1"/>
-          </a:fillRef>
-          <a:effectRef idx="2">
-            <a:schemeClr val="accent1"/>
-          </a:effectRef>
-          <a:fontRef idx="minor">
-            <a:schemeClr val="lt1"/>
-          </a:fontRef>
-        </p:style>
-        <p:txBody>
-          <a:bodyPr rtlCol="0" anchor="ctr"/>
-          <a:lstStyle/>
-          <a:p>
-            <a:pPr algn="ctr"/>
-          </a:p>
-        </p:txBody>
-      </p:sp>
-      <p:sp>
-        <p:nvSpPr>
-          <p:cNvPr id="15" name="Rounded Rectangle 14"/>
-          <p:cNvSpPr/>
-          <p:nvPr/>
-        </p:nvSpPr>
-        <p:spPr>
-          <a:xfrm>
-            <a:off x="5084064" y="1463040"/>
-            <a:ext cx="2057400" cy="4572000"/>
-          </a:xfrm>
-          <a:prstGeom prst="roundRect">
-            <a:avLst/>
-          </a:prstGeom>
-          <a:solidFill>
-            <a:srgbClr val="1E293B"/>
-          </a:solidFill>
-          <a:ln>
-            <a:solidFill>
-              <a:srgbClr val="334155"/>
-            </a:solidFill>
-          </a:ln>
-        </p:spPr>
-        <p:style>
-          <a:lnRef idx="1">
-            <a:schemeClr val="accent1"/>
-          </a:lnRef>
-          <a:fillRef idx="3">
-            <a:schemeClr val="accent1"/>
-          </a:fillRef>
-          <a:effectRef idx="2">
-            <a:schemeClr val="accent1"/>
-          </a:effectRef>
-          <a:fontRef idx="minor">
-            <a:schemeClr val="lt1"/>
-          </a:fontRef>
-        </p:style>
-        <p:txBody>
-          <a:bodyPr rtlCol="0" anchor="ctr"/>
-          <a:lstStyle/>
-          <a:p>
-            <a:pPr algn="ctr"/>
-          </a:p>
-        </p:txBody>
-      </p:sp>
-      <p:sp>
-        <p:nvSpPr>
-          <p:cNvPr id="16" name="Rounded Rectangle 15"/>
-          <p:cNvSpPr/>
-          <p:nvPr/>
-        </p:nvSpPr>
-        <p:spPr>
-          <a:xfrm>
-            <a:off x="5221224" y="1645920"/>
-            <a:ext cx="1783080" cy="411480"/>
-          </a:xfrm>
-          <a:prstGeom prst="roundRect">
-            <a:avLst/>
-          </a:prstGeom>
-          <a:solidFill>
-            <a:srgbClr val="A855F7"/>
-          </a:solidFill>
-          <a:ln>
-            <a:noFill/>
-          </a:ln>
-        </p:spPr>
-        <p:style>
-          <a:lnRef idx="1">
-            <a:schemeClr val="accent1"/>
-          </a:lnRef>
-          <a:fillRef idx="3">
-            <a:schemeClr val="accent1"/>
-          </a:fillRef>
-          <a:effectRef idx="2">
-            <a:schemeClr val="accent1"/>
-          </a:effectRef>
-          <a:fontRef idx="minor">
-            <a:schemeClr val="lt1"/>
-          </a:fontRef>
-        </p:style>
-        <p:txBody>
-          <a:bodyPr rtlCol="0" anchor="ctr"/>
-          <a:lstStyle/>
-          <a:p>
-            <a:pPr algn="ctr">
-              <a:defRPr sz="1000" b="1">
-                <a:solidFill>
-                  <a:srgbClr val="FFFFFF"/>
-                </a:solidFill>
-              </a:defRPr>
-            </a:pPr>
-            <a:r>
-              <a:t>STEP 3</a:t>
-            </a:r>
-          </a:p>
-        </p:txBody>
-      </p:sp>
-      <p:sp>
-        <p:nvSpPr>
-          <p:cNvPr id="17" name="TextBox 16"/>
-          <p:cNvSpPr txBox="1"/>
-          <p:nvPr/>
-        </p:nvSpPr>
-        <p:spPr>
-          <a:xfrm>
-            <a:off x="5221224" y="2194560"/>
-            <a:ext cx="1783080" cy="3657600"/>
-          </a:xfrm>
-          <a:prstGeom prst="rect">
-            <a:avLst/>
-          </a:prstGeom>
-          <a:noFill/>
-        </p:spPr>
-        <p:txBody>
-          <a:bodyPr wrap="square">
-            <a:spAutoFit/>
-          </a:bodyPr>
-          <a:lstStyle/>
-          <a:p>
-            <a:pPr>
-              <a:defRPr sz="1200" b="1">
-                <a:solidFill>
-                  <a:srgbClr val="F8FAFC"/>
-                </a:solidFill>
-              </a:defRPr>
-            </a:pPr>
-            <a:r>
-              <a:t>3. DCR (Discretionary)</a:t>
-            </a:r>
-          </a:p>
-          <a:p>
-            <a:pPr>
-              <a:spcBef>
-                <a:spcPts val="800"/>
-              </a:spcBef>
-              <a:defRPr sz="950">
-                <a:solidFill>
-                  <a:srgbClr val="94A3B8"/>
-                </a:solidFill>
-              </a:defRPr>
-            </a:pPr>
-            <a:r>
-              <a:t>Verifies institutional expense limits and forwards to canteen vendors.</a:t>
-            </a:r>
-          </a:p>
-        </p:txBody>
-      </p:sp>
-      <p:sp>
-        <p:nvSpPr>
-          <p:cNvPr id="18" name="Right Arrow 17"/>
-          <p:cNvSpPr/>
-          <p:nvPr/>
-        </p:nvSpPr>
-        <p:spPr>
-          <a:xfrm>
-            <a:off x="7168895" y="3566160"/>
-            <a:ext cx="146304" cy="219456"/>
-          </a:xfrm>
-          <a:prstGeom prst="rightArrow">
-            <a:avLst/>
-          </a:prstGeom>
-          <a:solidFill>
-            <a:srgbClr val="60A5FA"/>
-          </a:solidFill>
-          <a:ln>
-            <a:noFill/>
-          </a:ln>
-        </p:spPr>
-        <p:style>
-          <a:lnRef idx="1">
-            <a:schemeClr val="accent1"/>
-          </a:lnRef>
-          <a:fillRef idx="3">
-            <a:schemeClr val="accent1"/>
-          </a:fillRef>
-          <a:effectRef idx="2">
-            <a:schemeClr val="accent1"/>
-          </a:effectRef>
-          <a:fontRef idx="minor">
-            <a:schemeClr val="lt1"/>
-          </a:fontRef>
-        </p:style>
-        <p:txBody>
-          <a:bodyPr rtlCol="0" anchor="ctr"/>
-          <a:lstStyle/>
-          <a:p>
-            <a:pPr algn="ctr"/>
-          </a:p>
-        </p:txBody>
-      </p:sp>
-      <p:sp>
-        <p:nvSpPr>
-          <p:cNvPr id="19" name="Rounded Rectangle 18"/>
-          <p:cNvSpPr/>
-          <p:nvPr/>
-        </p:nvSpPr>
-        <p:spPr>
-          <a:xfrm>
-            <a:off x="7260336" y="1463040"/>
-            <a:ext cx="2057400" cy="4572000"/>
-          </a:xfrm>
-          <a:prstGeom prst="roundRect">
-            <a:avLst/>
-          </a:prstGeom>
-          <a:solidFill>
-            <a:srgbClr val="1E293B"/>
-          </a:solidFill>
-          <a:ln>
-            <a:solidFill>
-              <a:srgbClr val="334155"/>
-            </a:solidFill>
-          </a:ln>
-        </p:spPr>
-        <p:style>
-          <a:lnRef idx="1">
-            <a:schemeClr val="accent1"/>
-          </a:lnRef>
-          <a:fillRef idx="3">
-            <a:schemeClr val="accent1"/>
-          </a:fillRef>
-          <a:effectRef idx="2">
-            <a:schemeClr val="accent1"/>
-          </a:effectRef>
-          <a:fontRef idx="minor">
-            <a:schemeClr val="lt1"/>
-          </a:fontRef>
-        </p:style>
-        <p:txBody>
-          <a:bodyPr rtlCol="0" anchor="ctr"/>
-          <a:lstStyle/>
-          <a:p>
-            <a:pPr algn="ctr"/>
-          </a:p>
-        </p:txBody>
-      </p:sp>
-      <p:sp>
-        <p:nvSpPr>
-          <p:cNvPr id="20" name="Rounded Rectangle 19"/>
-          <p:cNvSpPr/>
-          <p:nvPr/>
-        </p:nvSpPr>
-        <p:spPr>
-          <a:xfrm>
-            <a:off x="7397496" y="1645920"/>
-            <a:ext cx="1783080" cy="411480"/>
-          </a:xfrm>
-          <a:prstGeom prst="roundRect">
-            <a:avLst/>
-          </a:prstGeom>
-          <a:solidFill>
-            <a:srgbClr val="F59E0B"/>
-          </a:solidFill>
-          <a:ln>
-            <a:noFill/>
-          </a:ln>
-        </p:spPr>
-        <p:style>
-          <a:lnRef idx="1">
-            <a:schemeClr val="accent1"/>
-          </a:lnRef>
-          <a:fillRef idx="3">
-            <a:schemeClr val="accent1"/>
-          </a:fillRef>
-          <a:effectRef idx="2">
-            <a:schemeClr val="accent1"/>
-          </a:effectRef>
-          <a:fontRef idx="minor">
-            <a:schemeClr val="lt1"/>
-          </a:fontRef>
-        </p:style>
-        <p:txBody>
-          <a:bodyPr rtlCol="0" anchor="ctr"/>
-          <a:lstStyle/>
-          <a:p>
-            <a:pPr algn="ctr">
-              <a:defRPr sz="1000" b="1">
-                <a:solidFill>
-                  <a:srgbClr val="FFFFFF"/>
-                </a:solidFill>
-              </a:defRPr>
-            </a:pPr>
-            <a:r>
-              <a:t>STEP 4</a:t>
-            </a:r>
-          </a:p>
-        </p:txBody>
-      </p:sp>
-      <p:sp>
-        <p:nvSpPr>
-          <p:cNvPr id="21" name="TextBox 20"/>
-          <p:cNvSpPr txBox="1"/>
-          <p:nvPr/>
-        </p:nvSpPr>
-        <p:spPr>
-          <a:xfrm>
-            <a:off x="7397496" y="2194560"/>
-            <a:ext cx="1783080" cy="3657600"/>
-          </a:xfrm>
-          <a:prstGeom prst="rect">
-            <a:avLst/>
-          </a:prstGeom>
-          <a:noFill/>
-        </p:spPr>
-        <p:txBody>
-          <a:bodyPr wrap="square">
-            <a:spAutoFit/>
-          </a:bodyPr>
-          <a:lstStyle/>
-          <a:p>
-            <a:pPr>
-              <a:defRPr sz="1200" b="1">
-                <a:solidFill>
-                  <a:srgbClr val="F8FAFC"/>
-                </a:solidFill>
-              </a:defRPr>
-            </a:pPr>
-            <a:r>
-              <a:t>4. Canteen Vendor</a:t>
-            </a:r>
-          </a:p>
-          <a:p>
-            <a:pPr>
-              <a:spcBef>
-                <a:spcPts val="800"/>
-              </a:spcBef>
-              <a:defRPr sz="950">
-                <a:solidFill>
-                  <a:srgbClr val="94A3B8"/>
-                </a:solidFill>
-              </a:defRPr>
-            </a:pPr>
-            <a:r>
-              <a:t>Confirms pricing, prepares items, requests modifications if needed.</a:t>
-            </a:r>
-          </a:p>
-        </p:txBody>
-      </p:sp>
-      <p:sp>
-        <p:nvSpPr>
-          <p:cNvPr id="22" name="Right Arrow 21"/>
-          <p:cNvSpPr/>
-          <p:nvPr/>
-        </p:nvSpPr>
-        <p:spPr>
-          <a:xfrm>
-            <a:off x="9345167" y="3566160"/>
-            <a:ext cx="146304" cy="219456"/>
-          </a:xfrm>
-          <a:prstGeom prst="rightArrow">
-            <a:avLst/>
-          </a:prstGeom>
-          <a:solidFill>
-            <a:srgbClr val="60A5FA"/>
-          </a:solidFill>
-          <a:ln>
-            <a:noFill/>
-          </a:ln>
-        </p:spPr>
-        <p:style>
-          <a:lnRef idx="1">
-            <a:schemeClr val="accent1"/>
-          </a:lnRef>
-          <a:fillRef idx="3">
-            <a:schemeClr val="accent1"/>
-          </a:fillRef>
-          <a:effectRef idx="2">
-            <a:schemeClr val="accent1"/>
-          </a:effectRef>
-          <a:fontRef idx="minor">
-            <a:schemeClr val="lt1"/>
-          </a:fontRef>
-        </p:style>
-        <p:txBody>
-          <a:bodyPr rtlCol="0" anchor="ctr"/>
-          <a:lstStyle/>
-          <a:p>
-            <a:pPr algn="ctr"/>
-          </a:p>
-        </p:txBody>
-      </p:sp>
-      <p:sp>
-        <p:nvSpPr>
-          <p:cNvPr id="23" name="Rounded Rectangle 22"/>
-          <p:cNvSpPr/>
-          <p:nvPr/>
-        </p:nvSpPr>
-        <p:spPr>
-          <a:xfrm>
-            <a:off x="9436608" y="1463040"/>
-            <a:ext cx="2057400" cy="4572000"/>
-          </a:xfrm>
-          <a:prstGeom prst="roundRect">
-            <a:avLst/>
-          </a:prstGeom>
-          <a:solidFill>
-            <a:srgbClr val="1E293B"/>
-          </a:solidFill>
-          <a:ln>
-            <a:solidFill>
-              <a:srgbClr val="334155"/>
-            </a:solidFill>
-          </a:ln>
-        </p:spPr>
-        <p:style>
-          <a:lnRef idx="1">
-            <a:schemeClr val="accent1"/>
-          </a:lnRef>
-          <a:fillRef idx="3">
-            <a:schemeClr val="accent1"/>
-          </a:fillRef>
-          <a:effectRef idx="2">
-            <a:schemeClr val="accent1"/>
-          </a:effectRef>
-          <a:fontRef idx="minor">
-            <a:schemeClr val="lt1"/>
-          </a:fontRef>
-        </p:style>
-        <p:txBody>
-          <a:bodyPr rtlCol="0" anchor="ctr"/>
-          <a:lstStyle/>
-          <a:p>
-            <a:pPr algn="ctr"/>
-          </a:p>
-        </p:txBody>
-      </p:sp>
-      <p:sp>
-        <p:nvSpPr>
-          <p:cNvPr id="24" name="Rounded Rectangle 23"/>
-          <p:cNvSpPr/>
-          <p:nvPr/>
-        </p:nvSpPr>
-        <p:spPr>
-          <a:xfrm>
-            <a:off x="9573768" y="1645920"/>
-            <a:ext cx="1783080" cy="411480"/>
-          </a:xfrm>
-          <a:prstGeom prst="roundRect">
-            <a:avLst/>
-          </a:prstGeom>
-          <a:solidFill>
-            <a:srgbClr val="10B981"/>
-          </a:solidFill>
-          <a:ln>
-            <a:noFill/>
-          </a:ln>
-        </p:spPr>
-        <p:style>
-          <a:lnRef idx="1">
-            <a:schemeClr val="accent1"/>
-          </a:lnRef>
-          <a:fillRef idx="3">
-            <a:schemeClr val="accent1"/>
-          </a:fillRef>
-          <a:effectRef idx="2">
-            <a:schemeClr val="accent1"/>
-          </a:effectRef>
-          <a:fontRef idx="minor">
-            <a:schemeClr val="lt1"/>
-          </a:fontRef>
-        </p:style>
-        <p:txBody>
-          <a:bodyPr rtlCol="0" anchor="ctr"/>
-          <a:lstStyle/>
-          <a:p>
-            <a:pPr algn="ctr">
-              <a:defRPr sz="1000" b="1">
-                <a:solidFill>
-                  <a:srgbClr val="FFFFFF"/>
-                </a:solidFill>
-              </a:defRPr>
-            </a:pPr>
-            <a:r>
-              <a:t>STEP 5</a:t>
-            </a:r>
-          </a:p>
-        </p:txBody>
-      </p:sp>
-      <p:sp>
-        <p:nvSpPr>
-          <p:cNvPr id="25" name="TextBox 24"/>
-          <p:cNvSpPr txBox="1"/>
-          <p:nvPr/>
-        </p:nvSpPr>
-        <p:spPr>
-          <a:xfrm>
-            <a:off x="9573768" y="2194560"/>
-            <a:ext cx="1783080" cy="3657600"/>
-          </a:xfrm>
-          <a:prstGeom prst="rect">
-            <a:avLst/>
-          </a:prstGeom>
-          <a:noFill/>
-        </p:spPr>
-        <p:txBody>
-          <a:bodyPr wrap="square">
-            <a:spAutoFit/>
-          </a:bodyPr>
-          <a:lstStyle/>
-          <a:p>
-            <a:pPr>
-              <a:defRPr sz="1200" b="1">
-                <a:solidFill>
-                  <a:srgbClr val="F8FAFC"/>
-                </a:solidFill>
-              </a:defRPr>
-            </a:pPr>
-            <a:r>
-              <a:t>5. Final Settlement</a:t>
-            </a:r>
-          </a:p>
-          <a:p>
-            <a:pPr>
-              <a:spcBef>
-                <a:spcPts val="800"/>
-              </a:spcBef>
-              <a:defRPr sz="950">
-                <a:solidFill>
-                  <a:srgbClr val="94A3B8"/>
-                </a:solidFill>
-              </a:defRPr>
-            </a:pPr>
-            <a:r>
-              <a:t>Consolidates all sub-bills, generates verified QR invoice &amp; audit entry.</a:t>
+              <a:defRPr sz="950" b="1">
+                <a:solidFill>
+                  <a:srgbClr val="60A5FA"/>
+                </a:solidFill>
+                <a:latin typeface="Arial"/>
+              </a:defRPr>
+            </a:pPr>
+            <a:r>
+              <a:t>📸 End-to-End Order Requisition &amp; Verification Data Flow</a:t>
             </a:r>
           </a:p>
         </p:txBody>
@@ -9116,7 +8438,7 @@
 </file>
 
 <file path=ppt/slides/slide6.xml><?xml version="1.0" encoding="utf-8"?>
-<p:sld xmlns:a="http://schemas.openxmlformats.org/drawingml/2006/main" xmlns:p="http://schemas.openxmlformats.org/presentationml/2006/main" xmlns:r="http://schemas.openxmlformats.org/officeDocument/2006/relationships">
+<p:sld xmlns:a="http://schemas.openxmlformats.org/drawingml/2006/main" xmlns:r="http://schemas.openxmlformats.org/officeDocument/2006/relationships" xmlns:p="http://schemas.openxmlformats.org/presentationml/2006/main">
   <p:cSld>
     <p:spTree>
       <p:nvGrpSpPr>
@@ -9124,7 +8446,14 @@
         <p:cNvGrpSpPr/>
         <p:nvPr/>
       </p:nvGrpSpPr>
-      <p:grpSpPr/>
+      <p:grpSpPr>
+        <a:xfrm>
+          <a:off x="0" y="0"/>
+          <a:ext cx="0" cy="0"/>
+          <a:chOff x="0" y="0"/>
+          <a:chExt cx="0" cy="0"/>
+        </a:xfrm>
+      </p:grpSpPr>
       <p:sp>
         <p:nvSpPr>
           <p:cNvPr id="2" name="Rectangle 1"/>
@@ -9165,6 +8494,7 @@
           <a:lstStyle/>
           <a:p>
             <a:pPr algn="ctr"/>
+            <a:endParaRPr/>
           </a:p>
         </p:txBody>
       </p:sp>
@@ -9185,7 +8515,7 @@
           <a:noFill/>
         </p:spPr>
         <p:txBody>
-          <a:bodyPr wrap="square" lIns="0" rIns="0" tIns="0" bIns="0">
+          <a:bodyPr wrap="square" lIns="0" tIns="0" rIns="0" bIns="0">
             <a:spAutoFit/>
           </a:bodyPr>
           <a:lstStyle/>
@@ -9221,7 +8551,7 @@
           <a:noFill/>
         </p:spPr>
         <p:txBody>
-          <a:bodyPr wrap="square" lIns="0" rIns="0" tIns="0" bIns="0">
+          <a:bodyPr wrap="square" lIns="0" tIns="0" rIns="0" bIns="0">
             <a:spAutoFit/>
           </a:bodyPr>
           <a:lstStyle/>
@@ -9235,7 +8565,7 @@
               </a:defRPr>
             </a:pPr>
             <a:r>
-              <a:t>Coordinator Experience: Multi-Vendor Requisition</a:t>
+              <a:t>Coordinator Experience: Multi-Vendor Requisition &amp; Tracking</a:t>
             </a:r>
           </a:p>
         </p:txBody>
@@ -9280,6 +8610,7 @@
           <a:lstStyle/>
           <a:p>
             <a:pPr algn="ctr"/>
+            <a:endParaRPr/>
           </a:p>
         </p:txBody>
       </p:sp>
@@ -9300,7 +8631,7 @@
           <a:noFill/>
         </p:spPr>
         <p:txBody>
-          <a:bodyPr wrap="none" lIns="0" rIns="0" tIns="0" bIns="0">
+          <a:bodyPr wrap="none" lIns="0" tIns="0" rIns="0" bIns="0">
             <a:spAutoFit/>
           </a:bodyPr>
           <a:lstStyle/>
@@ -9328,7 +8659,7 @@
         <p:spPr>
           <a:xfrm>
             <a:off x="731520" y="1463040"/>
-            <a:ext cx="5303520" cy="1371600"/>
+            <a:ext cx="4937760" cy="1371600"/>
           </a:xfrm>
           <a:prstGeom prst="roundRect">
             <a:avLst/>
@@ -9361,6 +8692,7 @@
           <a:lstStyle/>
           <a:p>
             <a:pPr algn="ctr"/>
+            <a:endParaRPr/>
           </a:p>
         </p:txBody>
       </p:sp>
@@ -9373,7 +8705,7 @@
         <p:spPr>
           <a:xfrm>
             <a:off x="960120" y="1645920"/>
-            <a:ext cx="4846320" cy="1005840"/>
+            <a:ext cx="4480560" cy="1005840"/>
           </a:xfrm>
           <a:prstGeom prst="rect">
             <a:avLst/>
@@ -9381,7 +8713,7 @@
           <a:noFill/>
         </p:spPr>
         <p:txBody>
-          <a:bodyPr wrap="square" lIns="0" rIns="0" tIns="0" bIns="0">
+          <a:bodyPr wrap="square" lIns="0" tIns="0" rIns="0" bIns="0">
             <a:spAutoFit/>
           </a:bodyPr>
           <a:lstStyle/>
@@ -9441,7 +8773,7 @@
         <p:spPr>
           <a:xfrm>
             <a:off x="731520" y="2971800"/>
-            <a:ext cx="5303520" cy="1371600"/>
+            <a:ext cx="4937760" cy="1371600"/>
           </a:xfrm>
           <a:prstGeom prst="roundRect">
             <a:avLst/>
@@ -9474,6 +8806,7 @@
           <a:lstStyle/>
           <a:p>
             <a:pPr algn="ctr"/>
+            <a:endParaRPr/>
           </a:p>
         </p:txBody>
       </p:sp>
@@ -9486,7 +8819,7 @@
         <p:spPr>
           <a:xfrm>
             <a:off x="960120" y="3154680"/>
-            <a:ext cx="4846320" cy="1005840"/>
+            <a:ext cx="4480560" cy="1005840"/>
           </a:xfrm>
           <a:prstGeom prst="rect">
             <a:avLst/>
@@ -9494,7 +8827,7 @@
           <a:noFill/>
         </p:spPr>
         <p:txBody>
-          <a:bodyPr wrap="square" lIns="0" rIns="0" tIns="0" bIns="0">
+          <a:bodyPr wrap="square" lIns="0" tIns="0" rIns="0" bIns="0">
             <a:spAutoFit/>
           </a:bodyPr>
           <a:lstStyle/>
@@ -9540,7 +8873,7 @@
               </a:defRPr>
             </a:pPr>
             <a:r>
-              <a:t>• Automated subtotal calculations with instant budget summary.</a:t>
+              <a:t>• Automated line item price calculations with instant budget summary.</a:t>
             </a:r>
           </a:p>
         </p:txBody>
@@ -9554,7 +8887,7 @@
         <p:spPr>
           <a:xfrm>
             <a:off x="731520" y="4480560"/>
-            <a:ext cx="5303520" cy="1371600"/>
+            <a:ext cx="4937760" cy="1371600"/>
           </a:xfrm>
           <a:prstGeom prst="roundRect">
             <a:avLst/>
@@ -9587,6 +8920,7 @@
           <a:lstStyle/>
           <a:p>
             <a:pPr algn="ctr"/>
+            <a:endParaRPr/>
           </a:p>
         </p:txBody>
       </p:sp>
@@ -9599,7 +8933,7 @@
         <p:spPr>
           <a:xfrm>
             <a:off x="960120" y="4663440"/>
-            <a:ext cx="4846320" cy="1005840"/>
+            <a:ext cx="4480560" cy="1005840"/>
           </a:xfrm>
           <a:prstGeom prst="rect">
             <a:avLst/>
@@ -9607,7 +8941,7 @@
           <a:noFill/>
         </p:spPr>
         <p:txBody>
-          <a:bodyPr wrap="square" lIns="0" rIns="0" tIns="0" bIns="0">
+          <a:bodyPr wrap="square" lIns="0" tIns="0" rIns="0" bIns="0">
             <a:spAutoFit/>
           </a:bodyPr>
           <a:lstStyle/>
@@ -9621,7 +8955,7 @@
               </a:defRPr>
             </a:pPr>
             <a:r>
-              <a:t>Live Order Tracking &amp; Rejection Visibility</a:t>
+              <a:t>Pre-DCR Modification &amp; Live Tracking</a:t>
             </a:r>
           </a:p>
           <a:p>
@@ -9637,7 +8971,7 @@
               </a:defRPr>
             </a:pPr>
             <a:r>
-              <a:t>• Visual order stepper displaying current stage in approval lifecycle.</a:t>
+              <a:t>• Coordinators can modify or cancel orders prior to final DCR audit clearance.</a:t>
             </a:r>
           </a:p>
           <a:p>
@@ -9653,7 +8987,7 @@
               </a:defRPr>
             </a:pPr>
             <a:r>
-              <a:t>• Detailed rejection remarks with immediate re-submission capabilities.</a:t>
+              <a:t>• Visual order stepper displaying real-time stage in approval lifecycle.</a:t>
             </a:r>
           </a:p>
         </p:txBody>
@@ -9666,8 +9000,8 @@
         </p:nvSpPr>
         <p:spPr>
           <a:xfrm>
-            <a:off x="6217920" y="1463040"/>
-            <a:ext cx="5242255" cy="4480560"/>
+            <a:off x="5815584" y="1426464"/>
+            <a:ext cx="5681167" cy="4553712"/>
           </a:xfrm>
           <a:prstGeom prst="roundRect">
             <a:avLst/>
@@ -9700,19 +9034,44 @@
           <a:lstStyle/>
           <a:p>
             <a:pPr algn="ctr"/>
-          </a:p>
-        </p:txBody>
-      </p:sp>
-      <p:sp>
-        <p:nvSpPr>
-          <p:cNvPr id="14" name="TextBox 13"/>
+            <a:endParaRPr/>
+          </a:p>
+        </p:txBody>
+      </p:sp>
+      <p:pic>
+        <p:nvPicPr>
+          <p:cNvPr id="14" name="Picture 13" descr="media_1787155691765.png"/>
+          <p:cNvPicPr>
+            <a:picLocks noChangeAspect="1"/>
+          </p:cNvPicPr>
+          <p:nvPr/>
+        </p:nvPicPr>
+        <p:blipFill>
+          <a:blip r:embed="rId2"/>
+          <a:stretch>
+            <a:fillRect/>
+          </a:stretch>
+        </p:blipFill>
+        <p:spPr>
+          <a:xfrm>
+            <a:off x="5762842" y="1399032"/>
+            <a:ext cx="5733909" cy="4617720"/>
+          </a:xfrm>
+          <a:prstGeom prst="rect">
+            <a:avLst/>
+          </a:prstGeom>
+        </p:spPr>
+      </p:pic>
+      <p:sp>
+        <p:nvSpPr>
+          <p:cNvPr id="15" name="TextBox 14"/>
           <p:cNvSpPr txBox="1"/>
           <p:nvPr/>
         </p:nvSpPr>
         <p:spPr>
           <a:xfrm>
-            <a:off x="6400800" y="3154680"/>
-            <a:ext cx="4876495" cy="1097280"/>
+            <a:off x="5852160" y="6016752"/>
+            <a:ext cx="5608015" cy="274320"/>
           </a:xfrm>
           <a:prstGeom prst="rect">
             <a:avLst/>
@@ -9720,13 +9079,13 @@
           <a:noFill/>
         </p:spPr>
         <p:txBody>
-          <a:bodyPr wrap="square" lIns="0" rIns="0" tIns="0" bIns="0">
+          <a:bodyPr wrap="none" lIns="0" tIns="0" rIns="0" bIns="0">
             <a:spAutoFit/>
           </a:bodyPr>
           <a:lstStyle/>
           <a:p>
             <a:pPr algn="ctr">
-              <a:defRPr sz="1200" b="1">
+              <a:defRPr sz="950" b="1">
                 <a:solidFill>
                   <a:srgbClr val="60A5FA"/>
                 </a:solidFill>
@@ -9734,33 +9093,7 @@
               </a:defRPr>
             </a:pPr>
             <a:r>
-              <a:t>📸 Coordinator Portal UI Screenshot</a:t>
-            </a:r>
-          </a:p>
-          <a:p>
-            <a:pPr algn="ctr">
-              <a:defRPr sz="950">
-                <a:solidFill>
-                  <a:srgbClr val="94A3B8"/>
-                </a:solidFill>
-                <a:latin typeface="Arial"/>
-              </a:defRPr>
-            </a:pPr>
-            <a:r>
-              <a:t>Insert Coordinator Draft &amp; Tracking Page Screenshot</a:t>
-            </a:r>
-          </a:p>
-          <a:p>
-            <a:pPr algn="ctr">
-              <a:defRPr sz="850" i="1">
-                <a:solidFill>
-                  <a:srgbClr val="94A3B8"/>
-                </a:solidFill>
-                <a:latin typeface="Arial"/>
-              </a:defRPr>
-            </a:pPr>
-            <a:r>
-              <a:t>(Right Click → Change Picture / Paste Screenshot)</a:t>
+              <a:t>📸 Coordinator Dashboard &amp; Requisition Interface</a:t>
             </a:r>
           </a:p>
         </p:txBody>
@@ -9774,7 +9107,7 @@
 </file>
 
 <file path=ppt/slides/slide7.xml><?xml version="1.0" encoding="utf-8"?>
-<p:sld xmlns:a="http://schemas.openxmlformats.org/drawingml/2006/main" xmlns:p="http://schemas.openxmlformats.org/presentationml/2006/main" xmlns:r="http://schemas.openxmlformats.org/officeDocument/2006/relationships">
+<p:sld xmlns:a="http://schemas.openxmlformats.org/drawingml/2006/main" xmlns:r="http://schemas.openxmlformats.org/officeDocument/2006/relationships" xmlns:p="http://schemas.openxmlformats.org/presentationml/2006/main">
   <p:cSld>
     <p:spTree>
       <p:nvGrpSpPr>
@@ -9782,7 +9115,14 @@
         <p:cNvGrpSpPr/>
         <p:nvPr/>
       </p:nvGrpSpPr>
-      <p:grpSpPr/>
+      <p:grpSpPr>
+        <a:xfrm>
+          <a:off x="0" y="0"/>
+          <a:ext cx="0" cy="0"/>
+          <a:chOff x="0" y="0"/>
+          <a:chExt cx="0" cy="0"/>
+        </a:xfrm>
+      </p:grpSpPr>
       <p:sp>
         <p:nvSpPr>
           <p:cNvPr id="2" name="Rectangle 1"/>
@@ -9823,6 +9163,7 @@
           <a:lstStyle/>
           <a:p>
             <a:pPr algn="ctr"/>
+            <a:endParaRPr/>
           </a:p>
         </p:txBody>
       </p:sp>
@@ -9843,7 +9184,7 @@
           <a:noFill/>
         </p:spPr>
         <p:txBody>
-          <a:bodyPr wrap="square" lIns="0" rIns="0" tIns="0" bIns="0">
+          <a:bodyPr wrap="square" lIns="0" tIns="0" rIns="0" bIns="0">
             <a:spAutoFit/>
           </a:bodyPr>
           <a:lstStyle/>
@@ -9879,7 +9220,7 @@
           <a:noFill/>
         </p:spPr>
         <p:txBody>
-          <a:bodyPr wrap="square" lIns="0" rIns="0" tIns="0" bIns="0">
+          <a:bodyPr wrap="square" lIns="0" tIns="0" rIns="0" bIns="0">
             <a:spAutoFit/>
           </a:bodyPr>
           <a:lstStyle/>
@@ -9893,7 +9234,7 @@
               </a:defRPr>
             </a:pPr>
             <a:r>
-              <a:t>Leadership Governance: Principal &amp; DCR Review</a:t>
+              <a:t>Leadership Governance: Principal &amp; DCR Review Controls</a:t>
             </a:r>
           </a:p>
         </p:txBody>
@@ -9938,6 +9279,7 @@
           <a:lstStyle/>
           <a:p>
             <a:pPr algn="ctr"/>
+            <a:endParaRPr/>
           </a:p>
         </p:txBody>
       </p:sp>
@@ -9958,7 +9300,7 @@
           <a:noFill/>
         </p:spPr>
         <p:txBody>
-          <a:bodyPr wrap="none" lIns="0" rIns="0" tIns="0" bIns="0">
+          <a:bodyPr wrap="none" lIns="0" tIns="0" rIns="0" bIns="0">
             <a:spAutoFit/>
           </a:bodyPr>
           <a:lstStyle/>
@@ -9986,7 +9328,7 @@
         <p:spPr>
           <a:xfrm>
             <a:off x="731520" y="1463040"/>
-            <a:ext cx="5303520" cy="2148840"/>
+            <a:ext cx="4937760" cy="2148840"/>
           </a:xfrm>
           <a:prstGeom prst="roundRect">
             <a:avLst/>
@@ -10019,6 +9361,7 @@
           <a:lstStyle/>
           <a:p>
             <a:pPr algn="ctr"/>
+            <a:endParaRPr/>
           </a:p>
         </p:txBody>
       </p:sp>
@@ -10031,7 +9374,7 @@
         <p:spPr>
           <a:xfrm>
             <a:off x="960120" y="1645920"/>
-            <a:ext cx="4846320" cy="1783080"/>
+            <a:ext cx="4480560" cy="1783080"/>
           </a:xfrm>
           <a:prstGeom prst="rect">
             <a:avLst/>
@@ -10039,7 +9382,7 @@
           <a:noFill/>
         </p:spPr>
         <p:txBody>
-          <a:bodyPr wrap="square" lIns="0" rIns="0" tIns="0" bIns="0">
+          <a:bodyPr wrap="square" lIns="0" tIns="0" rIns="0" bIns="0">
             <a:spAutoFit/>
           </a:bodyPr>
           <a:lstStyle/>
@@ -10069,7 +9412,7 @@
               </a:defRPr>
             </a:pPr>
             <a:r>
-              <a:t>• Multi-department supervisors (e.g. Diploma + Degree) review pending requisitions.</a:t>
+              <a:t>• Multi-department supervisors (e.g. Diploma + Degree) review pending queues.</a:t>
             </a:r>
           </a:p>
           <a:p>
@@ -10085,7 +9428,7 @@
               </a:defRPr>
             </a:pPr>
             <a:r>
-              <a:t>• One-click Approve / Reject with mandatory auditable remarks.</a:t>
+              <a:t>• 1-Click Approve / Reject with mandatory auditable remarks.</a:t>
             </a:r>
           </a:p>
           <a:p>
@@ -10101,7 +9444,7 @@
               </a:defRPr>
             </a:pPr>
             <a:r>
-              <a:t>• Direct-order privilege allowing Principals to draft urgent VIP orders directly to DCR.</a:t>
+              <a:t>• Direct-order privilege allowing Principals to draft urgent VIP requisitions directly.</a:t>
             </a:r>
           </a:p>
         </p:txBody>
@@ -10115,7 +9458,7 @@
         <p:spPr>
           <a:xfrm>
             <a:off x="731520" y="3749039"/>
-            <a:ext cx="5303520" cy="2148840"/>
+            <a:ext cx="4937760" cy="2148840"/>
           </a:xfrm>
           <a:prstGeom prst="roundRect">
             <a:avLst/>
@@ -10148,6 +9491,7 @@
           <a:lstStyle/>
           <a:p>
             <a:pPr algn="ctr"/>
+            <a:endParaRPr/>
           </a:p>
         </p:txBody>
       </p:sp>
@@ -10160,7 +9504,7 @@
         <p:spPr>
           <a:xfrm>
             <a:off x="960120" y="3931919"/>
-            <a:ext cx="4846320" cy="1783080"/>
+            <a:ext cx="4480560" cy="1783080"/>
           </a:xfrm>
           <a:prstGeom prst="rect">
             <a:avLst/>
@@ -10168,7 +9512,7 @@
           <a:noFill/>
         </p:spPr>
         <p:txBody>
-          <a:bodyPr wrap="square" lIns="0" rIns="0" tIns="0" bIns="0">
+          <a:bodyPr wrap="square" lIns="0" tIns="0" rIns="0" bIns="0">
             <a:spAutoFit/>
           </a:bodyPr>
           <a:lstStyle/>
@@ -10243,8 +9587,8 @@
         </p:nvSpPr>
         <p:spPr>
           <a:xfrm>
-            <a:off x="6217920" y="1463040"/>
-            <a:ext cx="5242255" cy="4480560"/>
+            <a:off x="5815584" y="1426464"/>
+            <a:ext cx="5681167" cy="4553712"/>
           </a:xfrm>
           <a:prstGeom prst="roundRect">
             <a:avLst/>
@@ -10277,19 +9621,44 @@
           <a:lstStyle/>
           <a:p>
             <a:pPr algn="ctr"/>
-          </a:p>
-        </p:txBody>
-      </p:sp>
-      <p:sp>
-        <p:nvSpPr>
-          <p:cNvPr id="12" name="TextBox 11"/>
+            <a:endParaRPr/>
+          </a:p>
+        </p:txBody>
+      </p:sp>
+      <p:pic>
+        <p:nvPicPr>
+          <p:cNvPr id="12" name="Picture 11" descr="media_1787155691787.png"/>
+          <p:cNvPicPr>
+            <a:picLocks noChangeAspect="1"/>
+          </p:cNvPicPr>
+          <p:nvPr/>
+        </p:nvPicPr>
+        <p:blipFill>
+          <a:blip r:embed="rId2"/>
+          <a:stretch>
+            <a:fillRect/>
+          </a:stretch>
+        </p:blipFill>
+        <p:spPr>
+          <a:xfrm>
+            <a:off x="5760600" y="1353312"/>
+            <a:ext cx="5791134" cy="4626864"/>
+          </a:xfrm>
+          <a:prstGeom prst="rect">
+            <a:avLst/>
+          </a:prstGeom>
+        </p:spPr>
+      </p:pic>
+      <p:sp>
+        <p:nvSpPr>
+          <p:cNvPr id="13" name="TextBox 12"/>
           <p:cNvSpPr txBox="1"/>
           <p:nvPr/>
         </p:nvSpPr>
         <p:spPr>
           <a:xfrm>
-            <a:off x="6400800" y="3154680"/>
-            <a:ext cx="4876495" cy="1097280"/>
+            <a:off x="5852160" y="6016752"/>
+            <a:ext cx="5608015" cy="274320"/>
           </a:xfrm>
           <a:prstGeom prst="rect">
             <a:avLst/>
@@ -10297,13 +9666,13 @@
           <a:noFill/>
         </p:spPr>
         <p:txBody>
-          <a:bodyPr wrap="square" lIns="0" rIns="0" tIns="0" bIns="0">
+          <a:bodyPr wrap="none" lIns="0" tIns="0" rIns="0" bIns="0">
             <a:spAutoFit/>
           </a:bodyPr>
           <a:lstStyle/>
           <a:p>
             <a:pPr algn="ctr">
-              <a:defRPr sz="1200" b="1">
+              <a:defRPr sz="950" b="1">
                 <a:solidFill>
                   <a:srgbClr val="60A5FA"/>
                 </a:solidFill>
@@ -10311,33 +9680,7 @@
               </a:defRPr>
             </a:pPr>
             <a:r>
-              <a:t>📸 Principal / DCR Review UI Screenshot</a:t>
-            </a:r>
-          </a:p>
-          <a:p>
-            <a:pPr algn="ctr">
-              <a:defRPr sz="950">
-                <a:solidFill>
-                  <a:srgbClr val="94A3B8"/>
-                </a:solidFill>
-                <a:latin typeface="Arial"/>
-              </a:defRPr>
-            </a:pPr>
-            <a:r>
-              <a:t>Insert Principal Approvals &amp; Audit Page Screenshot</a:t>
-            </a:r>
-          </a:p>
-          <a:p>
-            <a:pPr algn="ctr">
-              <a:defRPr sz="850" i="1">
-                <a:solidFill>
-                  <a:srgbClr val="94A3B8"/>
-                </a:solidFill>
-                <a:latin typeface="Arial"/>
-              </a:defRPr>
-            </a:pPr>
-            <a:r>
-              <a:t>(Right Click → Change Picture / Paste Screenshot)</a:t>
+              <a:t>📸 Principal Requisition Review &amp; Governance Queue</a:t>
             </a:r>
           </a:p>
         </p:txBody>
@@ -10351,7 +9694,7 @@
 </file>
 
 <file path=ppt/slides/slide8.xml><?xml version="1.0" encoding="utf-8"?>
-<p:sld xmlns:a="http://schemas.openxmlformats.org/drawingml/2006/main" xmlns:p="http://schemas.openxmlformats.org/presentationml/2006/main" xmlns:r="http://schemas.openxmlformats.org/officeDocument/2006/relationships">
+<p:sld xmlns:a="http://schemas.openxmlformats.org/drawingml/2006/main" xmlns:r="http://schemas.openxmlformats.org/officeDocument/2006/relationships" xmlns:p="http://schemas.openxmlformats.org/presentationml/2006/main">
   <p:cSld>
     <p:spTree>
       <p:nvGrpSpPr>
@@ -10359,7 +9702,14 @@
         <p:cNvGrpSpPr/>
         <p:nvPr/>
       </p:nvGrpSpPr>
-      <p:grpSpPr/>
+      <p:grpSpPr>
+        <a:xfrm>
+          <a:off x="0" y="0"/>
+          <a:ext cx="0" cy="0"/>
+          <a:chOff x="0" y="0"/>
+          <a:chExt cx="0" cy="0"/>
+        </a:xfrm>
+      </p:grpSpPr>
       <p:sp>
         <p:nvSpPr>
           <p:cNvPr id="2" name="Rectangle 1"/>
@@ -10400,6 +9750,7 @@
           <a:lstStyle/>
           <a:p>
             <a:pPr algn="ctr"/>
+            <a:endParaRPr/>
           </a:p>
         </p:txBody>
       </p:sp>
@@ -10420,7 +9771,7 @@
           <a:noFill/>
         </p:spPr>
         <p:txBody>
-          <a:bodyPr wrap="square" lIns="0" rIns="0" tIns="0" bIns="0">
+          <a:bodyPr wrap="square" lIns="0" tIns="0" rIns="0" bIns="0">
             <a:spAutoFit/>
           </a:bodyPr>
           <a:lstStyle/>
@@ -10456,7 +9807,7 @@
           <a:noFill/>
         </p:spPr>
         <p:txBody>
-          <a:bodyPr wrap="square" lIns="0" rIns="0" tIns="0" bIns="0">
+          <a:bodyPr wrap="square" lIns="0" tIns="0" rIns="0" bIns="0">
             <a:spAutoFit/>
           </a:bodyPr>
           <a:lstStyle/>
@@ -10515,6 +9866,7 @@
           <a:lstStyle/>
           <a:p>
             <a:pPr algn="ctr"/>
+            <a:endParaRPr/>
           </a:p>
         </p:txBody>
       </p:sp>
@@ -10535,7 +9887,7 @@
           <a:noFill/>
         </p:spPr>
         <p:txBody>
-          <a:bodyPr wrap="none" lIns="0" rIns="0" tIns="0" bIns="0">
+          <a:bodyPr wrap="none" lIns="0" tIns="0" rIns="0" bIns="0">
             <a:spAutoFit/>
           </a:bodyPr>
           <a:lstStyle/>
@@ -10563,7 +9915,7 @@
         <p:spPr>
           <a:xfrm>
             <a:off x="731520" y="1463040"/>
-            <a:ext cx="5303520" cy="1371600"/>
+            <a:ext cx="4937760" cy="1371600"/>
           </a:xfrm>
           <a:prstGeom prst="roundRect">
             <a:avLst/>
@@ -10596,6 +9948,7 @@
           <a:lstStyle/>
           <a:p>
             <a:pPr algn="ctr"/>
+            <a:endParaRPr/>
           </a:p>
         </p:txBody>
       </p:sp>
@@ -10608,7 +9961,7 @@
         <p:spPr>
           <a:xfrm>
             <a:off x="960120" y="1645920"/>
-            <a:ext cx="4846320" cy="1005840"/>
+            <a:ext cx="4480560" cy="1005840"/>
           </a:xfrm>
           <a:prstGeom prst="rect">
             <a:avLst/>
@@ -10616,7 +9969,7 @@
           <a:noFill/>
         </p:spPr>
         <p:txBody>
-          <a:bodyPr wrap="square" lIns="0" rIns="0" tIns="0" bIns="0">
+          <a:bodyPr wrap="square" lIns="0" tIns="0" rIns="0" bIns="0">
             <a:spAutoFit/>
           </a:bodyPr>
           <a:lstStyle/>
@@ -10692,7 +10045,7 @@
         <p:spPr>
           <a:xfrm>
             <a:off x="731520" y="2971800"/>
-            <a:ext cx="5303520" cy="1371600"/>
+            <a:ext cx="4937760" cy="1371600"/>
           </a:xfrm>
           <a:prstGeom prst="roundRect">
             <a:avLst/>
@@ -10725,6 +10078,7 @@
           <a:lstStyle/>
           <a:p>
             <a:pPr algn="ctr"/>
+            <a:endParaRPr/>
           </a:p>
         </p:txBody>
       </p:sp>
@@ -10737,7 +10091,7 @@
         <p:spPr>
           <a:xfrm>
             <a:off x="960120" y="3154680"/>
-            <a:ext cx="4846320" cy="1005840"/>
+            <a:ext cx="4480560" cy="1005840"/>
           </a:xfrm>
           <a:prstGeom prst="rect">
             <a:avLst/>
@@ -10745,7 +10099,7 @@
           <a:noFill/>
         </p:spPr>
         <p:txBody>
-          <a:bodyPr wrap="square" lIns="0" rIns="0" tIns="0" bIns="0">
+          <a:bodyPr wrap="square" lIns="0" tIns="0" rIns="0" bIns="0">
             <a:spAutoFit/>
           </a:bodyPr>
           <a:lstStyle/>
@@ -10805,7 +10159,7 @@
         <p:spPr>
           <a:xfrm>
             <a:off x="731520" y="4480560"/>
-            <a:ext cx="5303520" cy="1371600"/>
+            <a:ext cx="4937760" cy="1371600"/>
           </a:xfrm>
           <a:prstGeom prst="roundRect">
             <a:avLst/>
@@ -10838,6 +10192,7 @@
           <a:lstStyle/>
           <a:p>
             <a:pPr algn="ctr"/>
+            <a:endParaRPr/>
           </a:p>
         </p:txBody>
       </p:sp>
@@ -10850,7 +10205,7 @@
         <p:spPr>
           <a:xfrm>
             <a:off x="960120" y="4663440"/>
-            <a:ext cx="4846320" cy="1005840"/>
+            <a:ext cx="4480560" cy="1005840"/>
           </a:xfrm>
           <a:prstGeom prst="rect">
             <a:avLst/>
@@ -10858,7 +10213,7 @@
           <a:noFill/>
         </p:spPr>
         <p:txBody>
-          <a:bodyPr wrap="square" lIns="0" rIns="0" tIns="0" bIns="0">
+          <a:bodyPr wrap="square" lIns="0" tIns="0" rIns="0" bIns="0">
             <a:spAutoFit/>
           </a:bodyPr>
           <a:lstStyle/>
@@ -10917,8 +10272,8 @@
         </p:nvSpPr>
         <p:spPr>
           <a:xfrm>
-            <a:off x="6217920" y="1463040"/>
-            <a:ext cx="5242255" cy="4480560"/>
+            <a:off x="5815584" y="1426464"/>
+            <a:ext cx="5681167" cy="4553712"/>
           </a:xfrm>
           <a:prstGeom prst="roundRect">
             <a:avLst/>
@@ -10951,19 +10306,44 @@
           <a:lstStyle/>
           <a:p>
             <a:pPr algn="ctr"/>
-          </a:p>
-        </p:txBody>
-      </p:sp>
-      <p:sp>
-        <p:nvSpPr>
-          <p:cNvPr id="14" name="TextBox 13"/>
+            <a:endParaRPr/>
+          </a:p>
+        </p:txBody>
+      </p:sp>
+      <p:pic>
+        <p:nvPicPr>
+          <p:cNvPr id="14" name="Picture 13" descr="media_1787155691899.png"/>
+          <p:cNvPicPr>
+            <a:picLocks noChangeAspect="1"/>
+          </p:cNvPicPr>
+          <p:nvPr/>
+        </p:nvPicPr>
+        <p:blipFill>
+          <a:blip r:embed="rId2"/>
+          <a:stretch>
+            <a:fillRect/>
+          </a:stretch>
+        </p:blipFill>
+        <p:spPr>
+          <a:xfrm>
+            <a:off x="5760600" y="1389888"/>
+            <a:ext cx="5791134" cy="4626864"/>
+          </a:xfrm>
+          <a:prstGeom prst="rect">
+            <a:avLst/>
+          </a:prstGeom>
+        </p:spPr>
+      </p:pic>
+      <p:sp>
+        <p:nvSpPr>
+          <p:cNvPr id="15" name="TextBox 14"/>
           <p:cNvSpPr txBox="1"/>
           <p:nvPr/>
         </p:nvSpPr>
         <p:spPr>
           <a:xfrm>
-            <a:off x="6400800" y="3154680"/>
-            <a:ext cx="4876495" cy="1097280"/>
+            <a:off x="5852160" y="6016752"/>
+            <a:ext cx="5608015" cy="274320"/>
           </a:xfrm>
           <a:prstGeom prst="rect">
             <a:avLst/>
@@ -10971,13 +10351,13 @@
           <a:noFill/>
         </p:spPr>
         <p:txBody>
-          <a:bodyPr wrap="square" lIns="0" rIns="0" tIns="0" bIns="0">
+          <a:bodyPr wrap="none" lIns="0" tIns="0" rIns="0" bIns="0">
             <a:spAutoFit/>
           </a:bodyPr>
           <a:lstStyle/>
           <a:p>
             <a:pPr algn="ctr">
-              <a:defRPr sz="1200" b="1">
+              <a:defRPr sz="950" b="1">
                 <a:solidFill>
                   <a:srgbClr val="60A5FA"/>
                 </a:solidFill>
@@ -10985,33 +10365,7 @@
               </a:defRPr>
             </a:pPr>
             <a:r>
-              <a:t>📸 Vendor Kitchen Dashboard Screenshot</a:t>
-            </a:r>
-          </a:p>
-          <a:p>
-            <a:pPr algn="ctr">
-              <a:defRPr sz="950">
-                <a:solidFill>
-                  <a:srgbClr val="94A3B8"/>
-                </a:solidFill>
-                <a:latin typeface="Arial"/>
-              </a:defRPr>
-            </a:pPr>
-            <a:r>
-              <a:t>Insert Vendor Order Processing &amp; Menu Management Screenshot</a:t>
-            </a:r>
-          </a:p>
-          <a:p>
-            <a:pPr algn="ctr">
-              <a:defRPr sz="850" i="1">
-                <a:solidFill>
-                  <a:srgbClr val="94A3B8"/>
-                </a:solidFill>
-                <a:latin typeface="Arial"/>
-              </a:defRPr>
-            </a:pPr>
-            <a:r>
-              <a:t>(Right Click → Change Picture / Paste Screenshot)</a:t>
+              <a:t>📸 Canteen Vendor Kitchen Dashboard &amp; Orders Queue</a:t>
             </a:r>
           </a:p>
         </p:txBody>
@@ -11025,7 +10379,7 @@
 </file>
 
 <file path=ppt/slides/slide9.xml><?xml version="1.0" encoding="utf-8"?>
-<p:sld xmlns:a="http://schemas.openxmlformats.org/drawingml/2006/main" xmlns:p="http://schemas.openxmlformats.org/presentationml/2006/main" xmlns:r="http://schemas.openxmlformats.org/officeDocument/2006/relationships">
+<p:sld xmlns:a="http://schemas.openxmlformats.org/drawingml/2006/main" xmlns:r="http://schemas.openxmlformats.org/officeDocument/2006/relationships" xmlns:p="http://schemas.openxmlformats.org/presentationml/2006/main">
   <p:cSld>
     <p:spTree>
       <p:nvGrpSpPr>
@@ -11033,7 +10387,14 @@
         <p:cNvGrpSpPr/>
         <p:nvPr/>
       </p:nvGrpSpPr>
-      <p:grpSpPr/>
+      <p:grpSpPr>
+        <a:xfrm>
+          <a:off x="0" y="0"/>
+          <a:ext cx="0" cy="0"/>
+          <a:chOff x="0" y="0"/>
+          <a:chExt cx="0" cy="0"/>
+        </a:xfrm>
+      </p:grpSpPr>
       <p:sp>
         <p:nvSpPr>
           <p:cNvPr id="2" name="Rectangle 1"/>
@@ -11074,6 +10435,7 @@
           <a:lstStyle/>
           <a:p>
             <a:pPr algn="ctr"/>
+            <a:endParaRPr/>
           </a:p>
         </p:txBody>
       </p:sp>
@@ -11094,7 +10456,7 @@
           <a:noFill/>
         </p:spPr>
         <p:txBody>
-          <a:bodyPr wrap="square" lIns="0" rIns="0" tIns="0" bIns="0">
+          <a:bodyPr wrap="square" lIns="0" tIns="0" rIns="0" bIns="0">
             <a:spAutoFit/>
           </a:bodyPr>
           <a:lstStyle/>
@@ -11130,7 +10492,7 @@
           <a:noFill/>
         </p:spPr>
         <p:txBody>
-          <a:bodyPr wrap="square" lIns="0" rIns="0" tIns="0" bIns="0">
+          <a:bodyPr wrap="square" lIns="0" tIns="0" rIns="0" bIns="0">
             <a:spAutoFit/>
           </a:bodyPr>
           <a:lstStyle/>
@@ -11189,6 +10551,7 @@
           <a:lstStyle/>
           <a:p>
             <a:pPr algn="ctr"/>
+            <a:endParaRPr/>
           </a:p>
         </p:txBody>
       </p:sp>
@@ -11209,7 +10572,7 @@
           <a:noFill/>
         </p:spPr>
         <p:txBody>
-          <a:bodyPr wrap="none" lIns="0" rIns="0" tIns="0" bIns="0">
+          <a:bodyPr wrap="none" lIns="0" tIns="0" rIns="0" bIns="0">
             <a:spAutoFit/>
           </a:bodyPr>
           <a:lstStyle/>
@@ -11237,7 +10600,7 @@
         <p:spPr>
           <a:xfrm>
             <a:off x="731520" y="1463040"/>
-            <a:ext cx="5303520" cy="1371600"/>
+            <a:ext cx="4937760" cy="1371600"/>
           </a:xfrm>
           <a:prstGeom prst="roundRect">
             <a:avLst/>
@@ -11270,6 +10633,7 @@
           <a:lstStyle/>
           <a:p>
             <a:pPr algn="ctr"/>
+            <a:endParaRPr/>
           </a:p>
         </p:txBody>
       </p:sp>
@@ -11282,7 +10646,7 @@
         <p:spPr>
           <a:xfrm>
             <a:off x="960120" y="1645920"/>
-            <a:ext cx="4846320" cy="1005840"/>
+            <a:ext cx="4480560" cy="1005840"/>
           </a:xfrm>
           <a:prstGeom prst="rect">
             <a:avLst/>
@@ -11290,7 +10654,7 @@
           <a:noFill/>
         </p:spPr>
         <p:txBody>
-          <a:bodyPr wrap="square" lIns="0" rIns="0" tIns="0" bIns="0">
+          <a:bodyPr wrap="square" lIns="0" tIns="0" rIns="0" bIns="0">
             <a:spAutoFit/>
           </a:bodyPr>
           <a:lstStyle/>
@@ -11350,7 +10714,7 @@
         <p:spPr>
           <a:xfrm>
             <a:off x="731520" y="2971800"/>
-            <a:ext cx="5303520" cy="1371600"/>
+            <a:ext cx="4937760" cy="1371600"/>
           </a:xfrm>
           <a:prstGeom prst="roundRect">
             <a:avLst/>
@@ -11383,6 +10747,7 @@
           <a:lstStyle/>
           <a:p>
             <a:pPr algn="ctr"/>
+            <a:endParaRPr/>
           </a:p>
         </p:txBody>
       </p:sp>
@@ -11395,7 +10760,7 @@
         <p:spPr>
           <a:xfrm>
             <a:off x="960120" y="3154680"/>
-            <a:ext cx="4846320" cy="1005840"/>
+            <a:ext cx="4480560" cy="1005840"/>
           </a:xfrm>
           <a:prstGeom prst="rect">
             <a:avLst/>
@@ -11403,7 +10768,7 @@
           <a:noFill/>
         </p:spPr>
         <p:txBody>
-          <a:bodyPr wrap="square" lIns="0" rIns="0" tIns="0" bIns="0">
+          <a:bodyPr wrap="square" lIns="0" tIns="0" rIns="0" bIns="0">
             <a:spAutoFit/>
           </a:bodyPr>
           <a:lstStyle/>
@@ -11463,7 +10828,7 @@
         <p:spPr>
           <a:xfrm>
             <a:off x="731520" y="4480560"/>
-            <a:ext cx="5303520" cy="1371600"/>
+            <a:ext cx="4937760" cy="1371600"/>
           </a:xfrm>
           <a:prstGeom prst="roundRect">
             <a:avLst/>
@@ -11496,6 +10861,7 @@
           <a:lstStyle/>
           <a:p>
             <a:pPr algn="ctr"/>
+            <a:endParaRPr/>
           </a:p>
         </p:txBody>
       </p:sp>
@@ -11508,7 +10874,7 @@
         <p:spPr>
           <a:xfrm>
             <a:off x="960120" y="4663440"/>
-            <a:ext cx="4846320" cy="1005840"/>
+            <a:ext cx="4480560" cy="1005840"/>
           </a:xfrm>
           <a:prstGeom prst="rect">
             <a:avLst/>
@@ -11516,7 +10882,7 @@
           <a:noFill/>
         </p:spPr>
         <p:txBody>
-          <a:bodyPr wrap="square" lIns="0" rIns="0" tIns="0" bIns="0">
+          <a:bodyPr wrap="square" lIns="0" tIns="0" rIns="0" bIns="0">
             <a:spAutoFit/>
           </a:bodyPr>
           <a:lstStyle/>
@@ -11530,7 +10896,7 @@
               </a:defRPr>
             </a:pPr>
             <a:r>
-              <a:t>Financial Reports &amp; Audit Trail</a:t>
+              <a:t>System Operational Health &amp; Reports</a:t>
             </a:r>
           </a:p>
           <a:p>
@@ -11546,7 +10912,7 @@
               </a:defRPr>
             </a:pPr>
             <a:r>
-              <a:t>• Comprehensive order filters by date, department, status, vendor, and coordinator.</a:t>
+              <a:t>• Real-time database latency, WebSocket event gateway, and health analytics.</a:t>
             </a:r>
           </a:p>
           <a:p>
@@ -11562,7 +10928,7 @@
               </a:defRPr>
             </a:pPr>
             <a:r>
-              <a:t>• System health diagnostics, WebSocket monitor, and permanent security logs.</a:t>
+              <a:t>• Comprehensive order filters by date, department, status, vendor, and coordinator.</a:t>
             </a:r>
           </a:p>
         </p:txBody>
@@ -11575,8 +10941,8 @@
         </p:nvSpPr>
         <p:spPr>
           <a:xfrm>
-            <a:off x="6217920" y="1463040"/>
-            <a:ext cx="5242255" cy="4480560"/>
+            <a:off x="5815584" y="1426464"/>
+            <a:ext cx="5681167" cy="4553712"/>
           </a:xfrm>
           <a:prstGeom prst="roundRect">
             <a:avLst/>
@@ -11609,19 +10975,44 @@
           <a:lstStyle/>
           <a:p>
             <a:pPr algn="ctr"/>
-          </a:p>
-        </p:txBody>
-      </p:sp>
-      <p:sp>
-        <p:nvSpPr>
-          <p:cNvPr id="14" name="TextBox 13"/>
+            <a:endParaRPr/>
+          </a:p>
+        </p:txBody>
+      </p:sp>
+      <p:pic>
+        <p:nvPicPr>
+          <p:cNvPr id="14" name="Picture 13" descr="media_1787155691870.png"/>
+          <p:cNvPicPr>
+            <a:picLocks noChangeAspect="1"/>
+          </p:cNvPicPr>
+          <p:nvPr/>
+        </p:nvPicPr>
+        <p:blipFill>
+          <a:blip r:embed="rId2"/>
+          <a:stretch>
+            <a:fillRect/>
+          </a:stretch>
+        </p:blipFill>
+        <p:spPr>
+          <a:xfrm>
+            <a:off x="5783490" y="1408176"/>
+            <a:ext cx="5745354" cy="4590288"/>
+          </a:xfrm>
+          <a:prstGeom prst="rect">
+            <a:avLst/>
+          </a:prstGeom>
+        </p:spPr>
+      </p:pic>
+      <p:sp>
+        <p:nvSpPr>
+          <p:cNvPr id="15" name="TextBox 14"/>
           <p:cNvSpPr txBox="1"/>
           <p:nvPr/>
         </p:nvSpPr>
         <p:spPr>
           <a:xfrm>
-            <a:off x="6400800" y="3154680"/>
-            <a:ext cx="4876495" cy="1097280"/>
+            <a:off x="5852160" y="6016752"/>
+            <a:ext cx="5608015" cy="274320"/>
           </a:xfrm>
           <a:prstGeom prst="rect">
             <a:avLst/>
@@ -11629,13 +11020,13 @@
           <a:noFill/>
         </p:spPr>
         <p:txBody>
-          <a:bodyPr wrap="square" lIns="0" rIns="0" tIns="0" bIns="0">
+          <a:bodyPr wrap="none" lIns="0" tIns="0" rIns="0" bIns="0">
             <a:spAutoFit/>
           </a:bodyPr>
           <a:lstStyle/>
           <a:p>
             <a:pPr algn="ctr">
-              <a:defRPr sz="1200" b="1">
+              <a:defRPr sz="950" b="1">
                 <a:solidFill>
                   <a:srgbClr val="60A5FA"/>
                 </a:solidFill>
@@ -11643,33 +11034,7 @@
               </a:defRPr>
             </a:pPr>
             <a:r>
-              <a:t>📸 Admin Console Screenshot</a:t>
-            </a:r>
-          </a:p>
-          <a:p>
-            <a:pPr algn="ctr">
-              <a:defRPr sz="950">
-                <a:solidFill>
-                  <a:srgbClr val="94A3B8"/>
-                </a:solidFill>
-                <a:latin typeface="Arial"/>
-              </a:defRPr>
-            </a:pPr>
-            <a:r>
-              <a:t>Insert Admin User Management &amp; Reports Page Screenshot</a:t>
-            </a:r>
-          </a:p>
-          <a:p>
-            <a:pPr algn="ctr">
-              <a:defRPr sz="850" i="1">
-                <a:solidFill>
-                  <a:srgbClr val="94A3B8"/>
-                </a:solidFill>
-                <a:latin typeface="Arial"/>
-              </a:defRPr>
-            </a:pPr>
-            <a:r>
-              <a:t>(Right Click → Change Picture / Paste Screenshot)</a:t>
+              <a:t>📸 System Administrator Control &amp; Operational Health Console</a:t>
             </a:r>
           </a:p>
         </p:txBody>
